--- a/eindwerk presentatie.pptx
+++ b/eindwerk presentatie.pptx
@@ -8,9 +8,9 @@
     <p:sldId id="256" r:id="rId2"/>
     <p:sldId id="258" r:id="rId3"/>
     <p:sldId id="257" r:id="rId4"/>
-    <p:sldId id="259" r:id="rId5"/>
-    <p:sldId id="260" r:id="rId6"/>
-    <p:sldId id="261" r:id="rId7"/>
+    <p:sldId id="260" r:id="rId5"/>
+    <p:sldId id="261" r:id="rId6"/>
+    <p:sldId id="263" r:id="rId7"/>
     <p:sldId id="262" r:id="rId8"/>
   </p:sldIdLst>
   <p:sldSz cx="12192000" cy="6858000"/>
@@ -121,7 +121,7 @@
 <file path=ppt/revisionInfo.xml><?xml version="1.0" encoding="utf-8"?>
 <p1510:revInfo xmlns:a="http://schemas.openxmlformats.org/drawingml/2006/main" xmlns:r="http://schemas.openxmlformats.org/officeDocument/2006/relationships" xmlns:p1510="http://schemas.microsoft.com/office/powerpoint/2015/10/main">
   <p1510:revLst>
-    <p1510:client id="{FE9D2361-9A87-4427-AC3E-8E36C2CDD1D1}" v="6" dt="2026-09-11T07:30:58.742"/>
+    <p1510:client id="{FC0075AE-E7B4-46B1-A184-531FD7D11EAF}" v="50" dt="2026-09-28T06:59:35.053"/>
   </p1510:revLst>
 </p1510:revInfo>
 </file>
@@ -130,19 +130,19 @@
 <pc:chgInfo xmlns:a="http://schemas.openxmlformats.org/drawingml/2006/main" xmlns:r="http://schemas.openxmlformats.org/officeDocument/2006/relationships" xmlns:ac="http://schemas.microsoft.com/office/drawing/2013/main/command" xmlns:pc="http://schemas.microsoft.com/office/powerpoint/2013/main/command">
   <pc:docChgLst>
     <pc:chgData name="Demaeght Gunnarr" userId="d4ee6c7f-5b58-43ba-8a8e-d2bde2eb291f" providerId="ADAL" clId="{5D62749E-E127-43B3-8AC6-51DF11B66DA8}"/>
-    <pc:docChg chg="custSel addSld delSld modSld sldOrd">
-      <pc:chgData name="Demaeght Gunnarr" userId="d4ee6c7f-5b58-43ba-8a8e-d2bde2eb291f" providerId="ADAL" clId="{5D62749E-E127-43B3-8AC6-51DF11B66DA8}" dt="2026-09-11T07:33:16.931" v="734" actId="1076"/>
+    <pc:docChg chg="undo redo custSel addSld delSld modSld sldOrd">
+      <pc:chgData name="Demaeght Gunnarr" userId="d4ee6c7f-5b58-43ba-8a8e-d2bde2eb291f" providerId="ADAL" clId="{5D62749E-E127-43B3-8AC6-51DF11B66DA8}" dt="2026-09-28T07:03:19.745" v="1150" actId="1076"/>
       <pc:docMkLst>
         <pc:docMk/>
       </pc:docMkLst>
       <pc:sldChg chg="modSp mod ord modTransition">
-        <pc:chgData name="Demaeght Gunnarr" userId="d4ee6c7f-5b58-43ba-8a8e-d2bde2eb291f" providerId="ADAL" clId="{5D62749E-E127-43B3-8AC6-51DF11B66DA8}" dt="2026-09-11T07:30:58.742" v="726"/>
+        <pc:chgData name="Demaeght Gunnarr" userId="d4ee6c7f-5b58-43ba-8a8e-d2bde2eb291f" providerId="ADAL" clId="{5D62749E-E127-43B3-8AC6-51DF11B66DA8}" dt="2026-09-28T06:29:15.974" v="1136" actId="20577"/>
         <pc:sldMkLst>
           <pc:docMk/>
           <pc:sldMk cId="1145550092" sldId="256"/>
         </pc:sldMkLst>
         <pc:spChg chg="mod">
-          <ac:chgData name="Demaeght Gunnarr" userId="d4ee6c7f-5b58-43ba-8a8e-d2bde2eb291f" providerId="ADAL" clId="{5D62749E-E127-43B3-8AC6-51DF11B66DA8}" dt="2026-09-11T07:30:58.742" v="726"/>
+          <ac:chgData name="Demaeght Gunnarr" userId="d4ee6c7f-5b58-43ba-8a8e-d2bde2eb291f" providerId="ADAL" clId="{5D62749E-E127-43B3-8AC6-51DF11B66DA8}" dt="2026-09-27T11:12:03.319" v="815"/>
           <ac:spMkLst>
             <pc:docMk/>
             <pc:sldMk cId="1145550092" sldId="256"/>
@@ -150,7 +150,7 @@
           </ac:spMkLst>
         </pc:spChg>
         <pc:spChg chg="mod">
-          <ac:chgData name="Demaeght Gunnarr" userId="d4ee6c7f-5b58-43ba-8a8e-d2bde2eb291f" providerId="ADAL" clId="{5D62749E-E127-43B3-8AC6-51DF11B66DA8}" dt="2026-09-11T07:30:58.742" v="726"/>
+          <ac:chgData name="Demaeght Gunnarr" userId="d4ee6c7f-5b58-43ba-8a8e-d2bde2eb291f" providerId="ADAL" clId="{5D62749E-E127-43B3-8AC6-51DF11B66DA8}" dt="2026-09-28T06:29:15.974" v="1136" actId="20577"/>
           <ac:spMkLst>
             <pc:docMk/>
             <pc:sldMk cId="1145550092" sldId="256"/>
@@ -158,30 +158,30 @@
           </ac:spMkLst>
         </pc:spChg>
       </pc:sldChg>
-      <pc:sldChg chg="addSp delSp modSp new mod modTransition modClrScheme chgLayout">
-        <pc:chgData name="Demaeght Gunnarr" userId="d4ee6c7f-5b58-43ba-8a8e-d2bde2eb291f" providerId="ADAL" clId="{5D62749E-E127-43B3-8AC6-51DF11B66DA8}" dt="2026-09-11T07:30:58.742" v="726"/>
+      <pc:sldChg chg="addSp delSp modSp new mod modTransition setBg modClrScheme chgLayout">
+        <pc:chgData name="Demaeght Gunnarr" userId="d4ee6c7f-5b58-43ba-8a8e-d2bde2eb291f" providerId="ADAL" clId="{5D62749E-E127-43B3-8AC6-51DF11B66DA8}" dt="2026-09-27T12:39:28.475" v="1119" actId="1076"/>
         <pc:sldMkLst>
           <pc:docMk/>
           <pc:sldMk cId="2323266469" sldId="257"/>
         </pc:sldMkLst>
         <pc:spChg chg="mod">
-          <ac:chgData name="Demaeght Gunnarr" userId="d4ee6c7f-5b58-43ba-8a8e-d2bde2eb291f" providerId="ADAL" clId="{5D62749E-E127-43B3-8AC6-51DF11B66DA8}" dt="2026-09-11T07:30:58.742" v="726"/>
+          <ac:chgData name="Demaeght Gunnarr" userId="d4ee6c7f-5b58-43ba-8a8e-d2bde2eb291f" providerId="ADAL" clId="{5D62749E-E127-43B3-8AC6-51DF11B66DA8}" dt="2026-09-27T11:15:31.146" v="835" actId="1076"/>
           <ac:spMkLst>
             <pc:docMk/>
             <pc:sldMk cId="2323266469" sldId="257"/>
             <ac:spMk id="2" creationId="{D4BF55C2-83CE-A738-984C-84961BBA05F0}"/>
           </ac:spMkLst>
         </pc:spChg>
-        <pc:spChg chg="del">
-          <ac:chgData name="Demaeght Gunnarr" userId="d4ee6c7f-5b58-43ba-8a8e-d2bde2eb291f" providerId="ADAL" clId="{5D62749E-E127-43B3-8AC6-51DF11B66DA8}" dt="2026-09-10T07:26:12.603" v="66"/>
+        <pc:spChg chg="add del mod">
+          <ac:chgData name="Demaeght Gunnarr" userId="d4ee6c7f-5b58-43ba-8a8e-d2bde2eb291f" providerId="ADAL" clId="{5D62749E-E127-43B3-8AC6-51DF11B66DA8}" dt="2026-09-27T11:14:29.961" v="828" actId="478"/>
           <ac:spMkLst>
             <pc:docMk/>
             <pc:sldMk cId="2323266469" sldId="257"/>
-            <ac:spMk id="3" creationId="{3155C7FB-321C-7748-0216-E95D66CA7C0A}"/>
+            <ac:spMk id="6" creationId="{C2D5DF38-30F1-8E00-59C7-9469A081274A}"/>
           </ac:spMkLst>
         </pc:spChg>
-        <pc:picChg chg="add mod">
-          <ac:chgData name="Demaeght Gunnarr" userId="d4ee6c7f-5b58-43ba-8a8e-d2bde2eb291f" providerId="ADAL" clId="{5D62749E-E127-43B3-8AC6-51DF11B66DA8}" dt="2026-09-11T07:30:58.742" v="726"/>
+        <pc:picChg chg="add del mod">
+          <ac:chgData name="Demaeght Gunnarr" userId="d4ee6c7f-5b58-43ba-8a8e-d2bde2eb291f" providerId="ADAL" clId="{5D62749E-E127-43B3-8AC6-51DF11B66DA8}" dt="2026-09-27T11:14:19.315" v="827" actId="478"/>
           <ac:picMkLst>
             <pc:docMk/>
             <pc:sldMk cId="2323266469" sldId="257"/>
@@ -189,38 +189,38 @@
           </ac:picMkLst>
         </pc:picChg>
         <pc:picChg chg="add mod modCrop">
-          <ac:chgData name="Demaeght Gunnarr" userId="d4ee6c7f-5b58-43ba-8a8e-d2bde2eb291f" providerId="ADAL" clId="{5D62749E-E127-43B3-8AC6-51DF11B66DA8}" dt="2026-09-10T07:37:49.813" v="136" actId="26606"/>
+          <ac:chgData name="Demaeght Gunnarr" userId="d4ee6c7f-5b58-43ba-8a8e-d2bde2eb291f" providerId="ADAL" clId="{5D62749E-E127-43B3-8AC6-51DF11B66DA8}" dt="2026-09-27T11:15:39.738" v="836" actId="1076"/>
           <ac:picMkLst>
             <pc:docMk/>
             <pc:sldMk cId="2323266469" sldId="257"/>
             <ac:picMk id="5" creationId="{46F7A7B9-FDEB-B3EA-6230-162E3EF71BE5}"/>
           </ac:picMkLst>
         </pc:picChg>
+        <pc:picChg chg="add mod">
+          <ac:chgData name="Demaeght Gunnarr" userId="d4ee6c7f-5b58-43ba-8a8e-d2bde2eb291f" providerId="ADAL" clId="{5D62749E-E127-43B3-8AC6-51DF11B66DA8}" dt="2026-09-27T12:39:28.475" v="1119" actId="1076"/>
+          <ac:picMkLst>
+            <pc:docMk/>
+            <pc:sldMk cId="2323266469" sldId="257"/>
+            <ac:picMk id="7" creationId="{883AE644-BF24-3051-10C6-EF5ACD29F05D}"/>
+          </ac:picMkLst>
+        </pc:picChg>
       </pc:sldChg>
-      <pc:sldChg chg="addSp delSp modSp new mod ord modTransition">
-        <pc:chgData name="Demaeght Gunnarr" userId="d4ee6c7f-5b58-43ba-8a8e-d2bde2eb291f" providerId="ADAL" clId="{5D62749E-E127-43B3-8AC6-51DF11B66DA8}" dt="2026-09-11T07:30:58.742" v="726"/>
+      <pc:sldChg chg="addSp delSp modSp new mod ord modTransition modClrScheme chgLayout">
+        <pc:chgData name="Demaeght Gunnarr" userId="d4ee6c7f-5b58-43ba-8a8e-d2bde2eb291f" providerId="ADAL" clId="{5D62749E-E127-43B3-8AC6-51DF11B66DA8}" dt="2026-09-27T12:41:00.019" v="1121" actId="1076"/>
         <pc:sldMkLst>
           <pc:docMk/>
           <pc:sldMk cId="3157967162" sldId="258"/>
         </pc:sldMkLst>
         <pc:spChg chg="mod">
-          <ac:chgData name="Demaeght Gunnarr" userId="d4ee6c7f-5b58-43ba-8a8e-d2bde2eb291f" providerId="ADAL" clId="{5D62749E-E127-43B3-8AC6-51DF11B66DA8}" dt="2026-09-11T07:30:58.742" v="726"/>
+          <ac:chgData name="Demaeght Gunnarr" userId="d4ee6c7f-5b58-43ba-8a8e-d2bde2eb291f" providerId="ADAL" clId="{5D62749E-E127-43B3-8AC6-51DF11B66DA8}" dt="2026-09-27T12:41:00.019" v="1121" actId="1076"/>
           <ac:spMkLst>
             <pc:docMk/>
             <pc:sldMk cId="3157967162" sldId="258"/>
             <ac:spMk id="2" creationId="{DA0C588F-6AFB-42EF-AEFE-A25538B6D810}"/>
           </ac:spMkLst>
         </pc:spChg>
-        <pc:spChg chg="del">
-          <ac:chgData name="Demaeght Gunnarr" userId="d4ee6c7f-5b58-43ba-8a8e-d2bde2eb291f" providerId="ADAL" clId="{5D62749E-E127-43B3-8AC6-51DF11B66DA8}" dt="2026-09-10T07:28:55.423" v="119"/>
-          <ac:spMkLst>
-            <pc:docMk/>
-            <pc:sldMk cId="3157967162" sldId="258"/>
-            <ac:spMk id="3" creationId="{6B697213-1B55-DE32-005F-31C00B5F8587}"/>
-          </ac:spMkLst>
-        </pc:spChg>
         <pc:picChg chg="add mod">
-          <ac:chgData name="Demaeght Gunnarr" userId="d4ee6c7f-5b58-43ba-8a8e-d2bde2eb291f" providerId="ADAL" clId="{5D62749E-E127-43B3-8AC6-51DF11B66DA8}" dt="2026-09-10T07:31:41.389" v="125" actId="1076"/>
+          <ac:chgData name="Demaeght Gunnarr" userId="d4ee6c7f-5b58-43ba-8a8e-d2bde2eb291f" providerId="ADAL" clId="{5D62749E-E127-43B3-8AC6-51DF11B66DA8}" dt="2026-09-27T11:14:41.543" v="830" actId="1076"/>
           <ac:picMkLst>
             <pc:docMk/>
             <pc:sldMk cId="3157967162" sldId="258"/>
@@ -228,45 +228,21 @@
           </ac:picMkLst>
         </pc:picChg>
       </pc:sldChg>
-      <pc:sldChg chg="addSp delSp modSp new mod modTransition">
-        <pc:chgData name="Demaeght Gunnarr" userId="d4ee6c7f-5b58-43ba-8a8e-d2bde2eb291f" providerId="ADAL" clId="{5D62749E-E127-43B3-8AC6-51DF11B66DA8}" dt="2026-09-11T07:30:58.742" v="726"/>
+      <pc:sldChg chg="addSp delSp modSp new add del mod modTransition">
+        <pc:chgData name="Demaeght Gunnarr" userId="d4ee6c7f-5b58-43ba-8a8e-d2bde2eb291f" providerId="ADAL" clId="{5D62749E-E127-43B3-8AC6-51DF11B66DA8}" dt="2026-09-27T11:07:20.497" v="797" actId="2696"/>
         <pc:sldMkLst>
           <pc:docMk/>
           <pc:sldMk cId="1454382296" sldId="259"/>
         </pc:sldMkLst>
-        <pc:spChg chg="mod">
-          <ac:chgData name="Demaeght Gunnarr" userId="d4ee6c7f-5b58-43ba-8a8e-d2bde2eb291f" providerId="ADAL" clId="{5D62749E-E127-43B3-8AC6-51DF11B66DA8}" dt="2026-09-11T07:30:58.742" v="726"/>
-          <ac:spMkLst>
-            <pc:docMk/>
-            <pc:sldMk cId="1454382296" sldId="259"/>
-            <ac:spMk id="2" creationId="{B9CB340E-F55D-DA8A-9F0E-8474E3BE6DF7}"/>
-          </ac:spMkLst>
-        </pc:spChg>
-        <pc:spChg chg="del mod">
-          <ac:chgData name="Demaeght Gunnarr" userId="d4ee6c7f-5b58-43ba-8a8e-d2bde2eb291f" providerId="ADAL" clId="{5D62749E-E127-43B3-8AC6-51DF11B66DA8}" dt="2026-09-10T07:48:32.527" v="345" actId="26606"/>
-          <ac:spMkLst>
-            <pc:docMk/>
-            <pc:sldMk cId="1454382296" sldId="259"/>
-            <ac:spMk id="3" creationId="{A605F830-AAC4-FB93-5870-E49AFDC385D8}"/>
-          </ac:spMkLst>
-        </pc:spChg>
-        <pc:graphicFrameChg chg="add mod">
-          <ac:chgData name="Demaeght Gunnarr" userId="d4ee6c7f-5b58-43ba-8a8e-d2bde2eb291f" providerId="ADAL" clId="{5D62749E-E127-43B3-8AC6-51DF11B66DA8}" dt="2026-09-11T07:26:05.830" v="645" actId="1076"/>
-          <ac:graphicFrameMkLst>
-            <pc:docMk/>
-            <pc:sldMk cId="1454382296" sldId="259"/>
-            <ac:graphicFrameMk id="5" creationId="{A34BE619-C8A0-112C-FAFE-5F7447C9197C}"/>
-          </ac:graphicFrameMkLst>
-        </pc:graphicFrameChg>
       </pc:sldChg>
-      <pc:sldChg chg="addSp delSp modSp new mod modTransition">
-        <pc:chgData name="Demaeght Gunnarr" userId="d4ee6c7f-5b58-43ba-8a8e-d2bde2eb291f" providerId="ADAL" clId="{5D62749E-E127-43B3-8AC6-51DF11B66DA8}" dt="2026-09-11T07:30:58.742" v="726"/>
+      <pc:sldChg chg="addSp delSp modSp new mod modTransition modClrScheme chgLayout">
+        <pc:chgData name="Demaeght Gunnarr" userId="d4ee6c7f-5b58-43ba-8a8e-d2bde2eb291f" providerId="ADAL" clId="{5D62749E-E127-43B3-8AC6-51DF11B66DA8}" dt="2026-09-27T12:41:15.344" v="1134" actId="20577"/>
         <pc:sldMkLst>
           <pc:docMk/>
           <pc:sldMk cId="439038329" sldId="260"/>
         </pc:sldMkLst>
         <pc:spChg chg="mod">
-          <ac:chgData name="Demaeght Gunnarr" userId="d4ee6c7f-5b58-43ba-8a8e-d2bde2eb291f" providerId="ADAL" clId="{5D62749E-E127-43B3-8AC6-51DF11B66DA8}" dt="2026-09-11T07:30:58.742" v="726"/>
+          <ac:chgData name="Demaeght Gunnarr" userId="d4ee6c7f-5b58-43ba-8a8e-d2bde2eb291f" providerId="ADAL" clId="{5D62749E-E127-43B3-8AC6-51DF11B66DA8}" dt="2026-09-27T11:14:06.454" v="825" actId="26606"/>
           <ac:spMkLst>
             <pc:docMk/>
             <pc:sldMk cId="439038329" sldId="260"/>
@@ -274,3171 +250,774 @@
           </ac:spMkLst>
         </pc:spChg>
         <pc:spChg chg="mod">
-          <ac:chgData name="Demaeght Gunnarr" userId="d4ee6c7f-5b58-43ba-8a8e-d2bde2eb291f" providerId="ADAL" clId="{5D62749E-E127-43B3-8AC6-51DF11B66DA8}" dt="2026-09-11T07:30:58.742" v="726"/>
+          <ac:chgData name="Demaeght Gunnarr" userId="d4ee6c7f-5b58-43ba-8a8e-d2bde2eb291f" providerId="ADAL" clId="{5D62749E-E127-43B3-8AC6-51DF11B66DA8}" dt="2026-09-27T12:41:15.344" v="1134" actId="20577"/>
           <ac:spMkLst>
             <pc:docMk/>
             <pc:sldMk cId="439038329" sldId="260"/>
             <ac:spMk id="3" creationId="{8F793EA2-36C5-9A79-4D5F-D8F5185E65B6}"/>
           </ac:spMkLst>
         </pc:spChg>
-        <pc:spChg chg="add del mod">
-          <ac:chgData name="Demaeght Gunnarr" userId="d4ee6c7f-5b58-43ba-8a8e-d2bde2eb291f" providerId="ADAL" clId="{5D62749E-E127-43B3-8AC6-51DF11B66DA8}" dt="2026-09-10T07:58:42.838" v="588"/>
-          <ac:spMkLst>
-            <pc:docMk/>
-            <pc:sldMk cId="439038329" sldId="260"/>
-            <ac:spMk id="4" creationId="{5BC79F2C-F104-76E1-C64D-5438F7523B9E}"/>
-          </ac:spMkLst>
-        </pc:spChg>
       </pc:sldChg>
       <pc:sldChg chg="addSp delSp modSp new mod modTransition modClrScheme chgLayout">
-        <pc:chgData name="Demaeght Gunnarr" userId="d4ee6c7f-5b58-43ba-8a8e-d2bde2eb291f" providerId="ADAL" clId="{5D62749E-E127-43B3-8AC6-51DF11B66DA8}" dt="2026-09-11T07:33:16.931" v="734" actId="1076"/>
+        <pc:chgData name="Demaeght Gunnarr" userId="d4ee6c7f-5b58-43ba-8a8e-d2bde2eb291f" providerId="ADAL" clId="{5D62749E-E127-43B3-8AC6-51DF11B66DA8}" dt="2026-09-28T06:31:44.507" v="1139" actId="1076"/>
         <pc:sldMkLst>
           <pc:docMk/>
           <pc:sldMk cId="2265773176" sldId="261"/>
         </pc:sldMkLst>
-        <pc:spChg chg="del">
-          <ac:chgData name="Demaeght Gunnarr" userId="d4ee6c7f-5b58-43ba-8a8e-d2bde2eb291f" providerId="ADAL" clId="{5D62749E-E127-43B3-8AC6-51DF11B66DA8}" dt="2026-09-10T08:01:35.056" v="601" actId="26606"/>
+        <pc:spChg chg="add del">
+          <ac:chgData name="Demaeght Gunnarr" userId="d4ee6c7f-5b58-43ba-8a8e-d2bde2eb291f" providerId="ADAL" clId="{5D62749E-E127-43B3-8AC6-51DF11B66DA8}" dt="2026-09-27T12:09:52.575" v="947" actId="34122"/>
           <ac:spMkLst>
             <pc:docMk/>
             <pc:sldMk cId="2265773176" sldId="261"/>
-            <ac:spMk id="2" creationId="{3FD45FCF-DA14-E03A-404D-43998CC92595}"/>
-          </ac:spMkLst>
-        </pc:spChg>
-        <pc:spChg chg="add del mod">
-          <ac:chgData name="Demaeght Gunnarr" userId="d4ee6c7f-5b58-43ba-8a8e-d2bde2eb291f" providerId="ADAL" clId="{5D62749E-E127-43B3-8AC6-51DF11B66DA8}" dt="2026-09-11T07:32:03.645" v="731" actId="478"/>
-          <ac:spMkLst>
-            <pc:docMk/>
-            <pc:sldMk cId="2265773176" sldId="261"/>
-            <ac:spMk id="3" creationId="{432770D2-E8A5-4664-5DBA-4CB327AF9EFB}"/>
-          </ac:spMkLst>
-        </pc:spChg>
-        <pc:spChg chg="del">
-          <ac:chgData name="Demaeght Gunnarr" userId="d4ee6c7f-5b58-43ba-8a8e-d2bde2eb291f" providerId="ADAL" clId="{5D62749E-E127-43B3-8AC6-51DF11B66DA8}" dt="2026-09-10T08:01:26.470" v="600" actId="22"/>
-          <ac:spMkLst>
-            <pc:docMk/>
-            <pc:sldMk cId="2265773176" sldId="261"/>
-            <ac:spMk id="3" creationId="{FD833B22-FB9B-50C0-3D9A-20C29EF9DCDA}"/>
+            <ac:spMk id="6" creationId="{DC6CF609-63B5-42BF-9333-959182B44A47}"/>
           </ac:spMkLst>
         </pc:spChg>
         <pc:spChg chg="add mod">
-          <ac:chgData name="Demaeght Gunnarr" userId="d4ee6c7f-5b58-43ba-8a8e-d2bde2eb291f" providerId="ADAL" clId="{5D62749E-E127-43B3-8AC6-51DF11B66DA8}" dt="2026-09-11T07:30:58.742" v="726"/>
+          <ac:chgData name="Demaeght Gunnarr" userId="d4ee6c7f-5b58-43ba-8a8e-d2bde2eb291f" providerId="ADAL" clId="{5D62749E-E127-43B3-8AC6-51DF11B66DA8}" dt="2026-09-27T11:16:55.988" v="852" actId="1076"/>
           <ac:spMkLst>
             <pc:docMk/>
             <pc:sldMk cId="2265773176" sldId="261"/>
             <ac:spMk id="10" creationId="{31935CC8-2890-5E51-2D68-07BE9A14BCBB}"/>
           </ac:spMkLst>
         </pc:spChg>
-        <pc:spChg chg="add del mod">
-          <ac:chgData name="Demaeght Gunnarr" userId="d4ee6c7f-5b58-43ba-8a8e-d2bde2eb291f" providerId="ADAL" clId="{5D62749E-E127-43B3-8AC6-51DF11B66DA8}" dt="2026-09-10T08:03:29.972" v="639" actId="26606"/>
+        <pc:spChg chg="add mod">
+          <ac:chgData name="Demaeght Gunnarr" userId="d4ee6c7f-5b58-43ba-8a8e-d2bde2eb291f" providerId="ADAL" clId="{5D62749E-E127-43B3-8AC6-51DF11B66DA8}" dt="2026-09-28T06:31:32.134" v="1138" actId="571"/>
           <ac:spMkLst>
             <pc:docMk/>
             <pc:sldMk cId="2265773176" sldId="261"/>
-            <ac:spMk id="12" creationId="{9F1DA418-2715-FD64-E5D6-45578BAD45DA}"/>
+            <ac:spMk id="12" creationId="{71D3DA0E-5961-4C81-DF42-3755AB5C65F1}"/>
           </ac:spMkLst>
         </pc:spChg>
         <pc:spChg chg="add mod">
-          <ac:chgData name="Demaeght Gunnarr" userId="d4ee6c7f-5b58-43ba-8a8e-d2bde2eb291f" providerId="ADAL" clId="{5D62749E-E127-43B3-8AC6-51DF11B66DA8}" dt="2026-09-11T07:30:58.742" v="726"/>
+          <ac:chgData name="Demaeght Gunnarr" userId="d4ee6c7f-5b58-43ba-8a8e-d2bde2eb291f" providerId="ADAL" clId="{5D62749E-E127-43B3-8AC6-51DF11B66DA8}" dt="2026-09-28T06:31:32.134" v="1138" actId="571"/>
+          <ac:spMkLst>
+            <pc:docMk/>
+            <pc:sldMk cId="2265773176" sldId="261"/>
+            <ac:spMk id="13" creationId="{F7714E43-7560-2333-84F3-3E9818EB0AF6}"/>
+          </ac:spMkLst>
+        </pc:spChg>
+        <pc:spChg chg="add del mod">
+          <ac:chgData name="Demaeght Gunnarr" userId="d4ee6c7f-5b58-43ba-8a8e-d2bde2eb291f" providerId="ADAL" clId="{5D62749E-E127-43B3-8AC6-51DF11B66DA8}" dt="2026-09-27T11:16:34.300" v="837" actId="26606"/>
           <ac:spMkLst>
             <pc:docMk/>
             <pc:sldMk cId="2265773176" sldId="261"/>
             <ac:spMk id="17" creationId="{E1F15A19-71E8-BA50-EADD-F38D67D4A605}"/>
           </ac:spMkLst>
         </pc:spChg>
-        <pc:picChg chg="add del mod ord">
-          <ac:chgData name="Demaeght Gunnarr" userId="d4ee6c7f-5b58-43ba-8a8e-d2bde2eb291f" providerId="ADAL" clId="{5D62749E-E127-43B3-8AC6-51DF11B66DA8}" dt="2026-09-11T07:31:59.466" v="730" actId="478"/>
+        <pc:spChg chg="add del mod">
+          <ac:chgData name="Demaeght Gunnarr" userId="d4ee6c7f-5b58-43ba-8a8e-d2bde2eb291f" providerId="ADAL" clId="{5D62749E-E127-43B3-8AC6-51DF11B66DA8}" dt="2026-09-27T11:17:00.958" v="853" actId="478"/>
+          <ac:spMkLst>
+            <pc:docMk/>
+            <pc:sldMk cId="2265773176" sldId="261"/>
+            <ac:spMk id="22" creationId="{ADB04EFD-3252-EFD9-8787-0EF4117AAE00}"/>
+          </ac:spMkLst>
+        </pc:spChg>
+        <pc:spChg chg="add del mod">
+          <ac:chgData name="Demaeght Gunnarr" userId="d4ee6c7f-5b58-43ba-8a8e-d2bde2eb291f" providerId="ADAL" clId="{5D62749E-E127-43B3-8AC6-51DF11B66DA8}" dt="2026-09-27T12:12:30.596" v="994" actId="11529"/>
+          <ac:spMkLst>
+            <pc:docMk/>
+            <pc:sldMk cId="2265773176" sldId="261"/>
+            <ac:spMk id="43" creationId="{1D29AA96-46F5-BA7A-93B4-0B70BA0869DD}"/>
+          </ac:spMkLst>
+        </pc:spChg>
+        <pc:spChg chg="add del mod">
+          <ac:chgData name="Demaeght Gunnarr" userId="d4ee6c7f-5b58-43ba-8a8e-d2bde2eb291f" providerId="ADAL" clId="{5D62749E-E127-43B3-8AC6-51DF11B66DA8}" dt="2026-09-27T12:12:26.368" v="982" actId="22"/>
+          <ac:spMkLst>
+            <pc:docMk/>
+            <pc:sldMk cId="2265773176" sldId="261"/>
+            <ac:spMk id="45" creationId="{6D93B497-4DDD-4CE3-C5F6-FDC67646232A}"/>
+          </ac:spMkLst>
+        </pc:spChg>
+        <pc:spChg chg="add mod">
+          <ac:chgData name="Demaeght Gunnarr" userId="d4ee6c7f-5b58-43ba-8a8e-d2bde2eb291f" providerId="ADAL" clId="{5D62749E-E127-43B3-8AC6-51DF11B66DA8}" dt="2026-09-28T06:31:44.507" v="1139" actId="1076"/>
+          <ac:spMkLst>
+            <pc:docMk/>
+            <pc:sldMk cId="2265773176" sldId="261"/>
+            <ac:spMk id="68" creationId="{503892C6-1045-55E2-74DB-07451E128227}"/>
+          </ac:spMkLst>
+        </pc:spChg>
+        <pc:spChg chg="add mod">
+          <ac:chgData name="Demaeght Gunnarr" userId="d4ee6c7f-5b58-43ba-8a8e-d2bde2eb291f" providerId="ADAL" clId="{5D62749E-E127-43B3-8AC6-51DF11B66DA8}" dt="2026-09-28T06:31:44.507" v="1139" actId="1076"/>
+          <ac:spMkLst>
+            <pc:docMk/>
+            <pc:sldMk cId="2265773176" sldId="261"/>
+            <ac:spMk id="70" creationId="{FCB3BEE5-D978-689F-1859-10D149CECB4A}"/>
+          </ac:spMkLst>
+        </pc:spChg>
+        <pc:picChg chg="add del">
+          <ac:chgData name="Demaeght Gunnarr" userId="d4ee6c7f-5b58-43ba-8a8e-d2bde2eb291f" providerId="ADAL" clId="{5D62749E-E127-43B3-8AC6-51DF11B66DA8}" dt="2026-09-27T11:55:57.443" v="856" actId="22"/>
           <ac:picMkLst>
             <pc:docMk/>
             <pc:sldMk cId="2265773176" sldId="261"/>
-            <ac:picMk id="5" creationId="{3624556B-2A02-054A-3849-A5EF2252C217}"/>
+            <ac:picMk id="2" creationId="{7793EB81-A935-A5D7-1386-B3AF85E911C7}"/>
           </ac:picMkLst>
         </pc:picChg>
         <pc:picChg chg="add mod">
-          <ac:chgData name="Demaeght Gunnarr" userId="d4ee6c7f-5b58-43ba-8a8e-d2bde2eb291f" providerId="ADAL" clId="{5D62749E-E127-43B3-8AC6-51DF11B66DA8}" dt="2026-09-11T07:33:16.931" v="734" actId="1076"/>
+          <ac:chgData name="Demaeght Gunnarr" userId="d4ee6c7f-5b58-43ba-8a8e-d2bde2eb291f" providerId="ADAL" clId="{5D62749E-E127-43B3-8AC6-51DF11B66DA8}" dt="2026-09-28T06:31:32.134" v="1138" actId="571"/>
+          <ac:picMkLst>
+            <pc:docMk/>
+            <pc:sldMk cId="2265773176" sldId="261"/>
+            <ac:picMk id="2" creationId="{BF080E22-CCDE-20DC-F015-A644F8D6B7F8}"/>
+          </ac:picMkLst>
+        </pc:picChg>
+        <pc:picChg chg="add mod">
+          <ac:chgData name="Demaeght Gunnarr" userId="d4ee6c7f-5b58-43ba-8a8e-d2bde2eb291f" providerId="ADAL" clId="{5D62749E-E127-43B3-8AC6-51DF11B66DA8}" dt="2026-09-28T06:31:32.134" v="1138" actId="571"/>
+          <ac:picMkLst>
+            <pc:docMk/>
+            <pc:sldMk cId="2265773176" sldId="261"/>
+            <ac:picMk id="3" creationId="{2AAF0AF6-73A7-2D29-D6EE-67E69B92636F}"/>
+          </ac:picMkLst>
+        </pc:picChg>
+        <pc:picChg chg="add del">
+          <ac:chgData name="Demaeght Gunnarr" userId="d4ee6c7f-5b58-43ba-8a8e-d2bde2eb291f" providerId="ADAL" clId="{5D62749E-E127-43B3-8AC6-51DF11B66DA8}" dt="2026-09-27T11:56:46.349" v="859" actId="22"/>
+          <ac:picMkLst>
+            <pc:docMk/>
+            <pc:sldMk cId="2265773176" sldId="261"/>
+            <ac:picMk id="3" creationId="{924D7242-9F61-9227-0AC5-47B8FF6D5948}"/>
+          </ac:picMkLst>
+        </pc:picChg>
+        <pc:picChg chg="add mod">
+          <ac:chgData name="Demaeght Gunnarr" userId="d4ee6c7f-5b58-43ba-8a8e-d2bde2eb291f" providerId="ADAL" clId="{5D62749E-E127-43B3-8AC6-51DF11B66DA8}" dt="2026-09-28T06:31:32.134" v="1138" actId="571"/>
+          <ac:picMkLst>
+            <pc:docMk/>
+            <pc:sldMk cId="2265773176" sldId="261"/>
+            <ac:picMk id="4" creationId="{2C516E85-9376-8EAF-B75F-42D1780D043F}"/>
+          </ac:picMkLst>
+        </pc:picChg>
+        <pc:picChg chg="add del">
+          <ac:chgData name="Demaeght Gunnarr" userId="d4ee6c7f-5b58-43ba-8a8e-d2bde2eb291f" providerId="ADAL" clId="{5D62749E-E127-43B3-8AC6-51DF11B66DA8}" dt="2026-09-27T11:57:07.874" v="862" actId="22"/>
+          <ac:picMkLst>
+            <pc:docMk/>
+            <pc:sldMk cId="2265773176" sldId="261"/>
+            <ac:picMk id="4" creationId="{4DF71D25-D990-5821-A1AE-7917D2645BF3}"/>
+          </ac:picMkLst>
+        </pc:picChg>
+        <pc:picChg chg="add del">
+          <ac:chgData name="Demaeght Gunnarr" userId="d4ee6c7f-5b58-43ba-8a8e-d2bde2eb291f" providerId="ADAL" clId="{5D62749E-E127-43B3-8AC6-51DF11B66DA8}" dt="2026-09-27T11:57:33.696" v="865" actId="22"/>
+          <ac:picMkLst>
+            <pc:docMk/>
+            <pc:sldMk cId="2265773176" sldId="261"/>
+            <ac:picMk id="5" creationId="{0C451F79-0DD5-AEEE-099F-FE1FEAE88AAE}"/>
+          </ac:picMkLst>
+        </pc:picChg>
+        <pc:picChg chg="add mod">
+          <ac:chgData name="Demaeght Gunnarr" userId="d4ee6c7f-5b58-43ba-8a8e-d2bde2eb291f" providerId="ADAL" clId="{5D62749E-E127-43B3-8AC6-51DF11B66DA8}" dt="2026-09-28T06:31:32.134" v="1138" actId="571"/>
+          <ac:picMkLst>
+            <pc:docMk/>
+            <pc:sldMk cId="2265773176" sldId="261"/>
+            <ac:picMk id="5" creationId="{F32B4A7F-876D-5133-BA67-9D03355D20E3}"/>
+          </ac:picMkLst>
+        </pc:picChg>
+        <pc:picChg chg="add mod">
+          <ac:chgData name="Demaeght Gunnarr" userId="d4ee6c7f-5b58-43ba-8a8e-d2bde2eb291f" providerId="ADAL" clId="{5D62749E-E127-43B3-8AC6-51DF11B66DA8}" dt="2026-09-28T06:31:32.134" v="1138" actId="571"/>
+          <ac:picMkLst>
+            <pc:docMk/>
+            <pc:sldMk cId="2265773176" sldId="261"/>
+            <ac:picMk id="6" creationId="{374DFDE7-51F4-D1CE-FF81-56242D1A766C}"/>
+          </ac:picMkLst>
+        </pc:picChg>
+        <pc:picChg chg="add del mod">
+          <ac:chgData name="Demaeght Gunnarr" userId="d4ee6c7f-5b58-43ba-8a8e-d2bde2eb291f" providerId="ADAL" clId="{5D62749E-E127-43B3-8AC6-51DF11B66DA8}" dt="2026-09-27T11:13:34.747" v="824" actId="478"/>
           <ac:picMkLst>
             <pc:docMk/>
             <pc:sldMk cId="2265773176" sldId="261"/>
             <ac:picMk id="6" creationId="{63618FFE-080D-9175-5196-CDFC301950B6}"/>
           </ac:picMkLst>
         </pc:picChg>
+        <pc:picChg chg="add del">
+          <ac:chgData name="Demaeght Gunnarr" userId="d4ee6c7f-5b58-43ba-8a8e-d2bde2eb291f" providerId="ADAL" clId="{5D62749E-E127-43B3-8AC6-51DF11B66DA8}" dt="2026-09-27T11:57:53.844" v="868" actId="22"/>
+          <ac:picMkLst>
+            <pc:docMk/>
+            <pc:sldMk cId="2265773176" sldId="261"/>
+            <ac:picMk id="7" creationId="{6131DAC4-9BCA-C9C8-8146-168E91D983CA}"/>
+          </ac:picMkLst>
+        </pc:picChg>
+        <pc:picChg chg="add mod">
+          <ac:chgData name="Demaeght Gunnarr" userId="d4ee6c7f-5b58-43ba-8a8e-d2bde2eb291f" providerId="ADAL" clId="{5D62749E-E127-43B3-8AC6-51DF11B66DA8}" dt="2026-09-28T06:31:32.134" v="1138" actId="571"/>
+          <ac:picMkLst>
+            <pc:docMk/>
+            <pc:sldMk cId="2265773176" sldId="261"/>
+            <ac:picMk id="7" creationId="{E504506D-9FCE-086E-BF0F-5633E657317B}"/>
+          </ac:picMkLst>
+        </pc:picChg>
+        <pc:picChg chg="add del">
+          <ac:chgData name="Demaeght Gunnarr" userId="d4ee6c7f-5b58-43ba-8a8e-d2bde2eb291f" providerId="ADAL" clId="{5D62749E-E127-43B3-8AC6-51DF11B66DA8}" dt="2026-09-27T11:58:10.030" v="870" actId="22"/>
+          <ac:picMkLst>
+            <pc:docMk/>
+            <pc:sldMk cId="2265773176" sldId="261"/>
+            <ac:picMk id="9" creationId="{AA75E5E7-D47B-2C87-14C1-5F09FB423E13}"/>
+          </ac:picMkLst>
+        </pc:picChg>
+        <pc:picChg chg="add del">
+          <ac:chgData name="Demaeght Gunnarr" userId="d4ee6c7f-5b58-43ba-8a8e-d2bde2eb291f" providerId="ADAL" clId="{5D62749E-E127-43B3-8AC6-51DF11B66DA8}" dt="2026-09-27T11:58:32.276" v="873" actId="22"/>
+          <ac:picMkLst>
+            <pc:docMk/>
+            <pc:sldMk cId="2265773176" sldId="261"/>
+            <ac:picMk id="11" creationId="{1E84415D-9DB2-3219-82DF-9C299E451D14}"/>
+          </ac:picMkLst>
+        </pc:picChg>
+        <pc:picChg chg="add mod">
+          <ac:chgData name="Demaeght Gunnarr" userId="d4ee6c7f-5b58-43ba-8a8e-d2bde2eb291f" providerId="ADAL" clId="{5D62749E-E127-43B3-8AC6-51DF11B66DA8}" dt="2026-09-28T06:31:32.134" v="1138" actId="571"/>
+          <ac:picMkLst>
+            <pc:docMk/>
+            <pc:sldMk cId="2265773176" sldId="261"/>
+            <ac:picMk id="11" creationId="{D2B012C1-34FC-D89D-3171-4FE5D5C6EF64}"/>
+          </ac:picMkLst>
+        </pc:picChg>
+        <pc:picChg chg="add del">
+          <ac:chgData name="Demaeght Gunnarr" userId="d4ee6c7f-5b58-43ba-8a8e-d2bde2eb291f" providerId="ADAL" clId="{5D62749E-E127-43B3-8AC6-51DF11B66DA8}" dt="2026-09-27T11:58:43.239" v="876" actId="22"/>
+          <ac:picMkLst>
+            <pc:docMk/>
+            <pc:sldMk cId="2265773176" sldId="261"/>
+            <ac:picMk id="12" creationId="{A7F408E3-F508-A283-7E3C-40C95C93F34C}"/>
+          </ac:picMkLst>
+        </pc:picChg>
+        <pc:picChg chg="add del">
+          <ac:chgData name="Demaeght Gunnarr" userId="d4ee6c7f-5b58-43ba-8a8e-d2bde2eb291f" providerId="ADAL" clId="{5D62749E-E127-43B3-8AC6-51DF11B66DA8}" dt="2026-09-27T11:59:04.415" v="879" actId="22"/>
+          <ac:picMkLst>
+            <pc:docMk/>
+            <pc:sldMk cId="2265773176" sldId="261"/>
+            <ac:picMk id="13" creationId="{3BDCDC88-ACF6-B5FB-7DE2-68DF7A3AF3EF}"/>
+          </ac:picMkLst>
+        </pc:picChg>
+        <pc:picChg chg="add del mod">
+          <ac:chgData name="Demaeght Gunnarr" userId="d4ee6c7f-5b58-43ba-8a8e-d2bde2eb291f" providerId="ADAL" clId="{5D62749E-E127-43B3-8AC6-51DF11B66DA8}" dt="2026-09-27T12:00:56.633" v="881" actId="478"/>
+          <ac:picMkLst>
+            <pc:docMk/>
+            <pc:sldMk cId="2265773176" sldId="261"/>
+            <ac:picMk id="15" creationId="{D25D0490-D997-8948-2A24-31CDCB6D38D1}"/>
+          </ac:picMkLst>
+        </pc:picChg>
+        <pc:picChg chg="add del mod">
+          <ac:chgData name="Demaeght Gunnarr" userId="d4ee6c7f-5b58-43ba-8a8e-d2bde2eb291f" providerId="ADAL" clId="{5D62749E-E127-43B3-8AC6-51DF11B66DA8}" dt="2026-09-27T12:01:14.434" v="883" actId="931"/>
+          <ac:picMkLst>
+            <pc:docMk/>
+            <pc:sldMk cId="2265773176" sldId="261"/>
+            <ac:picMk id="18" creationId="{DE5D8DC3-7223-3887-4EB0-3B22470D24B2}"/>
+          </ac:picMkLst>
+        </pc:picChg>
+        <pc:picChg chg="add mod">
+          <ac:chgData name="Demaeght Gunnarr" userId="d4ee6c7f-5b58-43ba-8a8e-d2bde2eb291f" providerId="ADAL" clId="{5D62749E-E127-43B3-8AC6-51DF11B66DA8}" dt="2026-09-28T06:31:44.507" v="1139" actId="1076"/>
+          <ac:picMkLst>
+            <pc:docMk/>
+            <pc:sldMk cId="2265773176" sldId="261"/>
+            <ac:picMk id="19" creationId="{8DC3EC01-6689-15B9-46EE-FFF6C0B78DB9}"/>
+          </ac:picMkLst>
+        </pc:picChg>
+        <pc:picChg chg="add mod">
+          <ac:chgData name="Demaeght Gunnarr" userId="d4ee6c7f-5b58-43ba-8a8e-d2bde2eb291f" providerId="ADAL" clId="{5D62749E-E127-43B3-8AC6-51DF11B66DA8}" dt="2026-09-28T06:31:44.507" v="1139" actId="1076"/>
+          <ac:picMkLst>
+            <pc:docMk/>
+            <pc:sldMk cId="2265773176" sldId="261"/>
+            <ac:picMk id="21" creationId="{D652357C-4258-1662-7EC5-FF5523338C92}"/>
+          </ac:picMkLst>
+        </pc:picChg>
+        <pc:picChg chg="add del">
+          <ac:chgData name="Demaeght Gunnarr" userId="d4ee6c7f-5b58-43ba-8a8e-d2bde2eb291f" providerId="ADAL" clId="{5D62749E-E127-43B3-8AC6-51DF11B66DA8}" dt="2026-09-27T12:06:28.772" v="913" actId="22"/>
+          <ac:picMkLst>
+            <pc:docMk/>
+            <pc:sldMk cId="2265773176" sldId="261"/>
+            <ac:picMk id="23" creationId="{46726D96-CD31-D9A2-5859-2FFA0A16B106}"/>
+          </ac:picMkLst>
+        </pc:picChg>
+        <pc:picChg chg="add del">
+          <ac:chgData name="Demaeght Gunnarr" userId="d4ee6c7f-5b58-43ba-8a8e-d2bde2eb291f" providerId="ADAL" clId="{5D62749E-E127-43B3-8AC6-51DF11B66DA8}" dt="2026-09-27T12:06:28.262" v="912" actId="22"/>
+          <ac:picMkLst>
+            <pc:docMk/>
+            <pc:sldMk cId="2265773176" sldId="261"/>
+            <ac:picMk id="24" creationId="{5BC09B41-8403-BE2C-4484-8F4777A39EFC}"/>
+          </ac:picMkLst>
+        </pc:picChg>
+        <pc:picChg chg="add del">
+          <ac:chgData name="Demaeght Gunnarr" userId="d4ee6c7f-5b58-43ba-8a8e-d2bde2eb291f" providerId="ADAL" clId="{5D62749E-E127-43B3-8AC6-51DF11B66DA8}" dt="2026-09-27T12:06:27.893" v="911" actId="22"/>
+          <ac:picMkLst>
+            <pc:docMk/>
+            <pc:sldMk cId="2265773176" sldId="261"/>
+            <ac:picMk id="25" creationId="{203FB292-5F21-81F6-C927-45EB2F010DAC}"/>
+          </ac:picMkLst>
+        </pc:picChg>
+        <pc:picChg chg="add del mod">
+          <ac:chgData name="Demaeght Gunnarr" userId="d4ee6c7f-5b58-43ba-8a8e-d2bde2eb291f" providerId="ADAL" clId="{5D62749E-E127-43B3-8AC6-51DF11B66DA8}" dt="2026-09-27T12:06:27.521" v="910" actId="22"/>
+          <ac:picMkLst>
+            <pc:docMk/>
+            <pc:sldMk cId="2265773176" sldId="261"/>
+            <ac:picMk id="26" creationId="{F5779B84-928D-916F-5CA3-3B529960AEB1}"/>
+          </ac:picMkLst>
+        </pc:picChg>
+        <pc:picChg chg="add mod">
+          <ac:chgData name="Demaeght Gunnarr" userId="d4ee6c7f-5b58-43ba-8a8e-d2bde2eb291f" providerId="ADAL" clId="{5D62749E-E127-43B3-8AC6-51DF11B66DA8}" dt="2026-09-28T06:31:44.507" v="1139" actId="1076"/>
+          <ac:picMkLst>
+            <pc:docMk/>
+            <pc:sldMk cId="2265773176" sldId="261"/>
+            <ac:picMk id="27" creationId="{C2D37B91-2787-C25E-5C76-12E23EEB08A2}"/>
+          </ac:picMkLst>
+        </pc:picChg>
+        <pc:picChg chg="add mod">
+          <ac:chgData name="Demaeght Gunnarr" userId="d4ee6c7f-5b58-43ba-8a8e-d2bde2eb291f" providerId="ADAL" clId="{5D62749E-E127-43B3-8AC6-51DF11B66DA8}" dt="2026-09-28T06:31:44.507" v="1139" actId="1076"/>
+          <ac:picMkLst>
+            <pc:docMk/>
+            <pc:sldMk cId="2265773176" sldId="261"/>
+            <ac:picMk id="29" creationId="{5025EC41-7695-E869-BC90-DCC0D9932612}"/>
+          </ac:picMkLst>
+        </pc:picChg>
+        <pc:picChg chg="add mod">
+          <ac:chgData name="Demaeght Gunnarr" userId="d4ee6c7f-5b58-43ba-8a8e-d2bde2eb291f" providerId="ADAL" clId="{5D62749E-E127-43B3-8AC6-51DF11B66DA8}" dt="2026-09-28T06:31:44.507" v="1139" actId="1076"/>
+          <ac:picMkLst>
+            <pc:docMk/>
+            <pc:sldMk cId="2265773176" sldId="261"/>
+            <ac:picMk id="31" creationId="{8821ED6F-F19C-17BD-DC7C-093A16491169}"/>
+          </ac:picMkLst>
+        </pc:picChg>
+        <pc:picChg chg="add mod">
+          <ac:chgData name="Demaeght Gunnarr" userId="d4ee6c7f-5b58-43ba-8a8e-d2bde2eb291f" providerId="ADAL" clId="{5D62749E-E127-43B3-8AC6-51DF11B66DA8}" dt="2026-09-28T06:31:44.507" v="1139" actId="1076"/>
+          <ac:picMkLst>
+            <pc:docMk/>
+            <pc:sldMk cId="2265773176" sldId="261"/>
+            <ac:picMk id="33" creationId="{93112A2A-76AD-5096-4422-C567E5492E50}"/>
+          </ac:picMkLst>
+        </pc:picChg>
+        <pc:picChg chg="add mod">
+          <ac:chgData name="Demaeght Gunnarr" userId="d4ee6c7f-5b58-43ba-8a8e-d2bde2eb291f" providerId="ADAL" clId="{5D62749E-E127-43B3-8AC6-51DF11B66DA8}" dt="2026-09-28T06:31:44.507" v="1139" actId="1076"/>
+          <ac:picMkLst>
+            <pc:docMk/>
+            <pc:sldMk cId="2265773176" sldId="261"/>
+            <ac:picMk id="65" creationId="{4EED70B1-806E-2BDF-9733-3D0130DE63AF}"/>
+          </ac:picMkLst>
+        </pc:picChg>
+        <pc:inkChg chg="add del">
+          <ac:chgData name="Demaeght Gunnarr" userId="d4ee6c7f-5b58-43ba-8a8e-d2bde2eb291f" providerId="ADAL" clId="{5D62749E-E127-43B3-8AC6-51DF11B66DA8}" dt="2026-09-27T12:09:52.235" v="946" actId="34124"/>
+          <ac:inkMkLst>
+            <pc:docMk/>
+            <pc:sldMk cId="2265773176" sldId="261"/>
+            <ac:inkMk id="2" creationId="{A3E845FD-BC1E-4686-B009-D17088A027CC}"/>
+          </ac:inkMkLst>
+        </pc:inkChg>
+        <pc:inkChg chg="add mod">
+          <ac:chgData name="Demaeght Gunnarr" userId="d4ee6c7f-5b58-43ba-8a8e-d2bde2eb291f" providerId="ADAL" clId="{5D62749E-E127-43B3-8AC6-51DF11B66DA8}" dt="2026-09-28T06:31:32.134" v="1138" actId="571"/>
+          <ac:inkMkLst>
+            <pc:docMk/>
+            <pc:sldMk cId="2265773176" sldId="261"/>
+            <ac:inkMk id="8" creationId="{5E585B88-3745-8597-628D-ADA84A1AC92D}"/>
+          </ac:inkMkLst>
+        </pc:inkChg>
+        <pc:inkChg chg="add del">
+          <ac:chgData name="Demaeght Gunnarr" userId="d4ee6c7f-5b58-43ba-8a8e-d2bde2eb291f" providerId="ADAL" clId="{5D62749E-E127-43B3-8AC6-51DF11B66DA8}" dt="2026-09-27T12:09:55.999" v="956" actId="9405"/>
+          <ac:inkMkLst>
+            <pc:docMk/>
+            <pc:sldMk cId="2265773176" sldId="261"/>
+            <ac:inkMk id="34" creationId="{BFABFE03-F397-BE81-0449-A46618761CD9}"/>
+          </ac:inkMkLst>
+        </pc:inkChg>
+        <pc:inkChg chg="add mod">
+          <ac:chgData name="Demaeght Gunnarr" userId="d4ee6c7f-5b58-43ba-8a8e-d2bde2eb291f" providerId="ADAL" clId="{5D62749E-E127-43B3-8AC6-51DF11B66DA8}" dt="2026-09-27T12:09:55.116" v="954"/>
+          <ac:inkMkLst>
+            <pc:docMk/>
+            <pc:sldMk cId="2265773176" sldId="261"/>
+            <ac:inkMk id="35" creationId="{20E4DA97-9D2A-89F1-A01E-4A9BA7D87F3C}"/>
+          </ac:inkMkLst>
+        </pc:inkChg>
+        <pc:inkChg chg="add del">
+          <ac:chgData name="Demaeght Gunnarr" userId="d4ee6c7f-5b58-43ba-8a8e-d2bde2eb291f" providerId="ADAL" clId="{5D62749E-E127-43B3-8AC6-51DF11B66DA8}" dt="2026-09-27T12:08:05.956" v="932" actId="9405"/>
+          <ac:inkMkLst>
+            <pc:docMk/>
+            <pc:sldMk cId="2265773176" sldId="261"/>
+            <ac:inkMk id="36" creationId="{BEFB30B9-58EF-4F75-E564-55196EB41B09}"/>
+          </ac:inkMkLst>
+        </pc:inkChg>
+        <pc:inkChg chg="add del">
+          <ac:chgData name="Demaeght Gunnarr" userId="d4ee6c7f-5b58-43ba-8a8e-d2bde2eb291f" providerId="ADAL" clId="{5D62749E-E127-43B3-8AC6-51DF11B66DA8}" dt="2026-09-27T12:09:54.745" v="953" actId="9405"/>
+          <ac:inkMkLst>
+            <pc:docMk/>
+            <pc:sldMk cId="2265773176" sldId="261"/>
+            <ac:inkMk id="37" creationId="{242DE827-336F-2452-595E-0DD27A57B79D}"/>
+          </ac:inkMkLst>
+        </pc:inkChg>
+        <pc:inkChg chg="add">
+          <ac:chgData name="Demaeght Gunnarr" userId="d4ee6c7f-5b58-43ba-8a8e-d2bde2eb291f" providerId="ADAL" clId="{5D62749E-E127-43B3-8AC6-51DF11B66DA8}" dt="2026-09-27T12:08:10.131" v="934"/>
+          <ac:inkMkLst>
+            <pc:docMk/>
+            <pc:sldMk cId="2265773176" sldId="261"/>
+            <ac:inkMk id="38" creationId="{BB9DE1A4-75F8-8726-1F1F-15911A07577F}"/>
+          </ac:inkMkLst>
+        </pc:inkChg>
+        <pc:inkChg chg="add del">
+          <ac:chgData name="Demaeght Gunnarr" userId="d4ee6c7f-5b58-43ba-8a8e-d2bde2eb291f" providerId="ADAL" clId="{5D62749E-E127-43B3-8AC6-51DF11B66DA8}" dt="2026-09-27T12:09:53.982" v="951" actId="9405"/>
+          <ac:inkMkLst>
+            <pc:docMk/>
+            <pc:sldMk cId="2265773176" sldId="261"/>
+            <ac:inkMk id="39" creationId="{55529E6D-B042-4316-C2C3-F6F4988545F1}"/>
+          </ac:inkMkLst>
+        </pc:inkChg>
+        <pc:inkChg chg="add">
+          <ac:chgData name="Demaeght Gunnarr" userId="d4ee6c7f-5b58-43ba-8a8e-d2bde2eb291f" providerId="ADAL" clId="{5D62749E-E127-43B3-8AC6-51DF11B66DA8}" dt="2026-09-27T12:08:15.957" v="936"/>
+          <ac:inkMkLst>
+            <pc:docMk/>
+            <pc:sldMk cId="2265773176" sldId="261"/>
+            <ac:inkMk id="40" creationId="{F8305827-6960-4D2D-24EF-A26C5011B55A}"/>
+          </ac:inkMkLst>
+        </pc:inkChg>
+        <pc:inkChg chg="add del">
+          <ac:chgData name="Demaeght Gunnarr" userId="d4ee6c7f-5b58-43ba-8a8e-d2bde2eb291f" providerId="ADAL" clId="{5D62749E-E127-43B3-8AC6-51DF11B66DA8}" dt="2026-09-27T12:09:53.108" v="949" actId="9405"/>
+          <ac:inkMkLst>
+            <pc:docMk/>
+            <pc:sldMk cId="2265773176" sldId="261"/>
+            <ac:inkMk id="41" creationId="{15B06D81-0095-2FE4-1A2D-D5D9016BF8DF}"/>
+          </ac:inkMkLst>
+        </pc:inkChg>
+        <pc:inkChg chg="add del mod">
+          <ac:chgData name="Demaeght Gunnarr" userId="d4ee6c7f-5b58-43ba-8a8e-d2bde2eb291f" providerId="ADAL" clId="{5D62749E-E127-43B3-8AC6-51DF11B66DA8}" dt="2026-09-27T12:09:52.575" v="947" actId="34122"/>
+          <ac:inkMkLst>
+            <pc:docMk/>
+            <pc:sldMk cId="2265773176" sldId="261"/>
+            <ac:inkMk id="42" creationId="{1C44AC1E-1ABD-5953-6373-F859ADB2DB17}"/>
+          </ac:inkMkLst>
+        </pc:inkChg>
+        <pc:inkChg chg="add del">
+          <ac:chgData name="Demaeght Gunnarr" userId="d4ee6c7f-5b58-43ba-8a8e-d2bde2eb291f" providerId="ADAL" clId="{5D62749E-E127-43B3-8AC6-51DF11B66DA8}" dt="2026-09-27T12:13:40.626" v="1022" actId="9405"/>
+          <ac:inkMkLst>
+            <pc:docMk/>
+            <pc:sldMk cId="2265773176" sldId="261"/>
+            <ac:inkMk id="46" creationId="{EC8216A6-2C87-D723-E6BB-4BB3575CF779}"/>
+          </ac:inkMkLst>
+        </pc:inkChg>
+        <pc:inkChg chg="add mod">
+          <ac:chgData name="Demaeght Gunnarr" userId="d4ee6c7f-5b58-43ba-8a8e-d2bde2eb291f" providerId="ADAL" clId="{5D62749E-E127-43B3-8AC6-51DF11B66DA8}" dt="2026-09-27T12:13:40.193" v="1020"/>
+          <ac:inkMkLst>
+            <pc:docMk/>
+            <pc:sldMk cId="2265773176" sldId="261"/>
+            <ac:inkMk id="47" creationId="{16380D78-56A4-8E39-DE06-16FA502DFE8C}"/>
+          </ac:inkMkLst>
+        </pc:inkChg>
+        <pc:inkChg chg="add del">
+          <ac:chgData name="Demaeght Gunnarr" userId="d4ee6c7f-5b58-43ba-8a8e-d2bde2eb291f" providerId="ADAL" clId="{5D62749E-E127-43B3-8AC6-51DF11B66DA8}" dt="2026-09-27T12:13:01.738" v="999" actId="9405"/>
+          <ac:inkMkLst>
+            <pc:docMk/>
+            <pc:sldMk cId="2265773176" sldId="261"/>
+            <ac:inkMk id="48" creationId="{1A3A48DA-BEA7-B584-A7D0-627901A013EB}"/>
+          </ac:inkMkLst>
+        </pc:inkChg>
+        <pc:inkChg chg="add del">
+          <ac:chgData name="Demaeght Gunnarr" userId="d4ee6c7f-5b58-43ba-8a8e-d2bde2eb291f" providerId="ADAL" clId="{5D62749E-E127-43B3-8AC6-51DF11B66DA8}" dt="2026-09-27T12:13:39.966" v="1019" actId="9405"/>
+          <ac:inkMkLst>
+            <pc:docMk/>
+            <pc:sldMk cId="2265773176" sldId="261"/>
+            <ac:inkMk id="49" creationId="{9916E930-9ACB-288A-B0F1-13AA837EBCBA}"/>
+          </ac:inkMkLst>
+        </pc:inkChg>
+        <pc:inkChg chg="add mod">
+          <ac:chgData name="Demaeght Gunnarr" userId="d4ee6c7f-5b58-43ba-8a8e-d2bde2eb291f" providerId="ADAL" clId="{5D62749E-E127-43B3-8AC6-51DF11B66DA8}" dt="2026-09-27T12:13:39.576" v="1017"/>
+          <ac:inkMkLst>
+            <pc:docMk/>
+            <pc:sldMk cId="2265773176" sldId="261"/>
+            <ac:inkMk id="50" creationId="{F43C773F-766F-A644-7C8C-68B789684906}"/>
+          </ac:inkMkLst>
+        </pc:inkChg>
+        <pc:inkChg chg="add del">
+          <ac:chgData name="Demaeght Gunnarr" userId="d4ee6c7f-5b58-43ba-8a8e-d2bde2eb291f" providerId="ADAL" clId="{5D62749E-E127-43B3-8AC6-51DF11B66DA8}" dt="2026-09-27T12:13:39.354" v="1016" actId="9405"/>
+          <ac:inkMkLst>
+            <pc:docMk/>
+            <pc:sldMk cId="2265773176" sldId="261"/>
+            <ac:inkMk id="51" creationId="{ACA7A438-FCDD-2D56-0B05-DE37D5E12B35}"/>
+          </ac:inkMkLst>
+        </pc:inkChg>
+        <pc:inkChg chg="add mod">
+          <ac:chgData name="Demaeght Gunnarr" userId="d4ee6c7f-5b58-43ba-8a8e-d2bde2eb291f" providerId="ADAL" clId="{5D62749E-E127-43B3-8AC6-51DF11B66DA8}" dt="2026-09-27T12:13:38.921" v="1014"/>
+          <ac:inkMkLst>
+            <pc:docMk/>
+            <pc:sldMk cId="2265773176" sldId="261"/>
+            <ac:inkMk id="52" creationId="{7F6042BB-8835-EA30-05AE-CB55F93A6964}"/>
+          </ac:inkMkLst>
+        </pc:inkChg>
+        <pc:inkChg chg="add del">
+          <ac:chgData name="Demaeght Gunnarr" userId="d4ee6c7f-5b58-43ba-8a8e-d2bde2eb291f" providerId="ADAL" clId="{5D62749E-E127-43B3-8AC6-51DF11B66DA8}" dt="2026-09-27T12:13:20.327" v="1007" actId="9405"/>
+          <ac:inkMkLst>
+            <pc:docMk/>
+            <pc:sldMk cId="2265773176" sldId="261"/>
+            <ac:inkMk id="53" creationId="{4A1F4842-4EC3-04C4-0A7D-2EF49922D64F}"/>
+          </ac:inkMkLst>
+        </pc:inkChg>
+        <pc:inkChg chg="add del">
+          <ac:chgData name="Demaeght Gunnarr" userId="d4ee6c7f-5b58-43ba-8a8e-d2bde2eb291f" providerId="ADAL" clId="{5D62749E-E127-43B3-8AC6-51DF11B66DA8}" dt="2026-09-27T12:13:38.684" v="1013" actId="9405"/>
+          <ac:inkMkLst>
+            <pc:docMk/>
+            <pc:sldMk cId="2265773176" sldId="261"/>
+            <ac:inkMk id="54" creationId="{62C3ABBA-365C-15DC-CE48-54E6390FBEE0}"/>
+          </ac:inkMkLst>
+        </pc:inkChg>
+        <pc:inkChg chg="add mod">
+          <ac:chgData name="Demaeght Gunnarr" userId="d4ee6c7f-5b58-43ba-8a8e-d2bde2eb291f" providerId="ADAL" clId="{5D62749E-E127-43B3-8AC6-51DF11B66DA8}" dt="2026-09-27T12:13:37.803" v="1011"/>
+          <ac:inkMkLst>
+            <pc:docMk/>
+            <pc:sldMk cId="2265773176" sldId="261"/>
+            <ac:inkMk id="55" creationId="{C80EC12A-5929-33AD-8BBB-7128A46EBE65}"/>
+          </ac:inkMkLst>
+        </pc:inkChg>
+        <pc:inkChg chg="add del">
+          <ac:chgData name="Demaeght Gunnarr" userId="d4ee6c7f-5b58-43ba-8a8e-d2bde2eb291f" providerId="ADAL" clId="{5D62749E-E127-43B3-8AC6-51DF11B66DA8}" dt="2026-09-27T12:13:59.743" v="1026"/>
+          <ac:inkMkLst>
+            <pc:docMk/>
+            <pc:sldMk cId="2265773176" sldId="261"/>
+            <ac:inkMk id="56" creationId="{EC8F877E-CC49-5B9F-5CB8-636FBA75411A}"/>
+          </ac:inkMkLst>
+        </pc:inkChg>
+        <pc:inkChg chg="add mod">
+          <ac:chgData name="Demaeght Gunnarr" userId="d4ee6c7f-5b58-43ba-8a8e-d2bde2eb291f" providerId="ADAL" clId="{5D62749E-E127-43B3-8AC6-51DF11B66DA8}" dt="2026-09-27T12:14:01.866" v="1027"/>
+          <ac:inkMkLst>
+            <pc:docMk/>
+            <pc:sldMk cId="2265773176" sldId="261"/>
+            <ac:inkMk id="57" creationId="{33E4A19E-6E14-ACBB-6413-098F33B2D04A}"/>
+          </ac:inkMkLst>
+        </pc:inkChg>
+        <pc:inkChg chg="add del">
+          <ac:chgData name="Demaeght Gunnarr" userId="d4ee6c7f-5b58-43ba-8a8e-d2bde2eb291f" providerId="ADAL" clId="{5D62749E-E127-43B3-8AC6-51DF11B66DA8}" dt="2026-09-27T12:14:05.583" v="1029"/>
+          <ac:inkMkLst>
+            <pc:docMk/>
+            <pc:sldMk cId="2265773176" sldId="261"/>
+            <ac:inkMk id="58" creationId="{8A864321-3F8E-6B97-672E-32F46415FA02}"/>
+          </ac:inkMkLst>
+        </pc:inkChg>
+        <pc:inkChg chg="add mod">
+          <ac:chgData name="Demaeght Gunnarr" userId="d4ee6c7f-5b58-43ba-8a8e-d2bde2eb291f" providerId="ADAL" clId="{5D62749E-E127-43B3-8AC6-51DF11B66DA8}" dt="2026-09-28T06:31:44.507" v="1139" actId="1076"/>
+          <ac:inkMkLst>
+            <pc:docMk/>
+            <pc:sldMk cId="2265773176" sldId="261"/>
+            <ac:inkMk id="59" creationId="{8A2DCFF6-2636-A5F9-FFD5-7C670C15560E}"/>
+          </ac:inkMkLst>
+        </pc:inkChg>
+        <pc:inkChg chg="add del">
+          <ac:chgData name="Demaeght Gunnarr" userId="d4ee6c7f-5b58-43ba-8a8e-d2bde2eb291f" providerId="ADAL" clId="{5D62749E-E127-43B3-8AC6-51DF11B66DA8}" dt="2026-09-27T12:14:15.407" v="1032"/>
+          <ac:inkMkLst>
+            <pc:docMk/>
+            <pc:sldMk cId="2265773176" sldId="261"/>
+            <ac:inkMk id="60" creationId="{2CC8557E-29DB-77D7-7885-D7B507FF58CF}"/>
+          </ac:inkMkLst>
+        </pc:inkChg>
+        <pc:inkChg chg="add mod">
+          <ac:chgData name="Demaeght Gunnarr" userId="d4ee6c7f-5b58-43ba-8a8e-d2bde2eb291f" providerId="ADAL" clId="{5D62749E-E127-43B3-8AC6-51DF11B66DA8}" dt="2026-09-27T12:14:18.371" v="1033"/>
+          <ac:inkMkLst>
+            <pc:docMk/>
+            <pc:sldMk cId="2265773176" sldId="261"/>
+            <ac:inkMk id="61" creationId="{A606BE07-B6C8-69A2-62A9-CBD6535792AC}"/>
+          </ac:inkMkLst>
+        </pc:inkChg>
+        <pc:inkChg chg="add del">
+          <ac:chgData name="Demaeght Gunnarr" userId="d4ee6c7f-5b58-43ba-8a8e-d2bde2eb291f" providerId="ADAL" clId="{5D62749E-E127-43B3-8AC6-51DF11B66DA8}" dt="2026-09-27T12:14:21.987" v="1035"/>
+          <ac:inkMkLst>
+            <pc:docMk/>
+            <pc:sldMk cId="2265773176" sldId="261"/>
+            <ac:inkMk id="62" creationId="{4D8680BE-861A-207F-5200-B4380298FEA8}"/>
+          </ac:inkMkLst>
+        </pc:inkChg>
+        <pc:inkChg chg="add">
+          <ac:chgData name="Demaeght Gunnarr" userId="d4ee6c7f-5b58-43ba-8a8e-d2bde2eb291f" providerId="ADAL" clId="{5D62749E-E127-43B3-8AC6-51DF11B66DA8}" dt="2026-09-27T12:14:21.987" v="1035"/>
+          <ac:inkMkLst>
+            <pc:docMk/>
+            <pc:sldMk cId="2265773176" sldId="261"/>
+            <ac:inkMk id="63" creationId="{24862A02-C6D0-AF08-F630-55F32910E469}"/>
+          </ac:inkMkLst>
+        </pc:inkChg>
+        <pc:inkChg chg="add del">
+          <ac:chgData name="Demaeght Gunnarr" userId="d4ee6c7f-5b58-43ba-8a8e-d2bde2eb291f" providerId="ADAL" clId="{5D62749E-E127-43B3-8AC6-51DF11B66DA8}" dt="2026-09-27T12:14:26.210" v="1037" actId="9405"/>
+          <ac:inkMkLst>
+            <pc:docMk/>
+            <pc:sldMk cId="2265773176" sldId="261"/>
+            <ac:inkMk id="64" creationId="{B5F260C2-8CFD-32CC-A5B1-01FC1AA801C5}"/>
+          </ac:inkMkLst>
+        </pc:inkChg>
+        <pc:cxnChg chg="add del mod">
+          <ac:chgData name="Demaeght Gunnarr" userId="d4ee6c7f-5b58-43ba-8a8e-d2bde2eb291f" providerId="ADAL" clId="{5D62749E-E127-43B3-8AC6-51DF11B66DA8}" dt="2026-09-27T12:16:52.105" v="1045" actId="11529"/>
+          <ac:cxnSpMkLst>
+            <pc:docMk/>
+            <pc:sldMk cId="2265773176" sldId="261"/>
+            <ac:cxnSpMk id="67" creationId="{0E9AAEE9-C4B7-A313-2192-65DCF5A3C2BF}"/>
+          </ac:cxnSpMkLst>
+        </pc:cxnChg>
       </pc:sldChg>
-      <pc:sldChg chg="new del">
-        <pc:chgData name="Demaeght Gunnarr" userId="d4ee6c7f-5b58-43ba-8a8e-d2bde2eb291f" providerId="ADAL" clId="{5D62749E-E127-43B3-8AC6-51DF11B66DA8}" dt="2026-09-10T08:04:13.734" v="640" actId="47"/>
-        <pc:sldMkLst>
-          <pc:docMk/>
-          <pc:sldMk cId="23809089" sldId="262"/>
-        </pc:sldMkLst>
-      </pc:sldChg>
-      <pc:sldChg chg="delSp modSp new mod modClrScheme chgLayout">
-        <pc:chgData name="Demaeght Gunnarr" userId="d4ee6c7f-5b58-43ba-8a8e-d2bde2eb291f" providerId="ADAL" clId="{5D62749E-E127-43B3-8AC6-51DF11B66DA8}" dt="2026-09-11T07:31:09.300" v="727" actId="26606"/>
+      <pc:sldChg chg="delSp modSp new mod modTransition modClrScheme chgLayout">
+        <pc:chgData name="Demaeght Gunnarr" userId="d4ee6c7f-5b58-43ba-8a8e-d2bde2eb291f" providerId="ADAL" clId="{5D62749E-E127-43B3-8AC6-51DF11B66DA8}" dt="2026-09-27T11:12:03.319" v="815"/>
         <pc:sldMkLst>
           <pc:docMk/>
           <pc:sldMk cId="3244582694" sldId="262"/>
         </pc:sldMkLst>
         <pc:spChg chg="mod">
-          <ac:chgData name="Demaeght Gunnarr" userId="d4ee6c7f-5b58-43ba-8a8e-d2bde2eb291f" providerId="ADAL" clId="{5D62749E-E127-43B3-8AC6-51DF11B66DA8}" dt="2026-09-11T07:31:09.300" v="727" actId="26606"/>
+          <ac:chgData name="Demaeght Gunnarr" userId="d4ee6c7f-5b58-43ba-8a8e-d2bde2eb291f" providerId="ADAL" clId="{5D62749E-E127-43B3-8AC6-51DF11B66DA8}" dt="2026-09-27T11:12:03.319" v="815"/>
           <ac:spMkLst>
             <pc:docMk/>
             <pc:sldMk cId="3244582694" sldId="262"/>
             <ac:spMk id="2" creationId="{F5053C1F-8F75-1C45-DE95-75E0DFC03ACF}"/>
           </ac:spMkLst>
         </pc:spChg>
+      </pc:sldChg>
+      <pc:sldChg chg="addSp delSp modSp new mod modTransition modClrScheme chgLayout">
+        <pc:chgData name="Demaeght Gunnarr" userId="d4ee6c7f-5b58-43ba-8a8e-d2bde2eb291f" providerId="ADAL" clId="{5D62749E-E127-43B3-8AC6-51DF11B66DA8}" dt="2026-09-28T07:03:19.745" v="1150" actId="1076"/>
+        <pc:sldMkLst>
+          <pc:docMk/>
+          <pc:sldMk cId="1678947236" sldId="263"/>
+        </pc:sldMkLst>
         <pc:spChg chg="del">
-          <ac:chgData name="Demaeght Gunnarr" userId="d4ee6c7f-5b58-43ba-8a8e-d2bde2eb291f" providerId="ADAL" clId="{5D62749E-E127-43B3-8AC6-51DF11B66DA8}" dt="2026-09-11T07:30:18.294" v="720" actId="478"/>
+          <ac:chgData name="Demaeght Gunnarr" userId="d4ee6c7f-5b58-43ba-8a8e-d2bde2eb291f" providerId="ADAL" clId="{5D62749E-E127-43B3-8AC6-51DF11B66DA8}" dt="2026-09-27T12:22:22.368" v="1057" actId="26606"/>
           <ac:spMkLst>
             <pc:docMk/>
-            <pc:sldMk cId="3244582694" sldId="262"/>
-            <ac:spMk id="3" creationId="{57E6A7E7-95FD-2D7E-26AB-B4563988D76A}"/>
+            <pc:sldMk cId="1678947236" sldId="263"/>
+            <ac:spMk id="2" creationId="{AE4C5D4B-E0CC-0C06-D4B1-17B56E5920BD}"/>
           </ac:spMkLst>
         </pc:spChg>
         <pc:spChg chg="del">
-          <ac:chgData name="Demaeght Gunnarr" userId="d4ee6c7f-5b58-43ba-8a8e-d2bde2eb291f" providerId="ADAL" clId="{5D62749E-E127-43B3-8AC6-51DF11B66DA8}" dt="2026-09-11T07:30:14.614" v="719" actId="478"/>
+          <ac:chgData name="Demaeght Gunnarr" userId="d4ee6c7f-5b58-43ba-8a8e-d2bde2eb291f" providerId="ADAL" clId="{5D62749E-E127-43B3-8AC6-51DF11B66DA8}" dt="2026-09-27T12:22:22.368" v="1057" actId="26606"/>
           <ac:spMkLst>
             <pc:docMk/>
-            <pc:sldMk cId="3244582694" sldId="262"/>
-            <ac:spMk id="4" creationId="{4A2A8478-1CFA-D198-DCC0-C041238213A3}"/>
+            <pc:sldMk cId="1678947236" sldId="263"/>
+            <ac:spMk id="3" creationId="{01EF620C-8E57-3E72-DE78-701638477315}"/>
           </ac:spMkLst>
         </pc:spChg>
-      </pc:sldChg>
-      <pc:sldChg chg="modSp new del mod">
-        <pc:chgData name="Demaeght Gunnarr" userId="d4ee6c7f-5b58-43ba-8a8e-d2bde2eb291f" providerId="ADAL" clId="{5D62749E-E127-43B3-8AC6-51DF11B66DA8}" dt="2026-09-11T07:29:54.969" v="694" actId="47"/>
-        <pc:sldMkLst>
-          <pc:docMk/>
-          <pc:sldMk cId="3402220788" sldId="262"/>
-        </pc:sldMkLst>
-        <pc:spChg chg="mod">
-          <ac:chgData name="Demaeght Gunnarr" userId="d4ee6c7f-5b58-43ba-8a8e-d2bde2eb291f" providerId="ADAL" clId="{5D62749E-E127-43B3-8AC6-51DF11B66DA8}" dt="2026-09-11T07:27:40.487" v="693" actId="20577"/>
+        <pc:spChg chg="add mod">
+          <ac:chgData name="Demaeght Gunnarr" userId="d4ee6c7f-5b58-43ba-8a8e-d2bde2eb291f" providerId="ADAL" clId="{5D62749E-E127-43B3-8AC6-51DF11B66DA8}" dt="2026-09-27T12:22:57.032" v="1107" actId="20577"/>
           <ac:spMkLst>
             <pc:docMk/>
-            <pc:sldMk cId="3402220788" sldId="262"/>
-            <ac:spMk id="2" creationId="{9EDEFB32-6327-BE37-9FA8-D4256E531E89}"/>
+            <pc:sldMk cId="1678947236" sldId="263"/>
+            <ac:spMk id="8" creationId="{95ADDD13-FD0C-90F5-F409-31083954BC9A}"/>
           </ac:spMkLst>
         </pc:spChg>
+        <pc:spChg chg="add mod">
+          <ac:chgData name="Demaeght Gunnarr" userId="d4ee6c7f-5b58-43ba-8a8e-d2bde2eb291f" providerId="ADAL" clId="{5D62749E-E127-43B3-8AC6-51DF11B66DA8}" dt="2026-09-28T06:59:35.053" v="1140"/>
+          <ac:spMkLst>
+            <pc:docMk/>
+            <pc:sldMk cId="1678947236" sldId="263"/>
+            <ac:spMk id="10" creationId="{6A1E5F6D-959C-A809-763F-56A5C5A633D2}"/>
+          </ac:spMkLst>
+        </pc:spChg>
+        <pc:picChg chg="add mod">
+          <ac:chgData name="Demaeght Gunnarr" userId="d4ee6c7f-5b58-43ba-8a8e-d2bde2eb291f" providerId="ADAL" clId="{5D62749E-E127-43B3-8AC6-51DF11B66DA8}" dt="2026-09-28T07:03:19.745" v="1150" actId="1076"/>
+          <ac:picMkLst>
+            <pc:docMk/>
+            <pc:sldMk cId="1678947236" sldId="263"/>
+            <ac:picMk id="3" creationId="{29B940A6-598D-5E78-EBA0-48A4A0F2A7D2}"/>
+          </ac:picMkLst>
+        </pc:picChg>
+        <pc:picChg chg="add del mod">
+          <ac:chgData name="Demaeght Gunnarr" userId="d4ee6c7f-5b58-43ba-8a8e-d2bde2eb291f" providerId="ADAL" clId="{5D62749E-E127-43B3-8AC6-51DF11B66DA8}" dt="2026-09-28T07:00:13.172" v="1143" actId="478"/>
+          <ac:picMkLst>
+            <pc:docMk/>
+            <pc:sldMk cId="1678947236" sldId="263"/>
+            <ac:picMk id="4" creationId="{6EFE201D-AA46-2D78-373C-61B4FCEF98E0}"/>
+          </ac:picMkLst>
+        </pc:picChg>
       </pc:sldChg>
     </pc:docChg>
   </pc:docChgLst>
 </pc:chgInfo>
 </file>
 
-<file path=ppt/diagrams/colors1.xml><?xml version="1.0" encoding="utf-8"?>
-<dgm:colorsDef xmlns:dgm="http://schemas.openxmlformats.org/drawingml/2006/diagram" xmlns:a="http://schemas.openxmlformats.org/drawingml/2006/main" uniqueId="urn:microsoft.com/office/officeart/2005/8/colors/accent1_2#7">
-  <dgm:title val=""/>
-  <dgm:desc val=""/>
-  <dgm:catLst>
-    <dgm:cat type="accent1" pri="11200"/>
-  </dgm:catLst>
-  <dgm:styleLbl name="node0">
-    <dgm:fillClrLst meth="repeat">
-      <a:schemeClr val="accent1"/>
-    </dgm:fillClrLst>
-    <dgm:linClrLst meth="repeat">
-      <a:schemeClr val="lt1"/>
-    </dgm:linClrLst>
-    <dgm:effectClrLst/>
-    <dgm:txLinClrLst/>
-    <dgm:txFillClrLst/>
-    <dgm:txEffectClrLst/>
-  </dgm:styleLbl>
-  <dgm:styleLbl name="alignNode1">
-    <dgm:fillClrLst meth="repeat">
-      <a:schemeClr val="accent1"/>
-    </dgm:fillClrLst>
-    <dgm:linClrLst meth="repeat">
-      <a:schemeClr val="accent1"/>
-    </dgm:linClrLst>
-    <dgm:effectClrLst/>
-    <dgm:txLinClrLst/>
-    <dgm:txFillClrLst/>
-    <dgm:txEffectClrLst/>
-  </dgm:styleLbl>
-  <dgm:styleLbl name="node1">
-    <dgm:fillClrLst meth="repeat">
-      <a:schemeClr val="accent1"/>
-    </dgm:fillClrLst>
-    <dgm:linClrLst meth="repeat">
-      <a:schemeClr val="lt1"/>
-    </dgm:linClrLst>
-    <dgm:effectClrLst/>
-    <dgm:txLinClrLst/>
-    <dgm:txFillClrLst/>
-    <dgm:txEffectClrLst/>
-  </dgm:styleLbl>
-  <dgm:styleLbl name="lnNode1">
-    <dgm:fillClrLst meth="repeat">
-      <a:schemeClr val="accent1"/>
-    </dgm:fillClrLst>
-    <dgm:linClrLst meth="repeat">
-      <a:schemeClr val="lt1"/>
-    </dgm:linClrLst>
-    <dgm:effectClrLst/>
-    <dgm:txLinClrLst/>
-    <dgm:txFillClrLst/>
-    <dgm:txEffectClrLst/>
-  </dgm:styleLbl>
-  <dgm:styleLbl name="vennNode1">
-    <dgm:fillClrLst meth="repeat">
-      <a:schemeClr val="accent1">
-        <a:alpha val="50000"/>
-      </a:schemeClr>
-    </dgm:fillClrLst>
-    <dgm:linClrLst meth="repeat">
-      <a:schemeClr val="lt1"/>
-    </dgm:linClrLst>
-    <dgm:effectClrLst/>
-    <dgm:txLinClrLst/>
-    <dgm:txFillClrLst/>
-    <dgm:txEffectClrLst/>
-  </dgm:styleLbl>
-  <dgm:styleLbl name="node2">
-    <dgm:fillClrLst meth="repeat">
-      <a:schemeClr val="accent1"/>
-    </dgm:fillClrLst>
-    <dgm:linClrLst meth="repeat">
-      <a:schemeClr val="lt1"/>
-    </dgm:linClrLst>
-    <dgm:effectClrLst/>
-    <dgm:txLinClrLst/>
-    <dgm:txFillClrLst/>
-    <dgm:txEffectClrLst/>
-  </dgm:styleLbl>
-  <dgm:styleLbl name="node3">
-    <dgm:fillClrLst meth="repeat">
-      <a:schemeClr val="accent1"/>
-    </dgm:fillClrLst>
-    <dgm:linClrLst meth="repeat">
-      <a:schemeClr val="lt1"/>
-    </dgm:linClrLst>
-    <dgm:effectClrLst/>
-    <dgm:txLinClrLst/>
-    <dgm:txFillClrLst/>
-    <dgm:txEffectClrLst/>
-  </dgm:styleLbl>
-  <dgm:styleLbl name="node4">
-    <dgm:fillClrLst meth="repeat">
-      <a:schemeClr val="accent1"/>
-    </dgm:fillClrLst>
-    <dgm:linClrLst meth="repeat">
-      <a:schemeClr val="lt1"/>
-    </dgm:linClrLst>
-    <dgm:effectClrLst/>
-    <dgm:txLinClrLst/>
-    <dgm:txFillClrLst/>
-    <dgm:txEffectClrLst/>
-  </dgm:styleLbl>
-  <dgm:styleLbl name="fgImgPlace1">
-    <dgm:fillClrLst meth="repeat">
-      <a:schemeClr val="accent1">
-        <a:tint val="50000"/>
-      </a:schemeClr>
-    </dgm:fillClrLst>
-    <dgm:linClrLst meth="repeat">
-      <a:schemeClr val="lt1"/>
-    </dgm:linClrLst>
-    <dgm:effectClrLst/>
-    <dgm:txLinClrLst/>
-    <dgm:txFillClrLst meth="repeat">
-      <a:schemeClr val="lt1"/>
-    </dgm:txFillClrLst>
-    <dgm:txEffectClrLst/>
-  </dgm:styleLbl>
-  <dgm:styleLbl name="alignImgPlace1">
-    <dgm:fillClrLst meth="repeat">
-      <a:schemeClr val="accent1">
-        <a:tint val="50000"/>
-      </a:schemeClr>
-    </dgm:fillClrLst>
-    <dgm:linClrLst meth="repeat">
-      <a:schemeClr val="lt1"/>
-    </dgm:linClrLst>
-    <dgm:effectClrLst/>
-    <dgm:txLinClrLst/>
-    <dgm:txFillClrLst meth="repeat">
-      <a:schemeClr val="lt1"/>
-    </dgm:txFillClrLst>
-    <dgm:txEffectClrLst/>
-  </dgm:styleLbl>
-  <dgm:styleLbl name="bgImgPlace1">
-    <dgm:fillClrLst meth="repeat">
-      <a:schemeClr val="accent1">
-        <a:tint val="50000"/>
-      </a:schemeClr>
-    </dgm:fillClrLst>
-    <dgm:linClrLst meth="repeat">
-      <a:schemeClr val="lt1"/>
-    </dgm:linClrLst>
-    <dgm:effectClrLst/>
-    <dgm:txLinClrLst/>
-    <dgm:txFillClrLst meth="repeat">
-      <a:schemeClr val="lt1"/>
-    </dgm:txFillClrLst>
-    <dgm:txEffectClrLst/>
-  </dgm:styleLbl>
-  <dgm:styleLbl name="sibTrans2D1">
-    <dgm:fillClrLst meth="repeat">
-      <a:schemeClr val="accent1">
-        <a:tint val="60000"/>
-      </a:schemeClr>
-    </dgm:fillClrLst>
-    <dgm:linClrLst meth="repeat">
-      <a:schemeClr val="accent1">
-        <a:tint val="60000"/>
-      </a:schemeClr>
-    </dgm:linClrLst>
-    <dgm:effectClrLst/>
-    <dgm:txLinClrLst/>
-    <dgm:txFillClrLst/>
-    <dgm:txEffectClrLst/>
-  </dgm:styleLbl>
-  <dgm:styleLbl name="fgSibTrans2D1">
-    <dgm:fillClrLst meth="repeat">
-      <a:schemeClr val="accent1">
-        <a:tint val="60000"/>
-      </a:schemeClr>
-    </dgm:fillClrLst>
-    <dgm:linClrLst meth="repeat">
-      <a:schemeClr val="accent1">
-        <a:tint val="60000"/>
-      </a:schemeClr>
-    </dgm:linClrLst>
-    <dgm:effectClrLst/>
-    <dgm:txLinClrLst/>
-    <dgm:txFillClrLst/>
-    <dgm:txEffectClrLst/>
-  </dgm:styleLbl>
-  <dgm:styleLbl name="bgSibTrans2D1">
-    <dgm:fillClrLst meth="repeat">
-      <a:schemeClr val="accent1">
-        <a:tint val="60000"/>
-      </a:schemeClr>
-    </dgm:fillClrLst>
-    <dgm:linClrLst meth="repeat">
-      <a:schemeClr val="accent1">
-        <a:tint val="60000"/>
-      </a:schemeClr>
-    </dgm:linClrLst>
-    <dgm:effectClrLst/>
-    <dgm:txLinClrLst/>
-    <dgm:txFillClrLst/>
-    <dgm:txEffectClrLst/>
-  </dgm:styleLbl>
-  <dgm:styleLbl name="sibTrans1D1">
-    <dgm:fillClrLst meth="repeat">
-      <a:schemeClr val="accent1"/>
-    </dgm:fillClrLst>
-    <dgm:linClrLst meth="repeat">
-      <a:schemeClr val="accent1"/>
-    </dgm:linClrLst>
-    <dgm:effectClrLst/>
-    <dgm:txLinClrLst/>
-    <dgm:txFillClrLst meth="repeat">
-      <a:schemeClr val="tx1"/>
-    </dgm:txFillClrLst>
-    <dgm:txEffectClrLst/>
-  </dgm:styleLbl>
-  <dgm:styleLbl name="callout">
-    <dgm:fillClrLst meth="repeat">
-      <a:schemeClr val="accent1"/>
-    </dgm:fillClrLst>
-    <dgm:linClrLst meth="repeat">
-      <a:schemeClr val="accent1">
-        <a:tint val="50000"/>
-      </a:schemeClr>
-    </dgm:linClrLst>
-    <dgm:effectClrLst/>
-    <dgm:txLinClrLst/>
-    <dgm:txFillClrLst meth="repeat">
-      <a:schemeClr val="tx1"/>
-    </dgm:txFillClrLst>
-    <dgm:txEffectClrLst/>
-  </dgm:styleLbl>
-  <dgm:styleLbl name="asst0">
-    <dgm:fillClrLst meth="repeat">
-      <a:schemeClr val="accent1"/>
-    </dgm:fillClrLst>
-    <dgm:linClrLst meth="repeat">
-      <a:schemeClr val="lt1"/>
-    </dgm:linClrLst>
-    <dgm:effectClrLst/>
-    <dgm:txLinClrLst/>
-    <dgm:txFillClrLst/>
-    <dgm:txEffectClrLst/>
-  </dgm:styleLbl>
-  <dgm:styleLbl name="asst1">
-    <dgm:fillClrLst meth="repeat">
-      <a:schemeClr val="accent1"/>
-    </dgm:fillClrLst>
-    <dgm:linClrLst meth="repeat">
-      <a:schemeClr val="lt1"/>
-    </dgm:linClrLst>
-    <dgm:effectClrLst/>
-    <dgm:txLinClrLst/>
-    <dgm:txFillClrLst/>
-    <dgm:txEffectClrLst/>
-  </dgm:styleLbl>
-  <dgm:styleLbl name="asst2">
-    <dgm:fillClrLst meth="repeat">
-      <a:schemeClr val="accent1"/>
-    </dgm:fillClrLst>
-    <dgm:linClrLst meth="repeat">
-      <a:schemeClr val="lt1"/>
-    </dgm:linClrLst>
-    <dgm:effectClrLst/>
-    <dgm:txLinClrLst/>
-    <dgm:txFillClrLst/>
-    <dgm:txEffectClrLst/>
-  </dgm:styleLbl>
-  <dgm:styleLbl name="asst3">
-    <dgm:fillClrLst meth="repeat">
-      <a:schemeClr val="accent1"/>
-    </dgm:fillClrLst>
-    <dgm:linClrLst meth="repeat">
-      <a:schemeClr val="lt1"/>
-    </dgm:linClrLst>
-    <dgm:effectClrLst/>
-    <dgm:txLinClrLst/>
-    <dgm:txFillClrLst/>
-    <dgm:txEffectClrLst/>
-  </dgm:styleLbl>
-  <dgm:styleLbl name="asst4">
-    <dgm:fillClrLst meth="repeat">
-      <a:schemeClr val="accent1"/>
-    </dgm:fillClrLst>
-    <dgm:linClrLst meth="repeat">
-      <a:schemeClr val="lt1"/>
-    </dgm:linClrLst>
-    <dgm:effectClrLst/>
-    <dgm:txLinClrLst/>
-    <dgm:txFillClrLst/>
-    <dgm:txEffectClrLst/>
-  </dgm:styleLbl>
-  <dgm:styleLbl name="parChTrans2D1">
-    <dgm:fillClrLst meth="repeat">
-      <a:schemeClr val="accent1">
-        <a:tint val="60000"/>
-      </a:schemeClr>
-    </dgm:fillClrLst>
-    <dgm:linClrLst meth="repeat">
-      <a:schemeClr val="accent1">
-        <a:tint val="60000"/>
-      </a:schemeClr>
-    </dgm:linClrLst>
-    <dgm:effectClrLst/>
-    <dgm:txLinClrLst/>
-    <dgm:txFillClrLst meth="repeat">
-      <a:schemeClr val="lt1"/>
-    </dgm:txFillClrLst>
-    <dgm:txEffectClrLst/>
-  </dgm:styleLbl>
-  <dgm:styleLbl name="parChTrans2D2">
-    <dgm:fillClrLst meth="repeat">
-      <a:schemeClr val="accent1"/>
-    </dgm:fillClrLst>
-    <dgm:linClrLst meth="repeat">
-      <a:schemeClr val="accent1"/>
-    </dgm:linClrLst>
-    <dgm:effectClrLst/>
-    <dgm:txLinClrLst/>
-    <dgm:txFillClrLst meth="repeat">
-      <a:schemeClr val="lt1"/>
-    </dgm:txFillClrLst>
-    <dgm:txEffectClrLst/>
-  </dgm:styleLbl>
-  <dgm:styleLbl name="parChTrans2D3">
-    <dgm:fillClrLst meth="repeat">
-      <a:schemeClr val="accent1"/>
-    </dgm:fillClrLst>
-    <dgm:linClrLst meth="repeat">
-      <a:schemeClr val="accent1"/>
-    </dgm:linClrLst>
-    <dgm:effectClrLst/>
-    <dgm:txLinClrLst/>
-    <dgm:txFillClrLst meth="repeat">
-      <a:schemeClr val="lt1"/>
-    </dgm:txFillClrLst>
-    <dgm:txEffectClrLst/>
-  </dgm:styleLbl>
-  <dgm:styleLbl name="parChTrans2D4">
-    <dgm:fillClrLst meth="repeat">
-      <a:schemeClr val="accent1"/>
-    </dgm:fillClrLst>
-    <dgm:linClrLst meth="repeat">
-      <a:schemeClr val="accent1"/>
-    </dgm:linClrLst>
-    <dgm:effectClrLst/>
-    <dgm:txLinClrLst/>
-    <dgm:txFillClrLst meth="repeat">
-      <a:schemeClr val="lt1"/>
-    </dgm:txFillClrLst>
-    <dgm:txEffectClrLst/>
-  </dgm:styleLbl>
-  <dgm:styleLbl name="parChTrans1D1">
-    <dgm:fillClrLst meth="repeat">
-      <a:schemeClr val="accent1"/>
-    </dgm:fillClrLst>
-    <dgm:linClrLst meth="repeat">
-      <a:schemeClr val="accent1">
-        <a:shade val="60000"/>
-      </a:schemeClr>
-    </dgm:linClrLst>
-    <dgm:effectClrLst/>
-    <dgm:txLinClrLst/>
-    <dgm:txFillClrLst meth="repeat">
-      <a:schemeClr val="tx1"/>
-    </dgm:txFillClrLst>
-    <dgm:txEffectClrLst/>
-  </dgm:styleLbl>
-  <dgm:styleLbl name="parChTrans1D2">
-    <dgm:fillClrLst meth="repeat">
-      <a:schemeClr val="accent1"/>
-    </dgm:fillClrLst>
-    <dgm:linClrLst meth="repeat">
-      <a:schemeClr val="accent1">
-        <a:shade val="60000"/>
-      </a:schemeClr>
-    </dgm:linClrLst>
-    <dgm:effectClrLst/>
-    <dgm:txLinClrLst/>
-    <dgm:txFillClrLst meth="repeat">
-      <a:schemeClr val="tx1"/>
-    </dgm:txFillClrLst>
-    <dgm:txEffectClrLst/>
-  </dgm:styleLbl>
-  <dgm:styleLbl name="parChTrans1D3">
-    <dgm:fillClrLst meth="repeat">
-      <a:schemeClr val="accent1"/>
-    </dgm:fillClrLst>
-    <dgm:linClrLst meth="repeat">
-      <a:schemeClr val="accent1">
-        <a:shade val="80000"/>
-      </a:schemeClr>
-    </dgm:linClrLst>
-    <dgm:effectClrLst/>
-    <dgm:txLinClrLst/>
-    <dgm:txFillClrLst meth="repeat">
-      <a:schemeClr val="tx1"/>
-    </dgm:txFillClrLst>
-    <dgm:txEffectClrLst/>
-  </dgm:styleLbl>
-  <dgm:styleLbl name="parChTrans1D4">
-    <dgm:fillClrLst meth="repeat">
-      <a:schemeClr val="accent1"/>
-    </dgm:fillClrLst>
-    <dgm:linClrLst meth="repeat">
-      <a:schemeClr val="accent1">
-        <a:shade val="80000"/>
-      </a:schemeClr>
-    </dgm:linClrLst>
-    <dgm:effectClrLst/>
-    <dgm:txLinClrLst/>
-    <dgm:txFillClrLst meth="repeat">
-      <a:schemeClr val="tx1"/>
-    </dgm:txFillClrLst>
-    <dgm:txEffectClrLst/>
-  </dgm:styleLbl>
-  <dgm:styleLbl name="fgAcc1">
-    <dgm:fillClrLst meth="repeat">
-      <a:schemeClr val="lt1">
-        <a:alpha val="90000"/>
-      </a:schemeClr>
-    </dgm:fillClrLst>
-    <dgm:linClrLst meth="repeat">
-      <a:schemeClr val="accent1"/>
-    </dgm:linClrLst>
-    <dgm:effectClrLst/>
-    <dgm:txLinClrLst/>
-    <dgm:txFillClrLst meth="repeat">
-      <a:schemeClr val="dk1"/>
-    </dgm:txFillClrLst>
-    <dgm:txEffectClrLst/>
-  </dgm:styleLbl>
-  <dgm:styleLbl name="conFgAcc1">
-    <dgm:fillClrLst meth="repeat">
-      <a:schemeClr val="lt1">
-        <a:alpha val="90000"/>
-      </a:schemeClr>
-    </dgm:fillClrLst>
-    <dgm:linClrLst meth="repeat">
-      <a:schemeClr val="accent1"/>
-    </dgm:linClrLst>
-    <dgm:effectClrLst/>
-    <dgm:txLinClrLst/>
-    <dgm:txFillClrLst meth="repeat">
-      <a:schemeClr val="dk1"/>
-    </dgm:txFillClrLst>
-    <dgm:txEffectClrLst/>
-  </dgm:styleLbl>
-  <dgm:styleLbl name="alignAcc1">
-    <dgm:fillClrLst meth="repeat">
-      <a:schemeClr val="lt1">
-        <a:alpha val="90000"/>
-      </a:schemeClr>
-    </dgm:fillClrLst>
-    <dgm:linClrLst meth="repeat">
-      <a:schemeClr val="accent1"/>
-    </dgm:linClrLst>
-    <dgm:effectClrLst/>
-    <dgm:txLinClrLst/>
-    <dgm:txFillClrLst meth="repeat">
-      <a:schemeClr val="dk1"/>
-    </dgm:txFillClrLst>
-    <dgm:txEffectClrLst/>
-  </dgm:styleLbl>
-  <dgm:styleLbl name="trAlignAcc1">
-    <dgm:fillClrLst meth="repeat">
-      <a:schemeClr val="lt1">
-        <a:alpha val="40000"/>
-      </a:schemeClr>
-    </dgm:fillClrLst>
-    <dgm:linClrLst meth="repeat">
-      <a:schemeClr val="accent1"/>
-    </dgm:linClrLst>
-    <dgm:effectClrLst/>
-    <dgm:txLinClrLst/>
-    <dgm:txFillClrLst meth="repeat">
-      <a:schemeClr val="dk1"/>
-    </dgm:txFillClrLst>
-    <dgm:txEffectClrLst/>
-  </dgm:styleLbl>
-  <dgm:styleLbl name="bgAcc1">
-    <dgm:fillClrLst meth="repeat">
-      <a:schemeClr val="lt1">
-        <a:alpha val="90000"/>
-      </a:schemeClr>
-    </dgm:fillClrLst>
-    <dgm:linClrLst meth="repeat">
-      <a:schemeClr val="accent1"/>
-    </dgm:linClrLst>
-    <dgm:effectClrLst/>
-    <dgm:txLinClrLst/>
-    <dgm:txFillClrLst meth="repeat">
-      <a:schemeClr val="dk1"/>
-    </dgm:txFillClrLst>
-    <dgm:txEffectClrLst/>
-  </dgm:styleLbl>
-  <dgm:styleLbl name="solidFgAcc1">
-    <dgm:fillClrLst meth="repeat">
-      <a:schemeClr val="lt1"/>
-    </dgm:fillClrLst>
-    <dgm:linClrLst meth="repeat">
-      <a:schemeClr val="accent1"/>
-    </dgm:linClrLst>
-    <dgm:effectClrLst/>
-    <dgm:txLinClrLst/>
-    <dgm:txFillClrLst meth="repeat">
-      <a:schemeClr val="dk1"/>
-    </dgm:txFillClrLst>
-    <dgm:txEffectClrLst/>
-  </dgm:styleLbl>
-  <dgm:styleLbl name="solidAlignAcc1">
-    <dgm:fillClrLst meth="repeat">
-      <a:schemeClr val="lt1"/>
-    </dgm:fillClrLst>
-    <dgm:linClrLst meth="repeat">
-      <a:schemeClr val="accent1"/>
-    </dgm:linClrLst>
-    <dgm:effectClrLst/>
-    <dgm:txLinClrLst/>
-    <dgm:txFillClrLst meth="repeat">
-      <a:schemeClr val="dk1"/>
-    </dgm:txFillClrLst>
-    <dgm:txEffectClrLst/>
-  </dgm:styleLbl>
-  <dgm:styleLbl name="solidBgAcc1">
-    <dgm:fillClrLst meth="repeat">
-      <a:schemeClr val="lt1"/>
-    </dgm:fillClrLst>
-    <dgm:linClrLst meth="repeat">
-      <a:schemeClr val="accent1"/>
-    </dgm:linClrLst>
-    <dgm:effectClrLst/>
-    <dgm:txLinClrLst/>
-    <dgm:txFillClrLst meth="repeat">
-      <a:schemeClr val="dk1"/>
-    </dgm:txFillClrLst>
-    <dgm:txEffectClrLst/>
-  </dgm:styleLbl>
-  <dgm:styleLbl name="fgAccFollowNode1">
-    <dgm:fillClrLst meth="repeat">
-      <a:schemeClr val="accent1">
-        <a:alpha val="90000"/>
-        <a:tint val="40000"/>
-      </a:schemeClr>
-    </dgm:fillClrLst>
-    <dgm:linClrLst meth="repeat">
-      <a:schemeClr val="accent1">
-        <a:alpha val="90000"/>
-        <a:tint val="40000"/>
-      </a:schemeClr>
-    </dgm:linClrLst>
-    <dgm:effectClrLst/>
-    <dgm:txLinClrLst/>
-    <dgm:txFillClrLst meth="repeat">
-      <a:schemeClr val="dk1"/>
-    </dgm:txFillClrLst>
-    <dgm:txEffectClrLst/>
-  </dgm:styleLbl>
-  <dgm:styleLbl name="alignAccFollowNode1">
-    <dgm:fillClrLst meth="repeat">
-      <a:schemeClr val="accent1">
-        <a:alpha val="90000"/>
-        <a:tint val="40000"/>
-      </a:schemeClr>
-    </dgm:fillClrLst>
-    <dgm:linClrLst meth="repeat">
-      <a:schemeClr val="accent1">
-        <a:alpha val="90000"/>
-        <a:tint val="40000"/>
-      </a:schemeClr>
-    </dgm:linClrLst>
-    <dgm:effectClrLst/>
-    <dgm:txLinClrLst/>
-    <dgm:txFillClrLst meth="repeat">
-      <a:schemeClr val="dk1"/>
-    </dgm:txFillClrLst>
-    <dgm:txEffectClrLst/>
-  </dgm:styleLbl>
-  <dgm:styleLbl name="bgAccFollowNode1">
-    <dgm:fillClrLst meth="repeat">
-      <a:schemeClr val="accent1">
-        <a:alpha val="90000"/>
-        <a:tint val="40000"/>
-      </a:schemeClr>
-    </dgm:fillClrLst>
-    <dgm:linClrLst meth="repeat">
-      <a:schemeClr val="accent1">
-        <a:alpha val="90000"/>
-        <a:tint val="40000"/>
-      </a:schemeClr>
-    </dgm:linClrLst>
-    <dgm:effectClrLst/>
-    <dgm:txLinClrLst/>
-    <dgm:txFillClrLst meth="repeat">
-      <a:schemeClr val="dk1"/>
-    </dgm:txFillClrLst>
-    <dgm:txEffectClrLst/>
-  </dgm:styleLbl>
-  <dgm:styleLbl name="fgAcc0">
-    <dgm:fillClrLst meth="repeat">
-      <a:schemeClr val="lt1">
-        <a:alpha val="90000"/>
-      </a:schemeClr>
-    </dgm:fillClrLst>
-    <dgm:linClrLst meth="repeat">
-      <a:schemeClr val="accent1"/>
-    </dgm:linClrLst>
-    <dgm:effectClrLst/>
-    <dgm:txLinClrLst/>
-    <dgm:txFillClrLst meth="repeat">
-      <a:schemeClr val="dk1"/>
-    </dgm:txFillClrLst>
-    <dgm:txEffectClrLst/>
-  </dgm:styleLbl>
-  <dgm:styleLbl name="fgAcc2">
-    <dgm:fillClrLst meth="repeat">
-      <a:schemeClr val="lt1">
-        <a:alpha val="90000"/>
-      </a:schemeClr>
-    </dgm:fillClrLst>
-    <dgm:linClrLst meth="repeat">
-      <a:schemeClr val="accent1"/>
-    </dgm:linClrLst>
-    <dgm:effectClrLst/>
-    <dgm:txLinClrLst/>
-    <dgm:txFillClrLst meth="repeat">
-      <a:schemeClr val="dk1"/>
-    </dgm:txFillClrLst>
-    <dgm:txEffectClrLst/>
-  </dgm:styleLbl>
-  <dgm:styleLbl name="fgAcc3">
-    <dgm:fillClrLst meth="repeat">
-      <a:schemeClr val="lt1">
-        <a:alpha val="90000"/>
-      </a:schemeClr>
-    </dgm:fillClrLst>
-    <dgm:linClrLst meth="repeat">
-      <a:schemeClr val="accent1"/>
-    </dgm:linClrLst>
-    <dgm:effectClrLst/>
-    <dgm:txLinClrLst/>
-    <dgm:txFillClrLst meth="repeat">
-      <a:schemeClr val="dk1"/>
-    </dgm:txFillClrLst>
-    <dgm:txEffectClrLst/>
-  </dgm:styleLbl>
-  <dgm:styleLbl name="fgAcc4">
-    <dgm:fillClrLst meth="repeat">
-      <a:schemeClr val="lt1">
-        <a:alpha val="90000"/>
-      </a:schemeClr>
-    </dgm:fillClrLst>
-    <dgm:linClrLst meth="repeat">
-      <a:schemeClr val="accent1"/>
-    </dgm:linClrLst>
-    <dgm:effectClrLst/>
-    <dgm:txLinClrLst/>
-    <dgm:txFillClrLst meth="repeat">
-      <a:schemeClr val="dk1"/>
-    </dgm:txFillClrLst>
-    <dgm:txEffectClrLst/>
-  </dgm:styleLbl>
-  <dgm:styleLbl name="bgShp">
-    <dgm:fillClrLst meth="repeat">
-      <a:schemeClr val="accent1">
-        <a:tint val="40000"/>
-      </a:schemeClr>
-    </dgm:fillClrLst>
-    <dgm:linClrLst meth="repeat">
-      <a:schemeClr val="accent1"/>
-    </dgm:linClrLst>
-    <dgm:effectClrLst/>
-    <dgm:txLinClrLst/>
-    <dgm:txFillClrLst meth="repeat">
-      <a:schemeClr val="dk1"/>
-    </dgm:txFillClrLst>
-    <dgm:txEffectClrLst/>
-  </dgm:styleLbl>
-  <dgm:styleLbl name="dkBgShp">
-    <dgm:fillClrLst meth="repeat">
-      <a:schemeClr val="accent1">
-        <a:shade val="80000"/>
-      </a:schemeClr>
-    </dgm:fillClrLst>
-    <dgm:linClrLst meth="repeat">
-      <a:schemeClr val="accent1"/>
-    </dgm:linClrLst>
-    <dgm:effectClrLst/>
-    <dgm:txLinClrLst/>
-    <dgm:txFillClrLst meth="repeat">
-      <a:schemeClr val="lt1"/>
-    </dgm:txFillClrLst>
-    <dgm:txEffectClrLst/>
-  </dgm:styleLbl>
-  <dgm:styleLbl name="trBgShp">
-    <dgm:fillClrLst meth="repeat">
-      <a:schemeClr val="accent1">
-        <a:tint val="50000"/>
-        <a:alpha val="40000"/>
-      </a:schemeClr>
-    </dgm:fillClrLst>
-    <dgm:linClrLst meth="repeat">
-      <a:schemeClr val="accent1"/>
-    </dgm:linClrLst>
-    <dgm:effectClrLst/>
-    <dgm:txLinClrLst/>
-    <dgm:txFillClrLst meth="repeat">
-      <a:schemeClr val="lt1"/>
-    </dgm:txFillClrLst>
-    <dgm:txEffectClrLst/>
-  </dgm:styleLbl>
-  <dgm:styleLbl name="fgShp">
-    <dgm:fillClrLst meth="repeat">
-      <a:schemeClr val="accent1">
-        <a:tint val="60000"/>
-      </a:schemeClr>
-    </dgm:fillClrLst>
-    <dgm:linClrLst meth="repeat">
-      <a:schemeClr val="lt1"/>
-    </dgm:linClrLst>
-    <dgm:effectClrLst/>
-    <dgm:txLinClrLst/>
-    <dgm:txFillClrLst meth="repeat">
-      <a:schemeClr val="dk1"/>
-    </dgm:txFillClrLst>
-    <dgm:txEffectClrLst/>
-  </dgm:styleLbl>
-  <dgm:styleLbl name="revTx">
-    <dgm:fillClrLst meth="repeat">
-      <a:schemeClr val="lt1">
-        <a:alpha val="0"/>
-      </a:schemeClr>
-    </dgm:fillClrLst>
-    <dgm:linClrLst meth="repeat">
-      <a:schemeClr val="dk1">
-        <a:alpha val="0"/>
-      </a:schemeClr>
-    </dgm:linClrLst>
-    <dgm:effectClrLst/>
-    <dgm:txLinClrLst/>
-    <dgm:txFillClrLst meth="repeat">
-      <a:schemeClr val="tx1"/>
-    </dgm:txFillClrLst>
-    <dgm:txEffectClrLst/>
-  </dgm:styleLbl>
-</dgm:colorsDef>
+<file path=ppt/ink/ink1.xml><?xml version="1.0" encoding="utf-8"?>
+<inkml:ink xmlns:inkml="http://www.w3.org/2003/InkML">
+  <inkml:definitions>
+    <inkml:context xml:id="ctx0">
+      <inkml:inkSource xml:id="inkSrc0">
+        <inkml:traceFormat>
+          <inkml:channel name="X" type="integer" min="-2.14748E9" max="2.14748E9" units="cm"/>
+          <inkml:channel name="Y" type="integer" min="-2.14748E9" max="2.14748E9" units="cm"/>
+          <inkml:channel name="F" type="integer" max="32767" units="dev"/>
+        </inkml:traceFormat>
+        <inkml:channelProperties>
+          <inkml:channelProperty channel="X" name="resolution" value="1000" units="1/cm"/>
+          <inkml:channelProperty channel="Y" name="resolution" value="1000" units="1/cm"/>
+          <inkml:channelProperty channel="F" name="resolution" value="0" units="1/dev"/>
+        </inkml:channelProperties>
+      </inkml:inkSource>
+      <inkml:timestamp xml:id="ts0" timeString="2026-09-27T12:13:59.741"/>
+    </inkml:context>
+    <inkml:brush xml:id="br0">
+      <inkml:brushProperty name="width" value="0.2" units="cm"/>
+      <inkml:brushProperty name="height" value="0.2" units="cm"/>
+      <inkml:brushProperty name="color" value="#E71224"/>
+    </inkml:brush>
+  </inkml:definitions>
+  <inkml:trace contextRef="#ctx0" brushRef="#br0">1 1 24380,'1885'956'0</inkml:trace>
+</inkml:ink>
 </file>
 
-<file path=ppt/diagrams/data1.xml><?xml version="1.0" encoding="utf-8"?>
-<dgm:dataModel xmlns:dgm="http://schemas.openxmlformats.org/drawingml/2006/diagram" xmlns:a="http://schemas.openxmlformats.org/drawingml/2006/main">
-  <dgm:ptLst>
-    <dgm:pt modelId="{27589E54-12D5-49FB-8D2B-25A94FA0423E}" type="doc">
-      <dgm:prSet loTypeId="urn:microsoft.com/office/officeart/2005/8/layout/hierarchy1" loCatId="hierarchy" qsTypeId="urn:microsoft.com/office/officeart/2005/8/quickstyle/simple2#5" qsCatId="simple" csTypeId="urn:microsoft.com/office/officeart/2005/8/colors/accent1_2#7" csCatId="accent1"/>
-      <dgm:spPr/>
-      <dgm:t>
-        <a:bodyPr/>
-        <a:lstStyle/>
-        <a:p>
-          <a:endParaRPr lang="en-US"/>
-        </a:p>
-      </dgm:t>
-    </dgm:pt>
-    <dgm:pt modelId="{5ACF72D3-7C2E-47F8-B5D7-CCE939062A88}">
-      <dgm:prSet/>
-      <dgm:spPr/>
-      <dgm:t>
-        <a:bodyPr/>
-        <a:lstStyle/>
-        <a:p>
-          <a:r>
-            <a:rPr lang="en-US" dirty="0"/>
-            <a:t>- </a:t>
-          </a:r>
-          <a:r>
-            <a:rPr lang="en-US" dirty="0" err="1"/>
-            <a:t>meerder</a:t>
-          </a:r>
-          <a:r>
-            <a:rPr lang="en-US" dirty="0"/>
-            <a:t> camera’s </a:t>
-          </a:r>
-          <a:r>
-            <a:rPr lang="en-US" dirty="0" err="1"/>
-            <a:t>aantsturen</a:t>
-          </a:r>
-          <a:r>
-            <a:rPr lang="en-US" dirty="0"/>
-            <a:t> met 1 Pi</a:t>
-          </a:r>
-        </a:p>
-      </dgm:t>
-    </dgm:pt>
-    <dgm:pt modelId="{848BA0C5-E2D6-482A-8F16-ED1296412BAC}" type="parTrans" cxnId="{D067EABE-4E38-4482-A980-600DF8C98AC7}">
-      <dgm:prSet/>
-      <dgm:spPr/>
-      <dgm:t>
-        <a:bodyPr/>
-        <a:lstStyle/>
-        <a:p>
-          <a:endParaRPr lang="en-US"/>
-        </a:p>
-      </dgm:t>
-    </dgm:pt>
-    <dgm:pt modelId="{0B411016-CBAA-4A3E-B669-D836D8D12A10}" type="sibTrans" cxnId="{D067EABE-4E38-4482-A980-600DF8C98AC7}">
-      <dgm:prSet/>
-      <dgm:spPr/>
-      <dgm:t>
-        <a:bodyPr/>
-        <a:lstStyle/>
-        <a:p>
-          <a:endParaRPr lang="en-US"/>
-        </a:p>
-      </dgm:t>
-    </dgm:pt>
-    <dgm:pt modelId="{5E96A914-A104-4F9F-8D14-24F58116E0EE}">
-      <dgm:prSet/>
-      <dgm:spPr/>
-      <dgm:t>
-        <a:bodyPr/>
-        <a:lstStyle/>
-        <a:p>
-          <a:r>
-            <a:rPr lang="en-US"/>
-            <a:t>- een applicatie maken om de camera’s te bekijken</a:t>
-          </a:r>
-        </a:p>
-      </dgm:t>
-    </dgm:pt>
-    <dgm:pt modelId="{0C61E902-341A-40AD-8704-11D72D3D95F8}" type="parTrans" cxnId="{53A6761E-D0A6-447E-AABE-C4DE11D0F93C}">
-      <dgm:prSet/>
-      <dgm:spPr/>
-      <dgm:t>
-        <a:bodyPr/>
-        <a:lstStyle/>
-        <a:p>
-          <a:endParaRPr lang="en-US"/>
-        </a:p>
-      </dgm:t>
-    </dgm:pt>
-    <dgm:pt modelId="{B2D7E7B7-6FF8-4A55-9FF2-0D6F4D47DEAE}" type="sibTrans" cxnId="{53A6761E-D0A6-447E-AABE-C4DE11D0F93C}">
-      <dgm:prSet/>
-      <dgm:spPr/>
-      <dgm:t>
-        <a:bodyPr/>
-        <a:lstStyle/>
-        <a:p>
-          <a:endParaRPr lang="en-US"/>
-        </a:p>
-      </dgm:t>
-    </dgm:pt>
-    <dgm:pt modelId="{0A95ACB8-6DA1-4127-B67D-AD162295717A}">
-      <dgm:prSet/>
-      <dgm:spPr/>
-      <dgm:t>
-        <a:bodyPr/>
-        <a:lstStyle/>
-        <a:p>
-          <a:r>
-            <a:rPr lang="en-US"/>
-            <a:t>- draadloos aan de Pi verbinden</a:t>
-          </a:r>
-        </a:p>
-      </dgm:t>
-    </dgm:pt>
-    <dgm:pt modelId="{4BC66ED0-5BA0-402A-9762-905D9FCAC8E5}" type="parTrans" cxnId="{C07B7455-69C4-4426-90BA-36A8387AD4CF}">
-      <dgm:prSet/>
-      <dgm:spPr/>
-      <dgm:t>
-        <a:bodyPr/>
-        <a:lstStyle/>
-        <a:p>
-          <a:endParaRPr lang="en-US"/>
-        </a:p>
-      </dgm:t>
-    </dgm:pt>
-    <dgm:pt modelId="{0F644D01-A469-4D69-867D-D1D2CAEF40DB}" type="sibTrans" cxnId="{C07B7455-69C4-4426-90BA-36A8387AD4CF}">
-      <dgm:prSet/>
-      <dgm:spPr/>
-      <dgm:t>
-        <a:bodyPr/>
-        <a:lstStyle/>
-        <a:p>
-          <a:endParaRPr lang="en-US"/>
-        </a:p>
-      </dgm:t>
-    </dgm:pt>
-    <dgm:pt modelId="{E7DEE67E-81BE-4C8E-861E-B0D0932B90B5}" type="pres">
-      <dgm:prSet presAssocID="{27589E54-12D5-49FB-8D2B-25A94FA0423E}" presName="hierChild1" presStyleCnt="0">
-        <dgm:presLayoutVars>
-          <dgm:chPref val="1"/>
-          <dgm:dir/>
-          <dgm:animOne val="branch"/>
-          <dgm:animLvl val="lvl"/>
-          <dgm:resizeHandles/>
-        </dgm:presLayoutVars>
-      </dgm:prSet>
-      <dgm:spPr/>
-    </dgm:pt>
-    <dgm:pt modelId="{75F71BD8-3A90-4958-9A32-15905E69347C}" type="pres">
-      <dgm:prSet presAssocID="{5ACF72D3-7C2E-47F8-B5D7-CCE939062A88}" presName="hierRoot1" presStyleCnt="0"/>
-      <dgm:spPr/>
-    </dgm:pt>
-    <dgm:pt modelId="{CBECBEB4-3EE8-41DA-A97A-9C0BE64D7117}" type="pres">
-      <dgm:prSet presAssocID="{5ACF72D3-7C2E-47F8-B5D7-CCE939062A88}" presName="composite" presStyleCnt="0"/>
-      <dgm:spPr/>
-    </dgm:pt>
-    <dgm:pt modelId="{4CC47B4A-94FA-4C05-BB49-C35731D49E94}" type="pres">
-      <dgm:prSet presAssocID="{5ACF72D3-7C2E-47F8-B5D7-CCE939062A88}" presName="background" presStyleLbl="node0" presStyleIdx="0" presStyleCnt="3"/>
-      <dgm:spPr/>
-    </dgm:pt>
-    <dgm:pt modelId="{A92D661C-D664-4C3B-AE03-98099259D15C}" type="pres">
-      <dgm:prSet presAssocID="{5ACF72D3-7C2E-47F8-B5D7-CCE939062A88}" presName="text" presStyleLbl="fgAcc0" presStyleIdx="0" presStyleCnt="3">
-        <dgm:presLayoutVars>
-          <dgm:chPref val="3"/>
-        </dgm:presLayoutVars>
-      </dgm:prSet>
-      <dgm:spPr/>
-    </dgm:pt>
-    <dgm:pt modelId="{A899FA8E-A4CE-4879-946A-FD047B5BCABF}" type="pres">
-      <dgm:prSet presAssocID="{5ACF72D3-7C2E-47F8-B5D7-CCE939062A88}" presName="hierChild2" presStyleCnt="0"/>
-      <dgm:spPr/>
-    </dgm:pt>
-    <dgm:pt modelId="{31E3D24A-160D-4FF3-A4E2-839643E5025C}" type="pres">
-      <dgm:prSet presAssocID="{5E96A914-A104-4F9F-8D14-24F58116E0EE}" presName="hierRoot1" presStyleCnt="0"/>
-      <dgm:spPr/>
-    </dgm:pt>
-    <dgm:pt modelId="{060BD291-256E-4804-A913-521C3619E47F}" type="pres">
-      <dgm:prSet presAssocID="{5E96A914-A104-4F9F-8D14-24F58116E0EE}" presName="composite" presStyleCnt="0"/>
-      <dgm:spPr/>
-    </dgm:pt>
-    <dgm:pt modelId="{3E5E9458-F2EF-4D06-839E-C722FB9FCF03}" type="pres">
-      <dgm:prSet presAssocID="{5E96A914-A104-4F9F-8D14-24F58116E0EE}" presName="background" presStyleLbl="node0" presStyleIdx="1" presStyleCnt="3"/>
-      <dgm:spPr/>
-    </dgm:pt>
-    <dgm:pt modelId="{0EAE753B-0383-42F3-9946-E319688BE188}" type="pres">
-      <dgm:prSet presAssocID="{5E96A914-A104-4F9F-8D14-24F58116E0EE}" presName="text" presStyleLbl="fgAcc0" presStyleIdx="1" presStyleCnt="3">
-        <dgm:presLayoutVars>
-          <dgm:chPref val="3"/>
-        </dgm:presLayoutVars>
-      </dgm:prSet>
-      <dgm:spPr/>
-    </dgm:pt>
-    <dgm:pt modelId="{F1EA4B5F-C589-4F3C-BDEE-FDA7F9DFAC20}" type="pres">
-      <dgm:prSet presAssocID="{5E96A914-A104-4F9F-8D14-24F58116E0EE}" presName="hierChild2" presStyleCnt="0"/>
-      <dgm:spPr/>
-    </dgm:pt>
-    <dgm:pt modelId="{D5870B24-F14B-4881-82D8-E5C303806625}" type="pres">
-      <dgm:prSet presAssocID="{0A95ACB8-6DA1-4127-B67D-AD162295717A}" presName="hierRoot1" presStyleCnt="0"/>
-      <dgm:spPr/>
-    </dgm:pt>
-    <dgm:pt modelId="{77673462-69B9-450C-85AB-A841C71217FD}" type="pres">
-      <dgm:prSet presAssocID="{0A95ACB8-6DA1-4127-B67D-AD162295717A}" presName="composite" presStyleCnt="0"/>
-      <dgm:spPr/>
-    </dgm:pt>
-    <dgm:pt modelId="{AF919EB4-9468-48F0-AEB8-EABA574BFC27}" type="pres">
-      <dgm:prSet presAssocID="{0A95ACB8-6DA1-4127-B67D-AD162295717A}" presName="background" presStyleLbl="node0" presStyleIdx="2" presStyleCnt="3"/>
-      <dgm:spPr/>
-    </dgm:pt>
-    <dgm:pt modelId="{B2998A9B-6695-4891-AB1D-D70A266E270F}" type="pres">
-      <dgm:prSet presAssocID="{0A95ACB8-6DA1-4127-B67D-AD162295717A}" presName="text" presStyleLbl="fgAcc0" presStyleIdx="2" presStyleCnt="3">
-        <dgm:presLayoutVars>
-          <dgm:chPref val="3"/>
-        </dgm:presLayoutVars>
-      </dgm:prSet>
-      <dgm:spPr/>
-    </dgm:pt>
-    <dgm:pt modelId="{89A90489-F97C-4190-969D-20934E6F14EE}" type="pres">
-      <dgm:prSet presAssocID="{0A95ACB8-6DA1-4127-B67D-AD162295717A}" presName="hierChild2" presStyleCnt="0"/>
-      <dgm:spPr/>
-    </dgm:pt>
-  </dgm:ptLst>
-  <dgm:cxnLst>
-    <dgm:cxn modelId="{A547D01C-1AEC-4FF4-9D45-2B7E666F58F8}" type="presOf" srcId="{5ACF72D3-7C2E-47F8-B5D7-CCE939062A88}" destId="{A92D661C-D664-4C3B-AE03-98099259D15C}" srcOrd="0" destOrd="0" presId="urn:microsoft.com/office/officeart/2005/8/layout/hierarchy1"/>
-    <dgm:cxn modelId="{53A6761E-D0A6-447E-AABE-C4DE11D0F93C}" srcId="{27589E54-12D5-49FB-8D2B-25A94FA0423E}" destId="{5E96A914-A104-4F9F-8D14-24F58116E0EE}" srcOrd="1" destOrd="0" parTransId="{0C61E902-341A-40AD-8704-11D72D3D95F8}" sibTransId="{B2D7E7B7-6FF8-4A55-9FF2-0D6F4D47DEAE}"/>
-    <dgm:cxn modelId="{42041632-1CB7-49C4-ACDA-FA2A7F45E1D7}" type="presOf" srcId="{5E96A914-A104-4F9F-8D14-24F58116E0EE}" destId="{0EAE753B-0383-42F3-9946-E319688BE188}" srcOrd="0" destOrd="0" presId="urn:microsoft.com/office/officeart/2005/8/layout/hierarchy1"/>
-    <dgm:cxn modelId="{1148846D-C2B6-4CD0-BF66-9AAAB1F640B9}" type="presOf" srcId="{0A95ACB8-6DA1-4127-B67D-AD162295717A}" destId="{B2998A9B-6695-4891-AB1D-D70A266E270F}" srcOrd="0" destOrd="0" presId="urn:microsoft.com/office/officeart/2005/8/layout/hierarchy1"/>
-    <dgm:cxn modelId="{C07B7455-69C4-4426-90BA-36A8387AD4CF}" srcId="{27589E54-12D5-49FB-8D2B-25A94FA0423E}" destId="{0A95ACB8-6DA1-4127-B67D-AD162295717A}" srcOrd="2" destOrd="0" parTransId="{4BC66ED0-5BA0-402A-9762-905D9FCAC8E5}" sibTransId="{0F644D01-A469-4D69-867D-D1D2CAEF40DB}"/>
-    <dgm:cxn modelId="{D067EABE-4E38-4482-A980-600DF8C98AC7}" srcId="{27589E54-12D5-49FB-8D2B-25A94FA0423E}" destId="{5ACF72D3-7C2E-47F8-B5D7-CCE939062A88}" srcOrd="0" destOrd="0" parTransId="{848BA0C5-E2D6-482A-8F16-ED1296412BAC}" sibTransId="{0B411016-CBAA-4A3E-B669-D836D8D12A10}"/>
-    <dgm:cxn modelId="{045B44F1-4E61-4EAE-AB55-F6CA9556D740}" type="presOf" srcId="{27589E54-12D5-49FB-8D2B-25A94FA0423E}" destId="{E7DEE67E-81BE-4C8E-861E-B0D0932B90B5}" srcOrd="0" destOrd="0" presId="urn:microsoft.com/office/officeart/2005/8/layout/hierarchy1"/>
-    <dgm:cxn modelId="{F4C7A84F-1DA7-4BDC-84A0-47DB4149F9B4}" type="presParOf" srcId="{E7DEE67E-81BE-4C8E-861E-B0D0932B90B5}" destId="{75F71BD8-3A90-4958-9A32-15905E69347C}" srcOrd="0" destOrd="0" presId="urn:microsoft.com/office/officeart/2005/8/layout/hierarchy1"/>
-    <dgm:cxn modelId="{973144A1-3676-4EAF-B48E-2967E900B308}" type="presParOf" srcId="{75F71BD8-3A90-4958-9A32-15905E69347C}" destId="{CBECBEB4-3EE8-41DA-A97A-9C0BE64D7117}" srcOrd="0" destOrd="0" presId="urn:microsoft.com/office/officeart/2005/8/layout/hierarchy1"/>
-    <dgm:cxn modelId="{EEE3AF27-FD2E-4244-8097-C8746C6E98F4}" type="presParOf" srcId="{CBECBEB4-3EE8-41DA-A97A-9C0BE64D7117}" destId="{4CC47B4A-94FA-4C05-BB49-C35731D49E94}" srcOrd="0" destOrd="0" presId="urn:microsoft.com/office/officeart/2005/8/layout/hierarchy1"/>
-    <dgm:cxn modelId="{0558F4DA-AC2A-4F39-9C7F-41D400536C20}" type="presParOf" srcId="{CBECBEB4-3EE8-41DA-A97A-9C0BE64D7117}" destId="{A92D661C-D664-4C3B-AE03-98099259D15C}" srcOrd="1" destOrd="0" presId="urn:microsoft.com/office/officeart/2005/8/layout/hierarchy1"/>
-    <dgm:cxn modelId="{167A5977-3FFA-4AB7-84BA-7A4357EB736B}" type="presParOf" srcId="{75F71BD8-3A90-4958-9A32-15905E69347C}" destId="{A899FA8E-A4CE-4879-946A-FD047B5BCABF}" srcOrd="1" destOrd="0" presId="urn:microsoft.com/office/officeart/2005/8/layout/hierarchy1"/>
-    <dgm:cxn modelId="{ADCFDBE5-FAB5-4AEF-A9D6-DF71652C4C1B}" type="presParOf" srcId="{E7DEE67E-81BE-4C8E-861E-B0D0932B90B5}" destId="{31E3D24A-160D-4FF3-A4E2-839643E5025C}" srcOrd="1" destOrd="0" presId="urn:microsoft.com/office/officeart/2005/8/layout/hierarchy1"/>
-    <dgm:cxn modelId="{5AEFDD41-EFF7-4102-8620-B17C0CD1DF37}" type="presParOf" srcId="{31E3D24A-160D-4FF3-A4E2-839643E5025C}" destId="{060BD291-256E-4804-A913-521C3619E47F}" srcOrd="0" destOrd="0" presId="urn:microsoft.com/office/officeart/2005/8/layout/hierarchy1"/>
-    <dgm:cxn modelId="{E2346E2A-44E9-4D88-9C58-ED10C2658573}" type="presParOf" srcId="{060BD291-256E-4804-A913-521C3619E47F}" destId="{3E5E9458-F2EF-4D06-839E-C722FB9FCF03}" srcOrd="0" destOrd="0" presId="urn:microsoft.com/office/officeart/2005/8/layout/hierarchy1"/>
-    <dgm:cxn modelId="{7CEA3DA0-EBE4-4256-8BF8-AE290C4128BF}" type="presParOf" srcId="{060BD291-256E-4804-A913-521C3619E47F}" destId="{0EAE753B-0383-42F3-9946-E319688BE188}" srcOrd="1" destOrd="0" presId="urn:microsoft.com/office/officeart/2005/8/layout/hierarchy1"/>
-    <dgm:cxn modelId="{0F6C3034-DE88-493B-99F5-DC66F1345053}" type="presParOf" srcId="{31E3D24A-160D-4FF3-A4E2-839643E5025C}" destId="{F1EA4B5F-C589-4F3C-BDEE-FDA7F9DFAC20}" srcOrd="1" destOrd="0" presId="urn:microsoft.com/office/officeart/2005/8/layout/hierarchy1"/>
-    <dgm:cxn modelId="{DED66178-D4C7-4CC4-98A2-09BC48E232ED}" type="presParOf" srcId="{E7DEE67E-81BE-4C8E-861E-B0D0932B90B5}" destId="{D5870B24-F14B-4881-82D8-E5C303806625}" srcOrd="2" destOrd="0" presId="urn:microsoft.com/office/officeart/2005/8/layout/hierarchy1"/>
-    <dgm:cxn modelId="{0237D9BC-89F7-4A82-81A6-E9F8292F4B3E}" type="presParOf" srcId="{D5870B24-F14B-4881-82D8-E5C303806625}" destId="{77673462-69B9-450C-85AB-A841C71217FD}" srcOrd="0" destOrd="0" presId="urn:microsoft.com/office/officeart/2005/8/layout/hierarchy1"/>
-    <dgm:cxn modelId="{BE9FEFF1-5F2E-4CE4-9E37-081723DAFDF7}" type="presParOf" srcId="{77673462-69B9-450C-85AB-A841C71217FD}" destId="{AF919EB4-9468-48F0-AEB8-EABA574BFC27}" srcOrd="0" destOrd="0" presId="urn:microsoft.com/office/officeart/2005/8/layout/hierarchy1"/>
-    <dgm:cxn modelId="{8F0D3EB3-F44D-4141-9A3A-FD4F0852B304}" type="presParOf" srcId="{77673462-69B9-450C-85AB-A841C71217FD}" destId="{B2998A9B-6695-4891-AB1D-D70A266E270F}" srcOrd="1" destOrd="0" presId="urn:microsoft.com/office/officeart/2005/8/layout/hierarchy1"/>
-    <dgm:cxn modelId="{7AF99ADF-7480-4653-BB75-C96DE44F3D80}" type="presParOf" srcId="{D5870B24-F14B-4881-82D8-E5C303806625}" destId="{89A90489-F97C-4190-969D-20934E6F14EE}" srcOrd="1" destOrd="0" presId="urn:microsoft.com/office/officeart/2005/8/layout/hierarchy1"/>
-  </dgm:cxnLst>
-  <dgm:bg/>
-  <dgm:whole/>
-  <dgm:extLst>
-    <a:ext uri="http://schemas.microsoft.com/office/drawing/2008/diagram">
-      <dsp:dataModelExt xmlns:dsp="http://schemas.microsoft.com/office/drawing/2008/diagram" relId="rId6" minVer="http://schemas.openxmlformats.org/drawingml/2006/diagram"/>
-    </a:ext>
-  </dgm:extLst>
-</dgm:dataModel>
+<file path=ppt/ink/ink2.xml><?xml version="1.0" encoding="utf-8"?>
+<inkml:ink xmlns:inkml="http://www.w3.org/2003/InkML">
+  <inkml:definitions>
+    <inkml:context xml:id="ctx0">
+      <inkml:inkSource xml:id="inkSrc0">
+        <inkml:traceFormat>
+          <inkml:channel name="X" type="integer" min="-2.14748E9" max="2.14748E9" units="cm"/>
+          <inkml:channel name="Y" type="integer" min="-2.14748E9" max="2.14748E9" units="cm"/>
+          <inkml:channel name="F" type="integer" max="32767" units="dev"/>
+        </inkml:traceFormat>
+        <inkml:channelProperties>
+          <inkml:channelProperty channel="X" name="resolution" value="1000" units="1/cm"/>
+          <inkml:channelProperty channel="Y" name="resolution" value="1000" units="1/cm"/>
+          <inkml:channelProperty channel="F" name="resolution" value="0" units="1/dev"/>
+        </inkml:channelProperties>
+      </inkml:inkSource>
+      <inkml:timestamp xml:id="ts0" timeString="2026-09-27T12:14:05.584"/>
+    </inkml:context>
+    <inkml:brush xml:id="br0">
+      <inkml:brushProperty name="width" value="0.2" units="cm"/>
+      <inkml:brushProperty name="height" value="0.2" units="cm"/>
+      <inkml:brushProperty name="color" value="#E71224"/>
+    </inkml:brush>
+  </inkml:definitions>
+  <inkml:trace contextRef="#ctx0" brushRef="#br0">16 1 24450,'0'601'0</inkml:trace>
+</inkml:ink>
 </file>
 
-<file path=ppt/diagrams/drawing1.xml><?xml version="1.0" encoding="utf-8"?>
-<dsp:drawing xmlns:dgm="http://schemas.openxmlformats.org/drawingml/2006/diagram" xmlns:dsp="http://schemas.microsoft.com/office/drawing/2008/diagram" xmlns:a="http://schemas.openxmlformats.org/drawingml/2006/main">
-  <dsp:spTree>
-    <dsp:nvGrpSpPr>
-      <dsp:cNvPr id="0" name=""/>
-      <dsp:cNvGrpSpPr/>
-    </dsp:nvGrpSpPr>
-    <dsp:grpSpPr/>
-    <dsp:sp modelId="{4CC47B4A-94FA-4C05-BB49-C35731D49E94}">
-      <dsp:nvSpPr>
-        <dsp:cNvPr id="0" name=""/>
-        <dsp:cNvSpPr/>
-      </dsp:nvSpPr>
-      <dsp:spPr>
-        <a:xfrm>
-          <a:off x="0" y="1117241"/>
-          <a:ext cx="2796302" cy="1775652"/>
-        </a:xfrm>
-        <a:prstGeom prst="roundRect">
-          <a:avLst>
-            <a:gd name="adj" fmla="val 10000"/>
-          </a:avLst>
-        </a:prstGeom>
-        <a:solidFill>
-          <a:schemeClr val="accent1">
-            <a:hueOff val="0"/>
-            <a:satOff val="0"/>
-            <a:lumOff val="0"/>
-            <a:alphaOff val="0"/>
-          </a:schemeClr>
-        </a:solidFill>
-        <a:ln w="19050" cap="flat" cmpd="sng" algn="ctr">
-          <a:solidFill>
-            <a:schemeClr val="lt1">
-              <a:hueOff val="0"/>
-              <a:satOff val="0"/>
-              <a:lumOff val="0"/>
-              <a:alphaOff val="0"/>
-            </a:schemeClr>
-          </a:solidFill>
-          <a:prstDash val="solid"/>
-          <a:miter lim="800000"/>
-        </a:ln>
-        <a:effectLst/>
-      </dsp:spPr>
-      <dsp:style>
-        <a:lnRef idx="3">
-          <a:scrgbClr r="0" g="0" b="0"/>
-        </a:lnRef>
-        <a:fillRef idx="1">
-          <a:scrgbClr r="0" g="0" b="0"/>
-        </a:fillRef>
-        <a:effectRef idx="1">
-          <a:scrgbClr r="0" g="0" b="0"/>
-        </a:effectRef>
-        <a:fontRef idx="minor">
-          <a:schemeClr val="lt1"/>
-        </a:fontRef>
-      </dsp:style>
-    </dsp:sp>
-    <dsp:sp modelId="{A92D661C-D664-4C3B-AE03-98099259D15C}">
-      <dsp:nvSpPr>
-        <dsp:cNvPr id="0" name=""/>
-        <dsp:cNvSpPr/>
-      </dsp:nvSpPr>
-      <dsp:spPr>
-        <a:xfrm>
-          <a:off x="310700" y="1412406"/>
-          <a:ext cx="2796302" cy="1775652"/>
-        </a:xfrm>
-        <a:prstGeom prst="roundRect">
-          <a:avLst>
-            <a:gd name="adj" fmla="val 10000"/>
-          </a:avLst>
-        </a:prstGeom>
-        <a:solidFill>
-          <a:schemeClr val="lt1">
-            <a:alpha val="90000"/>
-            <a:hueOff val="0"/>
-            <a:satOff val="0"/>
-            <a:lumOff val="0"/>
-            <a:alphaOff val="0"/>
-          </a:schemeClr>
-        </a:solidFill>
-        <a:ln w="12700" cap="flat" cmpd="sng" algn="ctr">
-          <a:solidFill>
-            <a:schemeClr val="accent1">
-              <a:hueOff val="0"/>
-              <a:satOff val="0"/>
-              <a:lumOff val="0"/>
-              <a:alphaOff val="0"/>
-            </a:schemeClr>
-          </a:solidFill>
-          <a:prstDash val="solid"/>
-          <a:miter lim="800000"/>
-        </a:ln>
-        <a:effectLst/>
-      </dsp:spPr>
-      <dsp:style>
-        <a:lnRef idx="2">
-          <a:scrgbClr r="0" g="0" b="0"/>
-        </a:lnRef>
-        <a:fillRef idx="1">
-          <a:scrgbClr r="0" g="0" b="0"/>
-        </a:fillRef>
-        <a:effectRef idx="0">
-          <a:scrgbClr r="0" g="0" b="0"/>
-        </a:effectRef>
-        <a:fontRef idx="minor"/>
-      </dsp:style>
-      <dsp:txBody>
-        <a:bodyPr spcFirstLastPara="0" vert="horz" wrap="square" lIns="99060" tIns="99060" rIns="99060" bIns="99060" numCol="1" spcCol="1270" anchor="ctr" anchorCtr="0">
-          <a:noAutofit/>
-        </a:bodyPr>
-        <a:lstStyle/>
-        <a:p>
-          <a:pPr marL="0" lvl="0" indent="0" algn="ctr" defTabSz="1155700">
-            <a:lnSpc>
-              <a:spcPct val="90000"/>
-            </a:lnSpc>
-            <a:spcBef>
-              <a:spcPct val="0"/>
-            </a:spcBef>
-            <a:spcAft>
-              <a:spcPct val="35000"/>
-            </a:spcAft>
-            <a:buNone/>
-          </a:pPr>
-          <a:r>
-            <a:rPr lang="en-US" sz="2600" kern="1200" dirty="0"/>
-            <a:t>- </a:t>
-          </a:r>
-          <a:r>
-            <a:rPr lang="en-US" sz="2600" kern="1200" dirty="0" err="1"/>
-            <a:t>meerder</a:t>
-          </a:r>
-          <a:r>
-            <a:rPr lang="en-US" sz="2600" kern="1200" dirty="0"/>
-            <a:t> camera’s </a:t>
-          </a:r>
-          <a:r>
-            <a:rPr lang="en-US" sz="2600" kern="1200" dirty="0" err="1"/>
-            <a:t>aantsturen</a:t>
-          </a:r>
-          <a:r>
-            <a:rPr lang="en-US" sz="2600" kern="1200" dirty="0"/>
-            <a:t> met 1 Pi</a:t>
-          </a:r>
-        </a:p>
-      </dsp:txBody>
-      <dsp:txXfrm>
-        <a:off x="362707" y="1464413"/>
-        <a:ext cx="2692288" cy="1671638"/>
-      </dsp:txXfrm>
-    </dsp:sp>
-    <dsp:sp modelId="{3E5E9458-F2EF-4D06-839E-C722FB9FCF03}">
-      <dsp:nvSpPr>
-        <dsp:cNvPr id="0" name=""/>
-        <dsp:cNvSpPr/>
-      </dsp:nvSpPr>
-      <dsp:spPr>
-        <a:xfrm>
-          <a:off x="3417703" y="1117241"/>
-          <a:ext cx="2796302" cy="1775652"/>
-        </a:xfrm>
-        <a:prstGeom prst="roundRect">
-          <a:avLst>
-            <a:gd name="adj" fmla="val 10000"/>
-          </a:avLst>
-        </a:prstGeom>
-        <a:solidFill>
-          <a:schemeClr val="accent1">
-            <a:hueOff val="0"/>
-            <a:satOff val="0"/>
-            <a:lumOff val="0"/>
-            <a:alphaOff val="0"/>
-          </a:schemeClr>
-        </a:solidFill>
-        <a:ln w="19050" cap="flat" cmpd="sng" algn="ctr">
-          <a:solidFill>
-            <a:schemeClr val="lt1">
-              <a:hueOff val="0"/>
-              <a:satOff val="0"/>
-              <a:lumOff val="0"/>
-              <a:alphaOff val="0"/>
-            </a:schemeClr>
-          </a:solidFill>
-          <a:prstDash val="solid"/>
-          <a:miter lim="800000"/>
-        </a:ln>
-        <a:effectLst/>
-      </dsp:spPr>
-      <dsp:style>
-        <a:lnRef idx="3">
-          <a:scrgbClr r="0" g="0" b="0"/>
-        </a:lnRef>
-        <a:fillRef idx="1">
-          <a:scrgbClr r="0" g="0" b="0"/>
-        </a:fillRef>
-        <a:effectRef idx="1">
-          <a:scrgbClr r="0" g="0" b="0"/>
-        </a:effectRef>
-        <a:fontRef idx="minor">
-          <a:schemeClr val="lt1"/>
-        </a:fontRef>
-      </dsp:style>
-    </dsp:sp>
-    <dsp:sp modelId="{0EAE753B-0383-42F3-9946-E319688BE188}">
-      <dsp:nvSpPr>
-        <dsp:cNvPr id="0" name=""/>
-        <dsp:cNvSpPr/>
-      </dsp:nvSpPr>
-      <dsp:spPr>
-        <a:xfrm>
-          <a:off x="3728403" y="1412406"/>
-          <a:ext cx="2796302" cy="1775652"/>
-        </a:xfrm>
-        <a:prstGeom prst="roundRect">
-          <a:avLst>
-            <a:gd name="adj" fmla="val 10000"/>
-          </a:avLst>
-        </a:prstGeom>
-        <a:solidFill>
-          <a:schemeClr val="lt1">
-            <a:alpha val="90000"/>
-            <a:hueOff val="0"/>
-            <a:satOff val="0"/>
-            <a:lumOff val="0"/>
-            <a:alphaOff val="0"/>
-          </a:schemeClr>
-        </a:solidFill>
-        <a:ln w="12700" cap="flat" cmpd="sng" algn="ctr">
-          <a:solidFill>
-            <a:schemeClr val="accent1">
-              <a:hueOff val="0"/>
-              <a:satOff val="0"/>
-              <a:lumOff val="0"/>
-              <a:alphaOff val="0"/>
-            </a:schemeClr>
-          </a:solidFill>
-          <a:prstDash val="solid"/>
-          <a:miter lim="800000"/>
-        </a:ln>
-        <a:effectLst/>
-      </dsp:spPr>
-      <dsp:style>
-        <a:lnRef idx="2">
-          <a:scrgbClr r="0" g="0" b="0"/>
-        </a:lnRef>
-        <a:fillRef idx="1">
-          <a:scrgbClr r="0" g="0" b="0"/>
-        </a:fillRef>
-        <a:effectRef idx="0">
-          <a:scrgbClr r="0" g="0" b="0"/>
-        </a:effectRef>
-        <a:fontRef idx="minor"/>
-      </dsp:style>
-      <dsp:txBody>
-        <a:bodyPr spcFirstLastPara="0" vert="horz" wrap="square" lIns="99060" tIns="99060" rIns="99060" bIns="99060" numCol="1" spcCol="1270" anchor="ctr" anchorCtr="0">
-          <a:noAutofit/>
-        </a:bodyPr>
-        <a:lstStyle/>
-        <a:p>
-          <a:pPr marL="0" lvl="0" indent="0" algn="ctr" defTabSz="1155700">
-            <a:lnSpc>
-              <a:spcPct val="90000"/>
-            </a:lnSpc>
-            <a:spcBef>
-              <a:spcPct val="0"/>
-            </a:spcBef>
-            <a:spcAft>
-              <a:spcPct val="35000"/>
-            </a:spcAft>
-            <a:buNone/>
-          </a:pPr>
-          <a:r>
-            <a:rPr lang="en-US" sz="2600" kern="1200"/>
-            <a:t>- een applicatie maken om de camera’s te bekijken</a:t>
-          </a:r>
-        </a:p>
-      </dsp:txBody>
-      <dsp:txXfrm>
-        <a:off x="3780410" y="1464413"/>
-        <a:ext cx="2692288" cy="1671638"/>
-      </dsp:txXfrm>
-    </dsp:sp>
-    <dsp:sp modelId="{AF919EB4-9468-48F0-AEB8-EABA574BFC27}">
-      <dsp:nvSpPr>
-        <dsp:cNvPr id="0" name=""/>
-        <dsp:cNvSpPr/>
-      </dsp:nvSpPr>
-      <dsp:spPr>
-        <a:xfrm>
-          <a:off x="6835406" y="1117241"/>
-          <a:ext cx="2796302" cy="1775652"/>
-        </a:xfrm>
-        <a:prstGeom prst="roundRect">
-          <a:avLst>
-            <a:gd name="adj" fmla="val 10000"/>
-          </a:avLst>
-        </a:prstGeom>
-        <a:solidFill>
-          <a:schemeClr val="accent1">
-            <a:hueOff val="0"/>
-            <a:satOff val="0"/>
-            <a:lumOff val="0"/>
-            <a:alphaOff val="0"/>
-          </a:schemeClr>
-        </a:solidFill>
-        <a:ln w="19050" cap="flat" cmpd="sng" algn="ctr">
-          <a:solidFill>
-            <a:schemeClr val="lt1">
-              <a:hueOff val="0"/>
-              <a:satOff val="0"/>
-              <a:lumOff val="0"/>
-              <a:alphaOff val="0"/>
-            </a:schemeClr>
-          </a:solidFill>
-          <a:prstDash val="solid"/>
-          <a:miter lim="800000"/>
-        </a:ln>
-        <a:effectLst/>
-      </dsp:spPr>
-      <dsp:style>
-        <a:lnRef idx="3">
-          <a:scrgbClr r="0" g="0" b="0"/>
-        </a:lnRef>
-        <a:fillRef idx="1">
-          <a:scrgbClr r="0" g="0" b="0"/>
-        </a:fillRef>
-        <a:effectRef idx="1">
-          <a:scrgbClr r="0" g="0" b="0"/>
-        </a:effectRef>
-        <a:fontRef idx="minor">
-          <a:schemeClr val="lt1"/>
-        </a:fontRef>
-      </dsp:style>
-    </dsp:sp>
-    <dsp:sp modelId="{B2998A9B-6695-4891-AB1D-D70A266E270F}">
-      <dsp:nvSpPr>
-        <dsp:cNvPr id="0" name=""/>
-        <dsp:cNvSpPr/>
-      </dsp:nvSpPr>
-      <dsp:spPr>
-        <a:xfrm>
-          <a:off x="7146106" y="1412406"/>
-          <a:ext cx="2796302" cy="1775652"/>
-        </a:xfrm>
-        <a:prstGeom prst="roundRect">
-          <a:avLst>
-            <a:gd name="adj" fmla="val 10000"/>
-          </a:avLst>
-        </a:prstGeom>
-        <a:solidFill>
-          <a:schemeClr val="lt1">
-            <a:alpha val="90000"/>
-            <a:hueOff val="0"/>
-            <a:satOff val="0"/>
-            <a:lumOff val="0"/>
-            <a:alphaOff val="0"/>
-          </a:schemeClr>
-        </a:solidFill>
-        <a:ln w="12700" cap="flat" cmpd="sng" algn="ctr">
-          <a:solidFill>
-            <a:schemeClr val="accent1">
-              <a:hueOff val="0"/>
-              <a:satOff val="0"/>
-              <a:lumOff val="0"/>
-              <a:alphaOff val="0"/>
-            </a:schemeClr>
-          </a:solidFill>
-          <a:prstDash val="solid"/>
-          <a:miter lim="800000"/>
-        </a:ln>
-        <a:effectLst/>
-      </dsp:spPr>
-      <dsp:style>
-        <a:lnRef idx="2">
-          <a:scrgbClr r="0" g="0" b="0"/>
-        </a:lnRef>
-        <a:fillRef idx="1">
-          <a:scrgbClr r="0" g="0" b="0"/>
-        </a:fillRef>
-        <a:effectRef idx="0">
-          <a:scrgbClr r="0" g="0" b="0"/>
-        </a:effectRef>
-        <a:fontRef idx="minor"/>
-      </dsp:style>
-      <dsp:txBody>
-        <a:bodyPr spcFirstLastPara="0" vert="horz" wrap="square" lIns="99060" tIns="99060" rIns="99060" bIns="99060" numCol="1" spcCol="1270" anchor="ctr" anchorCtr="0">
-          <a:noAutofit/>
-        </a:bodyPr>
-        <a:lstStyle/>
-        <a:p>
-          <a:pPr marL="0" lvl="0" indent="0" algn="ctr" defTabSz="1155700">
-            <a:lnSpc>
-              <a:spcPct val="90000"/>
-            </a:lnSpc>
-            <a:spcBef>
-              <a:spcPct val="0"/>
-            </a:spcBef>
-            <a:spcAft>
-              <a:spcPct val="35000"/>
-            </a:spcAft>
-            <a:buNone/>
-          </a:pPr>
-          <a:r>
-            <a:rPr lang="en-US" sz="2600" kern="1200"/>
-            <a:t>- draadloos aan de Pi verbinden</a:t>
-          </a:r>
-        </a:p>
-      </dsp:txBody>
-      <dsp:txXfrm>
-        <a:off x="7198113" y="1464413"/>
-        <a:ext cx="2692288" cy="1671638"/>
-      </dsp:txXfrm>
-    </dsp:sp>
-  </dsp:spTree>
-</dsp:drawing>
+<file path=ppt/ink/ink3.xml><?xml version="1.0" encoding="utf-8"?>
+<inkml:ink xmlns:inkml="http://www.w3.org/2003/InkML">
+  <inkml:definitions>
+    <inkml:context xml:id="ctx0">
+      <inkml:inkSource xml:id="inkSrc0">
+        <inkml:traceFormat>
+          <inkml:channel name="X" type="integer" min="-2.14748E9" max="2.14748E9" units="cm"/>
+          <inkml:channel name="Y" type="integer" min="-2.14748E9" max="2.14748E9" units="cm"/>
+          <inkml:channel name="F" type="integer" max="32767" units="dev"/>
+        </inkml:traceFormat>
+        <inkml:channelProperties>
+          <inkml:channelProperty channel="X" name="resolution" value="1000" units="1/cm"/>
+          <inkml:channelProperty channel="Y" name="resolution" value="1000" units="1/cm"/>
+          <inkml:channelProperty channel="F" name="resolution" value="0" units="1/dev"/>
+        </inkml:channelProperties>
+      </inkml:inkSource>
+      <inkml:timestamp xml:id="ts0" timeString="2026-09-27T12:14:15.408"/>
+    </inkml:context>
+    <inkml:brush xml:id="br0">
+      <inkml:brushProperty name="width" value="0.2" units="cm"/>
+      <inkml:brushProperty name="height" value="0.2" units="cm"/>
+      <inkml:brushProperty name="color" value="#E71224"/>
+    </inkml:brush>
+  </inkml:definitions>
+  <inkml:trace contextRef="#ctx0" brushRef="#br0">22 0 24404,'0'630'0</inkml:trace>
+</inkml:ink>
 </file>
 
-<file path=ppt/diagrams/layout1.xml><?xml version="1.0" encoding="utf-8"?>
-<dgm:layoutDef xmlns:dgm="http://schemas.openxmlformats.org/drawingml/2006/diagram" xmlns:a="http://schemas.openxmlformats.org/drawingml/2006/main" uniqueId="urn:microsoft.com/office/officeart/2005/8/layout/hierarchy1">
-  <dgm:title val=""/>
-  <dgm:desc val=""/>
-  <dgm:catLst>
-    <dgm:cat type="hierarchy" pri="2000"/>
-  </dgm:catLst>
-  <dgm:sampData>
-    <dgm:dataModel>
-      <dgm:ptLst>
-        <dgm:pt modelId="0" type="doc"/>
-        <dgm:pt modelId="1">
-          <dgm:prSet phldr="1"/>
-        </dgm:pt>
-        <dgm:pt modelId="2">
-          <dgm:prSet phldr="1"/>
-        </dgm:pt>
-        <dgm:pt modelId="21">
-          <dgm:prSet phldr="1"/>
-        </dgm:pt>
-        <dgm:pt modelId="22">
-          <dgm:prSet phldr="1"/>
-        </dgm:pt>
-        <dgm:pt modelId="3">
-          <dgm:prSet phldr="1"/>
-        </dgm:pt>
-        <dgm:pt modelId="31">
-          <dgm:prSet phldr="1"/>
-        </dgm:pt>
-      </dgm:ptLst>
-      <dgm:cxnLst>
-        <dgm:cxn modelId="4" srcId="0" destId="1" srcOrd="0" destOrd="0"/>
-        <dgm:cxn modelId="5" srcId="1" destId="2" srcOrd="0" destOrd="0"/>
-        <dgm:cxn modelId="6" srcId="1" destId="3" srcOrd="1" destOrd="0"/>
-        <dgm:cxn modelId="23" srcId="2" destId="21" srcOrd="0" destOrd="0"/>
-        <dgm:cxn modelId="24" srcId="2" destId="22" srcOrd="1" destOrd="0"/>
-        <dgm:cxn modelId="33" srcId="3" destId="31" srcOrd="0" destOrd="0"/>
-      </dgm:cxnLst>
-      <dgm:bg/>
-      <dgm:whole/>
-    </dgm:dataModel>
-  </dgm:sampData>
-  <dgm:styleData>
-    <dgm:dataModel>
-      <dgm:ptLst>
-        <dgm:pt modelId="0" type="doc"/>
-        <dgm:pt modelId="1"/>
-        <dgm:pt modelId="11"/>
-        <dgm:pt modelId="12"/>
-      </dgm:ptLst>
-      <dgm:cxnLst>
-        <dgm:cxn modelId="2" srcId="0" destId="1" srcOrd="0" destOrd="0"/>
-        <dgm:cxn modelId="13" srcId="1" destId="11" srcOrd="0" destOrd="0"/>
-        <dgm:cxn modelId="14" srcId="1" destId="12" srcOrd="1" destOrd="0"/>
-      </dgm:cxnLst>
-      <dgm:bg/>
-      <dgm:whole/>
-    </dgm:dataModel>
-  </dgm:styleData>
-  <dgm:clrData>
-    <dgm:dataModel>
-      <dgm:ptLst>
-        <dgm:pt modelId="0" type="doc"/>
-        <dgm:pt modelId="1"/>
-        <dgm:pt modelId="2"/>
-        <dgm:pt modelId="21"/>
-        <dgm:pt modelId="211"/>
-        <dgm:pt modelId="3"/>
-        <dgm:pt modelId="31"/>
-        <dgm:pt modelId="311"/>
-      </dgm:ptLst>
-      <dgm:cxnLst>
-        <dgm:cxn modelId="4" srcId="0" destId="1" srcOrd="0" destOrd="0"/>
-        <dgm:cxn modelId="5" srcId="1" destId="2" srcOrd="0" destOrd="0"/>
-        <dgm:cxn modelId="6" srcId="1" destId="3" srcOrd="1" destOrd="0"/>
-        <dgm:cxn modelId="23" srcId="2" destId="21" srcOrd="0" destOrd="0"/>
-        <dgm:cxn modelId="24" srcId="21" destId="211" srcOrd="0" destOrd="0"/>
-        <dgm:cxn modelId="33" srcId="3" destId="31" srcOrd="0" destOrd="0"/>
-        <dgm:cxn modelId="34" srcId="31" destId="311" srcOrd="0" destOrd="0"/>
-      </dgm:cxnLst>
-      <dgm:bg/>
-      <dgm:whole/>
-    </dgm:dataModel>
-  </dgm:clrData>
-  <dgm:layoutNode name="hierChild1">
-    <dgm:varLst>
-      <dgm:chPref val="1"/>
-      <dgm:dir/>
-      <dgm:animOne val="branch"/>
-      <dgm:animLvl val="lvl"/>
-      <dgm:resizeHandles/>
-    </dgm:varLst>
-    <dgm:choose name="Name0">
-      <dgm:if name="Name1" func="var" arg="dir" op="equ" val="norm">
-        <dgm:alg type="hierChild">
-          <dgm:param type="linDir" val="fromL"/>
-        </dgm:alg>
-      </dgm:if>
-      <dgm:else name="Name2">
-        <dgm:alg type="hierChild">
-          <dgm:param type="linDir" val="fromR"/>
-        </dgm:alg>
-      </dgm:else>
-    </dgm:choose>
-    <dgm:shape xmlns:r="http://schemas.openxmlformats.org/officeDocument/2006/relationships" r:blip="">
-      <dgm:adjLst/>
-    </dgm:shape>
-    <dgm:presOf/>
-    <dgm:constrLst>
-      <dgm:constr type="primFontSz" for="des" ptType="node" op="equ" val="65"/>
-      <dgm:constr type="w" for="des" forName="composite" refType="w"/>
-      <dgm:constr type="h" for="des" forName="composite" refType="w" refFor="des" refForName="composite" fact="0.667"/>
-      <dgm:constr type="w" for="des" forName="composite2" refType="w" refFor="des" refForName="composite"/>
-      <dgm:constr type="h" for="des" forName="composite2" refType="h" refFor="des" refForName="composite"/>
-      <dgm:constr type="w" for="des" forName="composite3" refType="w" refFor="des" refForName="composite"/>
-      <dgm:constr type="h" for="des" forName="composite3" refType="h" refFor="des" refForName="composite"/>
-      <dgm:constr type="w" for="des" forName="composite4" refType="w" refFor="des" refForName="composite"/>
-      <dgm:constr type="h" for="des" forName="composite4" refType="h" refFor="des" refForName="composite"/>
-      <dgm:constr type="w" for="des" forName="composite5" refType="w" refFor="des" refForName="composite"/>
-      <dgm:constr type="h" for="des" forName="composite5" refType="h" refFor="des" refForName="composite"/>
-      <dgm:constr type="sibSp" refType="w" refFor="des" refForName="composite" fact="0.1"/>
-      <dgm:constr type="sibSp" for="des" forName="hierChild2" refType="sibSp"/>
-      <dgm:constr type="sibSp" for="des" forName="hierChild3" refType="sibSp"/>
-      <dgm:constr type="sibSp" for="des" forName="hierChild4" refType="sibSp"/>
-      <dgm:constr type="sibSp" for="des" forName="hierChild5" refType="sibSp"/>
-      <dgm:constr type="sibSp" for="des" forName="hierChild6" refType="sibSp"/>
-      <dgm:constr type="sp" for="des" forName="hierRoot1" refType="h" refFor="des" refForName="composite" fact="0.25"/>
-      <dgm:constr type="sp" for="des" forName="hierRoot2" refType="sp" refFor="des" refForName="hierRoot1"/>
-      <dgm:constr type="sp" for="des" forName="hierRoot3" refType="sp" refFor="des" refForName="hierRoot1"/>
-      <dgm:constr type="sp" for="des" forName="hierRoot4" refType="sp" refFor="des" refForName="hierRoot1"/>
-      <dgm:constr type="sp" for="des" forName="hierRoot5" refType="sp" refFor="des" refForName="hierRoot1"/>
-    </dgm:constrLst>
-    <dgm:ruleLst/>
-    <dgm:forEach name="Name3" axis="ch">
-      <dgm:forEach name="Name4" axis="self" ptType="node">
-        <dgm:layoutNode name="hierRoot1">
-          <dgm:alg type="hierRoot"/>
-          <dgm:shape xmlns:r="http://schemas.openxmlformats.org/officeDocument/2006/relationships" r:blip="">
-            <dgm:adjLst/>
-          </dgm:shape>
-          <dgm:presOf/>
-          <dgm:constrLst>
-            <dgm:constr type="bendDist" for="des" ptType="parTrans" refType="sp" fact="0.5"/>
-          </dgm:constrLst>
-          <dgm:ruleLst/>
-          <dgm:layoutNode name="composite">
-            <dgm:alg type="composite"/>
-            <dgm:shape xmlns:r="http://schemas.openxmlformats.org/officeDocument/2006/relationships" r:blip="">
-              <dgm:adjLst/>
-            </dgm:shape>
-            <dgm:presOf/>
-            <dgm:constrLst>
-              <dgm:constr type="w" for="ch" forName="background" refType="w" fact="0.9"/>
-              <dgm:constr type="h" for="ch" forName="background" refType="w" refFor="ch" refForName="background" fact="0.635"/>
-              <dgm:constr type="t" for="ch" forName="background"/>
-              <dgm:constr type="l" for="ch" forName="background"/>
-              <dgm:constr type="w" for="ch" forName="text" refType="w" fact="0.9"/>
-              <dgm:constr type="h" for="ch" forName="text" refType="w" refFor="ch" refForName="text" fact="0.635"/>
-              <dgm:constr type="t" for="ch" forName="text" refType="w" fact="0.095"/>
-              <dgm:constr type="l" for="ch" forName="text" refType="w" fact="0.1"/>
-            </dgm:constrLst>
-            <dgm:ruleLst/>
-            <dgm:layoutNode name="background" styleLbl="node0" moveWith="text">
-              <dgm:alg type="sp"/>
-              <dgm:shape xmlns:r="http://schemas.openxmlformats.org/officeDocument/2006/relationships" type="roundRect" r:blip="">
-                <dgm:adjLst>
-                  <dgm:adj idx="1" val="0.1"/>
-                </dgm:adjLst>
-              </dgm:shape>
-              <dgm:presOf/>
-              <dgm:constrLst/>
-              <dgm:ruleLst/>
-            </dgm:layoutNode>
-            <dgm:layoutNode name="text" styleLbl="fgAcc0">
-              <dgm:varLst>
-                <dgm:chPref val="3"/>
-              </dgm:varLst>
-              <dgm:alg type="tx"/>
-              <dgm:shape xmlns:r="http://schemas.openxmlformats.org/officeDocument/2006/relationships" type="roundRect" r:blip="">
-                <dgm:adjLst>
-                  <dgm:adj idx="1" val="0.1"/>
-                </dgm:adjLst>
-              </dgm:shape>
-              <dgm:presOf axis="self"/>
-              <dgm:constrLst>
-                <dgm:constr type="tMarg" refType="primFontSz" fact="0.3"/>
-                <dgm:constr type="bMarg" refType="primFontSz" fact="0.3"/>
-                <dgm:constr type="lMarg" refType="primFontSz" fact="0.3"/>
-                <dgm:constr type="rMarg" refType="primFontSz" fact="0.3"/>
-              </dgm:constrLst>
-              <dgm:ruleLst>
-                <dgm:rule type="primFontSz" val="5" fact="NaN" max="NaN"/>
-              </dgm:ruleLst>
-            </dgm:layoutNode>
-          </dgm:layoutNode>
-          <dgm:layoutNode name="hierChild2">
-            <dgm:choose name="Name5">
-              <dgm:if name="Name6" func="var" arg="dir" op="equ" val="norm">
-                <dgm:alg type="hierChild">
-                  <dgm:param type="linDir" val="fromL"/>
-                </dgm:alg>
-              </dgm:if>
-              <dgm:else name="Name7">
-                <dgm:alg type="hierChild">
-                  <dgm:param type="linDir" val="fromR"/>
-                </dgm:alg>
-              </dgm:else>
-            </dgm:choose>
-            <dgm:shape xmlns:r="http://schemas.openxmlformats.org/officeDocument/2006/relationships" r:blip="">
-              <dgm:adjLst/>
-            </dgm:shape>
-            <dgm:presOf/>
-            <dgm:constrLst/>
-            <dgm:ruleLst/>
-            <dgm:forEach name="Name8" axis="ch">
-              <dgm:forEach name="Name9" axis="self" ptType="parTrans" cnt="1">
-                <dgm:layoutNode name="Name10">
-                  <dgm:alg type="conn">
-                    <dgm:param type="dim" val="1D"/>
-                    <dgm:param type="endSty" val="noArr"/>
-                    <dgm:param type="connRout" val="bend"/>
-                    <dgm:param type="bendPt" val="end"/>
-                    <dgm:param type="begPts" val="bCtr"/>
-                    <dgm:param type="endPts" val="tCtr"/>
-                    <dgm:param type="srcNode" val="background"/>
-                    <dgm:param type="dstNode" val="background2"/>
-                  </dgm:alg>
-                  <dgm:shape xmlns:r="http://schemas.openxmlformats.org/officeDocument/2006/relationships" type="conn" r:blip="" zOrderOff="-999">
-                    <dgm:adjLst/>
-                  </dgm:shape>
-                  <dgm:presOf axis="self"/>
-                  <dgm:constrLst>
-                    <dgm:constr type="begPad"/>
-                    <dgm:constr type="endPad"/>
-                  </dgm:constrLst>
-                  <dgm:ruleLst/>
-                </dgm:layoutNode>
-              </dgm:forEach>
-              <dgm:forEach name="Name11" axis="self" ptType="node">
-                <dgm:layoutNode name="hierRoot2">
-                  <dgm:alg type="hierRoot"/>
-                  <dgm:shape xmlns:r="http://schemas.openxmlformats.org/officeDocument/2006/relationships" r:blip="">
-                    <dgm:adjLst/>
-                  </dgm:shape>
-                  <dgm:presOf/>
-                  <dgm:constrLst>
-                    <dgm:constr type="bendDist" for="des" ptType="parTrans" refType="sp" fact="0.5"/>
-                  </dgm:constrLst>
-                  <dgm:ruleLst/>
-                  <dgm:layoutNode name="composite2">
-                    <dgm:alg type="composite"/>
-                    <dgm:shape xmlns:r="http://schemas.openxmlformats.org/officeDocument/2006/relationships" r:blip="">
-                      <dgm:adjLst/>
-                    </dgm:shape>
-                    <dgm:presOf/>
-                    <dgm:constrLst>
-                      <dgm:constr type="w" for="ch" forName="background2" refType="w" fact="0.9"/>
-                      <dgm:constr type="h" for="ch" forName="background2" refType="w" refFor="ch" refForName="background2" fact="0.635"/>
-                      <dgm:constr type="t" for="ch" forName="background2"/>
-                      <dgm:constr type="l" for="ch" forName="background2"/>
-                      <dgm:constr type="w" for="ch" forName="text2" refType="w" fact="0.9"/>
-                      <dgm:constr type="h" for="ch" forName="text2" refType="w" refFor="ch" refForName="text2" fact="0.635"/>
-                      <dgm:constr type="t" for="ch" forName="text2" refType="w" fact="0.095"/>
-                      <dgm:constr type="l" for="ch" forName="text2" refType="w" fact="0.1"/>
-                    </dgm:constrLst>
-                    <dgm:ruleLst/>
-                    <dgm:layoutNode name="background2" moveWith="text2">
-                      <dgm:alg type="sp"/>
-                      <dgm:shape xmlns:r="http://schemas.openxmlformats.org/officeDocument/2006/relationships" type="roundRect" r:blip="">
-                        <dgm:adjLst>
-                          <dgm:adj idx="1" val="0.1"/>
-                        </dgm:adjLst>
-                      </dgm:shape>
-                      <dgm:presOf/>
-                      <dgm:constrLst/>
-                      <dgm:ruleLst/>
-                    </dgm:layoutNode>
-                    <dgm:layoutNode name="text2" styleLbl="fgAcc2">
-                      <dgm:varLst>
-                        <dgm:chPref val="3"/>
-                      </dgm:varLst>
-                      <dgm:alg type="tx"/>
-                      <dgm:shape xmlns:r="http://schemas.openxmlformats.org/officeDocument/2006/relationships" type="roundRect" r:blip="">
-                        <dgm:adjLst>
-                          <dgm:adj idx="1" val="0.1"/>
-                        </dgm:adjLst>
-                      </dgm:shape>
-                      <dgm:presOf axis="self"/>
-                      <dgm:constrLst>
-                        <dgm:constr type="tMarg" refType="primFontSz" fact="0.3"/>
-                        <dgm:constr type="bMarg" refType="primFontSz" fact="0.3"/>
-                        <dgm:constr type="lMarg" refType="primFontSz" fact="0.3"/>
-                        <dgm:constr type="rMarg" refType="primFontSz" fact="0.3"/>
-                      </dgm:constrLst>
-                      <dgm:ruleLst>
-                        <dgm:rule type="primFontSz" val="5" fact="NaN" max="NaN"/>
-                      </dgm:ruleLst>
-                    </dgm:layoutNode>
-                  </dgm:layoutNode>
-                  <dgm:layoutNode name="hierChild3">
-                    <dgm:choose name="Name12">
-                      <dgm:if name="Name13" func="var" arg="dir" op="equ" val="norm">
-                        <dgm:alg type="hierChild">
-                          <dgm:param type="linDir" val="fromL"/>
-                        </dgm:alg>
-                      </dgm:if>
-                      <dgm:else name="Name14">
-                        <dgm:alg type="hierChild">
-                          <dgm:param type="linDir" val="fromR"/>
-                        </dgm:alg>
-                      </dgm:else>
-                    </dgm:choose>
-                    <dgm:shape xmlns:r="http://schemas.openxmlformats.org/officeDocument/2006/relationships" r:blip="">
-                      <dgm:adjLst/>
-                    </dgm:shape>
-                    <dgm:presOf/>
-                    <dgm:constrLst/>
-                    <dgm:ruleLst/>
-                    <dgm:forEach name="Name15" axis="ch">
-                      <dgm:forEach name="Name16" axis="self" ptType="parTrans" cnt="1">
-                        <dgm:layoutNode name="Name17">
-                          <dgm:alg type="conn">
-                            <dgm:param type="dim" val="1D"/>
-                            <dgm:param type="endSty" val="noArr"/>
-                            <dgm:param type="connRout" val="bend"/>
-                            <dgm:param type="bendPt" val="end"/>
-                            <dgm:param type="begPts" val="bCtr"/>
-                            <dgm:param type="endPts" val="tCtr"/>
-                            <dgm:param type="srcNode" val="background2"/>
-                            <dgm:param type="dstNode" val="background3"/>
-                          </dgm:alg>
-                          <dgm:shape xmlns:r="http://schemas.openxmlformats.org/officeDocument/2006/relationships" type="conn" r:blip="" zOrderOff="-999">
-                            <dgm:adjLst/>
-                          </dgm:shape>
-                          <dgm:presOf axis="self"/>
-                          <dgm:constrLst>
-                            <dgm:constr type="begPad"/>
-                            <dgm:constr type="endPad"/>
-                          </dgm:constrLst>
-                          <dgm:ruleLst/>
-                        </dgm:layoutNode>
-                      </dgm:forEach>
-                      <dgm:forEach name="Name18" axis="self" ptType="node">
-                        <dgm:layoutNode name="hierRoot3">
-                          <dgm:alg type="hierRoot"/>
-                          <dgm:shape xmlns:r="http://schemas.openxmlformats.org/officeDocument/2006/relationships" r:blip="">
-                            <dgm:adjLst/>
-                          </dgm:shape>
-                          <dgm:presOf/>
-                          <dgm:constrLst>
-                            <dgm:constr type="bendDist" for="des" ptType="parTrans" refType="sp" fact="0.5"/>
-                          </dgm:constrLst>
-                          <dgm:ruleLst/>
-                          <dgm:layoutNode name="composite3">
-                            <dgm:alg type="composite"/>
-                            <dgm:shape xmlns:r="http://schemas.openxmlformats.org/officeDocument/2006/relationships" r:blip="">
-                              <dgm:adjLst/>
-                            </dgm:shape>
-                            <dgm:presOf/>
-                            <dgm:constrLst>
-                              <dgm:constr type="w" for="ch" forName="background3" refType="w" fact="0.9"/>
-                              <dgm:constr type="h" for="ch" forName="background3" refType="w" refFor="ch" refForName="background3" fact="0.635"/>
-                              <dgm:constr type="t" for="ch" forName="background3"/>
-                              <dgm:constr type="l" for="ch" forName="background3"/>
-                              <dgm:constr type="w" for="ch" forName="text3" refType="w" fact="0.9"/>
-                              <dgm:constr type="h" for="ch" forName="text3" refType="w" refFor="ch" refForName="text3" fact="0.635"/>
-                              <dgm:constr type="t" for="ch" forName="text3" refType="w" fact="0.095"/>
-                              <dgm:constr type="l" for="ch" forName="text3" refType="w" fact="0.1"/>
-                            </dgm:constrLst>
-                            <dgm:ruleLst/>
-                            <dgm:layoutNode name="background3" moveWith="text3">
-                              <dgm:alg type="sp"/>
-                              <dgm:shape xmlns:r="http://schemas.openxmlformats.org/officeDocument/2006/relationships" type="roundRect" r:blip="">
-                                <dgm:adjLst>
-                                  <dgm:adj idx="1" val="0.1"/>
-                                </dgm:adjLst>
-                              </dgm:shape>
-                              <dgm:presOf/>
-                              <dgm:constrLst/>
-                              <dgm:ruleLst/>
-                            </dgm:layoutNode>
-                            <dgm:layoutNode name="text3" styleLbl="fgAcc3">
-                              <dgm:varLst>
-                                <dgm:chPref val="3"/>
-                              </dgm:varLst>
-                              <dgm:alg type="tx"/>
-                              <dgm:shape xmlns:r="http://schemas.openxmlformats.org/officeDocument/2006/relationships" type="roundRect" r:blip="">
-                                <dgm:adjLst>
-                                  <dgm:adj idx="1" val="0.1"/>
-                                </dgm:adjLst>
-                              </dgm:shape>
-                              <dgm:presOf axis="self"/>
-                              <dgm:constrLst>
-                                <dgm:constr type="tMarg" refType="primFontSz" fact="0.3"/>
-                                <dgm:constr type="bMarg" refType="primFontSz" fact="0.3"/>
-                                <dgm:constr type="lMarg" refType="primFontSz" fact="0.3"/>
-                                <dgm:constr type="rMarg" refType="primFontSz" fact="0.3"/>
-                              </dgm:constrLst>
-                              <dgm:ruleLst>
-                                <dgm:rule type="primFontSz" val="5" fact="NaN" max="NaN"/>
-                              </dgm:ruleLst>
-                            </dgm:layoutNode>
-                          </dgm:layoutNode>
-                          <dgm:layoutNode name="hierChild4">
-                            <dgm:choose name="Name19">
-                              <dgm:if name="Name20" func="var" arg="dir" op="equ" val="norm">
-                                <dgm:alg type="hierChild">
-                                  <dgm:param type="linDir" val="fromL"/>
-                                </dgm:alg>
-                              </dgm:if>
-                              <dgm:else name="Name21">
-                                <dgm:alg type="hierChild">
-                                  <dgm:param type="linDir" val="fromR"/>
-                                </dgm:alg>
-                              </dgm:else>
-                            </dgm:choose>
-                            <dgm:shape xmlns:r="http://schemas.openxmlformats.org/officeDocument/2006/relationships" r:blip="">
-                              <dgm:adjLst/>
-                            </dgm:shape>
-                            <dgm:presOf/>
-                            <dgm:constrLst/>
-                            <dgm:ruleLst/>
-                            <dgm:forEach name="repeat" axis="ch">
-                              <dgm:forEach name="Name22" axis="self" ptType="parTrans" cnt="1">
-                                <dgm:layoutNode name="Name23">
-                                  <dgm:choose name="Name24">
-                                    <dgm:if name="Name25" axis="self" func="depth" op="lte" val="4">
-                                      <dgm:alg type="conn">
-                                        <dgm:param type="dim" val="1D"/>
-                                        <dgm:param type="endSty" val="noArr"/>
-                                        <dgm:param type="connRout" val="bend"/>
-                                        <dgm:param type="bendPt" val="end"/>
-                                        <dgm:param type="begPts" val="bCtr"/>
-                                        <dgm:param type="endPts" val="tCtr"/>
-                                        <dgm:param type="srcNode" val="background3"/>
-                                        <dgm:param type="dstNode" val="background4"/>
-                                      </dgm:alg>
-                                    </dgm:if>
-                                    <dgm:else name="Name26">
-                                      <dgm:alg type="conn">
-                                        <dgm:param type="dim" val="1D"/>
-                                        <dgm:param type="endSty" val="noArr"/>
-                                        <dgm:param type="connRout" val="bend"/>
-                                        <dgm:param type="bendPt" val="end"/>
-                                        <dgm:param type="begPts" val="bCtr"/>
-                                        <dgm:param type="endPts" val="tCtr"/>
-                                        <dgm:param type="srcNode" val="background4"/>
-                                        <dgm:param type="dstNode" val="background4"/>
-                                      </dgm:alg>
-                                    </dgm:else>
-                                  </dgm:choose>
-                                  <dgm:shape xmlns:r="http://schemas.openxmlformats.org/officeDocument/2006/relationships" type="conn" r:blip="" zOrderOff="-999">
-                                    <dgm:adjLst/>
-                                  </dgm:shape>
-                                  <dgm:presOf axis="self"/>
-                                  <dgm:constrLst>
-                                    <dgm:constr type="begPad"/>
-                                    <dgm:constr type="endPad"/>
-                                  </dgm:constrLst>
-                                  <dgm:ruleLst/>
-                                </dgm:layoutNode>
-                              </dgm:forEach>
-                              <dgm:forEach name="Name27" axis="self" ptType="node">
-                                <dgm:layoutNode name="hierRoot4">
-                                  <dgm:alg type="hierRoot"/>
-                                  <dgm:shape xmlns:r="http://schemas.openxmlformats.org/officeDocument/2006/relationships" r:blip="">
-                                    <dgm:adjLst/>
-                                  </dgm:shape>
-                                  <dgm:presOf/>
-                                  <dgm:constrLst>
-                                    <dgm:constr type="bendDist" for="des" ptType="parTrans" refType="sp" fact="0.5"/>
-                                  </dgm:constrLst>
-                                  <dgm:ruleLst/>
-                                  <dgm:layoutNode name="composite4">
-                                    <dgm:alg type="composite"/>
-                                    <dgm:shape xmlns:r="http://schemas.openxmlformats.org/officeDocument/2006/relationships" r:blip="">
-                                      <dgm:adjLst/>
-                                    </dgm:shape>
-                                    <dgm:presOf/>
-                                    <dgm:constrLst>
-                                      <dgm:constr type="w" for="ch" forName="background4" refType="w" fact="0.9"/>
-                                      <dgm:constr type="h" for="ch" forName="background4" refType="w" refFor="ch" refForName="background4" fact="0.635"/>
-                                      <dgm:constr type="t" for="ch" forName="background4"/>
-                                      <dgm:constr type="l" for="ch" forName="background4"/>
-                                      <dgm:constr type="w" for="ch" forName="text4" refType="w" fact="0.9"/>
-                                      <dgm:constr type="h" for="ch" forName="text4" refType="w" refFor="ch" refForName="text4" fact="0.635"/>
-                                      <dgm:constr type="t" for="ch" forName="text4" refType="w" fact="0.095"/>
-                                      <dgm:constr type="l" for="ch" forName="text4" refType="w" fact="0.1"/>
-                                    </dgm:constrLst>
-                                    <dgm:ruleLst/>
-                                    <dgm:layoutNode name="background4" moveWith="text4">
-                                      <dgm:alg type="sp"/>
-                                      <dgm:shape xmlns:r="http://schemas.openxmlformats.org/officeDocument/2006/relationships" type="roundRect" r:blip="">
-                                        <dgm:adjLst>
-                                          <dgm:adj idx="1" val="0.1"/>
-                                        </dgm:adjLst>
-                                      </dgm:shape>
-                                      <dgm:presOf/>
-                                      <dgm:constrLst/>
-                                      <dgm:ruleLst/>
-                                    </dgm:layoutNode>
-                                    <dgm:layoutNode name="text4" styleLbl="fgAcc4">
-                                      <dgm:varLst>
-                                        <dgm:chPref val="3"/>
-                                      </dgm:varLst>
-                                      <dgm:alg type="tx"/>
-                                      <dgm:shape xmlns:r="http://schemas.openxmlformats.org/officeDocument/2006/relationships" type="roundRect" r:blip="">
-                                        <dgm:adjLst>
-                                          <dgm:adj idx="1" val="0.1"/>
-                                        </dgm:adjLst>
-                                      </dgm:shape>
-                                      <dgm:presOf axis="self"/>
-                                      <dgm:constrLst>
-                                        <dgm:constr type="tMarg" refType="primFontSz" fact="0.3"/>
-                                        <dgm:constr type="bMarg" refType="primFontSz" fact="0.3"/>
-                                        <dgm:constr type="lMarg" refType="primFontSz" fact="0.3"/>
-                                        <dgm:constr type="rMarg" refType="primFontSz" fact="0.3"/>
-                                      </dgm:constrLst>
-                                      <dgm:ruleLst>
-                                        <dgm:rule type="primFontSz" val="5" fact="NaN" max="NaN"/>
-                                      </dgm:ruleLst>
-                                    </dgm:layoutNode>
-                                  </dgm:layoutNode>
-                                  <dgm:layoutNode name="hierChild5">
-                                    <dgm:choose name="Name28">
-                                      <dgm:if name="Name29" func="var" arg="dir" op="equ" val="norm">
-                                        <dgm:alg type="hierChild">
-                                          <dgm:param type="linDir" val="fromL"/>
-                                        </dgm:alg>
-                                      </dgm:if>
-                                      <dgm:else name="Name30">
-                                        <dgm:alg type="hierChild">
-                                          <dgm:param type="linDir" val="fromR"/>
-                                        </dgm:alg>
-                                      </dgm:else>
-                                    </dgm:choose>
-                                    <dgm:shape xmlns:r="http://schemas.openxmlformats.org/officeDocument/2006/relationships" r:blip="">
-                                      <dgm:adjLst/>
-                                    </dgm:shape>
-                                    <dgm:presOf/>
-                                    <dgm:constrLst/>
-                                    <dgm:ruleLst/>
-                                    <dgm:forEach name="Name31" ref="repeat"/>
-                                  </dgm:layoutNode>
-                                </dgm:layoutNode>
-                              </dgm:forEach>
-                            </dgm:forEach>
-                          </dgm:layoutNode>
-                        </dgm:layoutNode>
-                      </dgm:forEach>
-                    </dgm:forEach>
-                  </dgm:layoutNode>
-                </dgm:layoutNode>
-              </dgm:forEach>
-            </dgm:forEach>
-          </dgm:layoutNode>
-        </dgm:layoutNode>
-      </dgm:forEach>
-    </dgm:forEach>
-  </dgm:layoutNode>
-</dgm:layoutDef>
-</file>
-
-<file path=ppt/diagrams/quickStyle1.xml><?xml version="1.0" encoding="utf-8"?>
-<dgm:styleDef xmlns:dgm="http://schemas.openxmlformats.org/drawingml/2006/diagram" xmlns:a="http://schemas.openxmlformats.org/drawingml/2006/main" uniqueId="urn:microsoft.com/office/officeart/2005/8/quickstyle/simple2#5">
-  <dgm:title val=""/>
-  <dgm:desc val=""/>
-  <dgm:catLst>
-    <dgm:cat type="simple" pri="10200"/>
-  </dgm:catLst>
-  <dgm:scene3d>
-    <a:camera prst="orthographicFront"/>
-    <a:lightRig rig="threePt" dir="t"/>
-  </dgm:scene3d>
-  <dgm:styleLbl name="node0">
-    <dgm:scene3d>
-      <a:camera prst="orthographicFront"/>
-      <a:lightRig rig="threePt" dir="t"/>
-    </dgm:scene3d>
-    <dgm:sp3d/>
-    <dgm:txPr/>
-    <dgm:style>
-      <a:lnRef idx="3">
-        <a:scrgbClr r="0" g="0" b="0"/>
-      </a:lnRef>
-      <a:fillRef idx="1">
-        <a:scrgbClr r="0" g="0" b="0"/>
-      </a:fillRef>
-      <a:effectRef idx="1">
-        <a:scrgbClr r="0" g="0" b="0"/>
-      </a:effectRef>
-      <a:fontRef idx="minor">
-        <a:schemeClr val="lt1"/>
-      </a:fontRef>
-    </dgm:style>
-  </dgm:styleLbl>
-  <dgm:styleLbl name="lnNode1">
-    <dgm:scene3d>
-      <a:camera prst="orthographicFront"/>
-      <a:lightRig rig="threePt" dir="t"/>
-    </dgm:scene3d>
-    <dgm:sp3d/>
-    <dgm:txPr/>
-    <dgm:style>
-      <a:lnRef idx="3">
-        <a:scrgbClr r="0" g="0" b="0"/>
-      </a:lnRef>
-      <a:fillRef idx="1">
-        <a:scrgbClr r="0" g="0" b="0"/>
-      </a:fillRef>
-      <a:effectRef idx="1">
-        <a:scrgbClr r="0" g="0" b="0"/>
-      </a:effectRef>
-      <a:fontRef idx="minor">
-        <a:schemeClr val="lt1"/>
-      </a:fontRef>
-    </dgm:style>
-  </dgm:styleLbl>
-  <dgm:styleLbl name="vennNode1">
-    <dgm:scene3d>
-      <a:camera prst="orthographicFront"/>
-      <a:lightRig rig="threePt" dir="t"/>
-    </dgm:scene3d>
-    <dgm:sp3d/>
-    <dgm:txPr/>
-    <dgm:style>
-      <a:lnRef idx="3">
-        <a:scrgbClr r="0" g="0" b="0"/>
-      </a:lnRef>
-      <a:fillRef idx="1">
-        <a:scrgbClr r="0" g="0" b="0"/>
-      </a:fillRef>
-      <a:effectRef idx="0">
-        <a:scrgbClr r="0" g="0" b="0"/>
-      </a:effectRef>
-      <a:fontRef idx="minor">
-        <a:schemeClr val="tx1"/>
-      </a:fontRef>
-    </dgm:style>
-  </dgm:styleLbl>
-  <dgm:styleLbl name="alignNode1">
-    <dgm:scene3d>
-      <a:camera prst="orthographicFront"/>
-      <a:lightRig rig="threePt" dir="t"/>
-    </dgm:scene3d>
-    <dgm:sp3d/>
-    <dgm:txPr/>
-    <dgm:style>
-      <a:lnRef idx="2">
-        <a:scrgbClr r="0" g="0" b="0"/>
-      </a:lnRef>
-      <a:fillRef idx="1">
-        <a:scrgbClr r="0" g="0" b="0"/>
-      </a:fillRef>
-      <a:effectRef idx="1">
-        <a:scrgbClr r="0" g="0" b="0"/>
-      </a:effectRef>
-      <a:fontRef idx="minor">
-        <a:schemeClr val="lt1"/>
-      </a:fontRef>
-    </dgm:style>
-  </dgm:styleLbl>
-  <dgm:styleLbl name="node1">
-    <dgm:scene3d>
-      <a:camera prst="orthographicFront"/>
-      <a:lightRig rig="threePt" dir="t"/>
-    </dgm:scene3d>
-    <dgm:sp3d/>
-    <dgm:txPr/>
-    <dgm:style>
-      <a:lnRef idx="3">
-        <a:scrgbClr r="0" g="0" b="0"/>
-      </a:lnRef>
-      <a:fillRef idx="1">
-        <a:scrgbClr r="0" g="0" b="0"/>
-      </a:fillRef>
-      <a:effectRef idx="1">
-        <a:scrgbClr r="0" g="0" b="0"/>
-      </a:effectRef>
-      <a:fontRef idx="minor">
-        <a:schemeClr val="lt1"/>
-      </a:fontRef>
-    </dgm:style>
-  </dgm:styleLbl>
-  <dgm:styleLbl name="node2">
-    <dgm:scene3d>
-      <a:camera prst="orthographicFront"/>
-      <a:lightRig rig="threePt" dir="t"/>
-    </dgm:scene3d>
-    <dgm:sp3d/>
-    <dgm:txPr/>
-    <dgm:style>
-      <a:lnRef idx="3">
-        <a:scrgbClr r="0" g="0" b="0"/>
-      </a:lnRef>
-      <a:fillRef idx="1">
-        <a:scrgbClr r="0" g="0" b="0"/>
-      </a:fillRef>
-      <a:effectRef idx="1">
-        <a:scrgbClr r="0" g="0" b="0"/>
-      </a:effectRef>
-      <a:fontRef idx="minor">
-        <a:schemeClr val="lt1"/>
-      </a:fontRef>
-    </dgm:style>
-  </dgm:styleLbl>
-  <dgm:styleLbl name="node3">
-    <dgm:scene3d>
-      <a:camera prst="orthographicFront"/>
-      <a:lightRig rig="threePt" dir="t"/>
-    </dgm:scene3d>
-    <dgm:sp3d/>
-    <dgm:txPr/>
-    <dgm:style>
-      <a:lnRef idx="3">
-        <a:scrgbClr r="0" g="0" b="0"/>
-      </a:lnRef>
-      <a:fillRef idx="1">
-        <a:scrgbClr r="0" g="0" b="0"/>
-      </a:fillRef>
-      <a:effectRef idx="1">
-        <a:scrgbClr r="0" g="0" b="0"/>
-      </a:effectRef>
-      <a:fontRef idx="minor">
-        <a:schemeClr val="lt1"/>
-      </a:fontRef>
-    </dgm:style>
-  </dgm:styleLbl>
-  <dgm:styleLbl name="node4">
-    <dgm:scene3d>
-      <a:camera prst="orthographicFront"/>
-      <a:lightRig rig="threePt" dir="t"/>
-    </dgm:scene3d>
-    <dgm:sp3d/>
-    <dgm:txPr/>
-    <dgm:style>
-      <a:lnRef idx="3">
-        <a:scrgbClr r="0" g="0" b="0"/>
-      </a:lnRef>
-      <a:fillRef idx="1">
-        <a:scrgbClr r="0" g="0" b="0"/>
-      </a:fillRef>
-      <a:effectRef idx="1">
-        <a:scrgbClr r="0" g="0" b="0"/>
-      </a:effectRef>
-      <a:fontRef idx="minor">
-        <a:schemeClr val="lt1"/>
-      </a:fontRef>
-    </dgm:style>
-  </dgm:styleLbl>
-  <dgm:styleLbl name="fgImgPlace1">
-    <dgm:scene3d>
-      <a:camera prst="orthographicFront"/>
-      <a:lightRig rig="threePt" dir="t"/>
-    </dgm:scene3d>
-    <dgm:sp3d/>
-    <dgm:txPr/>
-    <dgm:style>
-      <a:lnRef idx="3">
-        <a:scrgbClr r="0" g="0" b="0"/>
-      </a:lnRef>
-      <a:fillRef idx="1">
-        <a:scrgbClr r="0" g="0" b="0"/>
-      </a:fillRef>
-      <a:effectRef idx="1">
-        <a:scrgbClr r="0" g="0" b="0"/>
-      </a:effectRef>
-      <a:fontRef idx="minor"/>
-    </dgm:style>
-  </dgm:styleLbl>
-  <dgm:styleLbl name="alignImgPlace1">
-    <dgm:scene3d>
-      <a:camera prst="orthographicFront"/>
-      <a:lightRig rig="threePt" dir="t"/>
-    </dgm:scene3d>
-    <dgm:sp3d/>
-    <dgm:txPr/>
-    <dgm:style>
-      <a:lnRef idx="3">
-        <a:scrgbClr r="0" g="0" b="0"/>
-      </a:lnRef>
-      <a:fillRef idx="1">
-        <a:scrgbClr r="0" g="0" b="0"/>
-      </a:fillRef>
-      <a:effectRef idx="1">
-        <a:scrgbClr r="0" g="0" b="0"/>
-      </a:effectRef>
-      <a:fontRef idx="minor"/>
-    </dgm:style>
-  </dgm:styleLbl>
-  <dgm:styleLbl name="bgImgPlace1">
-    <dgm:scene3d>
-      <a:camera prst="orthographicFront"/>
-      <a:lightRig rig="threePt" dir="t"/>
-    </dgm:scene3d>
-    <dgm:sp3d/>
-    <dgm:txPr/>
-    <dgm:style>
-      <a:lnRef idx="3">
-        <a:scrgbClr r="0" g="0" b="0"/>
-      </a:lnRef>
-      <a:fillRef idx="1">
-        <a:scrgbClr r="0" g="0" b="0"/>
-      </a:fillRef>
-      <a:effectRef idx="1">
-        <a:scrgbClr r="0" g="0" b="0"/>
-      </a:effectRef>
-      <a:fontRef idx="minor"/>
-    </dgm:style>
-  </dgm:styleLbl>
-  <dgm:styleLbl name="sibTrans2D1">
-    <dgm:scene3d>
-      <a:camera prst="orthographicFront"/>
-      <a:lightRig rig="threePt" dir="t"/>
-    </dgm:scene3d>
-    <dgm:sp3d/>
-    <dgm:txPr/>
-    <dgm:style>
-      <a:lnRef idx="0">
-        <a:scrgbClr r="0" g="0" b="0"/>
-      </a:lnRef>
-      <a:fillRef idx="1">
-        <a:scrgbClr r="0" g="0" b="0"/>
-      </a:fillRef>
-      <a:effectRef idx="1">
-        <a:scrgbClr r="0" g="0" b="0"/>
-      </a:effectRef>
-      <a:fontRef idx="minor">
-        <a:schemeClr val="lt1"/>
-      </a:fontRef>
-    </dgm:style>
-  </dgm:styleLbl>
-  <dgm:styleLbl name="fgSibTrans2D1">
-    <dgm:scene3d>
-      <a:camera prst="orthographicFront"/>
-      <a:lightRig rig="threePt" dir="t"/>
-    </dgm:scene3d>
-    <dgm:sp3d/>
-    <dgm:txPr/>
-    <dgm:style>
-      <a:lnRef idx="0">
-        <a:scrgbClr r="0" g="0" b="0"/>
-      </a:lnRef>
-      <a:fillRef idx="1">
-        <a:scrgbClr r="0" g="0" b="0"/>
-      </a:fillRef>
-      <a:effectRef idx="1">
-        <a:scrgbClr r="0" g="0" b="0"/>
-      </a:effectRef>
-      <a:fontRef idx="minor">
-        <a:schemeClr val="lt1"/>
-      </a:fontRef>
-    </dgm:style>
-  </dgm:styleLbl>
-  <dgm:styleLbl name="bgSibTrans2D1">
-    <dgm:scene3d>
-      <a:camera prst="orthographicFront"/>
-      <a:lightRig rig="threePt" dir="t"/>
-    </dgm:scene3d>
-    <dgm:sp3d/>
-    <dgm:txPr/>
-    <dgm:style>
-      <a:lnRef idx="0">
-        <a:scrgbClr r="0" g="0" b="0"/>
-      </a:lnRef>
-      <a:fillRef idx="1">
-        <a:scrgbClr r="0" g="0" b="0"/>
-      </a:fillRef>
-      <a:effectRef idx="1">
-        <a:scrgbClr r="0" g="0" b="0"/>
-      </a:effectRef>
-      <a:fontRef idx="minor">
-        <a:schemeClr val="lt1"/>
-      </a:fontRef>
-    </dgm:style>
-  </dgm:styleLbl>
-  <dgm:styleLbl name="sibTrans1D1">
-    <dgm:scene3d>
-      <a:camera prst="orthographicFront"/>
-      <a:lightRig rig="threePt" dir="t"/>
-    </dgm:scene3d>
-    <dgm:sp3d/>
-    <dgm:txPr/>
-    <dgm:style>
-      <a:lnRef idx="1">
-        <a:scrgbClr r="0" g="0" b="0"/>
-      </a:lnRef>
-      <a:fillRef idx="0">
-        <a:scrgbClr r="0" g="0" b="0"/>
-      </a:fillRef>
-      <a:effectRef idx="0">
-        <a:scrgbClr r="0" g="0" b="0"/>
-      </a:effectRef>
-      <a:fontRef idx="minor"/>
-    </dgm:style>
-  </dgm:styleLbl>
-  <dgm:styleLbl name="callout">
-    <dgm:scene3d>
-      <a:camera prst="orthographicFront"/>
-      <a:lightRig rig="threePt" dir="t"/>
-    </dgm:scene3d>
-    <dgm:sp3d/>
-    <dgm:txPr/>
-    <dgm:style>
-      <a:lnRef idx="2">
-        <a:scrgbClr r="0" g="0" b="0"/>
-      </a:lnRef>
-      <a:fillRef idx="1">
-        <a:scrgbClr r="0" g="0" b="0"/>
-      </a:fillRef>
-      <a:effectRef idx="1">
-        <a:scrgbClr r="0" g="0" b="0"/>
-      </a:effectRef>
-      <a:fontRef idx="minor"/>
-    </dgm:style>
-  </dgm:styleLbl>
-  <dgm:styleLbl name="asst0">
-    <dgm:scene3d>
-      <a:camera prst="orthographicFront"/>
-      <a:lightRig rig="threePt" dir="t"/>
-    </dgm:scene3d>
-    <dgm:sp3d/>
-    <dgm:txPr/>
-    <dgm:style>
-      <a:lnRef idx="3">
-        <a:scrgbClr r="0" g="0" b="0"/>
-      </a:lnRef>
-      <a:fillRef idx="1">
-        <a:scrgbClr r="0" g="0" b="0"/>
-      </a:fillRef>
-      <a:effectRef idx="1">
-        <a:scrgbClr r="0" g="0" b="0"/>
-      </a:effectRef>
-      <a:fontRef idx="minor">
-        <a:schemeClr val="lt1"/>
-      </a:fontRef>
-    </dgm:style>
-  </dgm:styleLbl>
-  <dgm:styleLbl name="asst1">
-    <dgm:scene3d>
-      <a:camera prst="orthographicFront"/>
-      <a:lightRig rig="threePt" dir="t"/>
-    </dgm:scene3d>
-    <dgm:sp3d/>
-    <dgm:txPr/>
-    <dgm:style>
-      <a:lnRef idx="3">
-        <a:scrgbClr r="0" g="0" b="0"/>
-      </a:lnRef>
-      <a:fillRef idx="1">
-        <a:scrgbClr r="0" g="0" b="0"/>
-      </a:fillRef>
-      <a:effectRef idx="1">
-        <a:scrgbClr r="0" g="0" b="0"/>
-      </a:effectRef>
-      <a:fontRef idx="minor">
-        <a:schemeClr val="lt1"/>
-      </a:fontRef>
-    </dgm:style>
-  </dgm:styleLbl>
-  <dgm:styleLbl name="asst2">
-    <dgm:scene3d>
-      <a:camera prst="orthographicFront"/>
-      <a:lightRig rig="threePt" dir="t"/>
-    </dgm:scene3d>
-    <dgm:sp3d/>
-    <dgm:txPr/>
-    <dgm:style>
-      <a:lnRef idx="3">
-        <a:scrgbClr r="0" g="0" b="0"/>
-      </a:lnRef>
-      <a:fillRef idx="1">
-        <a:scrgbClr r="0" g="0" b="0"/>
-      </a:fillRef>
-      <a:effectRef idx="1">
-        <a:scrgbClr r="0" g="0" b="0"/>
-      </a:effectRef>
-      <a:fontRef idx="minor">
-        <a:schemeClr val="lt1"/>
-      </a:fontRef>
-    </dgm:style>
-  </dgm:styleLbl>
-  <dgm:styleLbl name="asst3">
-    <dgm:scene3d>
-      <a:camera prst="orthographicFront"/>
-      <a:lightRig rig="threePt" dir="t"/>
-    </dgm:scene3d>
-    <dgm:sp3d/>
-    <dgm:txPr/>
-    <dgm:style>
-      <a:lnRef idx="3">
-        <a:scrgbClr r="0" g="0" b="0"/>
-      </a:lnRef>
-      <a:fillRef idx="1">
-        <a:scrgbClr r="0" g="0" b="0"/>
-      </a:fillRef>
-      <a:effectRef idx="1">
-        <a:scrgbClr r="0" g="0" b="0"/>
-      </a:effectRef>
-      <a:fontRef idx="minor">
-        <a:schemeClr val="lt1"/>
-      </a:fontRef>
-    </dgm:style>
-  </dgm:styleLbl>
-  <dgm:styleLbl name="asst4">
-    <dgm:scene3d>
-      <a:camera prst="orthographicFront"/>
-      <a:lightRig rig="threePt" dir="t"/>
-    </dgm:scene3d>
-    <dgm:sp3d/>
-    <dgm:txPr/>
-    <dgm:style>
-      <a:lnRef idx="3">
-        <a:scrgbClr r="0" g="0" b="0"/>
-      </a:lnRef>
-      <a:fillRef idx="1">
-        <a:scrgbClr r="0" g="0" b="0"/>
-      </a:fillRef>
-      <a:effectRef idx="1">
-        <a:scrgbClr r="0" g="0" b="0"/>
-      </a:effectRef>
-      <a:fontRef idx="minor">
-        <a:schemeClr val="lt1"/>
-      </a:fontRef>
-    </dgm:style>
-  </dgm:styleLbl>
-  <dgm:styleLbl name="parChTrans2D1">
-    <dgm:scene3d>
-      <a:camera prst="orthographicFront"/>
-      <a:lightRig rig="threePt" dir="t"/>
-    </dgm:scene3d>
-    <dgm:sp3d/>
-    <dgm:txPr/>
-    <dgm:style>
-      <a:lnRef idx="3">
-        <a:scrgbClr r="0" g="0" b="0"/>
-      </a:lnRef>
-      <a:fillRef idx="1">
-        <a:scrgbClr r="0" g="0" b="0"/>
-      </a:fillRef>
-      <a:effectRef idx="1">
-        <a:scrgbClr r="0" g="0" b="0"/>
-      </a:effectRef>
-      <a:fontRef idx="minor">
-        <a:schemeClr val="lt1"/>
-      </a:fontRef>
-    </dgm:style>
-  </dgm:styleLbl>
-  <dgm:styleLbl name="parChTrans2D2">
-    <dgm:scene3d>
-      <a:camera prst="orthographicFront"/>
-      <a:lightRig rig="threePt" dir="t"/>
-    </dgm:scene3d>
-    <dgm:sp3d/>
-    <dgm:txPr/>
-    <dgm:style>
-      <a:lnRef idx="3">
-        <a:scrgbClr r="0" g="0" b="0"/>
-      </a:lnRef>
-      <a:fillRef idx="1">
-        <a:scrgbClr r="0" g="0" b="0"/>
-      </a:fillRef>
-      <a:effectRef idx="1">
-        <a:scrgbClr r="0" g="0" b="0"/>
-      </a:effectRef>
-      <a:fontRef idx="minor">
-        <a:schemeClr val="lt1"/>
-      </a:fontRef>
-    </dgm:style>
-  </dgm:styleLbl>
-  <dgm:styleLbl name="parChTrans2D3">
-    <dgm:scene3d>
-      <a:camera prst="orthographicFront"/>
-      <a:lightRig rig="threePt" dir="t"/>
-    </dgm:scene3d>
-    <dgm:sp3d/>
-    <dgm:txPr/>
-    <dgm:style>
-      <a:lnRef idx="3">
-        <a:scrgbClr r="0" g="0" b="0"/>
-      </a:lnRef>
-      <a:fillRef idx="1">
-        <a:scrgbClr r="0" g="0" b="0"/>
-      </a:fillRef>
-      <a:effectRef idx="1">
-        <a:scrgbClr r="0" g="0" b="0"/>
-      </a:effectRef>
-      <a:fontRef idx="minor">
-        <a:schemeClr val="lt1"/>
-      </a:fontRef>
-    </dgm:style>
-  </dgm:styleLbl>
-  <dgm:styleLbl name="parChTrans2D4">
-    <dgm:scene3d>
-      <a:camera prst="orthographicFront"/>
-      <a:lightRig rig="threePt" dir="t"/>
-    </dgm:scene3d>
-    <dgm:sp3d/>
-    <dgm:txPr/>
-    <dgm:style>
-      <a:lnRef idx="3">
-        <a:scrgbClr r="0" g="0" b="0"/>
-      </a:lnRef>
-      <a:fillRef idx="1">
-        <a:scrgbClr r="0" g="0" b="0"/>
-      </a:fillRef>
-      <a:effectRef idx="1">
-        <a:scrgbClr r="0" g="0" b="0"/>
-      </a:effectRef>
-      <a:fontRef idx="minor">
-        <a:schemeClr val="lt1"/>
-      </a:fontRef>
-    </dgm:style>
-  </dgm:styleLbl>
-  <dgm:styleLbl name="parChTrans1D1">
-    <dgm:scene3d>
-      <a:camera prst="orthographicFront"/>
-      <a:lightRig rig="threePt" dir="t"/>
-    </dgm:scene3d>
-    <dgm:sp3d/>
-    <dgm:txPr/>
-    <dgm:style>
-      <a:lnRef idx="2">
-        <a:scrgbClr r="0" g="0" b="0"/>
-      </a:lnRef>
-      <a:fillRef idx="0">
-        <a:scrgbClr r="0" g="0" b="0"/>
-      </a:fillRef>
-      <a:effectRef idx="0">
-        <a:scrgbClr r="0" g="0" b="0"/>
-      </a:effectRef>
-      <a:fontRef idx="minor"/>
-    </dgm:style>
-  </dgm:styleLbl>
-  <dgm:styleLbl name="parChTrans1D2">
-    <dgm:scene3d>
-      <a:camera prst="orthographicFront"/>
-      <a:lightRig rig="threePt" dir="t"/>
-    </dgm:scene3d>
-    <dgm:sp3d/>
-    <dgm:txPr/>
-    <dgm:style>
-      <a:lnRef idx="2">
-        <a:scrgbClr r="0" g="0" b="0"/>
-      </a:lnRef>
-      <a:fillRef idx="0">
-        <a:scrgbClr r="0" g="0" b="0"/>
-      </a:fillRef>
-      <a:effectRef idx="0">
-        <a:scrgbClr r="0" g="0" b="0"/>
-      </a:effectRef>
-      <a:fontRef idx="minor"/>
-    </dgm:style>
-  </dgm:styleLbl>
-  <dgm:styleLbl name="parChTrans1D3">
-    <dgm:scene3d>
-      <a:camera prst="orthographicFront"/>
-      <a:lightRig rig="threePt" dir="t"/>
-    </dgm:scene3d>
-    <dgm:sp3d/>
-    <dgm:txPr/>
-    <dgm:style>
-      <a:lnRef idx="2">
-        <a:scrgbClr r="0" g="0" b="0"/>
-      </a:lnRef>
-      <a:fillRef idx="0">
-        <a:scrgbClr r="0" g="0" b="0"/>
-      </a:fillRef>
-      <a:effectRef idx="0">
-        <a:scrgbClr r="0" g="0" b="0"/>
-      </a:effectRef>
-      <a:fontRef idx="minor"/>
-    </dgm:style>
-  </dgm:styleLbl>
-  <dgm:styleLbl name="parChTrans1D4">
-    <dgm:scene3d>
-      <a:camera prst="orthographicFront"/>
-      <a:lightRig rig="threePt" dir="t"/>
-    </dgm:scene3d>
-    <dgm:sp3d/>
-    <dgm:txPr/>
-    <dgm:style>
-      <a:lnRef idx="2">
-        <a:scrgbClr r="0" g="0" b="0"/>
-      </a:lnRef>
-      <a:fillRef idx="0">
-        <a:scrgbClr r="0" g="0" b="0"/>
-      </a:fillRef>
-      <a:effectRef idx="0">
-        <a:scrgbClr r="0" g="0" b="0"/>
-      </a:effectRef>
-      <a:fontRef idx="minor"/>
-    </dgm:style>
-  </dgm:styleLbl>
-  <dgm:styleLbl name="fgAcc1">
-    <dgm:scene3d>
-      <a:camera prst="orthographicFront"/>
-      <a:lightRig rig="threePt" dir="t"/>
-    </dgm:scene3d>
-    <dgm:sp3d/>
-    <dgm:txPr/>
-    <dgm:style>
-      <a:lnRef idx="2">
-        <a:scrgbClr r="0" g="0" b="0"/>
-      </a:lnRef>
-      <a:fillRef idx="1">
-        <a:scrgbClr r="0" g="0" b="0"/>
-      </a:fillRef>
-      <a:effectRef idx="0">
-        <a:scrgbClr r="0" g="0" b="0"/>
-      </a:effectRef>
-      <a:fontRef idx="minor"/>
-    </dgm:style>
-  </dgm:styleLbl>
-  <dgm:styleLbl name="conFgAcc1">
-    <dgm:scene3d>
-      <a:camera prst="orthographicFront"/>
-      <a:lightRig rig="threePt" dir="t"/>
-    </dgm:scene3d>
-    <dgm:sp3d/>
-    <dgm:txPr/>
-    <dgm:style>
-      <a:lnRef idx="2">
-        <a:scrgbClr r="0" g="0" b="0"/>
-      </a:lnRef>
-      <a:fillRef idx="1">
-        <a:scrgbClr r="0" g="0" b="0"/>
-      </a:fillRef>
-      <a:effectRef idx="0">
-        <a:scrgbClr r="0" g="0" b="0"/>
-      </a:effectRef>
-      <a:fontRef idx="minor"/>
-    </dgm:style>
-  </dgm:styleLbl>
-  <dgm:styleLbl name="alignAcc1">
-    <dgm:scene3d>
-      <a:camera prst="orthographicFront"/>
-      <a:lightRig rig="threePt" dir="t"/>
-    </dgm:scene3d>
-    <dgm:sp3d/>
-    <dgm:txPr/>
-    <dgm:style>
-      <a:lnRef idx="2">
-        <a:scrgbClr r="0" g="0" b="0"/>
-      </a:lnRef>
-      <a:fillRef idx="1">
-        <a:scrgbClr r="0" g="0" b="0"/>
-      </a:fillRef>
-      <a:effectRef idx="0">
-        <a:scrgbClr r="0" g="0" b="0"/>
-      </a:effectRef>
-      <a:fontRef idx="minor"/>
-    </dgm:style>
-  </dgm:styleLbl>
-  <dgm:styleLbl name="trAlignAcc1">
-    <dgm:scene3d>
-      <a:camera prst="orthographicFront"/>
-      <a:lightRig rig="threePt" dir="t"/>
-    </dgm:scene3d>
-    <dgm:sp3d/>
-    <dgm:txPr/>
-    <dgm:style>
-      <a:lnRef idx="1">
-        <a:scrgbClr r="0" g="0" b="0"/>
-      </a:lnRef>
-      <a:fillRef idx="1">
-        <a:scrgbClr r="0" g="0" b="0"/>
-      </a:fillRef>
-      <a:effectRef idx="0">
-        <a:scrgbClr r="0" g="0" b="0"/>
-      </a:effectRef>
-      <a:fontRef idx="minor"/>
-    </dgm:style>
-  </dgm:styleLbl>
-  <dgm:styleLbl name="bgAcc1">
-    <dgm:scene3d>
-      <a:camera prst="orthographicFront"/>
-      <a:lightRig rig="threePt" dir="t"/>
-    </dgm:scene3d>
-    <dgm:sp3d/>
-    <dgm:txPr/>
-    <dgm:style>
-      <a:lnRef idx="2">
-        <a:scrgbClr r="0" g="0" b="0"/>
-      </a:lnRef>
-      <a:fillRef idx="1">
-        <a:scrgbClr r="0" g="0" b="0"/>
-      </a:fillRef>
-      <a:effectRef idx="0">
-        <a:scrgbClr r="0" g="0" b="0"/>
-      </a:effectRef>
-      <a:fontRef idx="minor"/>
-    </dgm:style>
-  </dgm:styleLbl>
-  <dgm:styleLbl name="solidFgAcc1">
-    <dgm:scene3d>
-      <a:camera prst="orthographicFront"/>
-      <a:lightRig rig="threePt" dir="t"/>
-    </dgm:scene3d>
-    <dgm:sp3d/>
-    <dgm:txPr/>
-    <dgm:style>
-      <a:lnRef idx="2">
-        <a:scrgbClr r="0" g="0" b="0"/>
-      </a:lnRef>
-      <a:fillRef idx="1">
-        <a:scrgbClr r="0" g="0" b="0"/>
-      </a:fillRef>
-      <a:effectRef idx="0">
-        <a:scrgbClr r="0" g="0" b="0"/>
-      </a:effectRef>
-      <a:fontRef idx="minor"/>
-    </dgm:style>
-  </dgm:styleLbl>
-  <dgm:styleLbl name="solidAlignAcc1">
-    <dgm:scene3d>
-      <a:camera prst="orthographicFront"/>
-      <a:lightRig rig="threePt" dir="t"/>
-    </dgm:scene3d>
-    <dgm:sp3d/>
-    <dgm:txPr/>
-    <dgm:style>
-      <a:lnRef idx="2">
-        <a:scrgbClr r="0" g="0" b="0"/>
-      </a:lnRef>
-      <a:fillRef idx="1">
-        <a:scrgbClr r="0" g="0" b="0"/>
-      </a:fillRef>
-      <a:effectRef idx="0">
-        <a:scrgbClr r="0" g="0" b="0"/>
-      </a:effectRef>
-      <a:fontRef idx="minor"/>
-    </dgm:style>
-  </dgm:styleLbl>
-  <dgm:styleLbl name="solidBgAcc1">
-    <dgm:scene3d>
-      <a:camera prst="orthographicFront"/>
-      <a:lightRig rig="threePt" dir="t"/>
-    </dgm:scene3d>
-    <dgm:sp3d/>
-    <dgm:txPr/>
-    <dgm:style>
-      <a:lnRef idx="2">
-        <a:scrgbClr r="0" g="0" b="0"/>
-      </a:lnRef>
-      <a:fillRef idx="1">
-        <a:scrgbClr r="0" g="0" b="0"/>
-      </a:fillRef>
-      <a:effectRef idx="0">
-        <a:scrgbClr r="0" g="0" b="0"/>
-      </a:effectRef>
-      <a:fontRef idx="minor"/>
-    </dgm:style>
-  </dgm:styleLbl>
-  <dgm:styleLbl name="fgAccFollowNode1">
-    <dgm:scene3d>
-      <a:camera prst="orthographicFront"/>
-      <a:lightRig rig="threePt" dir="t"/>
-    </dgm:scene3d>
-    <dgm:sp3d/>
-    <dgm:txPr/>
-    <dgm:style>
-      <a:lnRef idx="2">
-        <a:scrgbClr r="0" g="0" b="0"/>
-      </a:lnRef>
-      <a:fillRef idx="1">
-        <a:scrgbClr r="0" g="0" b="0"/>
-      </a:fillRef>
-      <a:effectRef idx="0">
-        <a:scrgbClr r="0" g="0" b="0"/>
-      </a:effectRef>
-      <a:fontRef idx="minor"/>
-    </dgm:style>
-  </dgm:styleLbl>
-  <dgm:styleLbl name="alignAccFollowNode1">
-    <dgm:scene3d>
-      <a:camera prst="orthographicFront"/>
-      <a:lightRig rig="threePt" dir="t"/>
-    </dgm:scene3d>
-    <dgm:sp3d/>
-    <dgm:txPr/>
-    <dgm:style>
-      <a:lnRef idx="2">
-        <a:scrgbClr r="0" g="0" b="0"/>
-      </a:lnRef>
-      <a:fillRef idx="1">
-        <a:scrgbClr r="0" g="0" b="0"/>
-      </a:fillRef>
-      <a:effectRef idx="0">
-        <a:scrgbClr r="0" g="0" b="0"/>
-      </a:effectRef>
-      <a:fontRef idx="minor"/>
-    </dgm:style>
-  </dgm:styleLbl>
-  <dgm:styleLbl name="bgAccFollowNode1">
-    <dgm:scene3d>
-      <a:camera prst="orthographicFront"/>
-      <a:lightRig rig="threePt" dir="t"/>
-    </dgm:scene3d>
-    <dgm:sp3d/>
-    <dgm:txPr/>
-    <dgm:style>
-      <a:lnRef idx="2">
-        <a:scrgbClr r="0" g="0" b="0"/>
-      </a:lnRef>
-      <a:fillRef idx="1">
-        <a:scrgbClr r="0" g="0" b="0"/>
-      </a:fillRef>
-      <a:effectRef idx="0">
-        <a:scrgbClr r="0" g="0" b="0"/>
-      </a:effectRef>
-      <a:fontRef idx="minor"/>
-    </dgm:style>
-  </dgm:styleLbl>
-  <dgm:styleLbl name="fgAcc0">
-    <dgm:scene3d>
-      <a:camera prst="orthographicFront"/>
-      <a:lightRig rig="threePt" dir="t"/>
-    </dgm:scene3d>
-    <dgm:sp3d/>
-    <dgm:txPr/>
-    <dgm:style>
-      <a:lnRef idx="2">
-        <a:scrgbClr r="0" g="0" b="0"/>
-      </a:lnRef>
-      <a:fillRef idx="1">
-        <a:scrgbClr r="0" g="0" b="0"/>
-      </a:fillRef>
-      <a:effectRef idx="0">
-        <a:scrgbClr r="0" g="0" b="0"/>
-      </a:effectRef>
-      <a:fontRef idx="minor"/>
-    </dgm:style>
-  </dgm:styleLbl>
-  <dgm:styleLbl name="fgAcc2">
-    <dgm:scene3d>
-      <a:camera prst="orthographicFront"/>
-      <a:lightRig rig="threePt" dir="t"/>
-    </dgm:scene3d>
-    <dgm:sp3d/>
-    <dgm:txPr/>
-    <dgm:style>
-      <a:lnRef idx="2">
-        <a:scrgbClr r="0" g="0" b="0"/>
-      </a:lnRef>
-      <a:fillRef idx="1">
-        <a:scrgbClr r="0" g="0" b="0"/>
-      </a:fillRef>
-      <a:effectRef idx="0">
-        <a:scrgbClr r="0" g="0" b="0"/>
-      </a:effectRef>
-      <a:fontRef idx="minor"/>
-    </dgm:style>
-  </dgm:styleLbl>
-  <dgm:styleLbl name="fgAcc3">
-    <dgm:scene3d>
-      <a:camera prst="orthographicFront"/>
-      <a:lightRig rig="threePt" dir="t"/>
-    </dgm:scene3d>
-    <dgm:sp3d/>
-    <dgm:txPr/>
-    <dgm:style>
-      <a:lnRef idx="2">
-        <a:scrgbClr r="0" g="0" b="0"/>
-      </a:lnRef>
-      <a:fillRef idx="1">
-        <a:scrgbClr r="0" g="0" b="0"/>
-      </a:fillRef>
-      <a:effectRef idx="0">
-        <a:scrgbClr r="0" g="0" b="0"/>
-      </a:effectRef>
-      <a:fontRef idx="minor"/>
-    </dgm:style>
-  </dgm:styleLbl>
-  <dgm:styleLbl name="fgAcc4">
-    <dgm:scene3d>
-      <a:camera prst="orthographicFront"/>
-      <a:lightRig rig="threePt" dir="t"/>
-    </dgm:scene3d>
-    <dgm:sp3d/>
-    <dgm:txPr/>
-    <dgm:style>
-      <a:lnRef idx="2">
-        <a:scrgbClr r="0" g="0" b="0"/>
-      </a:lnRef>
-      <a:fillRef idx="1">
-        <a:scrgbClr r="0" g="0" b="0"/>
-      </a:fillRef>
-      <a:effectRef idx="0">
-        <a:scrgbClr r="0" g="0" b="0"/>
-      </a:effectRef>
-      <a:fontRef idx="minor"/>
-    </dgm:style>
-  </dgm:styleLbl>
-  <dgm:styleLbl name="bgShp">
-    <dgm:scene3d>
-      <a:camera prst="orthographicFront"/>
-      <a:lightRig rig="threePt" dir="t"/>
-    </dgm:scene3d>
-    <dgm:sp3d/>
-    <dgm:txPr/>
-    <dgm:style>
-      <a:lnRef idx="0">
-        <a:scrgbClr r="0" g="0" b="0"/>
-      </a:lnRef>
-      <a:fillRef idx="1">
-        <a:scrgbClr r="0" g="0" b="0"/>
-      </a:fillRef>
-      <a:effectRef idx="0">
-        <a:scrgbClr r="0" g="0" b="0"/>
-      </a:effectRef>
-      <a:fontRef idx="minor"/>
-    </dgm:style>
-  </dgm:styleLbl>
-  <dgm:styleLbl name="dkBgShp">
-    <dgm:scene3d>
-      <a:camera prst="orthographicFront"/>
-      <a:lightRig rig="threePt" dir="t"/>
-    </dgm:scene3d>
-    <dgm:sp3d/>
-    <dgm:txPr/>
-    <dgm:style>
-      <a:lnRef idx="0">
-        <a:scrgbClr r="0" g="0" b="0"/>
-      </a:lnRef>
-      <a:fillRef idx="1">
-        <a:scrgbClr r="0" g="0" b="0"/>
-      </a:fillRef>
-      <a:effectRef idx="0">
-        <a:scrgbClr r="0" g="0" b="0"/>
-      </a:effectRef>
-      <a:fontRef idx="minor"/>
-    </dgm:style>
-  </dgm:styleLbl>
-  <dgm:styleLbl name="trBgShp">
-    <dgm:scene3d>
-      <a:camera prst="orthographicFront"/>
-      <a:lightRig rig="threePt" dir="t"/>
-    </dgm:scene3d>
-    <dgm:sp3d/>
-    <dgm:txPr/>
-    <dgm:style>
-      <a:lnRef idx="0">
-        <a:scrgbClr r="0" g="0" b="0"/>
-      </a:lnRef>
-      <a:fillRef idx="1">
-        <a:scrgbClr r="0" g="0" b="0"/>
-      </a:fillRef>
-      <a:effectRef idx="0">
-        <a:scrgbClr r="0" g="0" b="0"/>
-      </a:effectRef>
-      <a:fontRef idx="minor"/>
-    </dgm:style>
-  </dgm:styleLbl>
-  <dgm:styleLbl name="fgShp">
-    <dgm:scene3d>
-      <a:camera prst="orthographicFront"/>
-      <a:lightRig rig="threePt" dir="t"/>
-    </dgm:scene3d>
-    <dgm:sp3d/>
-    <dgm:txPr/>
-    <dgm:style>
-      <a:lnRef idx="3">
-        <a:scrgbClr r="0" g="0" b="0"/>
-      </a:lnRef>
-      <a:fillRef idx="1">
-        <a:scrgbClr r="0" g="0" b="0"/>
-      </a:fillRef>
-      <a:effectRef idx="1">
-        <a:scrgbClr r="0" g="0" b="0"/>
-      </a:effectRef>
-      <a:fontRef idx="minor"/>
-    </dgm:style>
-  </dgm:styleLbl>
-  <dgm:styleLbl name="revTx">
-    <dgm:scene3d>
-      <a:camera prst="orthographicFront"/>
-      <a:lightRig rig="threePt" dir="t"/>
-    </dgm:scene3d>
-    <dgm:sp3d/>
-    <dgm:txPr/>
-    <dgm:style>
-      <a:lnRef idx="0">
-        <a:scrgbClr r="0" g="0" b="0"/>
-      </a:lnRef>
-      <a:fillRef idx="0">
-        <a:scrgbClr r="0" g="0" b="0"/>
-      </a:fillRef>
-      <a:effectRef idx="0">
-        <a:scrgbClr r="0" g="0" b="0"/>
-      </a:effectRef>
-      <a:fontRef idx="minor"/>
-    </dgm:style>
-  </dgm:styleLbl>
-</dgm:styleDef>
+<file path=ppt/ink/ink4.xml><?xml version="1.0" encoding="utf-8"?>
+<inkml:ink xmlns:inkml="http://www.w3.org/2003/InkML">
+  <inkml:definitions>
+    <inkml:context xml:id="ctx0">
+      <inkml:inkSource xml:id="inkSrc0">
+        <inkml:traceFormat>
+          <inkml:channel name="X" type="integer" min="-2.14748E9" max="2.14748E9" units="cm"/>
+          <inkml:channel name="Y" type="integer" min="-2.14748E9" max="2.14748E9" units="cm"/>
+          <inkml:channel name="F" type="integer" max="32767" units="dev"/>
+        </inkml:traceFormat>
+        <inkml:channelProperties>
+          <inkml:channelProperty channel="X" name="resolution" value="1000" units="1/cm"/>
+          <inkml:channelProperty channel="Y" name="resolution" value="1000" units="1/cm"/>
+          <inkml:channelProperty channel="F" name="resolution" value="0" units="1/dev"/>
+        </inkml:channelProperties>
+      </inkml:inkSource>
+      <inkml:timestamp xml:id="ts0" timeString="2026-09-27T12:14:21.985"/>
+    </inkml:context>
+    <inkml:brush xml:id="br0">
+      <inkml:brushProperty name="width" value="0.2" units="cm"/>
+      <inkml:brushProperty name="height" value="0.2" units="cm"/>
+      <inkml:brushProperty name="color" value="#E71224"/>
+    </inkml:brush>
+  </inkml:definitions>
+  <inkml:trace contextRef="#ctx0" brushRef="#br0">1011 1 24417,'-1010'1038'0</inkml:trace>
+</inkml:ink>
 </file>
 
 <file path=ppt/slideLayouts/slideLayout1.xml><?xml version="1.0" encoding="utf-8"?>
@@ -3659,7 +1238,7 @@
           <a:p>
             <a:fld id="{445A4285-81FE-4AB8-816F-246C957942AC}" type="datetimeFigureOut">
               <a:rPr lang="LID4096" smtClean="0"/>
-              <a:t>09/11/2026</a:t>
+              <a:t>09/28/2026</a:t>
             </a:fld>
             <a:endParaRPr lang="LID4096"/>
           </a:p>
@@ -3833,7 +1412,7 @@
           <a:p>
             <a:fld id="{445A4285-81FE-4AB8-816F-246C957942AC}" type="datetimeFigureOut">
               <a:rPr lang="LID4096" smtClean="0"/>
-              <a:t>09/11/2026</a:t>
+              <a:t>09/28/2026</a:t>
             </a:fld>
             <a:endParaRPr lang="LID4096"/>
           </a:p>
@@ -4126,7 +1705,7 @@
           <a:p>
             <a:fld id="{445A4285-81FE-4AB8-816F-246C957942AC}" type="datetimeFigureOut">
               <a:rPr lang="LID4096" smtClean="0"/>
-              <a:t>09/11/2026</a:t>
+              <a:t>09/28/2026</a:t>
             </a:fld>
             <a:endParaRPr lang="LID4096"/>
           </a:p>
@@ -4488,7 +2067,7 @@
           <a:p>
             <a:fld id="{445A4285-81FE-4AB8-816F-246C957942AC}" type="datetimeFigureOut">
               <a:rPr lang="LID4096" smtClean="0"/>
-              <a:t>09/11/2026</a:t>
+              <a:t>09/28/2026</a:t>
             </a:fld>
             <a:endParaRPr lang="LID4096"/>
           </a:p>
@@ -4731,7 +2310,7 @@
           <a:p>
             <a:fld id="{445A4285-81FE-4AB8-816F-246C957942AC}" type="datetimeFigureOut">
               <a:rPr lang="LID4096" smtClean="0"/>
-              <a:t>09/11/2026</a:t>
+              <a:t>09/28/2026</a:t>
             </a:fld>
             <a:endParaRPr lang="LID4096"/>
           </a:p>
@@ -5007,7 +2586,7 @@
           <a:p>
             <a:fld id="{445A4285-81FE-4AB8-816F-246C957942AC}" type="datetimeFigureOut">
               <a:rPr lang="LID4096" smtClean="0"/>
-              <a:t>09/11/2026</a:t>
+              <a:t>09/28/2026</a:t>
             </a:fld>
             <a:endParaRPr lang="LID4096"/>
           </a:p>
@@ -5411,7 +2990,7 @@
           <a:p>
             <a:fld id="{445A4285-81FE-4AB8-816F-246C957942AC}" type="datetimeFigureOut">
               <a:rPr lang="LID4096" smtClean="0"/>
-              <a:t>09/11/2026</a:t>
+              <a:t>09/28/2026</a:t>
             </a:fld>
             <a:endParaRPr lang="LID4096"/>
           </a:p>
@@ -5667,7 +3246,7 @@
           <a:p>
             <a:fld id="{445A4285-81FE-4AB8-816F-246C957942AC}" type="datetimeFigureOut">
               <a:rPr lang="LID4096" smtClean="0"/>
-              <a:t>09/11/2026</a:t>
+              <a:t>09/28/2026</a:t>
             </a:fld>
             <a:endParaRPr lang="LID4096"/>
           </a:p>
@@ -6005,7 +3584,7 @@
           <a:p>
             <a:fld id="{445A4285-81FE-4AB8-816F-246C957942AC}" type="datetimeFigureOut">
               <a:rPr lang="LID4096" smtClean="0"/>
-              <a:t>09/11/2026</a:t>
+              <a:t>09/28/2026</a:t>
             </a:fld>
             <a:endParaRPr lang="LID4096"/>
           </a:p>
@@ -6225,7 +3804,7 @@
           <a:p>
             <a:fld id="{445A4285-81FE-4AB8-816F-246C957942AC}" type="datetimeFigureOut">
               <a:rPr lang="LID4096" smtClean="0"/>
-              <a:t>09/11/2026</a:t>
+              <a:t>09/28/2026</a:t>
             </a:fld>
             <a:endParaRPr lang="LID4096"/>
           </a:p>
@@ -6549,7 +4128,7 @@
           <a:p>
             <a:fld id="{445A4285-81FE-4AB8-816F-246C957942AC}" type="datetimeFigureOut">
               <a:rPr lang="LID4096" smtClean="0"/>
-              <a:t>09/11/2026</a:t>
+              <a:t>09/28/2026</a:t>
             </a:fld>
             <a:endParaRPr lang="LID4096"/>
           </a:p>
@@ -6770,7 +4349,7 @@
           <a:p>
             <a:fld id="{445A4285-81FE-4AB8-816F-246C957942AC}" type="datetimeFigureOut">
               <a:rPr lang="LID4096" smtClean="0"/>
-              <a:t>09/11/2026</a:t>
+              <a:t>09/28/2026</a:t>
             </a:fld>
             <a:endParaRPr lang="LID4096"/>
           </a:p>
@@ -7078,7 +4657,7 @@
           <a:p>
             <a:fld id="{445A4285-81FE-4AB8-816F-246C957942AC}" type="datetimeFigureOut">
               <a:rPr lang="LID4096" smtClean="0"/>
-              <a:t>09/11/2026</a:t>
+              <a:t>09/28/2026</a:t>
             </a:fld>
             <a:endParaRPr lang="LID4096"/>
           </a:p>
@@ -7418,7 +4997,7 @@
           <a:p>
             <a:fld id="{445A4285-81FE-4AB8-816F-246C957942AC}" type="datetimeFigureOut">
               <a:rPr lang="LID4096" smtClean="0"/>
-              <a:t>09/11/2026</a:t>
+              <a:t>09/28/2026</a:t>
             </a:fld>
             <a:endParaRPr lang="LID4096"/>
           </a:p>
@@ -7649,7 +5228,7 @@
           <a:p>
             <a:fld id="{445A4285-81FE-4AB8-816F-246C957942AC}" type="datetimeFigureOut">
               <a:rPr lang="LID4096" smtClean="0"/>
-              <a:t>09/11/2026</a:t>
+              <a:t>09/28/2026</a:t>
             </a:fld>
             <a:endParaRPr lang="LID4096"/>
           </a:p>
@@ -8029,7 +5608,7 @@
           <a:p>
             <a:fld id="{445A4285-81FE-4AB8-816F-246C957942AC}" type="datetimeFigureOut">
               <a:rPr lang="LID4096" smtClean="0"/>
-              <a:t>09/11/2026</a:t>
+              <a:t>09/28/2026</a:t>
             </a:fld>
             <a:endParaRPr lang="LID4096"/>
           </a:p>
@@ -8565,7 +6144,7 @@
           <a:p>
             <a:fld id="{445A4285-81FE-4AB8-816F-246C957942AC}" type="datetimeFigureOut">
               <a:rPr lang="LID4096" smtClean="0"/>
-              <a:t>09/11/2026</a:t>
+              <a:t>09/28/2026</a:t>
             </a:fld>
             <a:endParaRPr lang="LID4096"/>
           </a:p>
@@ -8702,7 +6281,7 @@
           <a:p>
             <a:fld id="{445A4285-81FE-4AB8-816F-246C957942AC}" type="datetimeFigureOut">
               <a:rPr lang="LID4096" smtClean="0"/>
-              <a:t>09/11/2026</a:t>
+              <a:t>09/28/2026</a:t>
             </a:fld>
             <a:endParaRPr lang="LID4096"/>
           </a:p>
@@ -8919,7 +6498,7 @@
           <a:p>
             <a:fld id="{445A4285-81FE-4AB8-816F-246C957942AC}" type="datetimeFigureOut">
               <a:rPr lang="LID4096" smtClean="0"/>
-              <a:t>09/11/2026</a:t>
+              <a:t>09/28/2026</a:t>
             </a:fld>
             <a:endParaRPr lang="LID4096"/>
           </a:p>
@@ -9235,7 +6814,7 @@
           <a:p>
             <a:fld id="{445A4285-81FE-4AB8-816F-246C957942AC}" type="datetimeFigureOut">
               <a:rPr lang="LID4096" smtClean="0"/>
-              <a:t>09/11/2026</a:t>
+              <a:t>09/28/2026</a:t>
             </a:fld>
             <a:endParaRPr lang="LID4096"/>
           </a:p>
@@ -9601,7 +7180,7 @@
           <a:p>
             <a:fld id="{445A4285-81FE-4AB8-816F-246C957942AC}" type="datetimeFigureOut">
               <a:rPr lang="LID4096" smtClean="0"/>
-              <a:t>09/11/2026</a:t>
+              <a:t>09/28/2026</a:t>
             </a:fld>
             <a:endParaRPr lang="LID4096"/>
           </a:p>
@@ -9910,7 +7489,7 @@
           <a:p>
             <a:fld id="{445A4285-81FE-4AB8-816F-246C957942AC}" type="datetimeFigureOut">
               <a:rPr lang="LID4096" smtClean="0"/>
-              <a:t>09/11/2026</a:t>
+              <a:t>09/28/2026</a:t>
             </a:fld>
             <a:endParaRPr lang="LID4096"/>
           </a:p>
@@ -10152,7 +7731,7 @@
           <a:p>
             <a:fld id="{445A4285-81FE-4AB8-816F-246C957942AC}" type="datetimeFigureOut">
               <a:rPr lang="LID4096" smtClean="0"/>
-              <a:t>09/11/2026</a:t>
+              <a:t>09/28/2026</a:t>
             </a:fld>
             <a:endParaRPr lang="LID4096"/>
           </a:p>
@@ -10379,7 +7958,7 @@
           <a:p>
             <a:fld id="{445A4285-81FE-4AB8-816F-246C957942AC}" type="datetimeFigureOut">
               <a:rPr lang="LID4096" smtClean="0"/>
-              <a:t>09/11/2026</a:t>
+              <a:t>09/28/2026</a:t>
             </a:fld>
             <a:endParaRPr lang="LID4096"/>
           </a:p>
@@ -10775,7 +8354,7 @@
           <a:p>
             <a:fld id="{445A4285-81FE-4AB8-816F-246C957942AC}" type="datetimeFigureOut">
               <a:rPr lang="LID4096" smtClean="0"/>
-              <a:t>09/11/2026</a:t>
+              <a:t>09/28/2026</a:t>
             </a:fld>
             <a:endParaRPr lang="LID4096"/>
           </a:p>
@@ -11132,7 +8711,7 @@
           <a:p>
             <a:fld id="{445A4285-81FE-4AB8-816F-246C957942AC}" type="datetimeFigureOut">
               <a:rPr lang="LID4096" smtClean="0"/>
-              <a:t>09/11/2026</a:t>
+              <a:t>09/28/2026</a:t>
             </a:fld>
             <a:endParaRPr lang="LID4096"/>
           </a:p>
@@ -11470,7 +9049,7 @@
           <a:p>
             <a:fld id="{445A4285-81FE-4AB8-816F-246C957942AC}" type="datetimeFigureOut">
               <a:rPr lang="LID4096" smtClean="0"/>
-              <a:t>09/11/2026</a:t>
+              <a:t>09/28/2026</a:t>
             </a:fld>
             <a:endParaRPr lang="LID4096"/>
           </a:p>
@@ -11841,7 +9420,7 @@
           <a:p>
             <a:fld id="{445A4285-81FE-4AB8-816F-246C957942AC}" type="datetimeFigureOut">
               <a:rPr lang="LID4096" smtClean="0"/>
-              <a:t>09/11/2026</a:t>
+              <a:t>09/28/2026</a:t>
             </a:fld>
             <a:endParaRPr lang="LID4096"/>
           </a:p>
@@ -12375,7 +9954,7 @@
           <a:p>
             <a:r>
               <a:rPr lang="en-US" dirty="0"/>
-              <a:t>Gunnarr Demaeght 5ICWA nr.2</a:t>
+              <a:t>Gunnarr Demaeght 6ICWA nr.2</a:t>
             </a:r>
             <a:endParaRPr lang="LID4096" dirty="0"/>
           </a:p>
@@ -12391,13 +9970,13 @@
   <p:clrMapOvr>
     <a:masterClrMapping/>
   </p:clrMapOvr>
-  <mc:AlternateContent xmlns:mc="http://schemas.openxmlformats.org/markup-compatibility/2006">
-    <mc:Choice xmlns:p159="http://schemas.microsoft.com/office/powerpoint/2015/09/main" Requires="p159">
+  <mc:AlternateContent xmlns:mc="http://schemas.openxmlformats.org/markup-compatibility/2006" xmlns:p159="http://schemas.microsoft.com/office/powerpoint/2015/09/main">
+    <mc:Choice Requires="p159">
       <p:transition xmlns:p14="http://schemas.microsoft.com/office/powerpoint/2010/main" spd="slow" p14:dur="2000">
         <p159:morph option="byObject"/>
       </p:transition>
     </mc:Choice>
-    <mc:Fallback>
+    <mc:Fallback xmlns="">
       <p:transition spd="slow">
         <p:fade/>
       </p:transition>
@@ -12439,9 +10018,16 @@
             <p:ph type="title"/>
           </p:nvPr>
         </p:nvSpPr>
-        <p:spPr/>
-        <p:txBody>
-          <a:bodyPr/>
+        <p:spPr>
+          <a:xfrm>
+            <a:off x="320528" y="834539"/>
+            <a:ext cx="5378267" cy="985658"/>
+          </a:xfrm>
+        </p:spPr>
+        <p:txBody>
+          <a:bodyPr anchor="b">
+            <a:normAutofit/>
+          </a:bodyPr>
           <a:lstStyle/>
           <a:p>
             <a:r>
@@ -12484,12 +10070,18 @@
         </p:blipFill>
         <p:spPr>
           <a:xfrm>
-            <a:off x="3082549" y="1989703"/>
-            <a:ext cx="6026902" cy="4520177"/>
+            <a:off x="3468658" y="2449954"/>
+            <a:ext cx="5254684" cy="3941013"/>
           </a:xfrm>
           <a:prstGeom prst="rect">
             <a:avLst/>
           </a:prstGeom>
+          <a:ln>
+            <a:noFill/>
+          </a:ln>
+          <a:effectLst>
+            <a:softEdge rad="112500"/>
+          </a:effectLst>
         </p:spPr>
       </p:pic>
     </p:spTree>
@@ -12502,13 +10094,13 @@
   <p:clrMapOvr>
     <a:masterClrMapping/>
   </p:clrMapOvr>
-  <mc:AlternateContent xmlns:mc="http://schemas.openxmlformats.org/markup-compatibility/2006">
-    <mc:Choice xmlns:p159="http://schemas.microsoft.com/office/powerpoint/2015/09/main" Requires="p159">
+  <mc:AlternateContent xmlns:mc="http://schemas.openxmlformats.org/markup-compatibility/2006" xmlns:p159="http://schemas.microsoft.com/office/powerpoint/2015/09/main">
+    <mc:Choice Requires="p159">
       <p:transition xmlns:p14="http://schemas.microsoft.com/office/powerpoint/2010/main" spd="slow" p14:dur="2000">
         <p159:morph option="byObject"/>
       </p:transition>
     </mc:Choice>
-    <mc:Fallback>
+    <mc:Fallback xmlns="">
       <p:transition spd="slow">
         <p:fade/>
       </p:transition>
@@ -12550,7 +10142,12 @@
             <p:ph type="title"/>
           </p:nvPr>
         </p:nvSpPr>
-        <p:spPr/>
+        <p:spPr>
+          <a:xfrm>
+            <a:off x="5786817" y="1063203"/>
+            <a:ext cx="5496426" cy="2092272"/>
+          </a:xfrm>
+        </p:spPr>
         <p:txBody>
           <a:bodyPr anchor="t">
             <a:normAutofit/>
@@ -12558,93 +10155,108 @@
           <a:lstStyle/>
           <a:p>
             <a:r>
-              <a:rPr lang="en-US" dirty="0" err="1"/>
+              <a:rPr lang="en-US" sz="4800" dirty="0" err="1"/>
               <a:t>Waarom</a:t>
             </a:r>
             <a:r>
-              <a:rPr lang="en-US" dirty="0"/>
+              <a:rPr lang="en-US" sz="4800" dirty="0"/>
               <a:t> </a:t>
             </a:r>
             <a:r>
-              <a:rPr lang="en-US" dirty="0" err="1"/>
+              <a:rPr lang="en-US" sz="4800" dirty="0" err="1"/>
               <a:t>heb</a:t>
             </a:r>
             <a:r>
-              <a:rPr lang="en-US" dirty="0"/>
+              <a:rPr lang="en-US" sz="4800" dirty="0"/>
               <a:t> </a:t>
             </a:r>
             <a:r>
-              <a:rPr lang="en-US" dirty="0" err="1"/>
+              <a:rPr lang="en-US" sz="4800" dirty="0" err="1"/>
               <a:t>ik</a:t>
             </a:r>
             <a:r>
-              <a:rPr lang="en-US" dirty="0"/>
+              <a:rPr lang="en-US" sz="4800" dirty="0"/>
               <a:t> </a:t>
             </a:r>
             <a:r>
-              <a:rPr lang="en-US" dirty="0" err="1"/>
+              <a:rPr lang="en-US" sz="4800" dirty="0" err="1"/>
               <a:t>voor</a:t>
             </a:r>
             <a:r>
-              <a:rPr lang="en-US" dirty="0"/>
+              <a:rPr lang="en-US" sz="4800" dirty="0"/>
               <a:t> </a:t>
             </a:r>
             <a:r>
-              <a:rPr lang="en-US" dirty="0" err="1"/>
+              <a:rPr lang="en-US" sz="4800" dirty="0" err="1"/>
               <a:t>dit</a:t>
             </a:r>
             <a:r>
-              <a:rPr lang="en-US" dirty="0"/>
+              <a:rPr lang="en-US" sz="4800" dirty="0"/>
               <a:t> </a:t>
             </a:r>
             <a:r>
-              <a:rPr lang="en-US" dirty="0" err="1"/>
+              <a:rPr lang="en-US" sz="4800" dirty="0" err="1"/>
               <a:t>gekozen</a:t>
             </a:r>
             <a:r>
-              <a:rPr lang="en-US" dirty="0"/>
+              <a:rPr lang="en-US" sz="4800" dirty="0"/>
               <a:t>?</a:t>
             </a:r>
-            <a:endParaRPr lang="LID4096" dirty="0"/>
+            <a:endParaRPr lang="LID4096" sz="4800" dirty="0"/>
           </a:p>
         </p:txBody>
       </p:sp>
       <p:pic>
         <p:nvPicPr>
-          <p:cNvPr id="4" name="Content Placeholder 3" descr="RASPBERRY PI SC1112">
-            <a:extLst>
-              <a:ext uri="{FF2B5EF4-FFF2-40B4-BE49-F238E27FC236}">
-                <a16:creationId xmlns:a16="http://schemas.microsoft.com/office/drawing/2014/main" id="{CE05AAE9-C09C-EE83-71CB-5731D994A205}"/>
+          <p:cNvPr id="5" name="Picture 4" descr="What Is CCTV Monitoring and How Does It Work?">
+            <a:extLst>
+              <a:ext uri="{FF2B5EF4-FFF2-40B4-BE49-F238E27FC236}">
+                <a16:creationId xmlns:a16="http://schemas.microsoft.com/office/drawing/2014/main" id="{46F7A7B9-FDEB-B3EA-6230-162E3EF71BE5}"/>
               </a:ext>
             </a:extLst>
           </p:cNvPr>
           <p:cNvPicPr>
-            <a:picLocks noGrp="1" noChangeAspect="1"/>
+            <a:picLocks noChangeAspect="1"/>
           </p:cNvPicPr>
-          <p:nvPr>
-            <p:ph type="pic" sz="quarter" idx="15"/>
-          </p:nvPr>
+          <p:nvPr/>
         </p:nvPicPr>
         <p:blipFill>
           <a:blip r:embed="rId2"/>
-          <a:srcRect l="6963" r="6963"/>
+          <a:srcRect r="29205" b="-3"/>
           <a:stretch>
             <a:fillRect/>
           </a:stretch>
         </p:blipFill>
         <p:spPr>
+          <a:xfrm>
+            <a:off x="6429040" y="3702526"/>
+            <a:ext cx="3916103" cy="2765887"/>
+          </a:xfrm>
           <a:prstGeom prst="rect">
             <a:avLst/>
           </a:prstGeom>
           <a:noFill/>
+          <a:ln w="88900" cap="sq">
+            <a:solidFill>
+              <a:srgbClr val="FFFFFF"/>
+            </a:solidFill>
+            <a:miter lim="800000"/>
+          </a:ln>
+          <a:effectLst>
+            <a:outerShdw blurRad="254000" algn="tl" rotWithShape="0">
+              <a:srgbClr val="000000">
+                <a:alpha val="43000"/>
+              </a:srgbClr>
+            </a:outerShdw>
+          </a:effectLst>
         </p:spPr>
       </p:pic>
       <p:pic>
         <p:nvPicPr>
-          <p:cNvPr id="5" name="Picture 4" descr="What Is CCTV Monitoring and How Does It Work?">
-            <a:extLst>
-              <a:ext uri="{FF2B5EF4-FFF2-40B4-BE49-F238E27FC236}">
-                <a16:creationId xmlns:a16="http://schemas.microsoft.com/office/drawing/2014/main" id="{46F7A7B9-FDEB-B3EA-6230-162E3EF71BE5}"/>
+          <p:cNvPr id="7" name="Content Placeholder 3" descr="RASPBERRY PI SC1112">
+            <a:extLst>
+              <a:ext uri="{FF2B5EF4-FFF2-40B4-BE49-F238E27FC236}">
+                <a16:creationId xmlns:a16="http://schemas.microsoft.com/office/drawing/2014/main" id="{883AE644-BF24-3051-10C6-EF5ACD29F05D}"/>
               </a:ext>
             </a:extLst>
           </p:cNvPr>
@@ -12655,20 +10267,34 @@
         </p:nvPicPr>
         <p:blipFill>
           <a:blip r:embed="rId3"/>
-          <a:srcRect r="44102" b="2"/>
           <a:stretch>
             <a:fillRect/>
           </a:stretch>
         </p:blipFill>
         <p:spPr>
           <a:xfrm>
-            <a:off x="5541276" y="1104900"/>
-            <a:ext cx="5750381" cy="5143500"/>
-          </a:xfrm>
-          <a:prstGeom prst="rect">
-            <a:avLst/>
+            <a:off x="231360" y="207659"/>
+            <a:ext cx="5254684" cy="3941013"/>
+          </a:xfrm>
+          <a:prstGeom prst="round2DiagRect">
+            <a:avLst>
+              <a:gd name="adj1" fmla="val 16667"/>
+              <a:gd name="adj2" fmla="val 0"/>
+            </a:avLst>
           </a:prstGeom>
-          <a:noFill/>
+          <a:ln w="88900" cap="sq">
+            <a:solidFill>
+              <a:srgbClr val="FFFFFF"/>
+            </a:solidFill>
+            <a:miter lim="800000"/>
+          </a:ln>
+          <a:effectLst>
+            <a:outerShdw blurRad="254000" algn="tl" rotWithShape="0">
+              <a:srgbClr val="000000">
+                <a:alpha val="43000"/>
+              </a:srgbClr>
+            </a:outerShdw>
+          </a:effectLst>
         </p:spPr>
       </p:pic>
     </p:spTree>
@@ -12681,13 +10307,13 @@
   <p:clrMapOvr>
     <a:masterClrMapping/>
   </p:clrMapOvr>
-  <mc:AlternateContent xmlns:mc="http://schemas.openxmlformats.org/markup-compatibility/2006">
-    <mc:Choice xmlns:p159="http://schemas.microsoft.com/office/powerpoint/2015/09/main" Requires="p159">
+  <mc:AlternateContent xmlns:mc="http://schemas.openxmlformats.org/markup-compatibility/2006" xmlns:p159="http://schemas.microsoft.com/office/powerpoint/2015/09/main">
+    <mc:Choice Requires="p159">
       <p:transition xmlns:p14="http://schemas.microsoft.com/office/powerpoint/2010/main" spd="slow" p14:dur="2000">
         <p159:morph option="byObject"/>
       </p:transition>
     </mc:Choice>
-    <mc:Fallback>
+    <mc:Fallback xmlns="">
       <p:transition spd="slow">
         <p:fade/>
       </p:transition>
@@ -12718,7 +10344,7 @@
           <p:cNvPr id="2" name="Title 1">
             <a:extLst>
               <a:ext uri="{FF2B5EF4-FFF2-40B4-BE49-F238E27FC236}">
-                <a16:creationId xmlns:a16="http://schemas.microsoft.com/office/drawing/2014/main" id="{B9CB340E-F55D-DA8A-9F0E-8474E3BE6DF7}"/>
+                <a16:creationId xmlns:a16="http://schemas.microsoft.com/office/drawing/2014/main" id="{727C0816-B592-9E8E-EA9D-D172D0B8710B}"/>
               </a:ext>
             </a:extLst>
           </p:cNvPr>
@@ -12729,7 +10355,12 @@
             <p:ph type="title"/>
           </p:nvPr>
         </p:nvSpPr>
-        <p:spPr/>
+        <p:spPr>
+          <a:xfrm>
+            <a:off x="432393" y="758952"/>
+            <a:ext cx="7609668" cy="1734866"/>
+          </a:xfrm>
+        </p:spPr>
         <p:txBody>
           <a:bodyPr anchor="t">
             <a:normAutofit/>
@@ -12738,60 +10369,124 @@
           <a:p>
             <a:r>
               <a:rPr lang="en-US" dirty="0" err="1"/>
-              <a:t>Doelstelling</a:t>
+              <a:t>Onderdelen</a:t>
             </a:r>
             <a:endParaRPr lang="LID4096" dirty="0"/>
           </a:p>
         </p:txBody>
       </p:sp>
-      <p:graphicFrame>
-        <p:nvGraphicFramePr>
-          <p:cNvPr id="5" name="Content Placeholder 2">
-            <a:extLst>
-              <a:ext uri="{FF2B5EF4-FFF2-40B4-BE49-F238E27FC236}">
-                <a16:creationId xmlns:a16="http://schemas.microsoft.com/office/drawing/2014/main" id="{A34BE619-C8A0-112C-FAFE-5F7447C9197C}"/>
-              </a:ext>
-            </a:extLst>
-          </p:cNvPr>
-          <p:cNvGraphicFramePr>
-            <a:graphicFrameLocks noGrp="1"/>
-          </p:cNvGraphicFramePr>
-          <p:nvPr>
-            <p:ph idx="1"/>
-            <p:extLst>
-              <p:ext uri="{D42A27DB-BD31-4B8C-83A1-F6EECF244321}">
-                <p14:modId xmlns:p14="http://schemas.microsoft.com/office/powerpoint/2010/main" val="1771320930"/>
-              </p:ext>
-            </p:extLst>
-          </p:nvPr>
-        </p:nvGraphicFramePr>
-        <p:xfrm>
-          <a:off x="1124795" y="1989703"/>
-          <a:ext cx="9942409" cy="4305300"/>
-        </p:xfrm>
-        <a:graphic>
-          <a:graphicData uri="http://schemas.openxmlformats.org/drawingml/2006/diagram">
-            <dgm:relIds xmlns:dgm="http://schemas.openxmlformats.org/drawingml/2006/diagram" xmlns:r="http://schemas.openxmlformats.org/officeDocument/2006/relationships" r:dm="rId2" r:lo="rId3" r:qs="rId4" r:cs="rId5"/>
-          </a:graphicData>
-        </a:graphic>
-      </p:graphicFrame>
+      <p:sp>
+        <p:nvSpPr>
+          <p:cNvPr id="3" name="Content Placeholder 2">
+            <a:extLst>
+              <a:ext uri="{FF2B5EF4-FFF2-40B4-BE49-F238E27FC236}">
+                <a16:creationId xmlns:a16="http://schemas.microsoft.com/office/drawing/2014/main" id="{8F793EA2-36C5-9A79-4D5F-D8F5185E65B6}"/>
+              </a:ext>
+            </a:extLst>
+          </p:cNvPr>
+          <p:cNvSpPr>
+            <a:spLocks noGrp="1"/>
+          </p:cNvSpPr>
+          <p:nvPr>
+            <p:ph sz="quarter" idx="13"/>
+          </p:nvPr>
+        </p:nvSpPr>
+        <p:spPr>
+          <a:xfrm>
+            <a:off x="419100" y="2705101"/>
+            <a:ext cx="8801100" cy="2947550"/>
+          </a:xfrm>
+        </p:spPr>
+        <p:txBody>
+          <a:bodyPr>
+            <a:normAutofit/>
+          </a:bodyPr>
+          <a:lstStyle/>
+          <a:p>
+            <a:pPr marL="457200" indent="-457200">
+              <a:buFontTx/>
+              <a:buChar char="-"/>
+            </a:pPr>
+            <a:r>
+              <a:rPr lang="en-US" dirty="0"/>
+              <a:t>Raspberry Pi 5 			€196,43</a:t>
+            </a:r>
+          </a:p>
+          <a:p>
+            <a:pPr marL="457200" indent="-457200">
+              <a:buFontTx/>
+              <a:buChar char="-"/>
+            </a:pPr>
+            <a:r>
+              <a:rPr lang="en-US" dirty="0"/>
+              <a:t>Micro SD Card 32GB		€11,52</a:t>
+            </a:r>
+          </a:p>
+          <a:p>
+            <a:pPr marL="457200" indent="-457200">
+              <a:buFontTx/>
+              <a:buChar char="-"/>
+            </a:pPr>
+            <a:r>
+              <a:rPr lang="en-US" dirty="0"/>
+              <a:t>USB hub met </a:t>
+            </a:r>
+            <a:r>
+              <a:rPr lang="en-US" dirty="0" err="1"/>
+              <a:t>voeding</a:t>
+            </a:r>
+            <a:r>
+              <a:rPr lang="en-US" dirty="0"/>
+              <a:t>		€12,99</a:t>
+            </a:r>
+          </a:p>
+          <a:p>
+            <a:pPr marL="457200" indent="-457200">
+              <a:buFontTx/>
+              <a:buChar char="-"/>
+            </a:pPr>
+            <a:r>
+              <a:rPr lang="en-US" dirty="0"/>
+              <a:t>4* Webcam 1080P		€11,99 *4 = €47,96</a:t>
+            </a:r>
+          </a:p>
+          <a:p>
+            <a:r>
+              <a:rPr lang="en-US"/>
+              <a:t>------------------------------------------------------------------------------</a:t>
+            </a:r>
+            <a:endParaRPr lang="en-US" dirty="0"/>
+          </a:p>
+          <a:p>
+            <a:pPr marL="457200" indent="-457200">
+              <a:buFontTx/>
+              <a:buChar char="-"/>
+            </a:pPr>
+            <a:r>
+              <a:rPr lang="en-US" dirty="0"/>
+              <a:t>TOTAL			€268,90</a:t>
+            </a:r>
+            <a:endParaRPr lang="LID4096" dirty="0"/>
+          </a:p>
+        </p:txBody>
+      </p:sp>
     </p:spTree>
     <p:extLst>
       <p:ext uri="{BB962C8B-B14F-4D97-AF65-F5344CB8AC3E}">
-        <p14:creationId xmlns:p14="http://schemas.microsoft.com/office/powerpoint/2010/main" val="1454382296"/>
+        <p14:creationId xmlns:p14="http://schemas.microsoft.com/office/powerpoint/2010/main" val="439038329"/>
       </p:ext>
     </p:extLst>
   </p:cSld>
   <p:clrMapOvr>
     <a:masterClrMapping/>
   </p:clrMapOvr>
-  <mc:AlternateContent xmlns:mc="http://schemas.openxmlformats.org/markup-compatibility/2006">
-    <mc:Choice xmlns:p159="http://schemas.microsoft.com/office/powerpoint/2015/09/main" Requires="p159">
+  <mc:AlternateContent xmlns:mc="http://schemas.openxmlformats.org/markup-compatibility/2006" xmlns:p159="http://schemas.microsoft.com/office/powerpoint/2015/09/main">
+    <mc:Choice Requires="p159">
       <p:transition xmlns:p14="http://schemas.microsoft.com/office/powerpoint/2010/main" spd="slow" p14:dur="2000">
         <p159:morph option="byObject"/>
       </p:transition>
     </mc:Choice>
-    <mc:Fallback>
+    <mc:Fallback xmlns="">
       <p:transition spd="slow">
         <p:fade/>
       </p:transition>
@@ -12819,10 +10514,10 @@
       </p:grpSpPr>
       <p:sp>
         <p:nvSpPr>
-          <p:cNvPr id="2" name="Title 1">
-            <a:extLst>
-              <a:ext uri="{FF2B5EF4-FFF2-40B4-BE49-F238E27FC236}">
-                <a16:creationId xmlns:a16="http://schemas.microsoft.com/office/drawing/2014/main" id="{727C0816-B592-9E8E-EA9D-D172D0B8710B}"/>
+          <p:cNvPr id="10" name="Title 1">
+            <a:extLst>
+              <a:ext uri="{FF2B5EF4-FFF2-40B4-BE49-F238E27FC236}">
+                <a16:creationId xmlns:a16="http://schemas.microsoft.com/office/drawing/2014/main" id="{31935CC8-2890-5E51-2D68-07BE9A14BCBB}"/>
               </a:ext>
             </a:extLst>
           </p:cNvPr>
@@ -12833,115 +10528,728 @@
             <p:ph type="title"/>
           </p:nvPr>
         </p:nvSpPr>
-        <p:spPr/>
-        <p:txBody>
-          <a:bodyPr/>
-          <a:lstStyle/>
-          <a:p>
-            <a:r>
-              <a:rPr lang="en-US" dirty="0" err="1"/>
-              <a:t>Onderdelen</a:t>
-            </a:r>
-            <a:endParaRPr lang="LID4096" dirty="0"/>
-          </a:p>
-        </p:txBody>
-      </p:sp>
-      <p:sp>
-        <p:nvSpPr>
-          <p:cNvPr id="3" name="Content Placeholder 2">
-            <a:extLst>
-              <a:ext uri="{FF2B5EF4-FFF2-40B4-BE49-F238E27FC236}">
-                <a16:creationId xmlns:a16="http://schemas.microsoft.com/office/drawing/2014/main" id="{8F793EA2-36C5-9A79-4D5F-D8F5185E65B6}"/>
-              </a:ext>
-            </a:extLst>
-          </p:cNvPr>
-          <p:cNvSpPr>
-            <a:spLocks noGrp="1"/>
-          </p:cNvSpPr>
-          <p:nvPr>
-            <p:ph idx="1"/>
-          </p:nvPr>
-        </p:nvSpPr>
-        <p:spPr/>
-        <p:txBody>
-          <a:bodyPr>
+        <p:spPr>
+          <a:xfrm>
+            <a:off x="97063" y="661668"/>
+            <a:ext cx="6433266" cy="1962149"/>
+          </a:xfrm>
+        </p:spPr>
+        <p:txBody>
+          <a:bodyPr anchor="t">
             <a:normAutofit/>
           </a:bodyPr>
           <a:lstStyle/>
           <a:p>
-            <a:pPr marL="457200" indent="-457200">
-              <a:buFontTx/>
-              <a:buChar char="-"/>
-            </a:pPr>
-            <a:r>
-              <a:rPr lang="en-US" sz="2600" dirty="0"/>
-              <a:t>Raspberry Pi 5 			€196,43</a:t>
-            </a:r>
-          </a:p>
-          <a:p>
-            <a:pPr marL="457200" indent="-457200">
-              <a:buFontTx/>
-              <a:buChar char="-"/>
-            </a:pPr>
-            <a:r>
-              <a:rPr lang="en-US" sz="2600" dirty="0"/>
-              <a:t>USB hub met </a:t>
-            </a:r>
-            <a:r>
-              <a:rPr lang="en-US" sz="2600" dirty="0" err="1"/>
-              <a:t>voeding</a:t>
-            </a:r>
-            <a:r>
-              <a:rPr lang="en-US" sz="2600" dirty="0"/>
-              <a:t>		€12,99</a:t>
-            </a:r>
-          </a:p>
-          <a:p>
-            <a:pPr marL="457200" indent="-457200">
-              <a:buFontTx/>
-              <a:buChar char="-"/>
-            </a:pPr>
-            <a:r>
-              <a:rPr lang="en-US" sz="2600" dirty="0"/>
-              <a:t>4* Webcam 1080P			€11,99 *4 = €47,96</a:t>
-            </a:r>
-          </a:p>
-          <a:p>
-            <a:r>
-              <a:rPr lang="en-US" sz="2600" dirty="0"/>
-              <a:t>--------------------------------------------------------------------</a:t>
-            </a:r>
-          </a:p>
-          <a:p>
-            <a:pPr marL="457200" indent="-457200">
-              <a:buFontTx/>
-              <a:buChar char="-"/>
-            </a:pPr>
-            <a:r>
-              <a:rPr lang="en-US" sz="2600" dirty="0"/>
-              <a:t>TOTAL					€257,38</a:t>
-            </a:r>
-            <a:endParaRPr lang="LID4096" sz="2600" dirty="0"/>
+            <a:r>
+              <a:rPr lang="en-US" sz="5500" dirty="0"/>
+              <a:t>Hoe </a:t>
+            </a:r>
+            <a:r>
+              <a:rPr lang="en-US" sz="5500" dirty="0" err="1"/>
+              <a:t>werkt</a:t>
+            </a:r>
+            <a:r>
+              <a:rPr lang="en-US" sz="5500" dirty="0"/>
+              <a:t> het?</a:t>
+            </a:r>
+          </a:p>
+        </p:txBody>
+      </p:sp>
+      <p:pic>
+        <p:nvPicPr>
+          <p:cNvPr id="19" name="Picture 18" descr="Laptop computer | Definition, History, &amp; Facts | Britannica">
+            <a:extLst>
+              <a:ext uri="{FF2B5EF4-FFF2-40B4-BE49-F238E27FC236}">
+                <a16:creationId xmlns:a16="http://schemas.microsoft.com/office/drawing/2014/main" id="{8DC3EC01-6689-15B9-46EE-FFF6C0B78DB9}"/>
+              </a:ext>
+            </a:extLst>
+          </p:cNvPr>
+          <p:cNvPicPr>
+            <a:picLocks noChangeAspect="1"/>
+          </p:cNvPicPr>
+          <p:nvPr/>
+        </p:nvPicPr>
+        <p:blipFill>
+          <a:blip r:embed="rId2"/>
+          <a:stretch>
+            <a:fillRect/>
+          </a:stretch>
+        </p:blipFill>
+        <p:spPr>
+          <a:xfrm>
+            <a:off x="526424" y="3658263"/>
+            <a:ext cx="3142896" cy="2117526"/>
+          </a:xfrm>
+          <a:prstGeom prst="snip2DiagRect">
+            <a:avLst/>
+          </a:prstGeom>
+          <a:solidFill>
+            <a:srgbClr val="FFFFFF">
+              <a:shade val="85000"/>
+            </a:srgbClr>
+          </a:solidFill>
+          <a:ln w="88900" cap="sq">
+            <a:solidFill>
+              <a:srgbClr val="FFFFFF"/>
+            </a:solidFill>
+            <a:miter lim="800000"/>
+          </a:ln>
+          <a:effectLst>
+            <a:outerShdw blurRad="88900" algn="tl" rotWithShape="0">
+              <a:srgbClr val="000000">
+                <a:alpha val="45000"/>
+              </a:srgbClr>
+            </a:outerShdw>
+          </a:effectLst>
+          <a:scene3d>
+            <a:camera prst="orthographicFront"/>
+            <a:lightRig rig="twoPt" dir="t">
+              <a:rot lat="0" lon="0" rev="7200000"/>
+            </a:lightRig>
+          </a:scene3d>
+          <a:sp3d>
+            <a:bevelT w="25400" h="19050"/>
+            <a:contourClr>
+              <a:srgbClr val="FFFFFF"/>
+            </a:contourClr>
+          </a:sp3d>
+        </p:spPr>
+      </p:pic>
+      <p:pic>
+        <p:nvPicPr>
+          <p:cNvPr id="21" name="Content Placeholder 3" descr="RASPBERRY PI SC1112">
+            <a:extLst>
+              <a:ext uri="{FF2B5EF4-FFF2-40B4-BE49-F238E27FC236}">
+                <a16:creationId xmlns:a16="http://schemas.microsoft.com/office/drawing/2014/main" id="{D652357C-4258-1662-7EC5-FF5523338C92}"/>
+              </a:ext>
+            </a:extLst>
+          </p:cNvPr>
+          <p:cNvPicPr>
+            <a:picLocks noChangeAspect="1"/>
+          </p:cNvPicPr>
+          <p:nvPr/>
+        </p:nvPicPr>
+        <p:blipFill>
+          <a:blip r:embed="rId3"/>
+          <a:stretch>
+            <a:fillRect/>
+          </a:stretch>
+        </p:blipFill>
+        <p:spPr>
+          <a:xfrm>
+            <a:off x="8031068" y="3658263"/>
+            <a:ext cx="2823368" cy="2117526"/>
+          </a:xfrm>
+          <a:prstGeom prst="snip2DiagRect">
+            <a:avLst/>
+          </a:prstGeom>
+          <a:solidFill>
+            <a:srgbClr val="FFFFFF">
+              <a:shade val="85000"/>
+            </a:srgbClr>
+          </a:solidFill>
+          <a:ln w="88900" cap="sq">
+            <a:solidFill>
+              <a:srgbClr val="FFFFFF"/>
+            </a:solidFill>
+            <a:miter lim="800000"/>
+          </a:ln>
+          <a:effectLst>
+            <a:outerShdw blurRad="88900" algn="tl" rotWithShape="0">
+              <a:srgbClr val="000000">
+                <a:alpha val="45000"/>
+              </a:srgbClr>
+            </a:outerShdw>
+          </a:effectLst>
+          <a:scene3d>
+            <a:camera prst="orthographicFront"/>
+            <a:lightRig rig="twoPt" dir="t">
+              <a:rot lat="0" lon="0" rev="7200000"/>
+            </a:lightRig>
+          </a:scene3d>
+          <a:sp3d>
+            <a:bevelT w="25400" h="19050"/>
+            <a:contourClr>
+              <a:srgbClr val="FFFFFF"/>
+            </a:contourClr>
+          </a:sp3d>
+        </p:spPr>
+      </p:pic>
+      <p:pic>
+        <p:nvPicPr>
+          <p:cNvPr id="27" name="Picture 26" descr="Power Gear Interior/Exterior Simulated Security Camera 40661 at Lowes.com">
+            <a:extLst>
+              <a:ext uri="{FF2B5EF4-FFF2-40B4-BE49-F238E27FC236}">
+                <a16:creationId xmlns:a16="http://schemas.microsoft.com/office/drawing/2014/main" id="{C2D37B91-2787-C25E-5C76-12E23EEB08A2}"/>
+              </a:ext>
+            </a:extLst>
+          </p:cNvPr>
+          <p:cNvPicPr>
+            <a:picLocks noChangeAspect="1"/>
+          </p:cNvPicPr>
+          <p:nvPr/>
+        </p:nvPicPr>
+        <p:blipFill>
+          <a:blip r:embed="rId4"/>
+          <a:stretch>
+            <a:fillRect/>
+          </a:stretch>
+        </p:blipFill>
+        <p:spPr>
+          <a:xfrm>
+            <a:off x="10378593" y="2028352"/>
+            <a:ext cx="1400648" cy="1400648"/>
+          </a:xfrm>
+          <a:prstGeom prst="roundRect">
+            <a:avLst>
+              <a:gd name="adj" fmla="val 16667"/>
+            </a:avLst>
+          </a:prstGeom>
+          <a:ln>
+            <a:noFill/>
+          </a:ln>
+          <a:effectLst>
+            <a:outerShdw blurRad="76200" dist="38100" dir="7800000" algn="tl" rotWithShape="0">
+              <a:srgbClr val="000000">
+                <a:alpha val="40000"/>
+              </a:srgbClr>
+            </a:outerShdw>
+          </a:effectLst>
+          <a:scene3d>
+            <a:camera prst="orthographicFront"/>
+            <a:lightRig rig="contrasting" dir="t">
+              <a:rot lat="0" lon="0" rev="4200000"/>
+            </a:lightRig>
+          </a:scene3d>
+          <a:sp3d prstMaterial="plastic">
+            <a:bevelT w="381000" h="114300" prst="relaxedInset"/>
+            <a:contourClr>
+              <a:srgbClr val="969696"/>
+            </a:contourClr>
+          </a:sp3d>
+        </p:spPr>
+      </p:pic>
+      <p:pic>
+        <p:nvPicPr>
+          <p:cNvPr id="29" name="Picture 28" descr="Power Gear Interior/Exterior Simulated Security Camera 40661 at Lowes.com">
+            <a:extLst>
+              <a:ext uri="{FF2B5EF4-FFF2-40B4-BE49-F238E27FC236}">
+                <a16:creationId xmlns:a16="http://schemas.microsoft.com/office/drawing/2014/main" id="{5025EC41-7695-E869-BC90-DCC0D9932612}"/>
+              </a:ext>
+            </a:extLst>
+          </p:cNvPr>
+          <p:cNvPicPr>
+            <a:picLocks noChangeAspect="1"/>
+          </p:cNvPicPr>
+          <p:nvPr/>
+        </p:nvPicPr>
+        <p:blipFill>
+          <a:blip r:embed="rId4"/>
+          <a:stretch>
+            <a:fillRect/>
+          </a:stretch>
+        </p:blipFill>
+        <p:spPr>
+          <a:xfrm>
+            <a:off x="5948049" y="1994163"/>
+            <a:ext cx="1400648" cy="1400648"/>
+          </a:xfrm>
+          <a:prstGeom prst="roundRect">
+            <a:avLst>
+              <a:gd name="adj" fmla="val 16667"/>
+            </a:avLst>
+          </a:prstGeom>
+          <a:ln>
+            <a:noFill/>
+          </a:ln>
+          <a:effectLst>
+            <a:outerShdw blurRad="76200" dist="38100" dir="7800000" algn="tl" rotWithShape="0">
+              <a:srgbClr val="000000">
+                <a:alpha val="40000"/>
+              </a:srgbClr>
+            </a:outerShdw>
+          </a:effectLst>
+          <a:scene3d>
+            <a:camera prst="orthographicFront"/>
+            <a:lightRig rig="contrasting" dir="t">
+              <a:rot lat="0" lon="0" rev="4200000"/>
+            </a:lightRig>
+          </a:scene3d>
+          <a:sp3d prstMaterial="plastic">
+            <a:bevelT w="381000" h="114300" prst="relaxedInset"/>
+            <a:contourClr>
+              <a:srgbClr val="969696"/>
+            </a:contourClr>
+          </a:sp3d>
+        </p:spPr>
+      </p:pic>
+      <p:pic>
+        <p:nvPicPr>
+          <p:cNvPr id="31" name="Picture 30" descr="Power Gear Interior/Exterior Simulated Security Camera 40661 at Lowes.com">
+            <a:extLst>
+              <a:ext uri="{FF2B5EF4-FFF2-40B4-BE49-F238E27FC236}">
+                <a16:creationId xmlns:a16="http://schemas.microsoft.com/office/drawing/2014/main" id="{8821ED6F-F19C-17BD-DC7C-093A16491169}"/>
+              </a:ext>
+            </a:extLst>
+          </p:cNvPr>
+          <p:cNvPicPr>
+            <a:picLocks noChangeAspect="1"/>
+          </p:cNvPicPr>
+          <p:nvPr/>
+        </p:nvPicPr>
+        <p:blipFill>
+          <a:blip r:embed="rId4"/>
+          <a:stretch>
+            <a:fillRect/>
+          </a:stretch>
+        </p:blipFill>
+        <p:spPr>
+          <a:xfrm>
+            <a:off x="7424897" y="1994163"/>
+            <a:ext cx="1400648" cy="1400648"/>
+          </a:xfrm>
+          <a:prstGeom prst="roundRect">
+            <a:avLst>
+              <a:gd name="adj" fmla="val 16667"/>
+            </a:avLst>
+          </a:prstGeom>
+          <a:ln>
+            <a:noFill/>
+          </a:ln>
+          <a:effectLst>
+            <a:outerShdw blurRad="76200" dist="38100" dir="7800000" algn="tl" rotWithShape="0">
+              <a:srgbClr val="000000">
+                <a:alpha val="40000"/>
+              </a:srgbClr>
+            </a:outerShdw>
+          </a:effectLst>
+          <a:scene3d>
+            <a:camera prst="orthographicFront"/>
+            <a:lightRig rig="contrasting" dir="t">
+              <a:rot lat="0" lon="0" rev="4200000"/>
+            </a:lightRig>
+          </a:scene3d>
+          <a:sp3d prstMaterial="plastic">
+            <a:bevelT w="381000" h="114300" prst="relaxedInset"/>
+            <a:contourClr>
+              <a:srgbClr val="969696"/>
+            </a:contourClr>
+          </a:sp3d>
+        </p:spPr>
+      </p:pic>
+      <p:pic>
+        <p:nvPicPr>
+          <p:cNvPr id="33" name="Picture 32" descr="Power Gear Interior/Exterior Simulated Security Camera 40661 at Lowes.com">
+            <a:extLst>
+              <a:ext uri="{FF2B5EF4-FFF2-40B4-BE49-F238E27FC236}">
+                <a16:creationId xmlns:a16="http://schemas.microsoft.com/office/drawing/2014/main" id="{93112A2A-76AD-5096-4422-C567E5492E50}"/>
+              </a:ext>
+            </a:extLst>
+          </p:cNvPr>
+          <p:cNvPicPr>
+            <a:picLocks noChangeAspect="1"/>
+          </p:cNvPicPr>
+          <p:nvPr/>
+        </p:nvPicPr>
+        <p:blipFill>
+          <a:blip r:embed="rId4"/>
+          <a:stretch>
+            <a:fillRect/>
+          </a:stretch>
+        </p:blipFill>
+        <p:spPr>
+          <a:xfrm>
+            <a:off x="8901745" y="1994163"/>
+            <a:ext cx="1400648" cy="1400648"/>
+          </a:xfrm>
+          <a:prstGeom prst="roundRect">
+            <a:avLst>
+              <a:gd name="adj" fmla="val 16667"/>
+            </a:avLst>
+          </a:prstGeom>
+          <a:ln>
+            <a:noFill/>
+          </a:ln>
+          <a:effectLst>
+            <a:outerShdw blurRad="76200" dist="38100" dir="7800000" algn="tl" rotWithShape="0">
+              <a:srgbClr val="000000">
+                <a:alpha val="40000"/>
+              </a:srgbClr>
+            </a:outerShdw>
+          </a:effectLst>
+          <a:scene3d>
+            <a:camera prst="orthographicFront"/>
+            <a:lightRig rig="contrasting" dir="t">
+              <a:rot lat="0" lon="0" rev="4200000"/>
+            </a:lightRig>
+          </a:scene3d>
+          <a:sp3d prstMaterial="plastic">
+            <a:bevelT w="381000" h="114300" prst="relaxedInset"/>
+            <a:contourClr>
+              <a:srgbClr val="969696"/>
+            </a:contourClr>
+          </a:sp3d>
+        </p:spPr>
+      </p:pic>
+      <mc:AlternateContent xmlns:mc="http://schemas.openxmlformats.org/markup-compatibility/2006">
+        <mc:Choice xmlns:p14="http://schemas.microsoft.com/office/powerpoint/2010/main" Requires="p14">
+          <p:contentPart p14:bwMode="auto" r:id="rId5">
+            <p14:nvContentPartPr>
+              <p14:cNvPr id="57" name="Ink 56">
+                <a:extLst>
+                  <a:ext uri="{FF2B5EF4-FFF2-40B4-BE49-F238E27FC236}">
+                    <a16:creationId xmlns:a16="http://schemas.microsoft.com/office/drawing/2014/main" id="{33E4A19E-6E14-ACBB-6413-098F33B2D04A}"/>
+                  </a:ext>
+                </a:extLst>
+              </p14:cNvPr>
+              <p14:cNvContentPartPr/>
+              <p14:nvPr/>
+            </p14:nvContentPartPr>
+            <p14:xfrm>
+              <a:off x="7314754" y="3352494"/>
+              <a:ext cx="678960" cy="344520"/>
+            </p14:xfrm>
+          </p:contentPart>
+        </mc:Choice>
+        <mc:Fallback>
+          <p:pic>
+            <p:nvPicPr>
+              <p:cNvPr id="57" name="Ink 56">
+                <a:extLst>
+                  <a:ext uri="{FF2B5EF4-FFF2-40B4-BE49-F238E27FC236}">
+                    <a16:creationId xmlns:a16="http://schemas.microsoft.com/office/drawing/2014/main" id="{33E4A19E-6E14-ACBB-6413-098F33B2D04A}"/>
+                  </a:ext>
+                </a:extLst>
+              </p:cNvPr>
+              <p:cNvPicPr/>
+              <p:nvPr/>
+            </p:nvPicPr>
+            <p:blipFill>
+              <a:blip r:embed="rId6"/>
+              <a:stretch>
+                <a:fillRect/>
+              </a:stretch>
+            </p:blipFill>
+            <p:spPr>
+              <a:xfrm>
+                <a:off x="7278754" y="3316494"/>
+                <a:ext cx="750600" cy="416160"/>
+              </a:xfrm>
+              <a:prstGeom prst="rect">
+                <a:avLst/>
+              </a:prstGeom>
+            </p:spPr>
+          </p:pic>
+        </mc:Fallback>
+      </mc:AlternateContent>
+      <mc:AlternateContent xmlns:mc="http://schemas.openxmlformats.org/markup-compatibility/2006">
+        <mc:Choice xmlns:p14="http://schemas.microsoft.com/office/powerpoint/2010/main" Requires="p14">
+          <p:contentPart p14:bwMode="auto" r:id="rId7">
+            <p14:nvContentPartPr>
+              <p14:cNvPr id="59" name="Ink 58">
+                <a:extLst>
+                  <a:ext uri="{FF2B5EF4-FFF2-40B4-BE49-F238E27FC236}">
+                    <a16:creationId xmlns:a16="http://schemas.microsoft.com/office/drawing/2014/main" id="{8A2DCFF6-2636-A5F9-FFD5-7C670C15560E}"/>
+                  </a:ext>
+                </a:extLst>
+              </p14:cNvPr>
+              <p14:cNvContentPartPr/>
+              <p14:nvPr/>
+            </p14:nvContentPartPr>
+            <p14:xfrm>
+              <a:off x="8455594" y="3411534"/>
+              <a:ext cx="720" cy="217080"/>
+            </p14:xfrm>
+          </p:contentPart>
+        </mc:Choice>
+        <mc:Fallback>
+          <p:pic>
+            <p:nvPicPr>
+              <p:cNvPr id="59" name="Ink 58">
+                <a:extLst>
+                  <a:ext uri="{FF2B5EF4-FFF2-40B4-BE49-F238E27FC236}">
+                    <a16:creationId xmlns:a16="http://schemas.microsoft.com/office/drawing/2014/main" id="{8A2DCFF6-2636-A5F9-FFD5-7C670C15560E}"/>
+                  </a:ext>
+                </a:extLst>
+              </p:cNvPr>
+              <p:cNvPicPr/>
+              <p:nvPr/>
+            </p:nvPicPr>
+            <p:blipFill>
+              <a:blip r:embed="rId8"/>
+              <a:stretch>
+                <a:fillRect/>
+              </a:stretch>
+            </p:blipFill>
+            <p:spPr>
+              <a:xfrm>
+                <a:off x="8383594" y="3375474"/>
+                <a:ext cx="144000" cy="288839"/>
+              </a:xfrm>
+              <a:prstGeom prst="rect">
+                <a:avLst/>
+              </a:prstGeom>
+            </p:spPr>
+          </p:pic>
+        </mc:Fallback>
+      </mc:AlternateContent>
+      <mc:AlternateContent xmlns:mc="http://schemas.openxmlformats.org/markup-compatibility/2006">
+        <mc:Choice xmlns:p14="http://schemas.microsoft.com/office/powerpoint/2010/main" Requires="p14">
+          <p:contentPart p14:bwMode="auto" r:id="rId9">
+            <p14:nvContentPartPr>
+              <p14:cNvPr id="61" name="Ink 60">
+                <a:extLst>
+                  <a:ext uri="{FF2B5EF4-FFF2-40B4-BE49-F238E27FC236}">
+                    <a16:creationId xmlns:a16="http://schemas.microsoft.com/office/drawing/2014/main" id="{A606BE07-B6C8-69A2-62A9-CBD6535792AC}"/>
+                  </a:ext>
+                </a:extLst>
+              </p14:cNvPr>
+              <p14:cNvContentPartPr/>
+              <p14:nvPr/>
+            </p14:nvContentPartPr>
+            <p14:xfrm>
+              <a:off x="9596074" y="3382014"/>
+              <a:ext cx="720" cy="226800"/>
+            </p14:xfrm>
+          </p:contentPart>
+        </mc:Choice>
+        <mc:Fallback>
+          <p:pic>
+            <p:nvPicPr>
+              <p:cNvPr id="61" name="Ink 60">
+                <a:extLst>
+                  <a:ext uri="{FF2B5EF4-FFF2-40B4-BE49-F238E27FC236}">
+                    <a16:creationId xmlns:a16="http://schemas.microsoft.com/office/drawing/2014/main" id="{A606BE07-B6C8-69A2-62A9-CBD6535792AC}"/>
+                  </a:ext>
+                </a:extLst>
+              </p:cNvPr>
+              <p:cNvPicPr/>
+              <p:nvPr/>
+            </p:nvPicPr>
+            <p:blipFill>
+              <a:blip r:embed="rId10"/>
+              <a:stretch>
+                <a:fillRect/>
+              </a:stretch>
+            </p:blipFill>
+            <p:spPr>
+              <a:xfrm>
+                <a:off x="9524074" y="3346071"/>
+                <a:ext cx="144000" cy="298326"/>
+              </a:xfrm>
+              <a:prstGeom prst="rect">
+                <a:avLst/>
+              </a:prstGeom>
+            </p:spPr>
+          </p:pic>
+        </mc:Fallback>
+      </mc:AlternateContent>
+      <mc:AlternateContent xmlns:mc="http://schemas.openxmlformats.org/markup-compatibility/2006">
+        <mc:Choice xmlns:p14="http://schemas.microsoft.com/office/powerpoint/2010/main" Requires="p14">
+          <p:contentPart p14:bwMode="auto" r:id="rId11">
+            <p14:nvContentPartPr>
+              <p14:cNvPr id="63" name="Ink 62">
+                <a:extLst>
+                  <a:ext uri="{FF2B5EF4-FFF2-40B4-BE49-F238E27FC236}">
+                    <a16:creationId xmlns:a16="http://schemas.microsoft.com/office/drawing/2014/main" id="{24862A02-C6D0-AF08-F630-55F32910E469}"/>
+                  </a:ext>
+                </a:extLst>
+              </p14:cNvPr>
+              <p14:cNvContentPartPr/>
+              <p14:nvPr/>
+            </p14:nvContentPartPr>
+            <p14:xfrm>
+              <a:off x="10746274" y="3460494"/>
+              <a:ext cx="363960" cy="374040"/>
+            </p14:xfrm>
+          </p:contentPart>
+        </mc:Choice>
+        <mc:Fallback>
+          <p:pic>
+            <p:nvPicPr>
+              <p:cNvPr id="63" name="Ink 62">
+                <a:extLst>
+                  <a:ext uri="{FF2B5EF4-FFF2-40B4-BE49-F238E27FC236}">
+                    <a16:creationId xmlns:a16="http://schemas.microsoft.com/office/drawing/2014/main" id="{24862A02-C6D0-AF08-F630-55F32910E469}"/>
+                  </a:ext>
+                </a:extLst>
+              </p:cNvPr>
+              <p:cNvPicPr/>
+              <p:nvPr/>
+            </p:nvPicPr>
+            <p:blipFill>
+              <a:blip r:embed="rId12"/>
+              <a:stretch>
+                <a:fillRect/>
+              </a:stretch>
+            </p:blipFill>
+            <p:spPr>
+              <a:xfrm>
+                <a:off x="10710274" y="3424494"/>
+                <a:ext cx="435600" cy="445680"/>
+              </a:xfrm>
+              <a:prstGeom prst="rect">
+                <a:avLst/>
+              </a:prstGeom>
+            </p:spPr>
+          </p:pic>
+        </mc:Fallback>
+      </mc:AlternateContent>
+      <p:pic>
+        <p:nvPicPr>
+          <p:cNvPr id="65" name="Picture 64" descr="Welcome IT professionals">
+            <a:extLst>
+              <a:ext uri="{FF2B5EF4-FFF2-40B4-BE49-F238E27FC236}">
+                <a16:creationId xmlns:a16="http://schemas.microsoft.com/office/drawing/2014/main" id="{4EED70B1-806E-2BDF-9733-3D0130DE63AF}"/>
+              </a:ext>
+            </a:extLst>
+          </p:cNvPr>
+          <p:cNvPicPr>
+            <a:picLocks noChangeAspect="1"/>
+          </p:cNvPicPr>
+          <p:nvPr/>
+        </p:nvPicPr>
+        <p:blipFill>
+          <a:blip r:embed="rId13"/>
+          <a:stretch>
+            <a:fillRect/>
+          </a:stretch>
+        </p:blipFill>
+        <p:spPr>
+          <a:xfrm>
+            <a:off x="5081457" y="3984738"/>
+            <a:ext cx="1537472" cy="1537472"/>
+          </a:xfrm>
+          <a:prstGeom prst="rect">
+            <a:avLst/>
+          </a:prstGeom>
+        </p:spPr>
+      </p:pic>
+      <p:sp>
+        <p:nvSpPr>
+          <p:cNvPr id="68" name="Arrow: Down 67">
+            <a:extLst>
+              <a:ext uri="{FF2B5EF4-FFF2-40B4-BE49-F238E27FC236}">
+                <a16:creationId xmlns:a16="http://schemas.microsoft.com/office/drawing/2014/main" id="{503892C6-1045-55E2-74DB-07451E128227}"/>
+              </a:ext>
+            </a:extLst>
+          </p:cNvPr>
+          <p:cNvSpPr/>
+          <p:nvPr/>
+        </p:nvSpPr>
+        <p:spPr>
+          <a:xfrm rot="16200000">
+            <a:off x="4325771" y="4172553"/>
+            <a:ext cx="363794" cy="1342526"/>
+          </a:xfrm>
+          <a:prstGeom prst="downArrow">
+            <a:avLst/>
+          </a:prstGeom>
+          <a:solidFill>
+            <a:srgbClr val="00B0F0"/>
+          </a:solidFill>
+          <a:ln>
+            <a:solidFill>
+              <a:srgbClr val="0070C0"/>
+            </a:solidFill>
+          </a:ln>
+        </p:spPr>
+        <p:style>
+          <a:lnRef idx="2">
+            <a:schemeClr val="accent1">
+              <a:shade val="15000"/>
+            </a:schemeClr>
+          </a:lnRef>
+          <a:fillRef idx="1">
+            <a:schemeClr val="accent1"/>
+          </a:fillRef>
+          <a:effectRef idx="0">
+            <a:schemeClr val="accent1"/>
+          </a:effectRef>
+          <a:fontRef idx="minor">
+            <a:schemeClr val="lt1"/>
+          </a:fontRef>
+        </p:style>
+        <p:txBody>
+          <a:bodyPr rtlCol="0" anchor="ctr"/>
+          <a:lstStyle/>
+          <a:p>
+            <a:pPr algn="ctr"/>
+            <a:endParaRPr lang="LID4096"/>
+          </a:p>
+        </p:txBody>
+      </p:sp>
+      <p:sp>
+        <p:nvSpPr>
+          <p:cNvPr id="70" name="Arrow: Down 69">
+            <a:extLst>
+              <a:ext uri="{FF2B5EF4-FFF2-40B4-BE49-F238E27FC236}">
+                <a16:creationId xmlns:a16="http://schemas.microsoft.com/office/drawing/2014/main" id="{FCB3BEE5-D978-689F-1859-10D149CECB4A}"/>
+              </a:ext>
+            </a:extLst>
+          </p:cNvPr>
+          <p:cNvSpPr/>
+          <p:nvPr/>
+        </p:nvSpPr>
+        <p:spPr>
+          <a:xfrm rot="16200000">
+            <a:off x="7010823" y="4172553"/>
+            <a:ext cx="363794" cy="1342526"/>
+          </a:xfrm>
+          <a:prstGeom prst="downArrow">
+            <a:avLst/>
+          </a:prstGeom>
+          <a:solidFill>
+            <a:srgbClr val="00B0F0"/>
+          </a:solidFill>
+          <a:ln>
+            <a:solidFill>
+              <a:srgbClr val="0070C0"/>
+            </a:solidFill>
+          </a:ln>
+        </p:spPr>
+        <p:style>
+          <a:lnRef idx="2">
+            <a:schemeClr val="accent1">
+              <a:shade val="15000"/>
+            </a:schemeClr>
+          </a:lnRef>
+          <a:fillRef idx="1">
+            <a:schemeClr val="accent1"/>
+          </a:fillRef>
+          <a:effectRef idx="0">
+            <a:schemeClr val="accent1"/>
+          </a:effectRef>
+          <a:fontRef idx="minor">
+            <a:schemeClr val="lt1"/>
+          </a:fontRef>
+        </p:style>
+        <p:txBody>
+          <a:bodyPr rtlCol="0" anchor="ctr"/>
+          <a:lstStyle/>
+          <a:p>
+            <a:pPr algn="ctr"/>
+            <a:endParaRPr lang="LID4096"/>
           </a:p>
         </p:txBody>
       </p:sp>
     </p:spTree>
     <p:extLst>
       <p:ext uri="{BB962C8B-B14F-4D97-AF65-F5344CB8AC3E}">
-        <p14:creationId xmlns:p14="http://schemas.microsoft.com/office/powerpoint/2010/main" val="439038329"/>
+        <p14:creationId xmlns:p14="http://schemas.microsoft.com/office/powerpoint/2010/main" val="2265773176"/>
       </p:ext>
     </p:extLst>
   </p:cSld>
   <p:clrMapOvr>
     <a:masterClrMapping/>
   </p:clrMapOvr>
-  <mc:AlternateContent xmlns:mc="http://schemas.openxmlformats.org/markup-compatibility/2006">
-    <mc:Choice xmlns:p159="http://schemas.microsoft.com/office/powerpoint/2015/09/main" Requires="p159">
+  <mc:AlternateContent xmlns:mc="http://schemas.openxmlformats.org/markup-compatibility/2006" xmlns:p159="http://schemas.microsoft.com/office/powerpoint/2015/09/main">
+    <mc:Choice Requires="p159">
       <p:transition xmlns:p14="http://schemas.microsoft.com/office/powerpoint/2010/main" spd="slow" p14:dur="2000">
         <p159:morph option="byObject"/>
       </p:transition>
     </mc:Choice>
-    <mc:Fallback>
+    <mc:Fallback xmlns="">
       <p:transition spd="slow">
         <p:fade/>
       </p:transition>
@@ -12969,10 +11277,10 @@
       </p:grpSpPr>
       <p:sp>
         <p:nvSpPr>
-          <p:cNvPr id="10" name="Title 1">
-            <a:extLst>
-              <a:ext uri="{FF2B5EF4-FFF2-40B4-BE49-F238E27FC236}">
-                <a16:creationId xmlns:a16="http://schemas.microsoft.com/office/drawing/2014/main" id="{31935CC8-2890-5E51-2D68-07BE9A14BCBB}"/>
+          <p:cNvPr id="8" name="Title 1">
+            <a:extLst>
+              <a:ext uri="{FF2B5EF4-FFF2-40B4-BE49-F238E27FC236}">
+                <a16:creationId xmlns:a16="http://schemas.microsoft.com/office/drawing/2014/main" id="{95ADDD13-FD0C-90F5-F409-31083954BC9A}"/>
               </a:ext>
             </a:extLst>
           </p:cNvPr>
@@ -12983,67 +11291,88 @@
             <p:ph type="title"/>
           </p:nvPr>
         </p:nvSpPr>
-        <p:spPr/>
-        <p:txBody>
-          <a:bodyPr anchor="t">
+        <p:spPr>
+          <a:xfrm>
+            <a:off x="418851" y="1276990"/>
+            <a:ext cx="5378267" cy="985658"/>
+          </a:xfrm>
+        </p:spPr>
+        <p:txBody>
+          <a:bodyPr/>
+          <a:lstStyle/>
+          <a:p>
+            <a:r>
+              <a:rPr lang="en-US" dirty="0"/>
+              <a:t>Meer info </a:t>
+            </a:r>
+            <a:r>
+              <a:rPr lang="en-US" dirty="0" err="1"/>
+              <a:t>en</a:t>
+            </a:r>
+            <a:r>
+              <a:rPr lang="en-US" dirty="0"/>
+              <a:t> updates op </a:t>
+            </a:r>
+            <a:r>
+              <a:rPr lang="en-US" dirty="0" err="1"/>
+              <a:t>mijn</a:t>
+            </a:r>
+            <a:r>
+              <a:rPr lang="en-US" dirty="0"/>
+              <a:t> </a:t>
+            </a:r>
+            <a:r>
+              <a:rPr lang="en-US" dirty="0" err="1"/>
+              <a:t>Github</a:t>
+            </a:r>
+            <a:r>
+              <a:rPr lang="en-US" dirty="0"/>
+              <a:t> repository</a:t>
+            </a:r>
+          </a:p>
+        </p:txBody>
+      </p:sp>
+      <p:sp>
+        <p:nvSpPr>
+          <p:cNvPr id="10" name="Content Placeholder 2">
+            <a:extLst>
+              <a:ext uri="{FF2B5EF4-FFF2-40B4-BE49-F238E27FC236}">
+                <a16:creationId xmlns:a16="http://schemas.microsoft.com/office/drawing/2014/main" id="{6A1E5F6D-959C-A809-763F-56A5C5A633D2}"/>
+              </a:ext>
+            </a:extLst>
+          </p:cNvPr>
+          <p:cNvSpPr>
+            <a:spLocks noGrp="1"/>
+          </p:cNvSpPr>
+          <p:nvPr>
+            <p:ph idx="1"/>
+          </p:nvPr>
+        </p:nvSpPr>
+        <p:spPr>
+          <a:xfrm>
+            <a:off x="427476" y="2471736"/>
+            <a:ext cx="6278123" cy="3662734"/>
+          </a:xfrm>
+        </p:spPr>
+        <p:txBody>
+          <a:bodyPr>
             <a:normAutofit/>
           </a:bodyPr>
           <a:lstStyle/>
           <a:p>
             <a:r>
-              <a:rPr lang="en-US" dirty="0"/>
-              <a:t>Flowchart </a:t>
-            </a:r>
-            <a:r>
-              <a:rPr lang="en-US" dirty="0" err="1"/>
-              <a:t>werking</a:t>
-            </a:r>
-            <a:r>
-              <a:rPr lang="en-US" dirty="0"/>
-              <a:t> </a:t>
-            </a:r>
-            <a:r>
-              <a:rPr lang="en-US" dirty="0" err="1"/>
-              <a:t>tussen</a:t>
-            </a:r>
-            <a:r>
-              <a:rPr lang="en-US" dirty="0"/>
-              <a:t> PC - Pi</a:t>
-            </a:r>
-          </a:p>
-        </p:txBody>
-      </p:sp>
-      <p:sp>
-        <p:nvSpPr>
-          <p:cNvPr id="17" name="Content Placeholder 2">
-            <a:extLst>
-              <a:ext uri="{FF2B5EF4-FFF2-40B4-BE49-F238E27FC236}">
-                <a16:creationId xmlns:a16="http://schemas.microsoft.com/office/drawing/2014/main" id="{E1F15A19-71E8-BA50-EADD-F38D67D4A605}"/>
-              </a:ext>
-            </a:extLst>
-          </p:cNvPr>
-          <p:cNvSpPr>
-            <a:spLocks noGrp="1"/>
-          </p:cNvSpPr>
-          <p:nvPr>
-            <p:ph sz="quarter" idx="14"/>
-          </p:nvPr>
-        </p:nvSpPr>
-        <p:spPr/>
-        <p:txBody>
-          <a:bodyPr/>
-          <a:lstStyle/>
-          <a:p>
-            <a:endParaRPr lang="en-US"/>
+              <a:rPr lang="en-US" sz="2000" dirty="0"/>
+              <a:t>https://github.com/GunnarrD/Gunnarrs-eindwerk</a:t>
+            </a:r>
           </a:p>
         </p:txBody>
       </p:sp>
       <p:pic>
         <p:nvPicPr>
-          <p:cNvPr id="6" name="Picture 5">
-            <a:extLst>
-              <a:ext uri="{FF2B5EF4-FFF2-40B4-BE49-F238E27FC236}">
-                <a16:creationId xmlns:a16="http://schemas.microsoft.com/office/drawing/2014/main" id="{63618FFE-080D-9175-5196-CDFC301950B6}"/>
+          <p:cNvPr id="3" name="Picture 2">
+            <a:extLst>
+              <a:ext uri="{FF2B5EF4-FFF2-40B4-BE49-F238E27FC236}">
+                <a16:creationId xmlns:a16="http://schemas.microsoft.com/office/drawing/2014/main" id="{29B940A6-598D-5E78-EBA0-48A4A0F2A7D2}"/>
               </a:ext>
             </a:extLst>
           </p:cNvPr>
@@ -13053,38 +11382,50 @@
           <p:nvPr/>
         </p:nvPicPr>
         <p:blipFill>
-          <a:blip r:embed="rId2"/>
+          <a:blip r:embed="rId2">
+            <a:extLst>
+              <a:ext uri="{28A0092B-C50C-407E-A947-70E740481C1C}">
+                <a14:useLocalDpi xmlns:a14="http://schemas.microsoft.com/office/drawing/2010/main" val="0"/>
+              </a:ext>
+            </a:extLst>
+          </a:blip>
           <a:stretch>
             <a:fillRect/>
           </a:stretch>
         </p:blipFill>
         <p:spPr>
           <a:xfrm>
-            <a:off x="5895656" y="1515954"/>
-            <a:ext cx="5867908" cy="4922947"/>
+            <a:off x="1521488" y="3182515"/>
+            <a:ext cx="3161043" cy="3161043"/>
           </a:xfrm>
           <a:prstGeom prst="rect">
             <a:avLst/>
           </a:prstGeom>
+          <a:ln>
+            <a:noFill/>
+          </a:ln>
+          <a:effectLst>
+            <a:softEdge rad="112500"/>
+          </a:effectLst>
         </p:spPr>
       </p:pic>
     </p:spTree>
     <p:extLst>
       <p:ext uri="{BB962C8B-B14F-4D97-AF65-F5344CB8AC3E}">
-        <p14:creationId xmlns:p14="http://schemas.microsoft.com/office/powerpoint/2010/main" val="2265773176"/>
+        <p14:creationId xmlns:p14="http://schemas.microsoft.com/office/powerpoint/2010/main" val="1678947236"/>
       </p:ext>
     </p:extLst>
   </p:cSld>
   <p:clrMapOvr>
     <a:masterClrMapping/>
   </p:clrMapOvr>
-  <mc:AlternateContent xmlns:mc="http://schemas.openxmlformats.org/markup-compatibility/2006">
-    <mc:Choice xmlns:p159="http://schemas.microsoft.com/office/powerpoint/2015/09/main" Requires="p159">
+  <mc:AlternateContent xmlns:mc="http://schemas.openxmlformats.org/markup-compatibility/2006" xmlns:p159="http://schemas.microsoft.com/office/powerpoint/2015/09/main">
+    <mc:Choice Requires="p159">
       <p:transition xmlns:p14="http://schemas.microsoft.com/office/powerpoint/2010/main" spd="slow" p14:dur="2000">
         <p159:morph option="byObject"/>
       </p:transition>
     </mc:Choice>
-    <mc:Fallback>
+    <mc:Fallback xmlns="">
       <p:transition spd="slow">
         <p:fade/>
       </p:transition>
@@ -13126,12 +11467,7 @@
             <p:ph type="title"/>
           </p:nvPr>
         </p:nvSpPr>
-        <p:spPr>
-          <a:xfrm>
-            <a:off x="409980" y="4311805"/>
-            <a:ext cx="8585337" cy="2368300"/>
-          </a:xfrm>
-        </p:spPr>
+        <p:spPr/>
         <p:txBody>
           <a:bodyPr anchor="b">
             <a:normAutofit/>
@@ -13172,6 +11508,18 @@
   <p:clrMapOvr>
     <a:masterClrMapping/>
   </p:clrMapOvr>
+  <mc:AlternateContent xmlns:mc="http://schemas.openxmlformats.org/markup-compatibility/2006" xmlns:p159="http://schemas.microsoft.com/office/powerpoint/2015/09/main">
+    <mc:Choice Requires="p159">
+      <p:transition xmlns:p14="http://schemas.microsoft.com/office/powerpoint/2010/main" spd="slow" p14:dur="2000">
+        <p159:morph option="byObject"/>
+      </p:transition>
+    </mc:Choice>
+    <mc:Fallback xmlns="">
+      <p:transition spd="slow">
+        <p:fade/>
+      </p:transition>
+    </mc:Fallback>
+  </mc:AlternateContent>
 </p:sld>
 </file>
 

--- a/eindwerk presentatie.pptx
+++ b/eindwerk presentatie.pptx
@@ -8,8 +8,8 @@
     <p:sldId id="256" r:id="rId2"/>
     <p:sldId id="258" r:id="rId3"/>
     <p:sldId id="257" r:id="rId4"/>
-    <p:sldId id="260" r:id="rId5"/>
-    <p:sldId id="261" r:id="rId6"/>
+    <p:sldId id="261" r:id="rId5"/>
+    <p:sldId id="260" r:id="rId6"/>
     <p:sldId id="263" r:id="rId7"/>
     <p:sldId id="262" r:id="rId8"/>
   </p:sldIdLst>
@@ -131,7 +131,7 @@
   <pc:docChgLst>
     <pc:chgData name="Demaeght Gunnarr" userId="d4ee6c7f-5b58-43ba-8a8e-d2bde2eb291f" providerId="ADAL" clId="{5D62749E-E127-43B3-8AC6-51DF11B66DA8}"/>
     <pc:docChg chg="undo redo custSel addSld delSld modSld sldOrd">
-      <pc:chgData name="Demaeght Gunnarr" userId="d4ee6c7f-5b58-43ba-8a8e-d2bde2eb291f" providerId="ADAL" clId="{5D62749E-E127-43B3-8AC6-51DF11B66DA8}" dt="2026-09-28T07:03:19.745" v="1150" actId="1076"/>
+      <pc:chgData name="Demaeght Gunnarr" userId="d4ee6c7f-5b58-43ba-8a8e-d2bde2eb291f" providerId="ADAL" clId="{5D62749E-E127-43B3-8AC6-51DF11B66DA8}" dt="2026-09-28T08:46:59.346" v="1153" actId="688"/>
       <pc:docMkLst>
         <pc:docMk/>
       </pc:docMkLst>
@@ -258,8 +258,8 @@
           </ac:spMkLst>
         </pc:spChg>
       </pc:sldChg>
-      <pc:sldChg chg="addSp delSp modSp new mod modTransition modClrScheme chgLayout">
-        <pc:chgData name="Demaeght Gunnarr" userId="d4ee6c7f-5b58-43ba-8a8e-d2bde2eb291f" providerId="ADAL" clId="{5D62749E-E127-43B3-8AC6-51DF11B66DA8}" dt="2026-09-28T06:31:44.507" v="1139" actId="1076"/>
+      <pc:sldChg chg="addSp delSp modSp new mod ord modTransition modClrScheme chgLayout">
+        <pc:chgData name="Demaeght Gunnarr" userId="d4ee6c7f-5b58-43ba-8a8e-d2bde2eb291f" providerId="ADAL" clId="{5D62749E-E127-43B3-8AC6-51DF11B66DA8}" dt="2026-09-28T08:46:59.346" v="1153" actId="688"/>
         <pc:sldMkLst>
           <pc:docMk/>
           <pc:sldMk cId="2265773176" sldId="261"/>
@@ -337,7 +337,7 @@
           </ac:spMkLst>
         </pc:spChg>
         <pc:spChg chg="add mod">
-          <ac:chgData name="Demaeght Gunnarr" userId="d4ee6c7f-5b58-43ba-8a8e-d2bde2eb291f" providerId="ADAL" clId="{5D62749E-E127-43B3-8AC6-51DF11B66DA8}" dt="2026-09-28T06:31:44.507" v="1139" actId="1076"/>
+          <ac:chgData name="Demaeght Gunnarr" userId="d4ee6c7f-5b58-43ba-8a8e-d2bde2eb291f" providerId="ADAL" clId="{5D62749E-E127-43B3-8AC6-51DF11B66DA8}" dt="2026-09-28T08:46:59.346" v="1153" actId="688"/>
           <ac:spMkLst>
             <pc:docMk/>
             <pc:sldMk cId="2265773176" sldId="261"/>
@@ -10341,10 +10341,10 @@
       </p:grpSpPr>
       <p:sp>
         <p:nvSpPr>
-          <p:cNvPr id="2" name="Title 1">
-            <a:extLst>
-              <a:ext uri="{FF2B5EF4-FFF2-40B4-BE49-F238E27FC236}">
-                <a16:creationId xmlns:a16="http://schemas.microsoft.com/office/drawing/2014/main" id="{727C0816-B592-9E8E-EA9D-D172D0B8710B}"/>
+          <p:cNvPr id="10" name="Title 1">
+            <a:extLst>
+              <a:ext uri="{FF2B5EF4-FFF2-40B4-BE49-F238E27FC236}">
+                <a16:creationId xmlns:a16="http://schemas.microsoft.com/office/drawing/2014/main" id="{31935CC8-2890-5E51-2D68-07BE9A14BCBB}"/>
               </a:ext>
             </a:extLst>
           </p:cNvPr>
@@ -10357,8 +10357,8 @@
         </p:nvSpPr>
         <p:spPr>
           <a:xfrm>
-            <a:off x="432393" y="758952"/>
-            <a:ext cx="7609668" cy="1734866"/>
+            <a:off x="97063" y="661668"/>
+            <a:ext cx="6433266" cy="1962149"/>
           </a:xfrm>
         </p:spPr>
         <p:txBody>
@@ -10368,112 +10368,702 @@
           <a:lstStyle/>
           <a:p>
             <a:r>
-              <a:rPr lang="en-US" dirty="0" err="1"/>
-              <a:t>Onderdelen</a:t>
-            </a:r>
-            <a:endParaRPr lang="LID4096" dirty="0"/>
-          </a:p>
-        </p:txBody>
-      </p:sp>
-      <p:sp>
-        <p:nvSpPr>
-          <p:cNvPr id="3" name="Content Placeholder 2">
-            <a:extLst>
-              <a:ext uri="{FF2B5EF4-FFF2-40B4-BE49-F238E27FC236}">
-                <a16:creationId xmlns:a16="http://schemas.microsoft.com/office/drawing/2014/main" id="{8F793EA2-36C5-9A79-4D5F-D8F5185E65B6}"/>
-              </a:ext>
-            </a:extLst>
-          </p:cNvPr>
-          <p:cNvSpPr>
-            <a:spLocks noGrp="1"/>
-          </p:cNvSpPr>
-          <p:nvPr>
-            <p:ph sz="quarter" idx="13"/>
-          </p:nvPr>
-        </p:nvSpPr>
-        <p:spPr>
-          <a:xfrm>
-            <a:off x="419100" y="2705101"/>
-            <a:ext cx="8801100" cy="2947550"/>
-          </a:xfrm>
-        </p:spPr>
-        <p:txBody>
-          <a:bodyPr>
-            <a:normAutofit/>
-          </a:bodyPr>
+              <a:rPr lang="en-US" sz="5500" dirty="0"/>
+              <a:t>Hoe </a:t>
+            </a:r>
+            <a:r>
+              <a:rPr lang="en-US" sz="5500" dirty="0" err="1"/>
+              <a:t>werkt</a:t>
+            </a:r>
+            <a:r>
+              <a:rPr lang="en-US" sz="5500" dirty="0"/>
+              <a:t> het?</a:t>
+            </a:r>
+          </a:p>
+        </p:txBody>
+      </p:sp>
+      <p:pic>
+        <p:nvPicPr>
+          <p:cNvPr id="19" name="Picture 18" descr="Laptop computer | Definition, History, &amp; Facts | Britannica">
+            <a:extLst>
+              <a:ext uri="{FF2B5EF4-FFF2-40B4-BE49-F238E27FC236}">
+                <a16:creationId xmlns:a16="http://schemas.microsoft.com/office/drawing/2014/main" id="{8DC3EC01-6689-15B9-46EE-FFF6C0B78DB9}"/>
+              </a:ext>
+            </a:extLst>
+          </p:cNvPr>
+          <p:cNvPicPr>
+            <a:picLocks noChangeAspect="1"/>
+          </p:cNvPicPr>
+          <p:nvPr/>
+        </p:nvPicPr>
+        <p:blipFill>
+          <a:blip r:embed="rId2"/>
+          <a:stretch>
+            <a:fillRect/>
+          </a:stretch>
+        </p:blipFill>
+        <p:spPr>
+          <a:xfrm>
+            <a:off x="526424" y="3658263"/>
+            <a:ext cx="3142896" cy="2117526"/>
+          </a:xfrm>
+          <a:prstGeom prst="snip2DiagRect">
+            <a:avLst/>
+          </a:prstGeom>
+          <a:solidFill>
+            <a:srgbClr val="FFFFFF">
+              <a:shade val="85000"/>
+            </a:srgbClr>
+          </a:solidFill>
+          <a:ln w="88900" cap="sq">
+            <a:solidFill>
+              <a:srgbClr val="FFFFFF"/>
+            </a:solidFill>
+            <a:miter lim="800000"/>
+          </a:ln>
+          <a:effectLst>
+            <a:outerShdw blurRad="88900" algn="tl" rotWithShape="0">
+              <a:srgbClr val="000000">
+                <a:alpha val="45000"/>
+              </a:srgbClr>
+            </a:outerShdw>
+          </a:effectLst>
+          <a:scene3d>
+            <a:camera prst="orthographicFront"/>
+            <a:lightRig rig="twoPt" dir="t">
+              <a:rot lat="0" lon="0" rev="7200000"/>
+            </a:lightRig>
+          </a:scene3d>
+          <a:sp3d>
+            <a:bevelT w="25400" h="19050"/>
+            <a:contourClr>
+              <a:srgbClr val="FFFFFF"/>
+            </a:contourClr>
+          </a:sp3d>
+        </p:spPr>
+      </p:pic>
+      <p:pic>
+        <p:nvPicPr>
+          <p:cNvPr id="21" name="Content Placeholder 3" descr="RASPBERRY PI SC1112">
+            <a:extLst>
+              <a:ext uri="{FF2B5EF4-FFF2-40B4-BE49-F238E27FC236}">
+                <a16:creationId xmlns:a16="http://schemas.microsoft.com/office/drawing/2014/main" id="{D652357C-4258-1662-7EC5-FF5523338C92}"/>
+              </a:ext>
+            </a:extLst>
+          </p:cNvPr>
+          <p:cNvPicPr>
+            <a:picLocks noChangeAspect="1"/>
+          </p:cNvPicPr>
+          <p:nvPr/>
+        </p:nvPicPr>
+        <p:blipFill>
+          <a:blip r:embed="rId3"/>
+          <a:stretch>
+            <a:fillRect/>
+          </a:stretch>
+        </p:blipFill>
+        <p:spPr>
+          <a:xfrm>
+            <a:off x="8031068" y="3658263"/>
+            <a:ext cx="2823368" cy="2117526"/>
+          </a:xfrm>
+          <a:prstGeom prst="snip2DiagRect">
+            <a:avLst/>
+          </a:prstGeom>
+          <a:solidFill>
+            <a:srgbClr val="FFFFFF">
+              <a:shade val="85000"/>
+            </a:srgbClr>
+          </a:solidFill>
+          <a:ln w="88900" cap="sq">
+            <a:solidFill>
+              <a:srgbClr val="FFFFFF"/>
+            </a:solidFill>
+            <a:miter lim="800000"/>
+          </a:ln>
+          <a:effectLst>
+            <a:outerShdw blurRad="88900" algn="tl" rotWithShape="0">
+              <a:srgbClr val="000000">
+                <a:alpha val="45000"/>
+              </a:srgbClr>
+            </a:outerShdw>
+          </a:effectLst>
+          <a:scene3d>
+            <a:camera prst="orthographicFront"/>
+            <a:lightRig rig="twoPt" dir="t">
+              <a:rot lat="0" lon="0" rev="7200000"/>
+            </a:lightRig>
+          </a:scene3d>
+          <a:sp3d>
+            <a:bevelT w="25400" h="19050"/>
+            <a:contourClr>
+              <a:srgbClr val="FFFFFF"/>
+            </a:contourClr>
+          </a:sp3d>
+        </p:spPr>
+      </p:pic>
+      <p:pic>
+        <p:nvPicPr>
+          <p:cNvPr id="27" name="Picture 26" descr="Power Gear Interior/Exterior Simulated Security Camera 40661 at Lowes.com">
+            <a:extLst>
+              <a:ext uri="{FF2B5EF4-FFF2-40B4-BE49-F238E27FC236}">
+                <a16:creationId xmlns:a16="http://schemas.microsoft.com/office/drawing/2014/main" id="{C2D37B91-2787-C25E-5C76-12E23EEB08A2}"/>
+              </a:ext>
+            </a:extLst>
+          </p:cNvPr>
+          <p:cNvPicPr>
+            <a:picLocks noChangeAspect="1"/>
+          </p:cNvPicPr>
+          <p:nvPr/>
+        </p:nvPicPr>
+        <p:blipFill>
+          <a:blip r:embed="rId4"/>
+          <a:stretch>
+            <a:fillRect/>
+          </a:stretch>
+        </p:blipFill>
+        <p:spPr>
+          <a:xfrm>
+            <a:off x="10378593" y="2028352"/>
+            <a:ext cx="1400648" cy="1400648"/>
+          </a:xfrm>
+          <a:prstGeom prst="roundRect">
+            <a:avLst>
+              <a:gd name="adj" fmla="val 16667"/>
+            </a:avLst>
+          </a:prstGeom>
+          <a:ln>
+            <a:noFill/>
+          </a:ln>
+          <a:effectLst>
+            <a:outerShdw blurRad="76200" dist="38100" dir="7800000" algn="tl" rotWithShape="0">
+              <a:srgbClr val="000000">
+                <a:alpha val="40000"/>
+              </a:srgbClr>
+            </a:outerShdw>
+          </a:effectLst>
+          <a:scene3d>
+            <a:camera prst="orthographicFront"/>
+            <a:lightRig rig="contrasting" dir="t">
+              <a:rot lat="0" lon="0" rev="4200000"/>
+            </a:lightRig>
+          </a:scene3d>
+          <a:sp3d prstMaterial="plastic">
+            <a:bevelT w="381000" h="114300" prst="relaxedInset"/>
+            <a:contourClr>
+              <a:srgbClr val="969696"/>
+            </a:contourClr>
+          </a:sp3d>
+        </p:spPr>
+      </p:pic>
+      <p:pic>
+        <p:nvPicPr>
+          <p:cNvPr id="29" name="Picture 28" descr="Power Gear Interior/Exterior Simulated Security Camera 40661 at Lowes.com">
+            <a:extLst>
+              <a:ext uri="{FF2B5EF4-FFF2-40B4-BE49-F238E27FC236}">
+                <a16:creationId xmlns:a16="http://schemas.microsoft.com/office/drawing/2014/main" id="{5025EC41-7695-E869-BC90-DCC0D9932612}"/>
+              </a:ext>
+            </a:extLst>
+          </p:cNvPr>
+          <p:cNvPicPr>
+            <a:picLocks noChangeAspect="1"/>
+          </p:cNvPicPr>
+          <p:nvPr/>
+        </p:nvPicPr>
+        <p:blipFill>
+          <a:blip r:embed="rId4"/>
+          <a:stretch>
+            <a:fillRect/>
+          </a:stretch>
+        </p:blipFill>
+        <p:spPr>
+          <a:xfrm>
+            <a:off x="5948049" y="1994163"/>
+            <a:ext cx="1400648" cy="1400648"/>
+          </a:xfrm>
+          <a:prstGeom prst="roundRect">
+            <a:avLst>
+              <a:gd name="adj" fmla="val 16667"/>
+            </a:avLst>
+          </a:prstGeom>
+          <a:ln>
+            <a:noFill/>
+          </a:ln>
+          <a:effectLst>
+            <a:outerShdw blurRad="76200" dist="38100" dir="7800000" algn="tl" rotWithShape="0">
+              <a:srgbClr val="000000">
+                <a:alpha val="40000"/>
+              </a:srgbClr>
+            </a:outerShdw>
+          </a:effectLst>
+          <a:scene3d>
+            <a:camera prst="orthographicFront"/>
+            <a:lightRig rig="contrasting" dir="t">
+              <a:rot lat="0" lon="0" rev="4200000"/>
+            </a:lightRig>
+          </a:scene3d>
+          <a:sp3d prstMaterial="plastic">
+            <a:bevelT w="381000" h="114300" prst="relaxedInset"/>
+            <a:contourClr>
+              <a:srgbClr val="969696"/>
+            </a:contourClr>
+          </a:sp3d>
+        </p:spPr>
+      </p:pic>
+      <p:pic>
+        <p:nvPicPr>
+          <p:cNvPr id="31" name="Picture 30" descr="Power Gear Interior/Exterior Simulated Security Camera 40661 at Lowes.com">
+            <a:extLst>
+              <a:ext uri="{FF2B5EF4-FFF2-40B4-BE49-F238E27FC236}">
+                <a16:creationId xmlns:a16="http://schemas.microsoft.com/office/drawing/2014/main" id="{8821ED6F-F19C-17BD-DC7C-093A16491169}"/>
+              </a:ext>
+            </a:extLst>
+          </p:cNvPr>
+          <p:cNvPicPr>
+            <a:picLocks noChangeAspect="1"/>
+          </p:cNvPicPr>
+          <p:nvPr/>
+        </p:nvPicPr>
+        <p:blipFill>
+          <a:blip r:embed="rId4"/>
+          <a:stretch>
+            <a:fillRect/>
+          </a:stretch>
+        </p:blipFill>
+        <p:spPr>
+          <a:xfrm>
+            <a:off x="7424897" y="1994163"/>
+            <a:ext cx="1400648" cy="1400648"/>
+          </a:xfrm>
+          <a:prstGeom prst="roundRect">
+            <a:avLst>
+              <a:gd name="adj" fmla="val 16667"/>
+            </a:avLst>
+          </a:prstGeom>
+          <a:ln>
+            <a:noFill/>
+          </a:ln>
+          <a:effectLst>
+            <a:outerShdw blurRad="76200" dist="38100" dir="7800000" algn="tl" rotWithShape="0">
+              <a:srgbClr val="000000">
+                <a:alpha val="40000"/>
+              </a:srgbClr>
+            </a:outerShdw>
+          </a:effectLst>
+          <a:scene3d>
+            <a:camera prst="orthographicFront"/>
+            <a:lightRig rig="contrasting" dir="t">
+              <a:rot lat="0" lon="0" rev="4200000"/>
+            </a:lightRig>
+          </a:scene3d>
+          <a:sp3d prstMaterial="plastic">
+            <a:bevelT w="381000" h="114300" prst="relaxedInset"/>
+            <a:contourClr>
+              <a:srgbClr val="969696"/>
+            </a:contourClr>
+          </a:sp3d>
+        </p:spPr>
+      </p:pic>
+      <p:pic>
+        <p:nvPicPr>
+          <p:cNvPr id="33" name="Picture 32" descr="Power Gear Interior/Exterior Simulated Security Camera 40661 at Lowes.com">
+            <a:extLst>
+              <a:ext uri="{FF2B5EF4-FFF2-40B4-BE49-F238E27FC236}">
+                <a16:creationId xmlns:a16="http://schemas.microsoft.com/office/drawing/2014/main" id="{93112A2A-76AD-5096-4422-C567E5492E50}"/>
+              </a:ext>
+            </a:extLst>
+          </p:cNvPr>
+          <p:cNvPicPr>
+            <a:picLocks noChangeAspect="1"/>
+          </p:cNvPicPr>
+          <p:nvPr/>
+        </p:nvPicPr>
+        <p:blipFill>
+          <a:blip r:embed="rId4"/>
+          <a:stretch>
+            <a:fillRect/>
+          </a:stretch>
+        </p:blipFill>
+        <p:spPr>
+          <a:xfrm>
+            <a:off x="8901745" y="1994163"/>
+            <a:ext cx="1400648" cy="1400648"/>
+          </a:xfrm>
+          <a:prstGeom prst="roundRect">
+            <a:avLst>
+              <a:gd name="adj" fmla="val 16667"/>
+            </a:avLst>
+          </a:prstGeom>
+          <a:ln>
+            <a:noFill/>
+          </a:ln>
+          <a:effectLst>
+            <a:outerShdw blurRad="76200" dist="38100" dir="7800000" algn="tl" rotWithShape="0">
+              <a:srgbClr val="000000">
+                <a:alpha val="40000"/>
+              </a:srgbClr>
+            </a:outerShdw>
+          </a:effectLst>
+          <a:scene3d>
+            <a:camera prst="orthographicFront"/>
+            <a:lightRig rig="contrasting" dir="t">
+              <a:rot lat="0" lon="0" rev="4200000"/>
+            </a:lightRig>
+          </a:scene3d>
+          <a:sp3d prstMaterial="plastic">
+            <a:bevelT w="381000" h="114300" prst="relaxedInset"/>
+            <a:contourClr>
+              <a:srgbClr val="969696"/>
+            </a:contourClr>
+          </a:sp3d>
+        </p:spPr>
+      </p:pic>
+      <mc:AlternateContent xmlns:mc="http://schemas.openxmlformats.org/markup-compatibility/2006" xmlns:p14="http://schemas.microsoft.com/office/powerpoint/2010/main">
+        <mc:Choice Requires="p14">
+          <p:contentPart p14:bwMode="auto" r:id="rId5">
+            <p14:nvContentPartPr>
+              <p14:cNvPr id="57" name="Ink 56">
+                <a:extLst>
+                  <a:ext uri="{FF2B5EF4-FFF2-40B4-BE49-F238E27FC236}">
+                    <a16:creationId xmlns:a16="http://schemas.microsoft.com/office/drawing/2014/main" id="{33E4A19E-6E14-ACBB-6413-098F33B2D04A}"/>
+                  </a:ext>
+                </a:extLst>
+              </p14:cNvPr>
+              <p14:cNvContentPartPr/>
+              <p14:nvPr/>
+            </p14:nvContentPartPr>
+            <p14:xfrm>
+              <a:off x="7314754" y="3352494"/>
+              <a:ext cx="678960" cy="344520"/>
+            </p14:xfrm>
+          </p:contentPart>
+        </mc:Choice>
+        <mc:Fallback xmlns="">
+          <p:pic>
+            <p:nvPicPr>
+              <p:cNvPr id="57" name="Ink 56">
+                <a:extLst>
+                  <a:ext uri="{FF2B5EF4-FFF2-40B4-BE49-F238E27FC236}">
+                    <a16:creationId xmlns:a16="http://schemas.microsoft.com/office/drawing/2014/main" id="{33E4A19E-6E14-ACBB-6413-098F33B2D04A}"/>
+                  </a:ext>
+                </a:extLst>
+              </p:cNvPr>
+              <p:cNvPicPr/>
+              <p:nvPr/>
+            </p:nvPicPr>
+            <p:blipFill>
+              <a:blip r:embed="rId6"/>
+              <a:stretch>
+                <a:fillRect/>
+              </a:stretch>
+            </p:blipFill>
+            <p:spPr>
+              <a:xfrm>
+                <a:off x="7278754" y="3316494"/>
+                <a:ext cx="750600" cy="416160"/>
+              </a:xfrm>
+              <a:prstGeom prst="rect">
+                <a:avLst/>
+              </a:prstGeom>
+            </p:spPr>
+          </p:pic>
+        </mc:Fallback>
+      </mc:AlternateContent>
+      <mc:AlternateContent xmlns:mc="http://schemas.openxmlformats.org/markup-compatibility/2006" xmlns:p14="http://schemas.microsoft.com/office/powerpoint/2010/main">
+        <mc:Choice Requires="p14">
+          <p:contentPart p14:bwMode="auto" r:id="rId7">
+            <p14:nvContentPartPr>
+              <p14:cNvPr id="59" name="Ink 58">
+                <a:extLst>
+                  <a:ext uri="{FF2B5EF4-FFF2-40B4-BE49-F238E27FC236}">
+                    <a16:creationId xmlns:a16="http://schemas.microsoft.com/office/drawing/2014/main" id="{8A2DCFF6-2636-A5F9-FFD5-7C670C15560E}"/>
+                  </a:ext>
+                </a:extLst>
+              </p14:cNvPr>
+              <p14:cNvContentPartPr/>
+              <p14:nvPr/>
+            </p14:nvContentPartPr>
+            <p14:xfrm>
+              <a:off x="8455594" y="3411534"/>
+              <a:ext cx="720" cy="217080"/>
+            </p14:xfrm>
+          </p:contentPart>
+        </mc:Choice>
+        <mc:Fallback xmlns="">
+          <p:pic>
+            <p:nvPicPr>
+              <p:cNvPr id="59" name="Ink 58">
+                <a:extLst>
+                  <a:ext uri="{FF2B5EF4-FFF2-40B4-BE49-F238E27FC236}">
+                    <a16:creationId xmlns:a16="http://schemas.microsoft.com/office/drawing/2014/main" id="{8A2DCFF6-2636-A5F9-FFD5-7C670C15560E}"/>
+                  </a:ext>
+                </a:extLst>
+              </p:cNvPr>
+              <p:cNvPicPr/>
+              <p:nvPr/>
+            </p:nvPicPr>
+            <p:blipFill>
+              <a:blip r:embed="rId8"/>
+              <a:stretch>
+                <a:fillRect/>
+              </a:stretch>
+            </p:blipFill>
+            <p:spPr>
+              <a:xfrm>
+                <a:off x="8383594" y="3375474"/>
+                <a:ext cx="144000" cy="288839"/>
+              </a:xfrm>
+              <a:prstGeom prst="rect">
+                <a:avLst/>
+              </a:prstGeom>
+            </p:spPr>
+          </p:pic>
+        </mc:Fallback>
+      </mc:AlternateContent>
+      <mc:AlternateContent xmlns:mc="http://schemas.openxmlformats.org/markup-compatibility/2006" xmlns:p14="http://schemas.microsoft.com/office/powerpoint/2010/main">
+        <mc:Choice Requires="p14">
+          <p:contentPart p14:bwMode="auto" r:id="rId9">
+            <p14:nvContentPartPr>
+              <p14:cNvPr id="61" name="Ink 60">
+                <a:extLst>
+                  <a:ext uri="{FF2B5EF4-FFF2-40B4-BE49-F238E27FC236}">
+                    <a16:creationId xmlns:a16="http://schemas.microsoft.com/office/drawing/2014/main" id="{A606BE07-B6C8-69A2-62A9-CBD6535792AC}"/>
+                  </a:ext>
+                </a:extLst>
+              </p14:cNvPr>
+              <p14:cNvContentPartPr/>
+              <p14:nvPr/>
+            </p14:nvContentPartPr>
+            <p14:xfrm>
+              <a:off x="9596074" y="3382014"/>
+              <a:ext cx="720" cy="226800"/>
+            </p14:xfrm>
+          </p:contentPart>
+        </mc:Choice>
+        <mc:Fallback xmlns="">
+          <p:pic>
+            <p:nvPicPr>
+              <p:cNvPr id="61" name="Ink 60">
+                <a:extLst>
+                  <a:ext uri="{FF2B5EF4-FFF2-40B4-BE49-F238E27FC236}">
+                    <a16:creationId xmlns:a16="http://schemas.microsoft.com/office/drawing/2014/main" id="{A606BE07-B6C8-69A2-62A9-CBD6535792AC}"/>
+                  </a:ext>
+                </a:extLst>
+              </p:cNvPr>
+              <p:cNvPicPr/>
+              <p:nvPr/>
+            </p:nvPicPr>
+            <p:blipFill>
+              <a:blip r:embed="rId10"/>
+              <a:stretch>
+                <a:fillRect/>
+              </a:stretch>
+            </p:blipFill>
+            <p:spPr>
+              <a:xfrm>
+                <a:off x="9524074" y="3346071"/>
+                <a:ext cx="144000" cy="298326"/>
+              </a:xfrm>
+              <a:prstGeom prst="rect">
+                <a:avLst/>
+              </a:prstGeom>
+            </p:spPr>
+          </p:pic>
+        </mc:Fallback>
+      </mc:AlternateContent>
+      <mc:AlternateContent xmlns:mc="http://schemas.openxmlformats.org/markup-compatibility/2006" xmlns:p14="http://schemas.microsoft.com/office/powerpoint/2010/main">
+        <mc:Choice Requires="p14">
+          <p:contentPart p14:bwMode="auto" r:id="rId11">
+            <p14:nvContentPartPr>
+              <p14:cNvPr id="63" name="Ink 62">
+                <a:extLst>
+                  <a:ext uri="{FF2B5EF4-FFF2-40B4-BE49-F238E27FC236}">
+                    <a16:creationId xmlns:a16="http://schemas.microsoft.com/office/drawing/2014/main" id="{24862A02-C6D0-AF08-F630-55F32910E469}"/>
+                  </a:ext>
+                </a:extLst>
+              </p14:cNvPr>
+              <p14:cNvContentPartPr/>
+              <p14:nvPr/>
+            </p14:nvContentPartPr>
+            <p14:xfrm>
+              <a:off x="10746274" y="3460494"/>
+              <a:ext cx="363960" cy="374040"/>
+            </p14:xfrm>
+          </p:contentPart>
+        </mc:Choice>
+        <mc:Fallback xmlns="">
+          <p:pic>
+            <p:nvPicPr>
+              <p:cNvPr id="63" name="Ink 62">
+                <a:extLst>
+                  <a:ext uri="{FF2B5EF4-FFF2-40B4-BE49-F238E27FC236}">
+                    <a16:creationId xmlns:a16="http://schemas.microsoft.com/office/drawing/2014/main" id="{24862A02-C6D0-AF08-F630-55F32910E469}"/>
+                  </a:ext>
+                </a:extLst>
+              </p:cNvPr>
+              <p:cNvPicPr/>
+              <p:nvPr/>
+            </p:nvPicPr>
+            <p:blipFill>
+              <a:blip r:embed="rId12"/>
+              <a:stretch>
+                <a:fillRect/>
+              </a:stretch>
+            </p:blipFill>
+            <p:spPr>
+              <a:xfrm>
+                <a:off x="10710274" y="3424494"/>
+                <a:ext cx="435600" cy="445680"/>
+              </a:xfrm>
+              <a:prstGeom prst="rect">
+                <a:avLst/>
+              </a:prstGeom>
+            </p:spPr>
+          </p:pic>
+        </mc:Fallback>
+      </mc:AlternateContent>
+      <p:pic>
+        <p:nvPicPr>
+          <p:cNvPr id="65" name="Picture 64" descr="Welcome IT professionals">
+            <a:extLst>
+              <a:ext uri="{FF2B5EF4-FFF2-40B4-BE49-F238E27FC236}">
+                <a16:creationId xmlns:a16="http://schemas.microsoft.com/office/drawing/2014/main" id="{4EED70B1-806E-2BDF-9733-3D0130DE63AF}"/>
+              </a:ext>
+            </a:extLst>
+          </p:cNvPr>
+          <p:cNvPicPr>
+            <a:picLocks noChangeAspect="1"/>
+          </p:cNvPicPr>
+          <p:nvPr/>
+        </p:nvPicPr>
+        <p:blipFill>
+          <a:blip r:embed="rId13"/>
+          <a:stretch>
+            <a:fillRect/>
+          </a:stretch>
+        </p:blipFill>
+        <p:spPr>
+          <a:xfrm>
+            <a:off x="5081457" y="3984738"/>
+            <a:ext cx="1537472" cy="1537472"/>
+          </a:xfrm>
+          <a:prstGeom prst="rect">
+            <a:avLst/>
+          </a:prstGeom>
+        </p:spPr>
+      </p:pic>
+      <p:sp>
+        <p:nvSpPr>
+          <p:cNvPr id="68" name="Arrow: Down 67">
+            <a:extLst>
+              <a:ext uri="{FF2B5EF4-FFF2-40B4-BE49-F238E27FC236}">
+                <a16:creationId xmlns:a16="http://schemas.microsoft.com/office/drawing/2014/main" id="{503892C6-1045-55E2-74DB-07451E128227}"/>
+              </a:ext>
+            </a:extLst>
+          </p:cNvPr>
+          <p:cNvSpPr/>
+          <p:nvPr/>
+        </p:nvSpPr>
+        <p:spPr>
+          <a:xfrm rot="16200000">
+            <a:off x="4325771" y="4172553"/>
+            <a:ext cx="363794" cy="1342526"/>
+          </a:xfrm>
+          <a:prstGeom prst="downArrow">
+            <a:avLst/>
+          </a:prstGeom>
+          <a:solidFill>
+            <a:srgbClr val="00B0F0"/>
+          </a:solidFill>
+          <a:ln>
+            <a:solidFill>
+              <a:srgbClr val="0070C0"/>
+            </a:solidFill>
+          </a:ln>
+        </p:spPr>
+        <p:style>
+          <a:lnRef idx="2">
+            <a:schemeClr val="accent1">
+              <a:shade val="15000"/>
+            </a:schemeClr>
+          </a:lnRef>
+          <a:fillRef idx="1">
+            <a:schemeClr val="accent1"/>
+          </a:fillRef>
+          <a:effectRef idx="0">
+            <a:schemeClr val="accent1"/>
+          </a:effectRef>
+          <a:fontRef idx="minor">
+            <a:schemeClr val="lt1"/>
+          </a:fontRef>
+        </p:style>
+        <p:txBody>
+          <a:bodyPr rtlCol="0" anchor="ctr"/>
           <a:lstStyle/>
           <a:p>
-            <a:pPr marL="457200" indent="-457200">
-              <a:buFontTx/>
-              <a:buChar char="-"/>
-            </a:pPr>
-            <a:r>
-              <a:rPr lang="en-US" dirty="0"/>
-              <a:t>Raspberry Pi 5 			€196,43</a:t>
-            </a:r>
-          </a:p>
-          <a:p>
-            <a:pPr marL="457200" indent="-457200">
-              <a:buFontTx/>
-              <a:buChar char="-"/>
-            </a:pPr>
-            <a:r>
-              <a:rPr lang="en-US" dirty="0"/>
-              <a:t>Micro SD Card 32GB		€11,52</a:t>
-            </a:r>
-          </a:p>
-          <a:p>
-            <a:pPr marL="457200" indent="-457200">
-              <a:buFontTx/>
-              <a:buChar char="-"/>
-            </a:pPr>
-            <a:r>
-              <a:rPr lang="en-US" dirty="0"/>
-              <a:t>USB hub met </a:t>
-            </a:r>
-            <a:r>
-              <a:rPr lang="en-US" dirty="0" err="1"/>
-              <a:t>voeding</a:t>
-            </a:r>
-            <a:r>
-              <a:rPr lang="en-US" dirty="0"/>
-              <a:t>		€12,99</a:t>
-            </a:r>
-          </a:p>
-          <a:p>
-            <a:pPr marL="457200" indent="-457200">
-              <a:buFontTx/>
-              <a:buChar char="-"/>
-            </a:pPr>
-            <a:r>
-              <a:rPr lang="en-US" dirty="0"/>
-              <a:t>4* Webcam 1080P		€11,99 *4 = €47,96</a:t>
-            </a:r>
-          </a:p>
-          <a:p>
-            <a:r>
-              <a:rPr lang="en-US"/>
-              <a:t>------------------------------------------------------------------------------</a:t>
-            </a:r>
-            <a:endParaRPr lang="en-US" dirty="0"/>
-          </a:p>
-          <a:p>
-            <a:pPr marL="457200" indent="-457200">
-              <a:buFontTx/>
-              <a:buChar char="-"/>
-            </a:pPr>
-            <a:r>
-              <a:rPr lang="en-US" dirty="0"/>
-              <a:t>TOTAL			€268,90</a:t>
-            </a:r>
-            <a:endParaRPr lang="LID4096" dirty="0"/>
+            <a:pPr algn="ctr"/>
+            <a:endParaRPr lang="LID4096"/>
+          </a:p>
+        </p:txBody>
+      </p:sp>
+      <p:sp>
+        <p:nvSpPr>
+          <p:cNvPr id="70" name="Arrow: Down 69">
+            <a:extLst>
+              <a:ext uri="{FF2B5EF4-FFF2-40B4-BE49-F238E27FC236}">
+                <a16:creationId xmlns:a16="http://schemas.microsoft.com/office/drawing/2014/main" id="{FCB3BEE5-D978-689F-1859-10D149CECB4A}"/>
+              </a:ext>
+            </a:extLst>
+          </p:cNvPr>
+          <p:cNvSpPr/>
+          <p:nvPr/>
+        </p:nvSpPr>
+        <p:spPr>
+          <a:xfrm rot="5400000">
+            <a:off x="7010823" y="4172553"/>
+            <a:ext cx="363794" cy="1342526"/>
+          </a:xfrm>
+          <a:prstGeom prst="downArrow">
+            <a:avLst/>
+          </a:prstGeom>
+          <a:solidFill>
+            <a:srgbClr val="00B0F0"/>
+          </a:solidFill>
+          <a:ln>
+            <a:solidFill>
+              <a:srgbClr val="0070C0"/>
+            </a:solidFill>
+          </a:ln>
+        </p:spPr>
+        <p:style>
+          <a:lnRef idx="2">
+            <a:schemeClr val="accent1">
+              <a:shade val="15000"/>
+            </a:schemeClr>
+          </a:lnRef>
+          <a:fillRef idx="1">
+            <a:schemeClr val="accent1"/>
+          </a:fillRef>
+          <a:effectRef idx="0">
+            <a:schemeClr val="accent1"/>
+          </a:effectRef>
+          <a:fontRef idx="minor">
+            <a:schemeClr val="lt1"/>
+          </a:fontRef>
+        </p:style>
+        <p:txBody>
+          <a:bodyPr rtlCol="0" anchor="ctr"/>
+          <a:lstStyle/>
+          <a:p>
+            <a:pPr algn="ctr"/>
+            <a:endParaRPr lang="LID4096"/>
           </a:p>
         </p:txBody>
       </p:sp>
     </p:spTree>
     <p:extLst>
       <p:ext uri="{BB962C8B-B14F-4D97-AF65-F5344CB8AC3E}">
-        <p14:creationId xmlns:p14="http://schemas.microsoft.com/office/powerpoint/2010/main" val="439038329"/>
+        <p14:creationId xmlns:p14="http://schemas.microsoft.com/office/powerpoint/2010/main" val="2265773176"/>
       </p:ext>
     </p:extLst>
   </p:cSld>
@@ -10514,10 +11104,10 @@
       </p:grpSpPr>
       <p:sp>
         <p:nvSpPr>
-          <p:cNvPr id="10" name="Title 1">
-            <a:extLst>
-              <a:ext uri="{FF2B5EF4-FFF2-40B4-BE49-F238E27FC236}">
-                <a16:creationId xmlns:a16="http://schemas.microsoft.com/office/drawing/2014/main" id="{31935CC8-2890-5E51-2D68-07BE9A14BCBB}"/>
+          <p:cNvPr id="2" name="Title 1">
+            <a:extLst>
+              <a:ext uri="{FF2B5EF4-FFF2-40B4-BE49-F238E27FC236}">
+                <a16:creationId xmlns:a16="http://schemas.microsoft.com/office/drawing/2014/main" id="{727C0816-B592-9E8E-EA9D-D172D0B8710B}"/>
               </a:ext>
             </a:extLst>
           </p:cNvPr>
@@ -10530,8 +11120,8 @@
         </p:nvSpPr>
         <p:spPr>
           <a:xfrm>
-            <a:off x="97063" y="661668"/>
-            <a:ext cx="6433266" cy="1962149"/>
+            <a:off x="432393" y="758952"/>
+            <a:ext cx="7609668" cy="1734866"/>
           </a:xfrm>
         </p:spPr>
         <p:txBody>
@@ -10541,702 +11131,112 @@
           <a:lstStyle/>
           <a:p>
             <a:r>
-              <a:rPr lang="en-US" sz="5500" dirty="0"/>
-              <a:t>Hoe </a:t>
-            </a:r>
-            <a:r>
-              <a:rPr lang="en-US" sz="5500" dirty="0" err="1"/>
-              <a:t>werkt</a:t>
-            </a:r>
-            <a:r>
-              <a:rPr lang="en-US" sz="5500" dirty="0"/>
-              <a:t> het?</a:t>
-            </a:r>
-          </a:p>
-        </p:txBody>
-      </p:sp>
-      <p:pic>
-        <p:nvPicPr>
-          <p:cNvPr id="19" name="Picture 18" descr="Laptop computer | Definition, History, &amp; Facts | Britannica">
-            <a:extLst>
-              <a:ext uri="{FF2B5EF4-FFF2-40B4-BE49-F238E27FC236}">
-                <a16:creationId xmlns:a16="http://schemas.microsoft.com/office/drawing/2014/main" id="{8DC3EC01-6689-15B9-46EE-FFF6C0B78DB9}"/>
-              </a:ext>
-            </a:extLst>
-          </p:cNvPr>
-          <p:cNvPicPr>
-            <a:picLocks noChangeAspect="1"/>
-          </p:cNvPicPr>
-          <p:nvPr/>
-        </p:nvPicPr>
-        <p:blipFill>
-          <a:blip r:embed="rId2"/>
-          <a:stretch>
-            <a:fillRect/>
-          </a:stretch>
-        </p:blipFill>
-        <p:spPr>
-          <a:xfrm>
-            <a:off x="526424" y="3658263"/>
-            <a:ext cx="3142896" cy="2117526"/>
-          </a:xfrm>
-          <a:prstGeom prst="snip2DiagRect">
-            <a:avLst/>
-          </a:prstGeom>
-          <a:solidFill>
-            <a:srgbClr val="FFFFFF">
-              <a:shade val="85000"/>
-            </a:srgbClr>
-          </a:solidFill>
-          <a:ln w="88900" cap="sq">
-            <a:solidFill>
-              <a:srgbClr val="FFFFFF"/>
-            </a:solidFill>
-            <a:miter lim="800000"/>
-          </a:ln>
-          <a:effectLst>
-            <a:outerShdw blurRad="88900" algn="tl" rotWithShape="0">
-              <a:srgbClr val="000000">
-                <a:alpha val="45000"/>
-              </a:srgbClr>
-            </a:outerShdw>
-          </a:effectLst>
-          <a:scene3d>
-            <a:camera prst="orthographicFront"/>
-            <a:lightRig rig="twoPt" dir="t">
-              <a:rot lat="0" lon="0" rev="7200000"/>
-            </a:lightRig>
-          </a:scene3d>
-          <a:sp3d>
-            <a:bevelT w="25400" h="19050"/>
-            <a:contourClr>
-              <a:srgbClr val="FFFFFF"/>
-            </a:contourClr>
-          </a:sp3d>
-        </p:spPr>
-      </p:pic>
-      <p:pic>
-        <p:nvPicPr>
-          <p:cNvPr id="21" name="Content Placeholder 3" descr="RASPBERRY PI SC1112">
-            <a:extLst>
-              <a:ext uri="{FF2B5EF4-FFF2-40B4-BE49-F238E27FC236}">
-                <a16:creationId xmlns:a16="http://schemas.microsoft.com/office/drawing/2014/main" id="{D652357C-4258-1662-7EC5-FF5523338C92}"/>
-              </a:ext>
-            </a:extLst>
-          </p:cNvPr>
-          <p:cNvPicPr>
-            <a:picLocks noChangeAspect="1"/>
-          </p:cNvPicPr>
-          <p:nvPr/>
-        </p:nvPicPr>
-        <p:blipFill>
-          <a:blip r:embed="rId3"/>
-          <a:stretch>
-            <a:fillRect/>
-          </a:stretch>
-        </p:blipFill>
-        <p:spPr>
-          <a:xfrm>
-            <a:off x="8031068" y="3658263"/>
-            <a:ext cx="2823368" cy="2117526"/>
-          </a:xfrm>
-          <a:prstGeom prst="snip2DiagRect">
-            <a:avLst/>
-          </a:prstGeom>
-          <a:solidFill>
-            <a:srgbClr val="FFFFFF">
-              <a:shade val="85000"/>
-            </a:srgbClr>
-          </a:solidFill>
-          <a:ln w="88900" cap="sq">
-            <a:solidFill>
-              <a:srgbClr val="FFFFFF"/>
-            </a:solidFill>
-            <a:miter lim="800000"/>
-          </a:ln>
-          <a:effectLst>
-            <a:outerShdw blurRad="88900" algn="tl" rotWithShape="0">
-              <a:srgbClr val="000000">
-                <a:alpha val="45000"/>
-              </a:srgbClr>
-            </a:outerShdw>
-          </a:effectLst>
-          <a:scene3d>
-            <a:camera prst="orthographicFront"/>
-            <a:lightRig rig="twoPt" dir="t">
-              <a:rot lat="0" lon="0" rev="7200000"/>
-            </a:lightRig>
-          </a:scene3d>
-          <a:sp3d>
-            <a:bevelT w="25400" h="19050"/>
-            <a:contourClr>
-              <a:srgbClr val="FFFFFF"/>
-            </a:contourClr>
-          </a:sp3d>
-        </p:spPr>
-      </p:pic>
-      <p:pic>
-        <p:nvPicPr>
-          <p:cNvPr id="27" name="Picture 26" descr="Power Gear Interior/Exterior Simulated Security Camera 40661 at Lowes.com">
-            <a:extLst>
-              <a:ext uri="{FF2B5EF4-FFF2-40B4-BE49-F238E27FC236}">
-                <a16:creationId xmlns:a16="http://schemas.microsoft.com/office/drawing/2014/main" id="{C2D37B91-2787-C25E-5C76-12E23EEB08A2}"/>
-              </a:ext>
-            </a:extLst>
-          </p:cNvPr>
-          <p:cNvPicPr>
-            <a:picLocks noChangeAspect="1"/>
-          </p:cNvPicPr>
-          <p:nvPr/>
-        </p:nvPicPr>
-        <p:blipFill>
-          <a:blip r:embed="rId4"/>
-          <a:stretch>
-            <a:fillRect/>
-          </a:stretch>
-        </p:blipFill>
-        <p:spPr>
-          <a:xfrm>
-            <a:off x="10378593" y="2028352"/>
-            <a:ext cx="1400648" cy="1400648"/>
-          </a:xfrm>
-          <a:prstGeom prst="roundRect">
-            <a:avLst>
-              <a:gd name="adj" fmla="val 16667"/>
-            </a:avLst>
-          </a:prstGeom>
-          <a:ln>
-            <a:noFill/>
-          </a:ln>
-          <a:effectLst>
-            <a:outerShdw blurRad="76200" dist="38100" dir="7800000" algn="tl" rotWithShape="0">
-              <a:srgbClr val="000000">
-                <a:alpha val="40000"/>
-              </a:srgbClr>
-            </a:outerShdw>
-          </a:effectLst>
-          <a:scene3d>
-            <a:camera prst="orthographicFront"/>
-            <a:lightRig rig="contrasting" dir="t">
-              <a:rot lat="0" lon="0" rev="4200000"/>
-            </a:lightRig>
-          </a:scene3d>
-          <a:sp3d prstMaterial="plastic">
-            <a:bevelT w="381000" h="114300" prst="relaxedInset"/>
-            <a:contourClr>
-              <a:srgbClr val="969696"/>
-            </a:contourClr>
-          </a:sp3d>
-        </p:spPr>
-      </p:pic>
-      <p:pic>
-        <p:nvPicPr>
-          <p:cNvPr id="29" name="Picture 28" descr="Power Gear Interior/Exterior Simulated Security Camera 40661 at Lowes.com">
-            <a:extLst>
-              <a:ext uri="{FF2B5EF4-FFF2-40B4-BE49-F238E27FC236}">
-                <a16:creationId xmlns:a16="http://schemas.microsoft.com/office/drawing/2014/main" id="{5025EC41-7695-E869-BC90-DCC0D9932612}"/>
-              </a:ext>
-            </a:extLst>
-          </p:cNvPr>
-          <p:cNvPicPr>
-            <a:picLocks noChangeAspect="1"/>
-          </p:cNvPicPr>
-          <p:nvPr/>
-        </p:nvPicPr>
-        <p:blipFill>
-          <a:blip r:embed="rId4"/>
-          <a:stretch>
-            <a:fillRect/>
-          </a:stretch>
-        </p:blipFill>
-        <p:spPr>
-          <a:xfrm>
-            <a:off x="5948049" y="1994163"/>
-            <a:ext cx="1400648" cy="1400648"/>
-          </a:xfrm>
-          <a:prstGeom prst="roundRect">
-            <a:avLst>
-              <a:gd name="adj" fmla="val 16667"/>
-            </a:avLst>
-          </a:prstGeom>
-          <a:ln>
-            <a:noFill/>
-          </a:ln>
-          <a:effectLst>
-            <a:outerShdw blurRad="76200" dist="38100" dir="7800000" algn="tl" rotWithShape="0">
-              <a:srgbClr val="000000">
-                <a:alpha val="40000"/>
-              </a:srgbClr>
-            </a:outerShdw>
-          </a:effectLst>
-          <a:scene3d>
-            <a:camera prst="orthographicFront"/>
-            <a:lightRig rig="contrasting" dir="t">
-              <a:rot lat="0" lon="0" rev="4200000"/>
-            </a:lightRig>
-          </a:scene3d>
-          <a:sp3d prstMaterial="plastic">
-            <a:bevelT w="381000" h="114300" prst="relaxedInset"/>
-            <a:contourClr>
-              <a:srgbClr val="969696"/>
-            </a:contourClr>
-          </a:sp3d>
-        </p:spPr>
-      </p:pic>
-      <p:pic>
-        <p:nvPicPr>
-          <p:cNvPr id="31" name="Picture 30" descr="Power Gear Interior/Exterior Simulated Security Camera 40661 at Lowes.com">
-            <a:extLst>
-              <a:ext uri="{FF2B5EF4-FFF2-40B4-BE49-F238E27FC236}">
-                <a16:creationId xmlns:a16="http://schemas.microsoft.com/office/drawing/2014/main" id="{8821ED6F-F19C-17BD-DC7C-093A16491169}"/>
-              </a:ext>
-            </a:extLst>
-          </p:cNvPr>
-          <p:cNvPicPr>
-            <a:picLocks noChangeAspect="1"/>
-          </p:cNvPicPr>
-          <p:nvPr/>
-        </p:nvPicPr>
-        <p:blipFill>
-          <a:blip r:embed="rId4"/>
-          <a:stretch>
-            <a:fillRect/>
-          </a:stretch>
-        </p:blipFill>
-        <p:spPr>
-          <a:xfrm>
-            <a:off x="7424897" y="1994163"/>
-            <a:ext cx="1400648" cy="1400648"/>
-          </a:xfrm>
-          <a:prstGeom prst="roundRect">
-            <a:avLst>
-              <a:gd name="adj" fmla="val 16667"/>
-            </a:avLst>
-          </a:prstGeom>
-          <a:ln>
-            <a:noFill/>
-          </a:ln>
-          <a:effectLst>
-            <a:outerShdw blurRad="76200" dist="38100" dir="7800000" algn="tl" rotWithShape="0">
-              <a:srgbClr val="000000">
-                <a:alpha val="40000"/>
-              </a:srgbClr>
-            </a:outerShdw>
-          </a:effectLst>
-          <a:scene3d>
-            <a:camera prst="orthographicFront"/>
-            <a:lightRig rig="contrasting" dir="t">
-              <a:rot lat="0" lon="0" rev="4200000"/>
-            </a:lightRig>
-          </a:scene3d>
-          <a:sp3d prstMaterial="plastic">
-            <a:bevelT w="381000" h="114300" prst="relaxedInset"/>
-            <a:contourClr>
-              <a:srgbClr val="969696"/>
-            </a:contourClr>
-          </a:sp3d>
-        </p:spPr>
-      </p:pic>
-      <p:pic>
-        <p:nvPicPr>
-          <p:cNvPr id="33" name="Picture 32" descr="Power Gear Interior/Exterior Simulated Security Camera 40661 at Lowes.com">
-            <a:extLst>
-              <a:ext uri="{FF2B5EF4-FFF2-40B4-BE49-F238E27FC236}">
-                <a16:creationId xmlns:a16="http://schemas.microsoft.com/office/drawing/2014/main" id="{93112A2A-76AD-5096-4422-C567E5492E50}"/>
-              </a:ext>
-            </a:extLst>
-          </p:cNvPr>
-          <p:cNvPicPr>
-            <a:picLocks noChangeAspect="1"/>
-          </p:cNvPicPr>
-          <p:nvPr/>
-        </p:nvPicPr>
-        <p:blipFill>
-          <a:blip r:embed="rId4"/>
-          <a:stretch>
-            <a:fillRect/>
-          </a:stretch>
-        </p:blipFill>
-        <p:spPr>
-          <a:xfrm>
-            <a:off x="8901745" y="1994163"/>
-            <a:ext cx="1400648" cy="1400648"/>
-          </a:xfrm>
-          <a:prstGeom prst="roundRect">
-            <a:avLst>
-              <a:gd name="adj" fmla="val 16667"/>
-            </a:avLst>
-          </a:prstGeom>
-          <a:ln>
-            <a:noFill/>
-          </a:ln>
-          <a:effectLst>
-            <a:outerShdw blurRad="76200" dist="38100" dir="7800000" algn="tl" rotWithShape="0">
-              <a:srgbClr val="000000">
-                <a:alpha val="40000"/>
-              </a:srgbClr>
-            </a:outerShdw>
-          </a:effectLst>
-          <a:scene3d>
-            <a:camera prst="orthographicFront"/>
-            <a:lightRig rig="contrasting" dir="t">
-              <a:rot lat="0" lon="0" rev="4200000"/>
-            </a:lightRig>
-          </a:scene3d>
-          <a:sp3d prstMaterial="plastic">
-            <a:bevelT w="381000" h="114300" prst="relaxedInset"/>
-            <a:contourClr>
-              <a:srgbClr val="969696"/>
-            </a:contourClr>
-          </a:sp3d>
-        </p:spPr>
-      </p:pic>
-      <mc:AlternateContent xmlns:mc="http://schemas.openxmlformats.org/markup-compatibility/2006">
-        <mc:Choice xmlns:p14="http://schemas.microsoft.com/office/powerpoint/2010/main" Requires="p14">
-          <p:contentPart p14:bwMode="auto" r:id="rId5">
-            <p14:nvContentPartPr>
-              <p14:cNvPr id="57" name="Ink 56">
-                <a:extLst>
-                  <a:ext uri="{FF2B5EF4-FFF2-40B4-BE49-F238E27FC236}">
-                    <a16:creationId xmlns:a16="http://schemas.microsoft.com/office/drawing/2014/main" id="{33E4A19E-6E14-ACBB-6413-098F33B2D04A}"/>
-                  </a:ext>
-                </a:extLst>
-              </p14:cNvPr>
-              <p14:cNvContentPartPr/>
-              <p14:nvPr/>
-            </p14:nvContentPartPr>
-            <p14:xfrm>
-              <a:off x="7314754" y="3352494"/>
-              <a:ext cx="678960" cy="344520"/>
-            </p14:xfrm>
-          </p:contentPart>
-        </mc:Choice>
-        <mc:Fallback>
-          <p:pic>
-            <p:nvPicPr>
-              <p:cNvPr id="57" name="Ink 56">
-                <a:extLst>
-                  <a:ext uri="{FF2B5EF4-FFF2-40B4-BE49-F238E27FC236}">
-                    <a16:creationId xmlns:a16="http://schemas.microsoft.com/office/drawing/2014/main" id="{33E4A19E-6E14-ACBB-6413-098F33B2D04A}"/>
-                  </a:ext>
-                </a:extLst>
-              </p:cNvPr>
-              <p:cNvPicPr/>
-              <p:nvPr/>
-            </p:nvPicPr>
-            <p:blipFill>
-              <a:blip r:embed="rId6"/>
-              <a:stretch>
-                <a:fillRect/>
-              </a:stretch>
-            </p:blipFill>
-            <p:spPr>
-              <a:xfrm>
-                <a:off x="7278754" y="3316494"/>
-                <a:ext cx="750600" cy="416160"/>
-              </a:xfrm>
-              <a:prstGeom prst="rect">
-                <a:avLst/>
-              </a:prstGeom>
-            </p:spPr>
-          </p:pic>
-        </mc:Fallback>
-      </mc:AlternateContent>
-      <mc:AlternateContent xmlns:mc="http://schemas.openxmlformats.org/markup-compatibility/2006">
-        <mc:Choice xmlns:p14="http://schemas.microsoft.com/office/powerpoint/2010/main" Requires="p14">
-          <p:contentPart p14:bwMode="auto" r:id="rId7">
-            <p14:nvContentPartPr>
-              <p14:cNvPr id="59" name="Ink 58">
-                <a:extLst>
-                  <a:ext uri="{FF2B5EF4-FFF2-40B4-BE49-F238E27FC236}">
-                    <a16:creationId xmlns:a16="http://schemas.microsoft.com/office/drawing/2014/main" id="{8A2DCFF6-2636-A5F9-FFD5-7C670C15560E}"/>
-                  </a:ext>
-                </a:extLst>
-              </p14:cNvPr>
-              <p14:cNvContentPartPr/>
-              <p14:nvPr/>
-            </p14:nvContentPartPr>
-            <p14:xfrm>
-              <a:off x="8455594" y="3411534"/>
-              <a:ext cx="720" cy="217080"/>
-            </p14:xfrm>
-          </p:contentPart>
-        </mc:Choice>
-        <mc:Fallback>
-          <p:pic>
-            <p:nvPicPr>
-              <p:cNvPr id="59" name="Ink 58">
-                <a:extLst>
-                  <a:ext uri="{FF2B5EF4-FFF2-40B4-BE49-F238E27FC236}">
-                    <a16:creationId xmlns:a16="http://schemas.microsoft.com/office/drawing/2014/main" id="{8A2DCFF6-2636-A5F9-FFD5-7C670C15560E}"/>
-                  </a:ext>
-                </a:extLst>
-              </p:cNvPr>
-              <p:cNvPicPr/>
-              <p:nvPr/>
-            </p:nvPicPr>
-            <p:blipFill>
-              <a:blip r:embed="rId8"/>
-              <a:stretch>
-                <a:fillRect/>
-              </a:stretch>
-            </p:blipFill>
-            <p:spPr>
-              <a:xfrm>
-                <a:off x="8383594" y="3375474"/>
-                <a:ext cx="144000" cy="288839"/>
-              </a:xfrm>
-              <a:prstGeom prst="rect">
-                <a:avLst/>
-              </a:prstGeom>
-            </p:spPr>
-          </p:pic>
-        </mc:Fallback>
-      </mc:AlternateContent>
-      <mc:AlternateContent xmlns:mc="http://schemas.openxmlformats.org/markup-compatibility/2006">
-        <mc:Choice xmlns:p14="http://schemas.microsoft.com/office/powerpoint/2010/main" Requires="p14">
-          <p:contentPart p14:bwMode="auto" r:id="rId9">
-            <p14:nvContentPartPr>
-              <p14:cNvPr id="61" name="Ink 60">
-                <a:extLst>
-                  <a:ext uri="{FF2B5EF4-FFF2-40B4-BE49-F238E27FC236}">
-                    <a16:creationId xmlns:a16="http://schemas.microsoft.com/office/drawing/2014/main" id="{A606BE07-B6C8-69A2-62A9-CBD6535792AC}"/>
-                  </a:ext>
-                </a:extLst>
-              </p14:cNvPr>
-              <p14:cNvContentPartPr/>
-              <p14:nvPr/>
-            </p14:nvContentPartPr>
-            <p14:xfrm>
-              <a:off x="9596074" y="3382014"/>
-              <a:ext cx="720" cy="226800"/>
-            </p14:xfrm>
-          </p:contentPart>
-        </mc:Choice>
-        <mc:Fallback>
-          <p:pic>
-            <p:nvPicPr>
-              <p:cNvPr id="61" name="Ink 60">
-                <a:extLst>
-                  <a:ext uri="{FF2B5EF4-FFF2-40B4-BE49-F238E27FC236}">
-                    <a16:creationId xmlns:a16="http://schemas.microsoft.com/office/drawing/2014/main" id="{A606BE07-B6C8-69A2-62A9-CBD6535792AC}"/>
-                  </a:ext>
-                </a:extLst>
-              </p:cNvPr>
-              <p:cNvPicPr/>
-              <p:nvPr/>
-            </p:nvPicPr>
-            <p:blipFill>
-              <a:blip r:embed="rId10"/>
-              <a:stretch>
-                <a:fillRect/>
-              </a:stretch>
-            </p:blipFill>
-            <p:spPr>
-              <a:xfrm>
-                <a:off x="9524074" y="3346071"/>
-                <a:ext cx="144000" cy="298326"/>
-              </a:xfrm>
-              <a:prstGeom prst="rect">
-                <a:avLst/>
-              </a:prstGeom>
-            </p:spPr>
-          </p:pic>
-        </mc:Fallback>
-      </mc:AlternateContent>
-      <mc:AlternateContent xmlns:mc="http://schemas.openxmlformats.org/markup-compatibility/2006">
-        <mc:Choice xmlns:p14="http://schemas.microsoft.com/office/powerpoint/2010/main" Requires="p14">
-          <p:contentPart p14:bwMode="auto" r:id="rId11">
-            <p14:nvContentPartPr>
-              <p14:cNvPr id="63" name="Ink 62">
-                <a:extLst>
-                  <a:ext uri="{FF2B5EF4-FFF2-40B4-BE49-F238E27FC236}">
-                    <a16:creationId xmlns:a16="http://schemas.microsoft.com/office/drawing/2014/main" id="{24862A02-C6D0-AF08-F630-55F32910E469}"/>
-                  </a:ext>
-                </a:extLst>
-              </p14:cNvPr>
-              <p14:cNvContentPartPr/>
-              <p14:nvPr/>
-            </p14:nvContentPartPr>
-            <p14:xfrm>
-              <a:off x="10746274" y="3460494"/>
-              <a:ext cx="363960" cy="374040"/>
-            </p14:xfrm>
-          </p:contentPart>
-        </mc:Choice>
-        <mc:Fallback>
-          <p:pic>
-            <p:nvPicPr>
-              <p:cNvPr id="63" name="Ink 62">
-                <a:extLst>
-                  <a:ext uri="{FF2B5EF4-FFF2-40B4-BE49-F238E27FC236}">
-                    <a16:creationId xmlns:a16="http://schemas.microsoft.com/office/drawing/2014/main" id="{24862A02-C6D0-AF08-F630-55F32910E469}"/>
-                  </a:ext>
-                </a:extLst>
-              </p:cNvPr>
-              <p:cNvPicPr/>
-              <p:nvPr/>
-            </p:nvPicPr>
-            <p:blipFill>
-              <a:blip r:embed="rId12"/>
-              <a:stretch>
-                <a:fillRect/>
-              </a:stretch>
-            </p:blipFill>
-            <p:spPr>
-              <a:xfrm>
-                <a:off x="10710274" y="3424494"/>
-                <a:ext cx="435600" cy="445680"/>
-              </a:xfrm>
-              <a:prstGeom prst="rect">
-                <a:avLst/>
-              </a:prstGeom>
-            </p:spPr>
-          </p:pic>
-        </mc:Fallback>
-      </mc:AlternateContent>
-      <p:pic>
-        <p:nvPicPr>
-          <p:cNvPr id="65" name="Picture 64" descr="Welcome IT professionals">
-            <a:extLst>
-              <a:ext uri="{FF2B5EF4-FFF2-40B4-BE49-F238E27FC236}">
-                <a16:creationId xmlns:a16="http://schemas.microsoft.com/office/drawing/2014/main" id="{4EED70B1-806E-2BDF-9733-3D0130DE63AF}"/>
-              </a:ext>
-            </a:extLst>
-          </p:cNvPr>
-          <p:cNvPicPr>
-            <a:picLocks noChangeAspect="1"/>
-          </p:cNvPicPr>
-          <p:nvPr/>
-        </p:nvPicPr>
-        <p:blipFill>
-          <a:blip r:embed="rId13"/>
-          <a:stretch>
-            <a:fillRect/>
-          </a:stretch>
-        </p:blipFill>
-        <p:spPr>
-          <a:xfrm>
-            <a:off x="5081457" y="3984738"/>
-            <a:ext cx="1537472" cy="1537472"/>
-          </a:xfrm>
-          <a:prstGeom prst="rect">
-            <a:avLst/>
-          </a:prstGeom>
-        </p:spPr>
-      </p:pic>
-      <p:sp>
-        <p:nvSpPr>
-          <p:cNvPr id="68" name="Arrow: Down 67">
-            <a:extLst>
-              <a:ext uri="{FF2B5EF4-FFF2-40B4-BE49-F238E27FC236}">
-                <a16:creationId xmlns:a16="http://schemas.microsoft.com/office/drawing/2014/main" id="{503892C6-1045-55E2-74DB-07451E128227}"/>
-              </a:ext>
-            </a:extLst>
-          </p:cNvPr>
-          <p:cNvSpPr/>
-          <p:nvPr/>
-        </p:nvSpPr>
-        <p:spPr>
-          <a:xfrm rot="16200000">
-            <a:off x="4325771" y="4172553"/>
-            <a:ext cx="363794" cy="1342526"/>
-          </a:xfrm>
-          <a:prstGeom prst="downArrow">
-            <a:avLst/>
-          </a:prstGeom>
-          <a:solidFill>
-            <a:srgbClr val="00B0F0"/>
-          </a:solidFill>
-          <a:ln>
-            <a:solidFill>
-              <a:srgbClr val="0070C0"/>
-            </a:solidFill>
-          </a:ln>
-        </p:spPr>
-        <p:style>
-          <a:lnRef idx="2">
-            <a:schemeClr val="accent1">
-              <a:shade val="15000"/>
-            </a:schemeClr>
-          </a:lnRef>
-          <a:fillRef idx="1">
-            <a:schemeClr val="accent1"/>
-          </a:fillRef>
-          <a:effectRef idx="0">
-            <a:schemeClr val="accent1"/>
-          </a:effectRef>
-          <a:fontRef idx="minor">
-            <a:schemeClr val="lt1"/>
-          </a:fontRef>
-        </p:style>
-        <p:txBody>
-          <a:bodyPr rtlCol="0" anchor="ctr"/>
+              <a:rPr lang="en-US" dirty="0" err="1"/>
+              <a:t>Onderdelen</a:t>
+            </a:r>
+            <a:endParaRPr lang="LID4096" dirty="0"/>
+          </a:p>
+        </p:txBody>
+      </p:sp>
+      <p:sp>
+        <p:nvSpPr>
+          <p:cNvPr id="3" name="Content Placeholder 2">
+            <a:extLst>
+              <a:ext uri="{FF2B5EF4-FFF2-40B4-BE49-F238E27FC236}">
+                <a16:creationId xmlns:a16="http://schemas.microsoft.com/office/drawing/2014/main" id="{8F793EA2-36C5-9A79-4D5F-D8F5185E65B6}"/>
+              </a:ext>
+            </a:extLst>
+          </p:cNvPr>
+          <p:cNvSpPr>
+            <a:spLocks noGrp="1"/>
+          </p:cNvSpPr>
+          <p:nvPr>
+            <p:ph sz="quarter" idx="13"/>
+          </p:nvPr>
+        </p:nvSpPr>
+        <p:spPr>
+          <a:xfrm>
+            <a:off x="419100" y="2705101"/>
+            <a:ext cx="8801100" cy="2947550"/>
+          </a:xfrm>
+        </p:spPr>
+        <p:txBody>
+          <a:bodyPr>
+            <a:normAutofit/>
+          </a:bodyPr>
           <a:lstStyle/>
           <a:p>
-            <a:pPr algn="ctr"/>
-            <a:endParaRPr lang="LID4096"/>
-          </a:p>
-        </p:txBody>
-      </p:sp>
-      <p:sp>
-        <p:nvSpPr>
-          <p:cNvPr id="70" name="Arrow: Down 69">
-            <a:extLst>
-              <a:ext uri="{FF2B5EF4-FFF2-40B4-BE49-F238E27FC236}">
-                <a16:creationId xmlns:a16="http://schemas.microsoft.com/office/drawing/2014/main" id="{FCB3BEE5-D978-689F-1859-10D149CECB4A}"/>
-              </a:ext>
-            </a:extLst>
-          </p:cNvPr>
-          <p:cNvSpPr/>
-          <p:nvPr/>
-        </p:nvSpPr>
-        <p:spPr>
-          <a:xfrm rot="16200000">
-            <a:off x="7010823" y="4172553"/>
-            <a:ext cx="363794" cy="1342526"/>
-          </a:xfrm>
-          <a:prstGeom prst="downArrow">
-            <a:avLst/>
-          </a:prstGeom>
-          <a:solidFill>
-            <a:srgbClr val="00B0F0"/>
-          </a:solidFill>
-          <a:ln>
-            <a:solidFill>
-              <a:srgbClr val="0070C0"/>
-            </a:solidFill>
-          </a:ln>
-        </p:spPr>
-        <p:style>
-          <a:lnRef idx="2">
-            <a:schemeClr val="accent1">
-              <a:shade val="15000"/>
-            </a:schemeClr>
-          </a:lnRef>
-          <a:fillRef idx="1">
-            <a:schemeClr val="accent1"/>
-          </a:fillRef>
-          <a:effectRef idx="0">
-            <a:schemeClr val="accent1"/>
-          </a:effectRef>
-          <a:fontRef idx="minor">
-            <a:schemeClr val="lt1"/>
-          </a:fontRef>
-        </p:style>
-        <p:txBody>
-          <a:bodyPr rtlCol="0" anchor="ctr"/>
-          <a:lstStyle/>
-          <a:p>
-            <a:pPr algn="ctr"/>
-            <a:endParaRPr lang="LID4096"/>
+            <a:pPr marL="457200" indent="-457200">
+              <a:buFontTx/>
+              <a:buChar char="-"/>
+            </a:pPr>
+            <a:r>
+              <a:rPr lang="en-US" dirty="0"/>
+              <a:t>Raspberry Pi 5 			€196,43</a:t>
+            </a:r>
+          </a:p>
+          <a:p>
+            <a:pPr marL="457200" indent="-457200">
+              <a:buFontTx/>
+              <a:buChar char="-"/>
+            </a:pPr>
+            <a:r>
+              <a:rPr lang="en-US" dirty="0"/>
+              <a:t>Micro SD Card 32GB		€11,52</a:t>
+            </a:r>
+          </a:p>
+          <a:p>
+            <a:pPr marL="457200" indent="-457200">
+              <a:buFontTx/>
+              <a:buChar char="-"/>
+            </a:pPr>
+            <a:r>
+              <a:rPr lang="en-US" dirty="0"/>
+              <a:t>USB hub met </a:t>
+            </a:r>
+            <a:r>
+              <a:rPr lang="en-US" dirty="0" err="1"/>
+              <a:t>voeding</a:t>
+            </a:r>
+            <a:r>
+              <a:rPr lang="en-US" dirty="0"/>
+              <a:t>		€12,99</a:t>
+            </a:r>
+          </a:p>
+          <a:p>
+            <a:pPr marL="457200" indent="-457200">
+              <a:buFontTx/>
+              <a:buChar char="-"/>
+            </a:pPr>
+            <a:r>
+              <a:rPr lang="en-US" dirty="0"/>
+              <a:t>4* Webcam 1080P		€11,99 *4 = €47,96</a:t>
+            </a:r>
+          </a:p>
+          <a:p>
+            <a:r>
+              <a:rPr lang="en-US"/>
+              <a:t>------------------------------------------------------------------------------</a:t>
+            </a:r>
+            <a:endParaRPr lang="en-US" dirty="0"/>
+          </a:p>
+          <a:p>
+            <a:pPr marL="457200" indent="-457200">
+              <a:buFontTx/>
+              <a:buChar char="-"/>
+            </a:pPr>
+            <a:r>
+              <a:rPr lang="en-US" dirty="0"/>
+              <a:t>TOTAL			€268,90</a:t>
+            </a:r>
+            <a:endParaRPr lang="LID4096" dirty="0"/>
           </a:p>
         </p:txBody>
       </p:sp>
     </p:spTree>
     <p:extLst>
       <p:ext uri="{BB962C8B-B14F-4D97-AF65-F5344CB8AC3E}">
-        <p14:creationId xmlns:p14="http://schemas.microsoft.com/office/powerpoint/2010/main" val="2265773176"/>
+        <p14:creationId xmlns:p14="http://schemas.microsoft.com/office/powerpoint/2010/main" val="439038329"/>
       </p:ext>
     </p:extLst>
   </p:cSld>

--- a/eindwerk presentatie.pptx
+++ b/eindwerk presentatie.pptx
@@ -9,9 +9,10 @@
     <p:sldId id="258" r:id="rId3"/>
     <p:sldId id="257" r:id="rId4"/>
     <p:sldId id="261" r:id="rId5"/>
-    <p:sldId id="260" r:id="rId6"/>
-    <p:sldId id="263" r:id="rId7"/>
-    <p:sldId id="262" r:id="rId8"/>
+    <p:sldId id="264" r:id="rId6"/>
+    <p:sldId id="260" r:id="rId7"/>
+    <p:sldId id="263" r:id="rId8"/>
+    <p:sldId id="262" r:id="rId9"/>
   </p:sldIdLst>
   <p:sldSz cx="12192000" cy="6858000"/>
   <p:notesSz cx="6858000" cy="9144000"/>
@@ -121,7 +122,7 @@
 <file path=ppt/revisionInfo.xml><?xml version="1.0" encoding="utf-8"?>
 <p1510:revInfo xmlns:a="http://schemas.openxmlformats.org/drawingml/2006/main" xmlns:r="http://schemas.openxmlformats.org/officeDocument/2006/relationships" xmlns:p1510="http://schemas.microsoft.com/office/powerpoint/2015/10/main">
   <p1510:revLst>
-    <p1510:client id="{FC0075AE-E7B4-46B1-A184-531FD7D11EAF}" v="50" dt="2026-09-28T06:59:35.053"/>
+    <p1510:client id="{FC0075AE-E7B4-46B1-A184-531FD7D11EAF}" v="52" dt="2026-09-28T16:26:01.152"/>
   </p1510:revLst>
 </p1510:revInfo>
 </file>
@@ -131,7 +132,7 @@
   <pc:docChgLst>
     <pc:chgData name="Demaeght Gunnarr" userId="d4ee6c7f-5b58-43ba-8a8e-d2bde2eb291f" providerId="ADAL" clId="{5D62749E-E127-43B3-8AC6-51DF11B66DA8}"/>
     <pc:docChg chg="undo redo custSel addSld delSld modSld sldOrd">
-      <pc:chgData name="Demaeght Gunnarr" userId="d4ee6c7f-5b58-43ba-8a8e-d2bde2eb291f" providerId="ADAL" clId="{5D62749E-E127-43B3-8AC6-51DF11B66DA8}" dt="2026-09-28T08:46:59.346" v="1153" actId="688"/>
+      <pc:chgData name="Demaeght Gunnarr" userId="d4ee6c7f-5b58-43ba-8a8e-d2bde2eb291f" providerId="ADAL" clId="{5D62749E-E127-43B3-8AC6-51DF11B66DA8}" dt="2026-09-28T16:26:01.152" v="1266"/>
       <pc:docMkLst>
         <pc:docMk/>
       </pc:docMkLst>
@@ -206,7 +207,7 @@
         </pc:picChg>
       </pc:sldChg>
       <pc:sldChg chg="addSp delSp modSp new mod ord modTransition modClrScheme chgLayout">
-        <pc:chgData name="Demaeght Gunnarr" userId="d4ee6c7f-5b58-43ba-8a8e-d2bde2eb291f" providerId="ADAL" clId="{5D62749E-E127-43B3-8AC6-51DF11B66DA8}" dt="2026-09-27T12:41:00.019" v="1121" actId="1076"/>
+        <pc:chgData name="Demaeght Gunnarr" userId="d4ee6c7f-5b58-43ba-8a8e-d2bde2eb291f" providerId="ADAL" clId="{5D62749E-E127-43B3-8AC6-51DF11B66DA8}" dt="2026-09-28T16:24:18.169" v="1259"/>
         <pc:sldMkLst>
           <pc:docMk/>
           <pc:sldMk cId="3157967162" sldId="258"/>
@@ -217,6 +218,14 @@
             <pc:docMk/>
             <pc:sldMk cId="3157967162" sldId="258"/>
             <ac:spMk id="2" creationId="{DA0C588F-6AFB-42EF-AEFE-A25538B6D810}"/>
+          </ac:spMkLst>
+        </pc:spChg>
+        <pc:spChg chg="add del mod">
+          <ac:chgData name="Demaeght Gunnarr" userId="d4ee6c7f-5b58-43ba-8a8e-d2bde2eb291f" providerId="ADAL" clId="{5D62749E-E127-43B3-8AC6-51DF11B66DA8}" dt="2026-09-28T16:24:18.169" v="1259"/>
+          <ac:spMkLst>
+            <pc:docMk/>
+            <pc:sldMk cId="3157967162" sldId="258"/>
+            <ac:spMk id="3" creationId="{E652E5DC-4EB4-DBC1-3A40-B902FB5210AE}"/>
           </ac:spMkLst>
         </pc:spChg>
         <pc:picChg chg="add mod">
@@ -903,9 +912,3252 @@
           </ac:picMkLst>
         </pc:picChg>
       </pc:sldChg>
+      <pc:sldChg chg="addSp delSp modSp new mod modTransition modClrScheme chgLayout">
+        <pc:chgData name="Demaeght Gunnarr" userId="d4ee6c7f-5b58-43ba-8a8e-d2bde2eb291f" providerId="ADAL" clId="{5D62749E-E127-43B3-8AC6-51DF11B66DA8}" dt="2026-09-28T16:26:01.152" v="1266"/>
+        <pc:sldMkLst>
+          <pc:docMk/>
+          <pc:sldMk cId="2760668692" sldId="264"/>
+        </pc:sldMkLst>
+        <pc:spChg chg="del">
+          <ac:chgData name="Demaeght Gunnarr" userId="d4ee6c7f-5b58-43ba-8a8e-d2bde2eb291f" providerId="ADAL" clId="{5D62749E-E127-43B3-8AC6-51DF11B66DA8}" dt="2026-09-28T16:19:56.690" v="1155" actId="26606"/>
+          <ac:spMkLst>
+            <pc:docMk/>
+            <pc:sldMk cId="2760668692" sldId="264"/>
+            <ac:spMk id="2" creationId="{A902EF6D-679F-F810-07BC-5C9516576C6A}"/>
+          </ac:spMkLst>
+        </pc:spChg>
+        <pc:spChg chg="del">
+          <ac:chgData name="Demaeght Gunnarr" userId="d4ee6c7f-5b58-43ba-8a8e-d2bde2eb291f" providerId="ADAL" clId="{5D62749E-E127-43B3-8AC6-51DF11B66DA8}" dt="2026-09-28T16:19:56.690" v="1155" actId="26606"/>
+          <ac:spMkLst>
+            <pc:docMk/>
+            <pc:sldMk cId="2760668692" sldId="264"/>
+            <ac:spMk id="3" creationId="{06601979-0E40-C7F9-63CE-FF88D4091AE5}"/>
+          </ac:spMkLst>
+        </pc:spChg>
+        <pc:spChg chg="add mod ord">
+          <ac:chgData name="Demaeght Gunnarr" userId="d4ee6c7f-5b58-43ba-8a8e-d2bde2eb291f" providerId="ADAL" clId="{5D62749E-E127-43B3-8AC6-51DF11B66DA8}" dt="2026-09-28T16:25:55.430" v="1265" actId="1076"/>
+          <ac:spMkLst>
+            <pc:docMk/>
+            <pc:sldMk cId="2760668692" sldId="264"/>
+            <ac:spMk id="8" creationId="{CA62670D-1AAD-F98F-C148-BE9A831F40F1}"/>
+          </ac:spMkLst>
+        </pc:spChg>
+        <pc:spChg chg="add del mod">
+          <ac:chgData name="Demaeght Gunnarr" userId="d4ee6c7f-5b58-43ba-8a8e-d2bde2eb291f" providerId="ADAL" clId="{5D62749E-E127-43B3-8AC6-51DF11B66DA8}" dt="2026-09-28T16:23:30.162" v="1253" actId="26606"/>
+          <ac:spMkLst>
+            <pc:docMk/>
+            <pc:sldMk cId="2760668692" sldId="264"/>
+            <ac:spMk id="10" creationId="{CA0A2D04-6300-804F-8DCE-08380576DCA7}"/>
+          </ac:spMkLst>
+        </pc:spChg>
+        <pc:spChg chg="add del mod">
+          <ac:chgData name="Demaeght Gunnarr" userId="d4ee6c7f-5b58-43ba-8a8e-d2bde2eb291f" providerId="ADAL" clId="{5D62749E-E127-43B3-8AC6-51DF11B66DA8}" dt="2026-09-28T16:21:51.453" v="1233" actId="26606"/>
+          <ac:spMkLst>
+            <pc:docMk/>
+            <pc:sldMk cId="2760668692" sldId="264"/>
+            <ac:spMk id="15" creationId="{175A62C7-3E58-C564-F3A2-AA326185AD11}"/>
+          </ac:spMkLst>
+        </pc:spChg>
+        <pc:graphicFrameChg chg="add mod ord">
+          <ac:chgData name="Demaeght Gunnarr" userId="d4ee6c7f-5b58-43ba-8a8e-d2bde2eb291f" providerId="ADAL" clId="{5D62749E-E127-43B3-8AC6-51DF11B66DA8}" dt="2026-09-28T16:25:42.677" v="1264" actId="1076"/>
+          <ac:graphicFrameMkLst>
+            <pc:docMk/>
+            <pc:sldMk cId="2760668692" sldId="264"/>
+            <ac:graphicFrameMk id="12" creationId="{0E2A3DB1-B1AD-54F2-0BF3-EA9B2484CC98}"/>
+          </ac:graphicFrameMkLst>
+        </pc:graphicFrameChg>
+      </pc:sldChg>
     </pc:docChg>
   </pc:docChgLst>
 </pc:chgInfo>
+</file>
+
+<file path=ppt/diagrams/colors1.xml><?xml version="1.0" encoding="utf-8"?>
+<dgm:colorsDef xmlns:dgm="http://schemas.openxmlformats.org/drawingml/2006/diagram" xmlns:a="http://schemas.openxmlformats.org/drawingml/2006/main" uniqueId="urn:microsoft.com/office/officeart/2005/8/colors/accent2_2#1">
+  <dgm:title val=""/>
+  <dgm:desc val=""/>
+  <dgm:catLst>
+    <dgm:cat type="accent2" pri="11200"/>
+  </dgm:catLst>
+  <dgm:styleLbl name="node0">
+    <dgm:fillClrLst meth="repeat">
+      <a:schemeClr val="accent2"/>
+    </dgm:fillClrLst>
+    <dgm:linClrLst meth="repeat">
+      <a:schemeClr val="lt1"/>
+    </dgm:linClrLst>
+    <dgm:effectClrLst/>
+    <dgm:txLinClrLst/>
+    <dgm:txFillClrLst/>
+    <dgm:txEffectClrLst/>
+  </dgm:styleLbl>
+  <dgm:styleLbl name="node1">
+    <dgm:fillClrLst meth="repeat">
+      <a:schemeClr val="accent2"/>
+    </dgm:fillClrLst>
+    <dgm:linClrLst meth="repeat">
+      <a:schemeClr val="lt1"/>
+    </dgm:linClrLst>
+    <dgm:effectClrLst/>
+    <dgm:txLinClrLst/>
+    <dgm:txFillClrLst/>
+    <dgm:txEffectClrLst/>
+  </dgm:styleLbl>
+  <dgm:styleLbl name="alignNode1">
+    <dgm:fillClrLst meth="repeat">
+      <a:schemeClr val="accent2"/>
+    </dgm:fillClrLst>
+    <dgm:linClrLst meth="repeat">
+      <a:schemeClr val="accent2"/>
+    </dgm:linClrLst>
+    <dgm:effectClrLst/>
+    <dgm:txLinClrLst/>
+    <dgm:txFillClrLst/>
+    <dgm:txEffectClrLst/>
+  </dgm:styleLbl>
+  <dgm:styleLbl name="lnNode1">
+    <dgm:fillClrLst meth="repeat">
+      <a:schemeClr val="accent2"/>
+    </dgm:fillClrLst>
+    <dgm:linClrLst meth="repeat">
+      <a:schemeClr val="lt1"/>
+    </dgm:linClrLst>
+    <dgm:effectClrLst/>
+    <dgm:txLinClrLst/>
+    <dgm:txFillClrLst/>
+    <dgm:txEffectClrLst/>
+  </dgm:styleLbl>
+  <dgm:styleLbl name="vennNode1">
+    <dgm:fillClrLst meth="repeat">
+      <a:schemeClr val="accent2">
+        <a:alpha val="50000"/>
+      </a:schemeClr>
+    </dgm:fillClrLst>
+    <dgm:linClrLst meth="repeat">
+      <a:schemeClr val="lt1"/>
+    </dgm:linClrLst>
+    <dgm:effectClrLst/>
+    <dgm:txLinClrLst/>
+    <dgm:txFillClrLst/>
+    <dgm:txEffectClrLst/>
+  </dgm:styleLbl>
+  <dgm:styleLbl name="node2">
+    <dgm:fillClrLst meth="repeat">
+      <a:schemeClr val="accent2"/>
+    </dgm:fillClrLst>
+    <dgm:linClrLst meth="repeat">
+      <a:schemeClr val="lt1"/>
+    </dgm:linClrLst>
+    <dgm:effectClrLst/>
+    <dgm:txLinClrLst/>
+    <dgm:txFillClrLst/>
+    <dgm:txEffectClrLst/>
+  </dgm:styleLbl>
+  <dgm:styleLbl name="node3">
+    <dgm:fillClrLst meth="repeat">
+      <a:schemeClr val="accent2"/>
+    </dgm:fillClrLst>
+    <dgm:linClrLst meth="repeat">
+      <a:schemeClr val="lt1"/>
+    </dgm:linClrLst>
+    <dgm:effectClrLst/>
+    <dgm:txLinClrLst/>
+    <dgm:txFillClrLst/>
+    <dgm:txEffectClrLst/>
+  </dgm:styleLbl>
+  <dgm:styleLbl name="node4">
+    <dgm:fillClrLst meth="repeat">
+      <a:schemeClr val="accent2"/>
+    </dgm:fillClrLst>
+    <dgm:linClrLst meth="repeat">
+      <a:schemeClr val="lt1"/>
+    </dgm:linClrLst>
+    <dgm:effectClrLst/>
+    <dgm:txLinClrLst/>
+    <dgm:txFillClrLst/>
+    <dgm:txEffectClrLst/>
+  </dgm:styleLbl>
+  <dgm:styleLbl name="fgImgPlace1">
+    <dgm:fillClrLst meth="repeat">
+      <a:schemeClr val="accent2">
+        <a:tint val="50000"/>
+      </a:schemeClr>
+    </dgm:fillClrLst>
+    <dgm:linClrLst meth="repeat">
+      <a:schemeClr val="lt1"/>
+    </dgm:linClrLst>
+    <dgm:effectClrLst/>
+    <dgm:txLinClrLst/>
+    <dgm:txFillClrLst meth="repeat">
+      <a:schemeClr val="lt1"/>
+    </dgm:txFillClrLst>
+    <dgm:txEffectClrLst/>
+  </dgm:styleLbl>
+  <dgm:styleLbl name="alignImgPlace1">
+    <dgm:fillClrLst meth="repeat">
+      <a:schemeClr val="accent2">
+        <a:tint val="50000"/>
+      </a:schemeClr>
+    </dgm:fillClrLst>
+    <dgm:linClrLst meth="repeat">
+      <a:schemeClr val="lt1"/>
+    </dgm:linClrLst>
+    <dgm:effectClrLst/>
+    <dgm:txLinClrLst/>
+    <dgm:txFillClrLst meth="repeat">
+      <a:schemeClr val="lt1"/>
+    </dgm:txFillClrLst>
+    <dgm:txEffectClrLst/>
+  </dgm:styleLbl>
+  <dgm:styleLbl name="bgImgPlace1">
+    <dgm:fillClrLst meth="repeat">
+      <a:schemeClr val="accent2">
+        <a:tint val="50000"/>
+      </a:schemeClr>
+    </dgm:fillClrLst>
+    <dgm:linClrLst meth="repeat">
+      <a:schemeClr val="lt1"/>
+    </dgm:linClrLst>
+    <dgm:effectClrLst/>
+    <dgm:txLinClrLst/>
+    <dgm:txFillClrLst meth="repeat">
+      <a:schemeClr val="lt1"/>
+    </dgm:txFillClrLst>
+    <dgm:txEffectClrLst/>
+  </dgm:styleLbl>
+  <dgm:styleLbl name="sibTrans2D1">
+    <dgm:fillClrLst meth="repeat">
+      <a:schemeClr val="accent2">
+        <a:tint val="60000"/>
+      </a:schemeClr>
+    </dgm:fillClrLst>
+    <dgm:linClrLst meth="repeat">
+      <a:schemeClr val="accent2">
+        <a:tint val="60000"/>
+      </a:schemeClr>
+    </dgm:linClrLst>
+    <dgm:effectClrLst/>
+    <dgm:txLinClrLst/>
+    <dgm:txFillClrLst/>
+    <dgm:txEffectClrLst/>
+  </dgm:styleLbl>
+  <dgm:styleLbl name="fgSibTrans2D1">
+    <dgm:fillClrLst meth="repeat">
+      <a:schemeClr val="accent2">
+        <a:tint val="60000"/>
+      </a:schemeClr>
+    </dgm:fillClrLst>
+    <dgm:linClrLst meth="repeat">
+      <a:schemeClr val="accent2">
+        <a:tint val="60000"/>
+      </a:schemeClr>
+    </dgm:linClrLst>
+    <dgm:effectClrLst/>
+    <dgm:txLinClrLst/>
+    <dgm:txFillClrLst/>
+    <dgm:txEffectClrLst/>
+  </dgm:styleLbl>
+  <dgm:styleLbl name="bgSibTrans2D1">
+    <dgm:fillClrLst meth="repeat">
+      <a:schemeClr val="accent2">
+        <a:tint val="60000"/>
+      </a:schemeClr>
+    </dgm:fillClrLst>
+    <dgm:linClrLst meth="repeat">
+      <a:schemeClr val="accent2">
+        <a:tint val="60000"/>
+      </a:schemeClr>
+    </dgm:linClrLst>
+    <dgm:effectClrLst/>
+    <dgm:txLinClrLst/>
+    <dgm:txFillClrLst/>
+    <dgm:txEffectClrLst/>
+  </dgm:styleLbl>
+  <dgm:styleLbl name="sibTrans1D1">
+    <dgm:fillClrLst meth="repeat">
+      <a:schemeClr val="accent2"/>
+    </dgm:fillClrLst>
+    <dgm:linClrLst meth="repeat">
+      <a:schemeClr val="accent2"/>
+    </dgm:linClrLst>
+    <dgm:effectClrLst/>
+    <dgm:txLinClrLst/>
+    <dgm:txFillClrLst meth="repeat">
+      <a:schemeClr val="tx1"/>
+    </dgm:txFillClrLst>
+    <dgm:txEffectClrLst/>
+  </dgm:styleLbl>
+  <dgm:styleLbl name="callout">
+    <dgm:fillClrLst meth="repeat">
+      <a:schemeClr val="accent2"/>
+    </dgm:fillClrLst>
+    <dgm:linClrLst meth="repeat">
+      <a:schemeClr val="accent2">
+        <a:tint val="50000"/>
+      </a:schemeClr>
+    </dgm:linClrLst>
+    <dgm:effectClrLst/>
+    <dgm:txLinClrLst/>
+    <dgm:txFillClrLst meth="repeat">
+      <a:schemeClr val="tx1"/>
+    </dgm:txFillClrLst>
+    <dgm:txEffectClrLst/>
+  </dgm:styleLbl>
+  <dgm:styleLbl name="asst0">
+    <dgm:fillClrLst meth="repeat">
+      <a:schemeClr val="accent2"/>
+    </dgm:fillClrLst>
+    <dgm:linClrLst meth="repeat">
+      <a:schemeClr val="lt1"/>
+    </dgm:linClrLst>
+    <dgm:effectClrLst/>
+    <dgm:txLinClrLst/>
+    <dgm:txFillClrLst/>
+    <dgm:txEffectClrLst/>
+  </dgm:styleLbl>
+  <dgm:styleLbl name="asst1">
+    <dgm:fillClrLst meth="repeat">
+      <a:schemeClr val="accent2"/>
+    </dgm:fillClrLst>
+    <dgm:linClrLst meth="repeat">
+      <a:schemeClr val="lt1"/>
+    </dgm:linClrLst>
+    <dgm:effectClrLst/>
+    <dgm:txLinClrLst/>
+    <dgm:txFillClrLst/>
+    <dgm:txEffectClrLst/>
+  </dgm:styleLbl>
+  <dgm:styleLbl name="asst2">
+    <dgm:fillClrLst meth="repeat">
+      <a:schemeClr val="accent2"/>
+    </dgm:fillClrLst>
+    <dgm:linClrLst meth="repeat">
+      <a:schemeClr val="lt1"/>
+    </dgm:linClrLst>
+    <dgm:effectClrLst/>
+    <dgm:txLinClrLst/>
+    <dgm:txFillClrLst/>
+    <dgm:txEffectClrLst/>
+  </dgm:styleLbl>
+  <dgm:styleLbl name="asst3">
+    <dgm:fillClrLst meth="repeat">
+      <a:schemeClr val="accent2"/>
+    </dgm:fillClrLst>
+    <dgm:linClrLst meth="repeat">
+      <a:schemeClr val="lt1"/>
+    </dgm:linClrLst>
+    <dgm:effectClrLst/>
+    <dgm:txLinClrLst/>
+    <dgm:txFillClrLst/>
+    <dgm:txEffectClrLst/>
+  </dgm:styleLbl>
+  <dgm:styleLbl name="asst4">
+    <dgm:fillClrLst meth="repeat">
+      <a:schemeClr val="accent2"/>
+    </dgm:fillClrLst>
+    <dgm:linClrLst meth="repeat">
+      <a:schemeClr val="lt1"/>
+    </dgm:linClrLst>
+    <dgm:effectClrLst/>
+    <dgm:txLinClrLst/>
+    <dgm:txFillClrLst/>
+    <dgm:txEffectClrLst/>
+  </dgm:styleLbl>
+  <dgm:styleLbl name="parChTrans2D1">
+    <dgm:fillClrLst meth="repeat">
+      <a:schemeClr val="accent2">
+        <a:tint val="60000"/>
+      </a:schemeClr>
+    </dgm:fillClrLst>
+    <dgm:linClrLst meth="repeat">
+      <a:schemeClr val="accent2">
+        <a:tint val="60000"/>
+      </a:schemeClr>
+    </dgm:linClrLst>
+    <dgm:effectClrLst/>
+    <dgm:txLinClrLst/>
+    <dgm:txFillClrLst meth="repeat">
+      <a:schemeClr val="lt1"/>
+    </dgm:txFillClrLst>
+    <dgm:txEffectClrLst/>
+  </dgm:styleLbl>
+  <dgm:styleLbl name="parChTrans2D2">
+    <dgm:fillClrLst meth="repeat">
+      <a:schemeClr val="accent2"/>
+    </dgm:fillClrLst>
+    <dgm:linClrLst meth="repeat">
+      <a:schemeClr val="accent2"/>
+    </dgm:linClrLst>
+    <dgm:effectClrLst/>
+    <dgm:txLinClrLst/>
+    <dgm:txFillClrLst meth="repeat">
+      <a:schemeClr val="lt1"/>
+    </dgm:txFillClrLst>
+    <dgm:txEffectClrLst/>
+  </dgm:styleLbl>
+  <dgm:styleLbl name="parChTrans2D3">
+    <dgm:fillClrLst meth="repeat">
+      <a:schemeClr val="accent2"/>
+    </dgm:fillClrLst>
+    <dgm:linClrLst meth="repeat">
+      <a:schemeClr val="accent2"/>
+    </dgm:linClrLst>
+    <dgm:effectClrLst/>
+    <dgm:txLinClrLst/>
+    <dgm:txFillClrLst meth="repeat">
+      <a:schemeClr val="lt1"/>
+    </dgm:txFillClrLst>
+    <dgm:txEffectClrLst/>
+  </dgm:styleLbl>
+  <dgm:styleLbl name="parChTrans2D4">
+    <dgm:fillClrLst meth="repeat">
+      <a:schemeClr val="accent2"/>
+    </dgm:fillClrLst>
+    <dgm:linClrLst meth="repeat">
+      <a:schemeClr val="accent2"/>
+    </dgm:linClrLst>
+    <dgm:effectClrLst/>
+    <dgm:txLinClrLst/>
+    <dgm:txFillClrLst meth="repeat">
+      <a:schemeClr val="lt1"/>
+    </dgm:txFillClrLst>
+    <dgm:txEffectClrLst/>
+  </dgm:styleLbl>
+  <dgm:styleLbl name="parChTrans1D1">
+    <dgm:fillClrLst meth="repeat">
+      <a:schemeClr val="accent2"/>
+    </dgm:fillClrLst>
+    <dgm:linClrLst meth="repeat">
+      <a:schemeClr val="accent2">
+        <a:shade val="60000"/>
+      </a:schemeClr>
+    </dgm:linClrLst>
+    <dgm:effectClrLst/>
+    <dgm:txLinClrLst/>
+    <dgm:txFillClrLst meth="repeat">
+      <a:schemeClr val="tx1"/>
+    </dgm:txFillClrLst>
+    <dgm:txEffectClrLst/>
+  </dgm:styleLbl>
+  <dgm:styleLbl name="parChTrans1D2">
+    <dgm:fillClrLst meth="repeat">
+      <a:schemeClr val="accent2"/>
+    </dgm:fillClrLst>
+    <dgm:linClrLst meth="repeat">
+      <a:schemeClr val="accent2">
+        <a:shade val="60000"/>
+      </a:schemeClr>
+    </dgm:linClrLst>
+    <dgm:effectClrLst/>
+    <dgm:txLinClrLst/>
+    <dgm:txFillClrLst meth="repeat">
+      <a:schemeClr val="tx1"/>
+    </dgm:txFillClrLst>
+    <dgm:txEffectClrLst/>
+  </dgm:styleLbl>
+  <dgm:styleLbl name="parChTrans1D3">
+    <dgm:fillClrLst meth="repeat">
+      <a:schemeClr val="accent2"/>
+    </dgm:fillClrLst>
+    <dgm:linClrLst meth="repeat">
+      <a:schemeClr val="accent2">
+        <a:shade val="80000"/>
+      </a:schemeClr>
+    </dgm:linClrLst>
+    <dgm:effectClrLst/>
+    <dgm:txLinClrLst/>
+    <dgm:txFillClrLst meth="repeat">
+      <a:schemeClr val="tx1"/>
+    </dgm:txFillClrLst>
+    <dgm:txEffectClrLst/>
+  </dgm:styleLbl>
+  <dgm:styleLbl name="parChTrans1D4">
+    <dgm:fillClrLst meth="repeat">
+      <a:schemeClr val="accent2"/>
+    </dgm:fillClrLst>
+    <dgm:linClrLst meth="repeat">
+      <a:schemeClr val="accent2">
+        <a:shade val="80000"/>
+      </a:schemeClr>
+    </dgm:linClrLst>
+    <dgm:effectClrLst/>
+    <dgm:txLinClrLst/>
+    <dgm:txFillClrLst meth="repeat">
+      <a:schemeClr val="tx1"/>
+    </dgm:txFillClrLst>
+    <dgm:txEffectClrLst/>
+  </dgm:styleLbl>
+  <dgm:styleLbl name="fgAcc1">
+    <dgm:fillClrLst meth="repeat">
+      <a:schemeClr val="lt1">
+        <a:alpha val="90000"/>
+      </a:schemeClr>
+    </dgm:fillClrLst>
+    <dgm:linClrLst meth="repeat">
+      <a:schemeClr val="accent2"/>
+    </dgm:linClrLst>
+    <dgm:effectClrLst/>
+    <dgm:txLinClrLst/>
+    <dgm:txFillClrLst meth="repeat">
+      <a:schemeClr val="dk1"/>
+    </dgm:txFillClrLst>
+    <dgm:txEffectClrLst/>
+  </dgm:styleLbl>
+  <dgm:styleLbl name="conFgAcc1">
+    <dgm:fillClrLst meth="repeat">
+      <a:schemeClr val="lt1">
+        <a:alpha val="90000"/>
+      </a:schemeClr>
+    </dgm:fillClrLst>
+    <dgm:linClrLst meth="repeat">
+      <a:schemeClr val="accent2"/>
+    </dgm:linClrLst>
+    <dgm:effectClrLst/>
+    <dgm:txLinClrLst/>
+    <dgm:txFillClrLst meth="repeat">
+      <a:schemeClr val="dk1"/>
+    </dgm:txFillClrLst>
+    <dgm:txEffectClrLst/>
+  </dgm:styleLbl>
+  <dgm:styleLbl name="alignAcc1">
+    <dgm:fillClrLst meth="repeat">
+      <a:schemeClr val="lt1">
+        <a:alpha val="90000"/>
+      </a:schemeClr>
+    </dgm:fillClrLst>
+    <dgm:linClrLst meth="repeat">
+      <a:schemeClr val="accent2"/>
+    </dgm:linClrLst>
+    <dgm:effectClrLst/>
+    <dgm:txLinClrLst/>
+    <dgm:txFillClrLst meth="repeat">
+      <a:schemeClr val="dk1"/>
+    </dgm:txFillClrLst>
+    <dgm:txEffectClrLst/>
+  </dgm:styleLbl>
+  <dgm:styleLbl name="trAlignAcc1">
+    <dgm:fillClrLst meth="repeat">
+      <a:schemeClr val="lt1">
+        <a:alpha val="40000"/>
+      </a:schemeClr>
+    </dgm:fillClrLst>
+    <dgm:linClrLst meth="repeat">
+      <a:schemeClr val="accent2"/>
+    </dgm:linClrLst>
+    <dgm:effectClrLst/>
+    <dgm:txLinClrLst/>
+    <dgm:txFillClrLst meth="repeat">
+      <a:schemeClr val="dk1"/>
+    </dgm:txFillClrLst>
+    <dgm:txEffectClrLst/>
+  </dgm:styleLbl>
+  <dgm:styleLbl name="bgAcc1">
+    <dgm:fillClrLst meth="repeat">
+      <a:schemeClr val="lt1">
+        <a:alpha val="90000"/>
+      </a:schemeClr>
+    </dgm:fillClrLst>
+    <dgm:linClrLst meth="repeat">
+      <a:schemeClr val="accent2"/>
+    </dgm:linClrLst>
+    <dgm:effectClrLst/>
+    <dgm:txLinClrLst/>
+    <dgm:txFillClrLst meth="repeat">
+      <a:schemeClr val="dk1"/>
+    </dgm:txFillClrLst>
+    <dgm:txEffectClrLst/>
+  </dgm:styleLbl>
+  <dgm:styleLbl name="solidFgAcc1">
+    <dgm:fillClrLst meth="repeat">
+      <a:schemeClr val="lt1"/>
+    </dgm:fillClrLst>
+    <dgm:linClrLst meth="repeat">
+      <a:schemeClr val="accent2"/>
+    </dgm:linClrLst>
+    <dgm:effectClrLst/>
+    <dgm:txLinClrLst/>
+    <dgm:txFillClrLst meth="repeat">
+      <a:schemeClr val="dk1"/>
+    </dgm:txFillClrLst>
+    <dgm:txEffectClrLst/>
+  </dgm:styleLbl>
+  <dgm:styleLbl name="solidAlignAcc1">
+    <dgm:fillClrLst meth="repeat">
+      <a:schemeClr val="lt1"/>
+    </dgm:fillClrLst>
+    <dgm:linClrLst meth="repeat">
+      <a:schemeClr val="accent2"/>
+    </dgm:linClrLst>
+    <dgm:effectClrLst/>
+    <dgm:txLinClrLst/>
+    <dgm:txFillClrLst meth="repeat">
+      <a:schemeClr val="dk1"/>
+    </dgm:txFillClrLst>
+    <dgm:txEffectClrLst/>
+  </dgm:styleLbl>
+  <dgm:styleLbl name="solidBgAcc1">
+    <dgm:fillClrLst meth="repeat">
+      <a:schemeClr val="lt1"/>
+    </dgm:fillClrLst>
+    <dgm:linClrLst meth="repeat">
+      <a:schemeClr val="accent2"/>
+    </dgm:linClrLst>
+    <dgm:effectClrLst/>
+    <dgm:txLinClrLst/>
+    <dgm:txFillClrLst meth="repeat">
+      <a:schemeClr val="dk1"/>
+    </dgm:txFillClrLst>
+    <dgm:txEffectClrLst/>
+  </dgm:styleLbl>
+  <dgm:styleLbl name="fgAccFollowNode1">
+    <dgm:fillClrLst meth="repeat">
+      <a:schemeClr val="accent2">
+        <a:alpha val="90000"/>
+        <a:tint val="40000"/>
+      </a:schemeClr>
+    </dgm:fillClrLst>
+    <dgm:linClrLst meth="repeat">
+      <a:schemeClr val="accent2">
+        <a:alpha val="90000"/>
+        <a:tint val="40000"/>
+      </a:schemeClr>
+    </dgm:linClrLst>
+    <dgm:effectClrLst/>
+    <dgm:txLinClrLst/>
+    <dgm:txFillClrLst meth="repeat">
+      <a:schemeClr val="dk1"/>
+    </dgm:txFillClrLst>
+    <dgm:txEffectClrLst/>
+  </dgm:styleLbl>
+  <dgm:styleLbl name="alignAccFollowNode1">
+    <dgm:fillClrLst meth="repeat">
+      <a:schemeClr val="accent2">
+        <a:alpha val="90000"/>
+        <a:tint val="40000"/>
+      </a:schemeClr>
+    </dgm:fillClrLst>
+    <dgm:linClrLst meth="repeat">
+      <a:schemeClr val="accent2">
+        <a:alpha val="90000"/>
+        <a:tint val="40000"/>
+      </a:schemeClr>
+    </dgm:linClrLst>
+    <dgm:effectClrLst/>
+    <dgm:txLinClrLst/>
+    <dgm:txFillClrLst meth="repeat">
+      <a:schemeClr val="dk1"/>
+    </dgm:txFillClrLst>
+    <dgm:txEffectClrLst/>
+  </dgm:styleLbl>
+  <dgm:styleLbl name="bgAccFollowNode1">
+    <dgm:fillClrLst meth="repeat">
+      <a:schemeClr val="accent2">
+        <a:alpha val="90000"/>
+        <a:tint val="40000"/>
+      </a:schemeClr>
+    </dgm:fillClrLst>
+    <dgm:linClrLst meth="repeat">
+      <a:schemeClr val="accent2">
+        <a:alpha val="90000"/>
+        <a:tint val="40000"/>
+      </a:schemeClr>
+    </dgm:linClrLst>
+    <dgm:effectClrLst/>
+    <dgm:txLinClrLst/>
+    <dgm:txFillClrLst meth="repeat">
+      <a:schemeClr val="dk1"/>
+    </dgm:txFillClrLst>
+    <dgm:txEffectClrLst/>
+  </dgm:styleLbl>
+  <dgm:styleLbl name="fgAcc0">
+    <dgm:fillClrLst meth="repeat">
+      <a:schemeClr val="lt1">
+        <a:alpha val="90000"/>
+      </a:schemeClr>
+    </dgm:fillClrLst>
+    <dgm:linClrLst meth="repeat">
+      <a:schemeClr val="accent2"/>
+    </dgm:linClrLst>
+    <dgm:effectClrLst/>
+    <dgm:txLinClrLst/>
+    <dgm:txFillClrLst meth="repeat">
+      <a:schemeClr val="dk1"/>
+    </dgm:txFillClrLst>
+    <dgm:txEffectClrLst/>
+  </dgm:styleLbl>
+  <dgm:styleLbl name="fgAcc2">
+    <dgm:fillClrLst meth="repeat">
+      <a:schemeClr val="lt1">
+        <a:alpha val="90000"/>
+      </a:schemeClr>
+    </dgm:fillClrLst>
+    <dgm:linClrLst meth="repeat">
+      <a:schemeClr val="accent2"/>
+    </dgm:linClrLst>
+    <dgm:effectClrLst/>
+    <dgm:txLinClrLst/>
+    <dgm:txFillClrLst meth="repeat">
+      <a:schemeClr val="dk1"/>
+    </dgm:txFillClrLst>
+    <dgm:txEffectClrLst/>
+  </dgm:styleLbl>
+  <dgm:styleLbl name="fgAcc3">
+    <dgm:fillClrLst meth="repeat">
+      <a:schemeClr val="lt1">
+        <a:alpha val="90000"/>
+      </a:schemeClr>
+    </dgm:fillClrLst>
+    <dgm:linClrLst meth="repeat">
+      <a:schemeClr val="accent2"/>
+    </dgm:linClrLst>
+    <dgm:effectClrLst/>
+    <dgm:txLinClrLst/>
+    <dgm:txFillClrLst meth="repeat">
+      <a:schemeClr val="dk1"/>
+    </dgm:txFillClrLst>
+    <dgm:txEffectClrLst/>
+  </dgm:styleLbl>
+  <dgm:styleLbl name="fgAcc4">
+    <dgm:fillClrLst meth="repeat">
+      <a:schemeClr val="lt1">
+        <a:alpha val="90000"/>
+      </a:schemeClr>
+    </dgm:fillClrLst>
+    <dgm:linClrLst meth="repeat">
+      <a:schemeClr val="accent2"/>
+    </dgm:linClrLst>
+    <dgm:effectClrLst/>
+    <dgm:txLinClrLst/>
+    <dgm:txFillClrLst meth="repeat">
+      <a:schemeClr val="dk1"/>
+    </dgm:txFillClrLst>
+    <dgm:txEffectClrLst/>
+  </dgm:styleLbl>
+  <dgm:styleLbl name="bgShp">
+    <dgm:fillClrLst meth="repeat">
+      <a:schemeClr val="accent2">
+        <a:tint val="40000"/>
+      </a:schemeClr>
+    </dgm:fillClrLst>
+    <dgm:linClrLst meth="repeat">
+      <a:schemeClr val="accent2"/>
+    </dgm:linClrLst>
+    <dgm:effectClrLst/>
+    <dgm:txLinClrLst/>
+    <dgm:txFillClrLst meth="repeat">
+      <a:schemeClr val="dk1"/>
+    </dgm:txFillClrLst>
+    <dgm:txEffectClrLst/>
+  </dgm:styleLbl>
+  <dgm:styleLbl name="dkBgShp">
+    <dgm:fillClrLst meth="repeat">
+      <a:schemeClr val="accent2">
+        <a:shade val="80000"/>
+      </a:schemeClr>
+    </dgm:fillClrLst>
+    <dgm:linClrLst meth="repeat">
+      <a:schemeClr val="accent2"/>
+    </dgm:linClrLst>
+    <dgm:effectClrLst/>
+    <dgm:txLinClrLst/>
+    <dgm:txFillClrLst meth="repeat">
+      <a:schemeClr val="lt1"/>
+    </dgm:txFillClrLst>
+    <dgm:txEffectClrLst/>
+  </dgm:styleLbl>
+  <dgm:styleLbl name="trBgShp">
+    <dgm:fillClrLst meth="repeat">
+      <a:schemeClr val="accent2">
+        <a:tint val="50000"/>
+        <a:alpha val="40000"/>
+      </a:schemeClr>
+    </dgm:fillClrLst>
+    <dgm:linClrLst meth="repeat">
+      <a:schemeClr val="accent2"/>
+    </dgm:linClrLst>
+    <dgm:effectClrLst/>
+    <dgm:txLinClrLst/>
+    <dgm:txFillClrLst meth="repeat">
+      <a:schemeClr val="lt1"/>
+    </dgm:txFillClrLst>
+    <dgm:txEffectClrLst/>
+  </dgm:styleLbl>
+  <dgm:styleLbl name="fgShp">
+    <dgm:fillClrLst meth="repeat">
+      <a:schemeClr val="accent2">
+        <a:tint val="60000"/>
+      </a:schemeClr>
+    </dgm:fillClrLst>
+    <dgm:linClrLst meth="repeat">
+      <a:schemeClr val="lt1"/>
+    </dgm:linClrLst>
+    <dgm:effectClrLst/>
+    <dgm:txLinClrLst/>
+    <dgm:txFillClrLst meth="repeat">
+      <a:schemeClr val="dk1"/>
+    </dgm:txFillClrLst>
+    <dgm:txEffectClrLst/>
+  </dgm:styleLbl>
+  <dgm:styleLbl name="revTx">
+    <dgm:fillClrLst meth="repeat">
+      <a:schemeClr val="lt1">
+        <a:alpha val="0"/>
+      </a:schemeClr>
+    </dgm:fillClrLst>
+    <dgm:linClrLst meth="repeat">
+      <a:schemeClr val="dk1">
+        <a:alpha val="0"/>
+      </a:schemeClr>
+    </dgm:linClrLst>
+    <dgm:effectClrLst/>
+    <dgm:txLinClrLst/>
+    <dgm:txFillClrLst meth="repeat">
+      <a:schemeClr val="tx1"/>
+    </dgm:txFillClrLst>
+    <dgm:txEffectClrLst/>
+  </dgm:styleLbl>
+</dgm:colorsDef>
+</file>
+
+<file path=ppt/diagrams/data1.xml><?xml version="1.0" encoding="utf-8"?>
+<dgm:dataModel xmlns:dgm="http://schemas.openxmlformats.org/drawingml/2006/diagram" xmlns:a="http://schemas.openxmlformats.org/drawingml/2006/main">
+  <dgm:ptLst>
+    <dgm:pt modelId="{0A6134B5-4CC2-4B7A-BAD4-ADF5C3BEAB84}" type="doc">
+      <dgm:prSet loTypeId="urn:microsoft.com/office/officeart/2005/8/layout/hierarchy1" loCatId="hierarchy" qsTypeId="urn:microsoft.com/office/officeart/2005/8/quickstyle/simple1#1" qsCatId="simple" csTypeId="urn:microsoft.com/office/officeart/2005/8/colors/accent2_2#1" csCatId="accent2"/>
+      <dgm:spPr/>
+      <dgm:t>
+        <a:bodyPr/>
+        <a:lstStyle/>
+        <a:p>
+          <a:endParaRPr lang="en-US"/>
+        </a:p>
+      </dgm:t>
+    </dgm:pt>
+    <dgm:pt modelId="{3BAB8303-5DD2-4E41-B528-66E84AC0361B}">
+      <dgm:prSet/>
+      <dgm:spPr/>
+      <dgm:t>
+        <a:bodyPr/>
+        <a:lstStyle/>
+        <a:p>
+          <a:r>
+            <a:rPr lang="en-US"/>
+            <a:t>mobile app</a:t>
+          </a:r>
+        </a:p>
+      </dgm:t>
+    </dgm:pt>
+    <dgm:pt modelId="{D00F3405-110A-450C-BDCF-7B3DB254D8AA}" type="parTrans" cxnId="{F0EDC11F-DFD4-49EF-8291-486B5025978B}">
+      <dgm:prSet/>
+      <dgm:spPr/>
+      <dgm:t>
+        <a:bodyPr/>
+        <a:lstStyle/>
+        <a:p>
+          <a:endParaRPr lang="en-US"/>
+        </a:p>
+      </dgm:t>
+    </dgm:pt>
+    <dgm:pt modelId="{A3F2139A-0216-4D45-AE29-6B6FA8CA9203}" type="sibTrans" cxnId="{F0EDC11F-DFD4-49EF-8291-486B5025978B}">
+      <dgm:prSet/>
+      <dgm:spPr/>
+      <dgm:t>
+        <a:bodyPr/>
+        <a:lstStyle/>
+        <a:p>
+          <a:endParaRPr lang="en-US"/>
+        </a:p>
+      </dgm:t>
+    </dgm:pt>
+    <dgm:pt modelId="{DB0C4415-FD09-476C-94FF-664CC3568112}">
+      <dgm:prSet/>
+      <dgm:spPr/>
+      <dgm:t>
+        <a:bodyPr/>
+        <a:lstStyle/>
+        <a:p>
+          <a:r>
+            <a:rPr lang="en-US"/>
+            <a:t>gezichtsherkenning</a:t>
+          </a:r>
+        </a:p>
+      </dgm:t>
+    </dgm:pt>
+    <dgm:pt modelId="{23D87EB9-9F01-4DE0-8653-2150FFD9C5CD}" type="parTrans" cxnId="{15108143-7248-4F1C-9EE3-F036572A73E9}">
+      <dgm:prSet/>
+      <dgm:spPr/>
+      <dgm:t>
+        <a:bodyPr/>
+        <a:lstStyle/>
+        <a:p>
+          <a:endParaRPr lang="en-US"/>
+        </a:p>
+      </dgm:t>
+    </dgm:pt>
+    <dgm:pt modelId="{1BC9DB88-96CE-4C6C-A5FB-B687D3C7CEF9}" type="sibTrans" cxnId="{15108143-7248-4F1C-9EE3-F036572A73E9}">
+      <dgm:prSet/>
+      <dgm:spPr/>
+      <dgm:t>
+        <a:bodyPr/>
+        <a:lstStyle/>
+        <a:p>
+          <a:endParaRPr lang="en-US"/>
+        </a:p>
+      </dgm:t>
+    </dgm:pt>
+    <dgm:pt modelId="{26E42511-0BF2-44B6-85AE-827D18546B37}">
+      <dgm:prSet/>
+      <dgm:spPr/>
+      <dgm:t>
+        <a:bodyPr/>
+        <a:lstStyle/>
+        <a:p>
+          <a:r>
+            <a:rPr lang="en-US"/>
+            <a:t>objectherkenning</a:t>
+          </a:r>
+        </a:p>
+      </dgm:t>
+    </dgm:pt>
+    <dgm:pt modelId="{B2380473-F120-4616-9405-821BC510D38E}" type="parTrans" cxnId="{2282E2FB-B4EC-42F0-8F73-742D10E71165}">
+      <dgm:prSet/>
+      <dgm:spPr/>
+      <dgm:t>
+        <a:bodyPr/>
+        <a:lstStyle/>
+        <a:p>
+          <a:endParaRPr lang="en-US"/>
+        </a:p>
+      </dgm:t>
+    </dgm:pt>
+    <dgm:pt modelId="{0E187D25-3E9B-4262-BF52-019D4ADC532B}" type="sibTrans" cxnId="{2282E2FB-B4EC-42F0-8F73-742D10E71165}">
+      <dgm:prSet/>
+      <dgm:spPr/>
+      <dgm:t>
+        <a:bodyPr/>
+        <a:lstStyle/>
+        <a:p>
+          <a:endParaRPr lang="en-US"/>
+        </a:p>
+      </dgm:t>
+    </dgm:pt>
+    <dgm:pt modelId="{6F3487D7-329F-4DE8-AD4D-10CC755C4111}">
+      <dgm:prSet/>
+      <dgm:spPr/>
+      <dgm:t>
+        <a:bodyPr/>
+        <a:lstStyle/>
+        <a:p>
+          <a:r>
+            <a:rPr lang="en-US"/>
+            <a:t>speech to text</a:t>
+          </a:r>
+        </a:p>
+      </dgm:t>
+    </dgm:pt>
+    <dgm:pt modelId="{46E6E6EF-BB78-4224-A960-7623709655E5}" type="parTrans" cxnId="{F628742A-3E5B-4895-BF81-A19347C45FF6}">
+      <dgm:prSet/>
+      <dgm:spPr/>
+      <dgm:t>
+        <a:bodyPr/>
+        <a:lstStyle/>
+        <a:p>
+          <a:endParaRPr lang="en-US"/>
+        </a:p>
+      </dgm:t>
+    </dgm:pt>
+    <dgm:pt modelId="{F3F9E80F-D15A-4366-862E-E4A8BE29243C}" type="sibTrans" cxnId="{F628742A-3E5B-4895-BF81-A19347C45FF6}">
+      <dgm:prSet/>
+      <dgm:spPr/>
+      <dgm:t>
+        <a:bodyPr/>
+        <a:lstStyle/>
+        <a:p>
+          <a:endParaRPr lang="en-US"/>
+        </a:p>
+      </dgm:t>
+    </dgm:pt>
+    <dgm:pt modelId="{1E84847B-471E-4F80-BC6D-3BD445B906C6}" type="pres">
+      <dgm:prSet presAssocID="{0A6134B5-4CC2-4B7A-BAD4-ADF5C3BEAB84}" presName="hierChild1" presStyleCnt="0">
+        <dgm:presLayoutVars>
+          <dgm:chPref val="1"/>
+          <dgm:dir/>
+          <dgm:animOne val="branch"/>
+          <dgm:animLvl val="lvl"/>
+          <dgm:resizeHandles/>
+        </dgm:presLayoutVars>
+      </dgm:prSet>
+      <dgm:spPr/>
+    </dgm:pt>
+    <dgm:pt modelId="{E952A2F7-E160-4D4F-B628-7D863ADC9995}" type="pres">
+      <dgm:prSet presAssocID="{3BAB8303-5DD2-4E41-B528-66E84AC0361B}" presName="hierRoot1" presStyleCnt="0"/>
+      <dgm:spPr/>
+    </dgm:pt>
+    <dgm:pt modelId="{30CC51DB-B1D3-414F-A5BB-E07567444A95}" type="pres">
+      <dgm:prSet presAssocID="{3BAB8303-5DD2-4E41-B528-66E84AC0361B}" presName="composite" presStyleCnt="0"/>
+      <dgm:spPr/>
+    </dgm:pt>
+    <dgm:pt modelId="{C504FDCD-748B-40DB-B109-B00F55BC541D}" type="pres">
+      <dgm:prSet presAssocID="{3BAB8303-5DD2-4E41-B528-66E84AC0361B}" presName="background" presStyleLbl="node0" presStyleIdx="0" presStyleCnt="4"/>
+      <dgm:spPr/>
+    </dgm:pt>
+    <dgm:pt modelId="{89FC8D94-751C-4213-B35D-3D2A0D7EA40B}" type="pres">
+      <dgm:prSet presAssocID="{3BAB8303-5DD2-4E41-B528-66E84AC0361B}" presName="text" presStyleLbl="fgAcc0" presStyleIdx="0" presStyleCnt="4">
+        <dgm:presLayoutVars>
+          <dgm:chPref val="3"/>
+        </dgm:presLayoutVars>
+      </dgm:prSet>
+      <dgm:spPr/>
+    </dgm:pt>
+    <dgm:pt modelId="{BFA0F3A6-7029-4640-826D-EFD784AFD732}" type="pres">
+      <dgm:prSet presAssocID="{3BAB8303-5DD2-4E41-B528-66E84AC0361B}" presName="hierChild2" presStyleCnt="0"/>
+      <dgm:spPr/>
+    </dgm:pt>
+    <dgm:pt modelId="{6B9F376D-75EA-4C5E-A96E-34EA0764ED15}" type="pres">
+      <dgm:prSet presAssocID="{DB0C4415-FD09-476C-94FF-664CC3568112}" presName="hierRoot1" presStyleCnt="0"/>
+      <dgm:spPr/>
+    </dgm:pt>
+    <dgm:pt modelId="{022AF6F9-A3B0-4084-9C1C-2E102D129452}" type="pres">
+      <dgm:prSet presAssocID="{DB0C4415-FD09-476C-94FF-664CC3568112}" presName="composite" presStyleCnt="0"/>
+      <dgm:spPr/>
+    </dgm:pt>
+    <dgm:pt modelId="{2AEF96B5-AC16-4A94-8ABA-32FD9280FBE0}" type="pres">
+      <dgm:prSet presAssocID="{DB0C4415-FD09-476C-94FF-664CC3568112}" presName="background" presStyleLbl="node0" presStyleIdx="1" presStyleCnt="4"/>
+      <dgm:spPr/>
+    </dgm:pt>
+    <dgm:pt modelId="{C89EB3FB-2485-43F3-810A-B5D1C06110AC}" type="pres">
+      <dgm:prSet presAssocID="{DB0C4415-FD09-476C-94FF-664CC3568112}" presName="text" presStyleLbl="fgAcc0" presStyleIdx="1" presStyleCnt="4">
+        <dgm:presLayoutVars>
+          <dgm:chPref val="3"/>
+        </dgm:presLayoutVars>
+      </dgm:prSet>
+      <dgm:spPr/>
+    </dgm:pt>
+    <dgm:pt modelId="{8C6EEA75-9676-4F73-830E-9F7A468245A4}" type="pres">
+      <dgm:prSet presAssocID="{DB0C4415-FD09-476C-94FF-664CC3568112}" presName="hierChild2" presStyleCnt="0"/>
+      <dgm:spPr/>
+    </dgm:pt>
+    <dgm:pt modelId="{C7E2D723-E18D-4E13-9928-5AEA8C8FAAE1}" type="pres">
+      <dgm:prSet presAssocID="{26E42511-0BF2-44B6-85AE-827D18546B37}" presName="hierRoot1" presStyleCnt="0"/>
+      <dgm:spPr/>
+    </dgm:pt>
+    <dgm:pt modelId="{B9E7B42B-C1BD-469B-8459-E69DDB6C615B}" type="pres">
+      <dgm:prSet presAssocID="{26E42511-0BF2-44B6-85AE-827D18546B37}" presName="composite" presStyleCnt="0"/>
+      <dgm:spPr/>
+    </dgm:pt>
+    <dgm:pt modelId="{9CEEB952-0EF3-4D78-A339-DFB498CEF9FE}" type="pres">
+      <dgm:prSet presAssocID="{26E42511-0BF2-44B6-85AE-827D18546B37}" presName="background" presStyleLbl="node0" presStyleIdx="2" presStyleCnt="4"/>
+      <dgm:spPr/>
+    </dgm:pt>
+    <dgm:pt modelId="{BDC69640-85AF-4298-80EC-264C8859FDFF}" type="pres">
+      <dgm:prSet presAssocID="{26E42511-0BF2-44B6-85AE-827D18546B37}" presName="text" presStyleLbl="fgAcc0" presStyleIdx="2" presStyleCnt="4">
+        <dgm:presLayoutVars>
+          <dgm:chPref val="3"/>
+        </dgm:presLayoutVars>
+      </dgm:prSet>
+      <dgm:spPr/>
+    </dgm:pt>
+    <dgm:pt modelId="{0E2C03E5-C2A5-439A-BB4C-D2EF3F1F7837}" type="pres">
+      <dgm:prSet presAssocID="{26E42511-0BF2-44B6-85AE-827D18546B37}" presName="hierChild2" presStyleCnt="0"/>
+      <dgm:spPr/>
+    </dgm:pt>
+    <dgm:pt modelId="{0D49697D-A0AE-4BC9-9969-00FFC34AA641}" type="pres">
+      <dgm:prSet presAssocID="{6F3487D7-329F-4DE8-AD4D-10CC755C4111}" presName="hierRoot1" presStyleCnt="0"/>
+      <dgm:spPr/>
+    </dgm:pt>
+    <dgm:pt modelId="{B69AF8EC-C17C-458F-BFDB-4ED315E03B33}" type="pres">
+      <dgm:prSet presAssocID="{6F3487D7-329F-4DE8-AD4D-10CC755C4111}" presName="composite" presStyleCnt="0"/>
+      <dgm:spPr/>
+    </dgm:pt>
+    <dgm:pt modelId="{051BB21D-78DA-4927-B8DD-8B4277522203}" type="pres">
+      <dgm:prSet presAssocID="{6F3487D7-329F-4DE8-AD4D-10CC755C4111}" presName="background" presStyleLbl="node0" presStyleIdx="3" presStyleCnt="4"/>
+      <dgm:spPr/>
+    </dgm:pt>
+    <dgm:pt modelId="{71D84B76-B432-4274-B2F3-59FF16E6512E}" type="pres">
+      <dgm:prSet presAssocID="{6F3487D7-329F-4DE8-AD4D-10CC755C4111}" presName="text" presStyleLbl="fgAcc0" presStyleIdx="3" presStyleCnt="4">
+        <dgm:presLayoutVars>
+          <dgm:chPref val="3"/>
+        </dgm:presLayoutVars>
+      </dgm:prSet>
+      <dgm:spPr/>
+    </dgm:pt>
+    <dgm:pt modelId="{C8F6FCE7-18E3-4729-97C3-9D4140EB5F4B}" type="pres">
+      <dgm:prSet presAssocID="{6F3487D7-329F-4DE8-AD4D-10CC755C4111}" presName="hierChild2" presStyleCnt="0"/>
+      <dgm:spPr/>
+    </dgm:pt>
+  </dgm:ptLst>
+  <dgm:cxnLst>
+    <dgm:cxn modelId="{D5A26504-DF0E-4C72-A545-5C9165B1DCF1}" type="presOf" srcId="{DB0C4415-FD09-476C-94FF-664CC3568112}" destId="{C89EB3FB-2485-43F3-810A-B5D1C06110AC}" srcOrd="0" destOrd="0" presId="urn:microsoft.com/office/officeart/2005/8/layout/hierarchy1"/>
+    <dgm:cxn modelId="{F3A67313-EFC4-42B9-B04D-A6CEED890D84}" type="presOf" srcId="{6F3487D7-329F-4DE8-AD4D-10CC755C4111}" destId="{71D84B76-B432-4274-B2F3-59FF16E6512E}" srcOrd="0" destOrd="0" presId="urn:microsoft.com/office/officeart/2005/8/layout/hierarchy1"/>
+    <dgm:cxn modelId="{F0EDC11F-DFD4-49EF-8291-486B5025978B}" srcId="{0A6134B5-4CC2-4B7A-BAD4-ADF5C3BEAB84}" destId="{3BAB8303-5DD2-4E41-B528-66E84AC0361B}" srcOrd="0" destOrd="0" parTransId="{D00F3405-110A-450C-BDCF-7B3DB254D8AA}" sibTransId="{A3F2139A-0216-4D45-AE29-6B6FA8CA9203}"/>
+    <dgm:cxn modelId="{F628742A-3E5B-4895-BF81-A19347C45FF6}" srcId="{0A6134B5-4CC2-4B7A-BAD4-ADF5C3BEAB84}" destId="{6F3487D7-329F-4DE8-AD4D-10CC755C4111}" srcOrd="3" destOrd="0" parTransId="{46E6E6EF-BB78-4224-A960-7623709655E5}" sibTransId="{F3F9E80F-D15A-4366-862E-E4A8BE29243C}"/>
+    <dgm:cxn modelId="{15108143-7248-4F1C-9EE3-F036572A73E9}" srcId="{0A6134B5-4CC2-4B7A-BAD4-ADF5C3BEAB84}" destId="{DB0C4415-FD09-476C-94FF-664CC3568112}" srcOrd="1" destOrd="0" parTransId="{23D87EB9-9F01-4DE0-8653-2150FFD9C5CD}" sibTransId="{1BC9DB88-96CE-4C6C-A5FB-B687D3C7CEF9}"/>
+    <dgm:cxn modelId="{90AC4949-F766-4B2D-B90A-6FC691043414}" type="presOf" srcId="{0A6134B5-4CC2-4B7A-BAD4-ADF5C3BEAB84}" destId="{1E84847B-471E-4F80-BC6D-3BD445B906C6}" srcOrd="0" destOrd="0" presId="urn:microsoft.com/office/officeart/2005/8/layout/hierarchy1"/>
+    <dgm:cxn modelId="{F8539869-A934-4921-B7BD-90F78D96D3B9}" type="presOf" srcId="{3BAB8303-5DD2-4E41-B528-66E84AC0361B}" destId="{89FC8D94-751C-4213-B35D-3D2A0D7EA40B}" srcOrd="0" destOrd="0" presId="urn:microsoft.com/office/officeart/2005/8/layout/hierarchy1"/>
+    <dgm:cxn modelId="{AD50FF5A-55EE-4768-9A53-D197F82534EB}" type="presOf" srcId="{26E42511-0BF2-44B6-85AE-827D18546B37}" destId="{BDC69640-85AF-4298-80EC-264C8859FDFF}" srcOrd="0" destOrd="0" presId="urn:microsoft.com/office/officeart/2005/8/layout/hierarchy1"/>
+    <dgm:cxn modelId="{2282E2FB-B4EC-42F0-8F73-742D10E71165}" srcId="{0A6134B5-4CC2-4B7A-BAD4-ADF5C3BEAB84}" destId="{26E42511-0BF2-44B6-85AE-827D18546B37}" srcOrd="2" destOrd="0" parTransId="{B2380473-F120-4616-9405-821BC510D38E}" sibTransId="{0E187D25-3E9B-4262-BF52-019D4ADC532B}"/>
+    <dgm:cxn modelId="{D8EE7252-1F4D-4909-B42A-DB09A6A2D91C}" type="presParOf" srcId="{1E84847B-471E-4F80-BC6D-3BD445B906C6}" destId="{E952A2F7-E160-4D4F-B628-7D863ADC9995}" srcOrd="0" destOrd="0" presId="urn:microsoft.com/office/officeart/2005/8/layout/hierarchy1"/>
+    <dgm:cxn modelId="{D1EE35CC-B1D4-45A9-9CD0-D2D23B12E035}" type="presParOf" srcId="{E952A2F7-E160-4D4F-B628-7D863ADC9995}" destId="{30CC51DB-B1D3-414F-A5BB-E07567444A95}" srcOrd="0" destOrd="0" presId="urn:microsoft.com/office/officeart/2005/8/layout/hierarchy1"/>
+    <dgm:cxn modelId="{617D12E1-1CFE-43C7-92AD-808052B430F3}" type="presParOf" srcId="{30CC51DB-B1D3-414F-A5BB-E07567444A95}" destId="{C504FDCD-748B-40DB-B109-B00F55BC541D}" srcOrd="0" destOrd="0" presId="urn:microsoft.com/office/officeart/2005/8/layout/hierarchy1"/>
+    <dgm:cxn modelId="{70CE28FA-B23E-45E0-B9E6-2B4542A1668B}" type="presParOf" srcId="{30CC51DB-B1D3-414F-A5BB-E07567444A95}" destId="{89FC8D94-751C-4213-B35D-3D2A0D7EA40B}" srcOrd="1" destOrd="0" presId="urn:microsoft.com/office/officeart/2005/8/layout/hierarchy1"/>
+    <dgm:cxn modelId="{EB65B3CD-9924-4909-9D0D-5B8E472BD95F}" type="presParOf" srcId="{E952A2F7-E160-4D4F-B628-7D863ADC9995}" destId="{BFA0F3A6-7029-4640-826D-EFD784AFD732}" srcOrd="1" destOrd="0" presId="urn:microsoft.com/office/officeart/2005/8/layout/hierarchy1"/>
+    <dgm:cxn modelId="{CBADD60B-544E-4C5E-91B9-567AA8D205EC}" type="presParOf" srcId="{1E84847B-471E-4F80-BC6D-3BD445B906C6}" destId="{6B9F376D-75EA-4C5E-A96E-34EA0764ED15}" srcOrd="1" destOrd="0" presId="urn:microsoft.com/office/officeart/2005/8/layout/hierarchy1"/>
+    <dgm:cxn modelId="{A4709C9D-B7AE-4CCC-9153-949CF9F446C3}" type="presParOf" srcId="{6B9F376D-75EA-4C5E-A96E-34EA0764ED15}" destId="{022AF6F9-A3B0-4084-9C1C-2E102D129452}" srcOrd="0" destOrd="0" presId="urn:microsoft.com/office/officeart/2005/8/layout/hierarchy1"/>
+    <dgm:cxn modelId="{039F05D5-BEEB-4DAD-975F-1C91A0CBEF40}" type="presParOf" srcId="{022AF6F9-A3B0-4084-9C1C-2E102D129452}" destId="{2AEF96B5-AC16-4A94-8ABA-32FD9280FBE0}" srcOrd="0" destOrd="0" presId="urn:microsoft.com/office/officeart/2005/8/layout/hierarchy1"/>
+    <dgm:cxn modelId="{40F1FDBB-4A06-47FE-9C61-2481921C7221}" type="presParOf" srcId="{022AF6F9-A3B0-4084-9C1C-2E102D129452}" destId="{C89EB3FB-2485-43F3-810A-B5D1C06110AC}" srcOrd="1" destOrd="0" presId="urn:microsoft.com/office/officeart/2005/8/layout/hierarchy1"/>
+    <dgm:cxn modelId="{DB6281EF-0B21-4544-96DF-01108F4810AA}" type="presParOf" srcId="{6B9F376D-75EA-4C5E-A96E-34EA0764ED15}" destId="{8C6EEA75-9676-4F73-830E-9F7A468245A4}" srcOrd="1" destOrd="0" presId="urn:microsoft.com/office/officeart/2005/8/layout/hierarchy1"/>
+    <dgm:cxn modelId="{60BB6590-5E14-4B85-A6BB-DF8D62AA402D}" type="presParOf" srcId="{1E84847B-471E-4F80-BC6D-3BD445B906C6}" destId="{C7E2D723-E18D-4E13-9928-5AEA8C8FAAE1}" srcOrd="2" destOrd="0" presId="urn:microsoft.com/office/officeart/2005/8/layout/hierarchy1"/>
+    <dgm:cxn modelId="{47CCA24C-F6EE-4BEB-A2BC-ED6C0B371DA5}" type="presParOf" srcId="{C7E2D723-E18D-4E13-9928-5AEA8C8FAAE1}" destId="{B9E7B42B-C1BD-469B-8459-E69DDB6C615B}" srcOrd="0" destOrd="0" presId="urn:microsoft.com/office/officeart/2005/8/layout/hierarchy1"/>
+    <dgm:cxn modelId="{995767D8-ED0A-4E9F-BAAE-CAD8B756A0C5}" type="presParOf" srcId="{B9E7B42B-C1BD-469B-8459-E69DDB6C615B}" destId="{9CEEB952-0EF3-4D78-A339-DFB498CEF9FE}" srcOrd="0" destOrd="0" presId="urn:microsoft.com/office/officeart/2005/8/layout/hierarchy1"/>
+    <dgm:cxn modelId="{D34B47F8-87DB-4DAE-BBC8-5E19298CA61F}" type="presParOf" srcId="{B9E7B42B-C1BD-469B-8459-E69DDB6C615B}" destId="{BDC69640-85AF-4298-80EC-264C8859FDFF}" srcOrd="1" destOrd="0" presId="urn:microsoft.com/office/officeart/2005/8/layout/hierarchy1"/>
+    <dgm:cxn modelId="{92A884CD-2A0E-4FED-8413-8D0A29805510}" type="presParOf" srcId="{C7E2D723-E18D-4E13-9928-5AEA8C8FAAE1}" destId="{0E2C03E5-C2A5-439A-BB4C-D2EF3F1F7837}" srcOrd="1" destOrd="0" presId="urn:microsoft.com/office/officeart/2005/8/layout/hierarchy1"/>
+    <dgm:cxn modelId="{3A6093B2-D1A0-46EC-9835-082F056BE4C8}" type="presParOf" srcId="{1E84847B-471E-4F80-BC6D-3BD445B906C6}" destId="{0D49697D-A0AE-4BC9-9969-00FFC34AA641}" srcOrd="3" destOrd="0" presId="urn:microsoft.com/office/officeart/2005/8/layout/hierarchy1"/>
+    <dgm:cxn modelId="{25C29041-9286-4358-BD85-1733310C4104}" type="presParOf" srcId="{0D49697D-A0AE-4BC9-9969-00FFC34AA641}" destId="{B69AF8EC-C17C-458F-BFDB-4ED315E03B33}" srcOrd="0" destOrd="0" presId="urn:microsoft.com/office/officeart/2005/8/layout/hierarchy1"/>
+    <dgm:cxn modelId="{471E9853-8041-49FA-B072-73CB666A62B9}" type="presParOf" srcId="{B69AF8EC-C17C-458F-BFDB-4ED315E03B33}" destId="{051BB21D-78DA-4927-B8DD-8B4277522203}" srcOrd="0" destOrd="0" presId="urn:microsoft.com/office/officeart/2005/8/layout/hierarchy1"/>
+    <dgm:cxn modelId="{54D5A18B-E0DA-489C-BE4F-284F8DE4B53D}" type="presParOf" srcId="{B69AF8EC-C17C-458F-BFDB-4ED315E03B33}" destId="{71D84B76-B432-4274-B2F3-59FF16E6512E}" srcOrd="1" destOrd="0" presId="urn:microsoft.com/office/officeart/2005/8/layout/hierarchy1"/>
+    <dgm:cxn modelId="{BC7998C1-D7DA-4070-B808-95ACC52737D7}" type="presParOf" srcId="{0D49697D-A0AE-4BC9-9969-00FFC34AA641}" destId="{C8F6FCE7-18E3-4729-97C3-9D4140EB5F4B}" srcOrd="1" destOrd="0" presId="urn:microsoft.com/office/officeart/2005/8/layout/hierarchy1"/>
+  </dgm:cxnLst>
+  <dgm:bg/>
+  <dgm:whole/>
+  <dgm:extLst>
+    <a:ext uri="http://schemas.microsoft.com/office/drawing/2008/diagram">
+      <dsp:dataModelExt xmlns:dsp="http://schemas.microsoft.com/office/drawing/2008/diagram" relId="rId6" minVer="http://schemas.openxmlformats.org/drawingml/2006/diagram"/>
+    </a:ext>
+  </dgm:extLst>
+</dgm:dataModel>
+</file>
+
+<file path=ppt/diagrams/drawing1.xml><?xml version="1.0" encoding="utf-8"?>
+<dsp:drawing xmlns:dgm="http://schemas.openxmlformats.org/drawingml/2006/diagram" xmlns:dsp="http://schemas.microsoft.com/office/drawing/2008/diagram" xmlns:a="http://schemas.openxmlformats.org/drawingml/2006/main">
+  <dsp:spTree>
+    <dsp:nvGrpSpPr>
+      <dsp:cNvPr id="0" name=""/>
+      <dsp:cNvGrpSpPr/>
+    </dsp:nvGrpSpPr>
+    <dsp:grpSpPr/>
+    <dsp:sp modelId="{C504FDCD-748B-40DB-B109-B00F55BC541D}">
+      <dsp:nvSpPr>
+        <dsp:cNvPr id="0" name=""/>
+        <dsp:cNvSpPr/>
+      </dsp:nvSpPr>
+      <dsp:spPr>
+        <a:xfrm>
+          <a:off x="2522" y="2445302"/>
+          <a:ext cx="1801257" cy="1143798"/>
+        </a:xfrm>
+        <a:prstGeom prst="roundRect">
+          <a:avLst>
+            <a:gd name="adj" fmla="val 10000"/>
+          </a:avLst>
+        </a:prstGeom>
+        <a:solidFill>
+          <a:schemeClr val="accent2">
+            <a:hueOff val="0"/>
+            <a:satOff val="0"/>
+            <a:lumOff val="0"/>
+            <a:alphaOff val="0"/>
+          </a:schemeClr>
+        </a:solidFill>
+        <a:ln w="12700" cap="flat" cmpd="sng" algn="ctr">
+          <a:solidFill>
+            <a:schemeClr val="lt1">
+              <a:hueOff val="0"/>
+              <a:satOff val="0"/>
+              <a:lumOff val="0"/>
+              <a:alphaOff val="0"/>
+            </a:schemeClr>
+          </a:solidFill>
+          <a:prstDash val="solid"/>
+          <a:miter lim="800000"/>
+        </a:ln>
+        <a:effectLst/>
+      </dsp:spPr>
+      <dsp:style>
+        <a:lnRef idx="2">
+          <a:scrgbClr r="0" g="0" b="0"/>
+        </a:lnRef>
+        <a:fillRef idx="1">
+          <a:scrgbClr r="0" g="0" b="0"/>
+        </a:fillRef>
+        <a:effectRef idx="0">
+          <a:scrgbClr r="0" g="0" b="0"/>
+        </a:effectRef>
+        <a:fontRef idx="minor">
+          <a:schemeClr val="lt1"/>
+        </a:fontRef>
+      </dsp:style>
+    </dsp:sp>
+    <dsp:sp modelId="{89FC8D94-751C-4213-B35D-3D2A0D7EA40B}">
+      <dsp:nvSpPr>
+        <dsp:cNvPr id="0" name=""/>
+        <dsp:cNvSpPr/>
+      </dsp:nvSpPr>
+      <dsp:spPr>
+        <a:xfrm>
+          <a:off x="202662" y="2635435"/>
+          <a:ext cx="1801257" cy="1143798"/>
+        </a:xfrm>
+        <a:prstGeom prst="roundRect">
+          <a:avLst>
+            <a:gd name="adj" fmla="val 10000"/>
+          </a:avLst>
+        </a:prstGeom>
+        <a:solidFill>
+          <a:schemeClr val="lt1">
+            <a:alpha val="90000"/>
+            <a:hueOff val="0"/>
+            <a:satOff val="0"/>
+            <a:lumOff val="0"/>
+            <a:alphaOff val="0"/>
+          </a:schemeClr>
+        </a:solidFill>
+        <a:ln w="12700" cap="flat" cmpd="sng" algn="ctr">
+          <a:solidFill>
+            <a:schemeClr val="accent2">
+              <a:hueOff val="0"/>
+              <a:satOff val="0"/>
+              <a:lumOff val="0"/>
+              <a:alphaOff val="0"/>
+            </a:schemeClr>
+          </a:solidFill>
+          <a:prstDash val="solid"/>
+          <a:miter lim="800000"/>
+        </a:ln>
+        <a:effectLst/>
+      </dsp:spPr>
+      <dsp:style>
+        <a:lnRef idx="2">
+          <a:scrgbClr r="0" g="0" b="0"/>
+        </a:lnRef>
+        <a:fillRef idx="1">
+          <a:scrgbClr r="0" g="0" b="0"/>
+        </a:fillRef>
+        <a:effectRef idx="0">
+          <a:scrgbClr r="0" g="0" b="0"/>
+        </a:effectRef>
+        <a:fontRef idx="minor"/>
+      </dsp:style>
+      <dsp:txBody>
+        <a:bodyPr spcFirstLastPara="0" vert="horz" wrap="square" lIns="53340" tIns="53340" rIns="53340" bIns="53340" numCol="1" spcCol="1270" anchor="ctr" anchorCtr="0">
+          <a:noAutofit/>
+        </a:bodyPr>
+        <a:lstStyle/>
+        <a:p>
+          <a:pPr marL="0" lvl="0" indent="0" algn="ctr" defTabSz="622300">
+            <a:lnSpc>
+              <a:spcPct val="90000"/>
+            </a:lnSpc>
+            <a:spcBef>
+              <a:spcPct val="0"/>
+            </a:spcBef>
+            <a:spcAft>
+              <a:spcPct val="35000"/>
+            </a:spcAft>
+            <a:buNone/>
+          </a:pPr>
+          <a:r>
+            <a:rPr lang="en-US" sz="1400" kern="1200"/>
+            <a:t>mobile app</a:t>
+          </a:r>
+        </a:p>
+      </dsp:txBody>
+      <dsp:txXfrm>
+        <a:off x="236163" y="2668936"/>
+        <a:ext cx="1734255" cy="1076796"/>
+      </dsp:txXfrm>
+    </dsp:sp>
+    <dsp:sp modelId="{2AEF96B5-AC16-4A94-8ABA-32FD9280FBE0}">
+      <dsp:nvSpPr>
+        <dsp:cNvPr id="0" name=""/>
+        <dsp:cNvSpPr/>
+      </dsp:nvSpPr>
+      <dsp:spPr>
+        <a:xfrm>
+          <a:off x="2204059" y="2445302"/>
+          <a:ext cx="1801257" cy="1143798"/>
+        </a:xfrm>
+        <a:prstGeom prst="roundRect">
+          <a:avLst>
+            <a:gd name="adj" fmla="val 10000"/>
+          </a:avLst>
+        </a:prstGeom>
+        <a:solidFill>
+          <a:schemeClr val="accent2">
+            <a:hueOff val="0"/>
+            <a:satOff val="0"/>
+            <a:lumOff val="0"/>
+            <a:alphaOff val="0"/>
+          </a:schemeClr>
+        </a:solidFill>
+        <a:ln w="12700" cap="flat" cmpd="sng" algn="ctr">
+          <a:solidFill>
+            <a:schemeClr val="lt1">
+              <a:hueOff val="0"/>
+              <a:satOff val="0"/>
+              <a:lumOff val="0"/>
+              <a:alphaOff val="0"/>
+            </a:schemeClr>
+          </a:solidFill>
+          <a:prstDash val="solid"/>
+          <a:miter lim="800000"/>
+        </a:ln>
+        <a:effectLst/>
+      </dsp:spPr>
+      <dsp:style>
+        <a:lnRef idx="2">
+          <a:scrgbClr r="0" g="0" b="0"/>
+        </a:lnRef>
+        <a:fillRef idx="1">
+          <a:scrgbClr r="0" g="0" b="0"/>
+        </a:fillRef>
+        <a:effectRef idx="0">
+          <a:scrgbClr r="0" g="0" b="0"/>
+        </a:effectRef>
+        <a:fontRef idx="minor">
+          <a:schemeClr val="lt1"/>
+        </a:fontRef>
+      </dsp:style>
+    </dsp:sp>
+    <dsp:sp modelId="{C89EB3FB-2485-43F3-810A-B5D1C06110AC}">
+      <dsp:nvSpPr>
+        <dsp:cNvPr id="0" name=""/>
+        <dsp:cNvSpPr/>
+      </dsp:nvSpPr>
+      <dsp:spPr>
+        <a:xfrm>
+          <a:off x="2404199" y="2635435"/>
+          <a:ext cx="1801257" cy="1143798"/>
+        </a:xfrm>
+        <a:prstGeom prst="roundRect">
+          <a:avLst>
+            <a:gd name="adj" fmla="val 10000"/>
+          </a:avLst>
+        </a:prstGeom>
+        <a:solidFill>
+          <a:schemeClr val="lt1">
+            <a:alpha val="90000"/>
+            <a:hueOff val="0"/>
+            <a:satOff val="0"/>
+            <a:lumOff val="0"/>
+            <a:alphaOff val="0"/>
+          </a:schemeClr>
+        </a:solidFill>
+        <a:ln w="12700" cap="flat" cmpd="sng" algn="ctr">
+          <a:solidFill>
+            <a:schemeClr val="accent2">
+              <a:hueOff val="0"/>
+              <a:satOff val="0"/>
+              <a:lumOff val="0"/>
+              <a:alphaOff val="0"/>
+            </a:schemeClr>
+          </a:solidFill>
+          <a:prstDash val="solid"/>
+          <a:miter lim="800000"/>
+        </a:ln>
+        <a:effectLst/>
+      </dsp:spPr>
+      <dsp:style>
+        <a:lnRef idx="2">
+          <a:scrgbClr r="0" g="0" b="0"/>
+        </a:lnRef>
+        <a:fillRef idx="1">
+          <a:scrgbClr r="0" g="0" b="0"/>
+        </a:fillRef>
+        <a:effectRef idx="0">
+          <a:scrgbClr r="0" g="0" b="0"/>
+        </a:effectRef>
+        <a:fontRef idx="minor"/>
+      </dsp:style>
+      <dsp:txBody>
+        <a:bodyPr spcFirstLastPara="0" vert="horz" wrap="square" lIns="53340" tIns="53340" rIns="53340" bIns="53340" numCol="1" spcCol="1270" anchor="ctr" anchorCtr="0">
+          <a:noAutofit/>
+        </a:bodyPr>
+        <a:lstStyle/>
+        <a:p>
+          <a:pPr marL="0" lvl="0" indent="0" algn="ctr" defTabSz="622300">
+            <a:lnSpc>
+              <a:spcPct val="90000"/>
+            </a:lnSpc>
+            <a:spcBef>
+              <a:spcPct val="0"/>
+            </a:spcBef>
+            <a:spcAft>
+              <a:spcPct val="35000"/>
+            </a:spcAft>
+            <a:buNone/>
+          </a:pPr>
+          <a:r>
+            <a:rPr lang="en-US" sz="1400" kern="1200"/>
+            <a:t>gezichtsherkenning</a:t>
+          </a:r>
+        </a:p>
+      </dsp:txBody>
+      <dsp:txXfrm>
+        <a:off x="2437700" y="2668936"/>
+        <a:ext cx="1734255" cy="1076796"/>
+      </dsp:txXfrm>
+    </dsp:sp>
+    <dsp:sp modelId="{9CEEB952-0EF3-4D78-A339-DFB498CEF9FE}">
+      <dsp:nvSpPr>
+        <dsp:cNvPr id="0" name=""/>
+        <dsp:cNvSpPr/>
+      </dsp:nvSpPr>
+      <dsp:spPr>
+        <a:xfrm>
+          <a:off x="4405596" y="2445302"/>
+          <a:ext cx="1801257" cy="1143798"/>
+        </a:xfrm>
+        <a:prstGeom prst="roundRect">
+          <a:avLst>
+            <a:gd name="adj" fmla="val 10000"/>
+          </a:avLst>
+        </a:prstGeom>
+        <a:solidFill>
+          <a:schemeClr val="accent2">
+            <a:hueOff val="0"/>
+            <a:satOff val="0"/>
+            <a:lumOff val="0"/>
+            <a:alphaOff val="0"/>
+          </a:schemeClr>
+        </a:solidFill>
+        <a:ln w="12700" cap="flat" cmpd="sng" algn="ctr">
+          <a:solidFill>
+            <a:schemeClr val="lt1">
+              <a:hueOff val="0"/>
+              <a:satOff val="0"/>
+              <a:lumOff val="0"/>
+              <a:alphaOff val="0"/>
+            </a:schemeClr>
+          </a:solidFill>
+          <a:prstDash val="solid"/>
+          <a:miter lim="800000"/>
+        </a:ln>
+        <a:effectLst/>
+      </dsp:spPr>
+      <dsp:style>
+        <a:lnRef idx="2">
+          <a:scrgbClr r="0" g="0" b="0"/>
+        </a:lnRef>
+        <a:fillRef idx="1">
+          <a:scrgbClr r="0" g="0" b="0"/>
+        </a:fillRef>
+        <a:effectRef idx="0">
+          <a:scrgbClr r="0" g="0" b="0"/>
+        </a:effectRef>
+        <a:fontRef idx="minor">
+          <a:schemeClr val="lt1"/>
+        </a:fontRef>
+      </dsp:style>
+    </dsp:sp>
+    <dsp:sp modelId="{BDC69640-85AF-4298-80EC-264C8859FDFF}">
+      <dsp:nvSpPr>
+        <dsp:cNvPr id="0" name=""/>
+        <dsp:cNvSpPr/>
+      </dsp:nvSpPr>
+      <dsp:spPr>
+        <a:xfrm>
+          <a:off x="4605736" y="2635435"/>
+          <a:ext cx="1801257" cy="1143798"/>
+        </a:xfrm>
+        <a:prstGeom prst="roundRect">
+          <a:avLst>
+            <a:gd name="adj" fmla="val 10000"/>
+          </a:avLst>
+        </a:prstGeom>
+        <a:solidFill>
+          <a:schemeClr val="lt1">
+            <a:alpha val="90000"/>
+            <a:hueOff val="0"/>
+            <a:satOff val="0"/>
+            <a:lumOff val="0"/>
+            <a:alphaOff val="0"/>
+          </a:schemeClr>
+        </a:solidFill>
+        <a:ln w="12700" cap="flat" cmpd="sng" algn="ctr">
+          <a:solidFill>
+            <a:schemeClr val="accent2">
+              <a:hueOff val="0"/>
+              <a:satOff val="0"/>
+              <a:lumOff val="0"/>
+              <a:alphaOff val="0"/>
+            </a:schemeClr>
+          </a:solidFill>
+          <a:prstDash val="solid"/>
+          <a:miter lim="800000"/>
+        </a:ln>
+        <a:effectLst/>
+      </dsp:spPr>
+      <dsp:style>
+        <a:lnRef idx="2">
+          <a:scrgbClr r="0" g="0" b="0"/>
+        </a:lnRef>
+        <a:fillRef idx="1">
+          <a:scrgbClr r="0" g="0" b="0"/>
+        </a:fillRef>
+        <a:effectRef idx="0">
+          <a:scrgbClr r="0" g="0" b="0"/>
+        </a:effectRef>
+        <a:fontRef idx="minor"/>
+      </dsp:style>
+      <dsp:txBody>
+        <a:bodyPr spcFirstLastPara="0" vert="horz" wrap="square" lIns="53340" tIns="53340" rIns="53340" bIns="53340" numCol="1" spcCol="1270" anchor="ctr" anchorCtr="0">
+          <a:noAutofit/>
+        </a:bodyPr>
+        <a:lstStyle/>
+        <a:p>
+          <a:pPr marL="0" lvl="0" indent="0" algn="ctr" defTabSz="622300">
+            <a:lnSpc>
+              <a:spcPct val="90000"/>
+            </a:lnSpc>
+            <a:spcBef>
+              <a:spcPct val="0"/>
+            </a:spcBef>
+            <a:spcAft>
+              <a:spcPct val="35000"/>
+            </a:spcAft>
+            <a:buNone/>
+          </a:pPr>
+          <a:r>
+            <a:rPr lang="en-US" sz="1400" kern="1200"/>
+            <a:t>objectherkenning</a:t>
+          </a:r>
+        </a:p>
+      </dsp:txBody>
+      <dsp:txXfrm>
+        <a:off x="4639237" y="2668936"/>
+        <a:ext cx="1734255" cy="1076796"/>
+      </dsp:txXfrm>
+    </dsp:sp>
+    <dsp:sp modelId="{051BB21D-78DA-4927-B8DD-8B4277522203}">
+      <dsp:nvSpPr>
+        <dsp:cNvPr id="0" name=""/>
+        <dsp:cNvSpPr/>
+      </dsp:nvSpPr>
+      <dsp:spPr>
+        <a:xfrm>
+          <a:off x="6607133" y="2445302"/>
+          <a:ext cx="1801257" cy="1143798"/>
+        </a:xfrm>
+        <a:prstGeom prst="roundRect">
+          <a:avLst>
+            <a:gd name="adj" fmla="val 10000"/>
+          </a:avLst>
+        </a:prstGeom>
+        <a:solidFill>
+          <a:schemeClr val="accent2">
+            <a:hueOff val="0"/>
+            <a:satOff val="0"/>
+            <a:lumOff val="0"/>
+            <a:alphaOff val="0"/>
+          </a:schemeClr>
+        </a:solidFill>
+        <a:ln w="12700" cap="flat" cmpd="sng" algn="ctr">
+          <a:solidFill>
+            <a:schemeClr val="lt1">
+              <a:hueOff val="0"/>
+              <a:satOff val="0"/>
+              <a:lumOff val="0"/>
+              <a:alphaOff val="0"/>
+            </a:schemeClr>
+          </a:solidFill>
+          <a:prstDash val="solid"/>
+          <a:miter lim="800000"/>
+        </a:ln>
+        <a:effectLst/>
+      </dsp:spPr>
+      <dsp:style>
+        <a:lnRef idx="2">
+          <a:scrgbClr r="0" g="0" b="0"/>
+        </a:lnRef>
+        <a:fillRef idx="1">
+          <a:scrgbClr r="0" g="0" b="0"/>
+        </a:fillRef>
+        <a:effectRef idx="0">
+          <a:scrgbClr r="0" g="0" b="0"/>
+        </a:effectRef>
+        <a:fontRef idx="minor">
+          <a:schemeClr val="lt1"/>
+        </a:fontRef>
+      </dsp:style>
+    </dsp:sp>
+    <dsp:sp modelId="{71D84B76-B432-4274-B2F3-59FF16E6512E}">
+      <dsp:nvSpPr>
+        <dsp:cNvPr id="0" name=""/>
+        <dsp:cNvSpPr/>
+      </dsp:nvSpPr>
+      <dsp:spPr>
+        <a:xfrm>
+          <a:off x="6807273" y="2635435"/>
+          <a:ext cx="1801257" cy="1143798"/>
+        </a:xfrm>
+        <a:prstGeom prst="roundRect">
+          <a:avLst>
+            <a:gd name="adj" fmla="val 10000"/>
+          </a:avLst>
+        </a:prstGeom>
+        <a:solidFill>
+          <a:schemeClr val="lt1">
+            <a:alpha val="90000"/>
+            <a:hueOff val="0"/>
+            <a:satOff val="0"/>
+            <a:lumOff val="0"/>
+            <a:alphaOff val="0"/>
+          </a:schemeClr>
+        </a:solidFill>
+        <a:ln w="12700" cap="flat" cmpd="sng" algn="ctr">
+          <a:solidFill>
+            <a:schemeClr val="accent2">
+              <a:hueOff val="0"/>
+              <a:satOff val="0"/>
+              <a:lumOff val="0"/>
+              <a:alphaOff val="0"/>
+            </a:schemeClr>
+          </a:solidFill>
+          <a:prstDash val="solid"/>
+          <a:miter lim="800000"/>
+        </a:ln>
+        <a:effectLst/>
+      </dsp:spPr>
+      <dsp:style>
+        <a:lnRef idx="2">
+          <a:scrgbClr r="0" g="0" b="0"/>
+        </a:lnRef>
+        <a:fillRef idx="1">
+          <a:scrgbClr r="0" g="0" b="0"/>
+        </a:fillRef>
+        <a:effectRef idx="0">
+          <a:scrgbClr r="0" g="0" b="0"/>
+        </a:effectRef>
+        <a:fontRef idx="minor"/>
+      </dsp:style>
+      <dsp:txBody>
+        <a:bodyPr spcFirstLastPara="0" vert="horz" wrap="square" lIns="53340" tIns="53340" rIns="53340" bIns="53340" numCol="1" spcCol="1270" anchor="ctr" anchorCtr="0">
+          <a:noAutofit/>
+        </a:bodyPr>
+        <a:lstStyle/>
+        <a:p>
+          <a:pPr marL="0" lvl="0" indent="0" algn="ctr" defTabSz="622300">
+            <a:lnSpc>
+              <a:spcPct val="90000"/>
+            </a:lnSpc>
+            <a:spcBef>
+              <a:spcPct val="0"/>
+            </a:spcBef>
+            <a:spcAft>
+              <a:spcPct val="35000"/>
+            </a:spcAft>
+            <a:buNone/>
+          </a:pPr>
+          <a:r>
+            <a:rPr lang="en-US" sz="1400" kern="1200"/>
+            <a:t>speech to text</a:t>
+          </a:r>
+        </a:p>
+      </dsp:txBody>
+      <dsp:txXfrm>
+        <a:off x="6840774" y="2668936"/>
+        <a:ext cx="1734255" cy="1076796"/>
+      </dsp:txXfrm>
+    </dsp:sp>
+  </dsp:spTree>
+</dsp:drawing>
+</file>
+
+<file path=ppt/diagrams/layout1.xml><?xml version="1.0" encoding="utf-8"?>
+<dgm:layoutDef xmlns:dgm="http://schemas.openxmlformats.org/drawingml/2006/diagram" xmlns:a="http://schemas.openxmlformats.org/drawingml/2006/main" uniqueId="urn:microsoft.com/office/officeart/2005/8/layout/hierarchy1">
+  <dgm:title val=""/>
+  <dgm:desc val=""/>
+  <dgm:catLst>
+    <dgm:cat type="hierarchy" pri="2000"/>
+  </dgm:catLst>
+  <dgm:sampData>
+    <dgm:dataModel>
+      <dgm:ptLst>
+        <dgm:pt modelId="0" type="doc"/>
+        <dgm:pt modelId="1">
+          <dgm:prSet phldr="1"/>
+        </dgm:pt>
+        <dgm:pt modelId="2">
+          <dgm:prSet phldr="1"/>
+        </dgm:pt>
+        <dgm:pt modelId="21">
+          <dgm:prSet phldr="1"/>
+        </dgm:pt>
+        <dgm:pt modelId="22">
+          <dgm:prSet phldr="1"/>
+        </dgm:pt>
+        <dgm:pt modelId="3">
+          <dgm:prSet phldr="1"/>
+        </dgm:pt>
+        <dgm:pt modelId="31">
+          <dgm:prSet phldr="1"/>
+        </dgm:pt>
+      </dgm:ptLst>
+      <dgm:cxnLst>
+        <dgm:cxn modelId="4" srcId="0" destId="1" srcOrd="0" destOrd="0"/>
+        <dgm:cxn modelId="5" srcId="1" destId="2" srcOrd="0" destOrd="0"/>
+        <dgm:cxn modelId="6" srcId="1" destId="3" srcOrd="1" destOrd="0"/>
+        <dgm:cxn modelId="23" srcId="2" destId="21" srcOrd="0" destOrd="0"/>
+        <dgm:cxn modelId="24" srcId="2" destId="22" srcOrd="1" destOrd="0"/>
+        <dgm:cxn modelId="33" srcId="3" destId="31" srcOrd="0" destOrd="0"/>
+      </dgm:cxnLst>
+      <dgm:bg/>
+      <dgm:whole/>
+    </dgm:dataModel>
+  </dgm:sampData>
+  <dgm:styleData>
+    <dgm:dataModel>
+      <dgm:ptLst>
+        <dgm:pt modelId="0" type="doc"/>
+        <dgm:pt modelId="1"/>
+        <dgm:pt modelId="11"/>
+        <dgm:pt modelId="12"/>
+      </dgm:ptLst>
+      <dgm:cxnLst>
+        <dgm:cxn modelId="2" srcId="0" destId="1" srcOrd="0" destOrd="0"/>
+        <dgm:cxn modelId="13" srcId="1" destId="11" srcOrd="0" destOrd="0"/>
+        <dgm:cxn modelId="14" srcId="1" destId="12" srcOrd="1" destOrd="0"/>
+      </dgm:cxnLst>
+      <dgm:bg/>
+      <dgm:whole/>
+    </dgm:dataModel>
+  </dgm:styleData>
+  <dgm:clrData>
+    <dgm:dataModel>
+      <dgm:ptLst>
+        <dgm:pt modelId="0" type="doc"/>
+        <dgm:pt modelId="1"/>
+        <dgm:pt modelId="2"/>
+        <dgm:pt modelId="21"/>
+        <dgm:pt modelId="211"/>
+        <dgm:pt modelId="3"/>
+        <dgm:pt modelId="31"/>
+        <dgm:pt modelId="311"/>
+      </dgm:ptLst>
+      <dgm:cxnLst>
+        <dgm:cxn modelId="4" srcId="0" destId="1" srcOrd="0" destOrd="0"/>
+        <dgm:cxn modelId="5" srcId="1" destId="2" srcOrd="0" destOrd="0"/>
+        <dgm:cxn modelId="6" srcId="1" destId="3" srcOrd="1" destOrd="0"/>
+        <dgm:cxn modelId="23" srcId="2" destId="21" srcOrd="0" destOrd="0"/>
+        <dgm:cxn modelId="24" srcId="21" destId="211" srcOrd="0" destOrd="0"/>
+        <dgm:cxn modelId="33" srcId="3" destId="31" srcOrd="0" destOrd="0"/>
+        <dgm:cxn modelId="34" srcId="31" destId="311" srcOrd="0" destOrd="0"/>
+      </dgm:cxnLst>
+      <dgm:bg/>
+      <dgm:whole/>
+    </dgm:dataModel>
+  </dgm:clrData>
+  <dgm:layoutNode name="hierChild1">
+    <dgm:varLst>
+      <dgm:chPref val="1"/>
+      <dgm:dir/>
+      <dgm:animOne val="branch"/>
+      <dgm:animLvl val="lvl"/>
+      <dgm:resizeHandles/>
+    </dgm:varLst>
+    <dgm:choose name="Name0">
+      <dgm:if name="Name1" func="var" arg="dir" op="equ" val="norm">
+        <dgm:alg type="hierChild">
+          <dgm:param type="linDir" val="fromL"/>
+        </dgm:alg>
+      </dgm:if>
+      <dgm:else name="Name2">
+        <dgm:alg type="hierChild">
+          <dgm:param type="linDir" val="fromR"/>
+        </dgm:alg>
+      </dgm:else>
+    </dgm:choose>
+    <dgm:shape xmlns:r="http://schemas.openxmlformats.org/officeDocument/2006/relationships" r:blip="">
+      <dgm:adjLst/>
+    </dgm:shape>
+    <dgm:presOf/>
+    <dgm:constrLst>
+      <dgm:constr type="primFontSz" for="des" ptType="node" op="equ" val="65"/>
+      <dgm:constr type="w" for="des" forName="composite" refType="w"/>
+      <dgm:constr type="h" for="des" forName="composite" refType="w" refFor="des" refForName="composite" fact="0.667"/>
+      <dgm:constr type="w" for="des" forName="composite2" refType="w" refFor="des" refForName="composite"/>
+      <dgm:constr type="h" for="des" forName="composite2" refType="h" refFor="des" refForName="composite"/>
+      <dgm:constr type="w" for="des" forName="composite3" refType="w" refFor="des" refForName="composite"/>
+      <dgm:constr type="h" for="des" forName="composite3" refType="h" refFor="des" refForName="composite"/>
+      <dgm:constr type="w" for="des" forName="composite4" refType="w" refFor="des" refForName="composite"/>
+      <dgm:constr type="h" for="des" forName="composite4" refType="h" refFor="des" refForName="composite"/>
+      <dgm:constr type="w" for="des" forName="composite5" refType="w" refFor="des" refForName="composite"/>
+      <dgm:constr type="h" for="des" forName="composite5" refType="h" refFor="des" refForName="composite"/>
+      <dgm:constr type="sibSp" refType="w" refFor="des" refForName="composite" fact="0.1"/>
+      <dgm:constr type="sibSp" for="des" forName="hierChild2" refType="sibSp"/>
+      <dgm:constr type="sibSp" for="des" forName="hierChild3" refType="sibSp"/>
+      <dgm:constr type="sibSp" for="des" forName="hierChild4" refType="sibSp"/>
+      <dgm:constr type="sibSp" for="des" forName="hierChild5" refType="sibSp"/>
+      <dgm:constr type="sibSp" for="des" forName="hierChild6" refType="sibSp"/>
+      <dgm:constr type="sp" for="des" forName="hierRoot1" refType="h" refFor="des" refForName="composite" fact="0.25"/>
+      <dgm:constr type="sp" for="des" forName="hierRoot2" refType="sp" refFor="des" refForName="hierRoot1"/>
+      <dgm:constr type="sp" for="des" forName="hierRoot3" refType="sp" refFor="des" refForName="hierRoot1"/>
+      <dgm:constr type="sp" for="des" forName="hierRoot4" refType="sp" refFor="des" refForName="hierRoot1"/>
+      <dgm:constr type="sp" for="des" forName="hierRoot5" refType="sp" refFor="des" refForName="hierRoot1"/>
+    </dgm:constrLst>
+    <dgm:ruleLst/>
+    <dgm:forEach name="Name3" axis="ch">
+      <dgm:forEach name="Name4" axis="self" ptType="node">
+        <dgm:layoutNode name="hierRoot1">
+          <dgm:alg type="hierRoot"/>
+          <dgm:shape xmlns:r="http://schemas.openxmlformats.org/officeDocument/2006/relationships" r:blip="">
+            <dgm:adjLst/>
+          </dgm:shape>
+          <dgm:presOf/>
+          <dgm:constrLst>
+            <dgm:constr type="bendDist" for="des" ptType="parTrans" refType="sp" fact="0.5"/>
+          </dgm:constrLst>
+          <dgm:ruleLst/>
+          <dgm:layoutNode name="composite">
+            <dgm:alg type="composite"/>
+            <dgm:shape xmlns:r="http://schemas.openxmlformats.org/officeDocument/2006/relationships" r:blip="">
+              <dgm:adjLst/>
+            </dgm:shape>
+            <dgm:presOf/>
+            <dgm:constrLst>
+              <dgm:constr type="w" for="ch" forName="background" refType="w" fact="0.9"/>
+              <dgm:constr type="h" for="ch" forName="background" refType="w" refFor="ch" refForName="background" fact="0.635"/>
+              <dgm:constr type="t" for="ch" forName="background"/>
+              <dgm:constr type="l" for="ch" forName="background"/>
+              <dgm:constr type="w" for="ch" forName="text" refType="w" fact="0.9"/>
+              <dgm:constr type="h" for="ch" forName="text" refType="w" refFor="ch" refForName="text" fact="0.635"/>
+              <dgm:constr type="t" for="ch" forName="text" refType="w" fact="0.095"/>
+              <dgm:constr type="l" for="ch" forName="text" refType="w" fact="0.1"/>
+            </dgm:constrLst>
+            <dgm:ruleLst/>
+            <dgm:layoutNode name="background" styleLbl="node0" moveWith="text">
+              <dgm:alg type="sp"/>
+              <dgm:shape xmlns:r="http://schemas.openxmlformats.org/officeDocument/2006/relationships" type="roundRect" r:blip="">
+                <dgm:adjLst>
+                  <dgm:adj idx="1" val="0.1"/>
+                </dgm:adjLst>
+              </dgm:shape>
+              <dgm:presOf/>
+              <dgm:constrLst/>
+              <dgm:ruleLst/>
+            </dgm:layoutNode>
+            <dgm:layoutNode name="text" styleLbl="fgAcc0">
+              <dgm:varLst>
+                <dgm:chPref val="3"/>
+              </dgm:varLst>
+              <dgm:alg type="tx"/>
+              <dgm:shape xmlns:r="http://schemas.openxmlformats.org/officeDocument/2006/relationships" type="roundRect" r:blip="">
+                <dgm:adjLst>
+                  <dgm:adj idx="1" val="0.1"/>
+                </dgm:adjLst>
+              </dgm:shape>
+              <dgm:presOf axis="self"/>
+              <dgm:constrLst>
+                <dgm:constr type="tMarg" refType="primFontSz" fact="0.3"/>
+                <dgm:constr type="bMarg" refType="primFontSz" fact="0.3"/>
+                <dgm:constr type="lMarg" refType="primFontSz" fact="0.3"/>
+                <dgm:constr type="rMarg" refType="primFontSz" fact="0.3"/>
+              </dgm:constrLst>
+              <dgm:ruleLst>
+                <dgm:rule type="primFontSz" val="5" fact="NaN" max="NaN"/>
+              </dgm:ruleLst>
+            </dgm:layoutNode>
+          </dgm:layoutNode>
+          <dgm:layoutNode name="hierChild2">
+            <dgm:choose name="Name5">
+              <dgm:if name="Name6" func="var" arg="dir" op="equ" val="norm">
+                <dgm:alg type="hierChild">
+                  <dgm:param type="linDir" val="fromL"/>
+                </dgm:alg>
+              </dgm:if>
+              <dgm:else name="Name7">
+                <dgm:alg type="hierChild">
+                  <dgm:param type="linDir" val="fromR"/>
+                </dgm:alg>
+              </dgm:else>
+            </dgm:choose>
+            <dgm:shape xmlns:r="http://schemas.openxmlformats.org/officeDocument/2006/relationships" r:blip="">
+              <dgm:adjLst/>
+            </dgm:shape>
+            <dgm:presOf/>
+            <dgm:constrLst/>
+            <dgm:ruleLst/>
+            <dgm:forEach name="Name8" axis="ch">
+              <dgm:forEach name="Name9" axis="self" ptType="parTrans" cnt="1">
+                <dgm:layoutNode name="Name10">
+                  <dgm:alg type="conn">
+                    <dgm:param type="dim" val="1D"/>
+                    <dgm:param type="endSty" val="noArr"/>
+                    <dgm:param type="connRout" val="bend"/>
+                    <dgm:param type="bendPt" val="end"/>
+                    <dgm:param type="begPts" val="bCtr"/>
+                    <dgm:param type="endPts" val="tCtr"/>
+                    <dgm:param type="srcNode" val="background"/>
+                    <dgm:param type="dstNode" val="background2"/>
+                  </dgm:alg>
+                  <dgm:shape xmlns:r="http://schemas.openxmlformats.org/officeDocument/2006/relationships" type="conn" r:blip="" zOrderOff="-999">
+                    <dgm:adjLst/>
+                  </dgm:shape>
+                  <dgm:presOf axis="self"/>
+                  <dgm:constrLst>
+                    <dgm:constr type="begPad"/>
+                    <dgm:constr type="endPad"/>
+                  </dgm:constrLst>
+                  <dgm:ruleLst/>
+                </dgm:layoutNode>
+              </dgm:forEach>
+              <dgm:forEach name="Name11" axis="self" ptType="node">
+                <dgm:layoutNode name="hierRoot2">
+                  <dgm:alg type="hierRoot"/>
+                  <dgm:shape xmlns:r="http://schemas.openxmlformats.org/officeDocument/2006/relationships" r:blip="">
+                    <dgm:adjLst/>
+                  </dgm:shape>
+                  <dgm:presOf/>
+                  <dgm:constrLst>
+                    <dgm:constr type="bendDist" for="des" ptType="parTrans" refType="sp" fact="0.5"/>
+                  </dgm:constrLst>
+                  <dgm:ruleLst/>
+                  <dgm:layoutNode name="composite2">
+                    <dgm:alg type="composite"/>
+                    <dgm:shape xmlns:r="http://schemas.openxmlformats.org/officeDocument/2006/relationships" r:blip="">
+                      <dgm:adjLst/>
+                    </dgm:shape>
+                    <dgm:presOf/>
+                    <dgm:constrLst>
+                      <dgm:constr type="w" for="ch" forName="background2" refType="w" fact="0.9"/>
+                      <dgm:constr type="h" for="ch" forName="background2" refType="w" refFor="ch" refForName="background2" fact="0.635"/>
+                      <dgm:constr type="t" for="ch" forName="background2"/>
+                      <dgm:constr type="l" for="ch" forName="background2"/>
+                      <dgm:constr type="w" for="ch" forName="text2" refType="w" fact="0.9"/>
+                      <dgm:constr type="h" for="ch" forName="text2" refType="w" refFor="ch" refForName="text2" fact="0.635"/>
+                      <dgm:constr type="t" for="ch" forName="text2" refType="w" fact="0.095"/>
+                      <dgm:constr type="l" for="ch" forName="text2" refType="w" fact="0.1"/>
+                    </dgm:constrLst>
+                    <dgm:ruleLst/>
+                    <dgm:layoutNode name="background2" moveWith="text2">
+                      <dgm:alg type="sp"/>
+                      <dgm:shape xmlns:r="http://schemas.openxmlformats.org/officeDocument/2006/relationships" type="roundRect" r:blip="">
+                        <dgm:adjLst>
+                          <dgm:adj idx="1" val="0.1"/>
+                        </dgm:adjLst>
+                      </dgm:shape>
+                      <dgm:presOf/>
+                      <dgm:constrLst/>
+                      <dgm:ruleLst/>
+                    </dgm:layoutNode>
+                    <dgm:layoutNode name="text2" styleLbl="fgAcc2">
+                      <dgm:varLst>
+                        <dgm:chPref val="3"/>
+                      </dgm:varLst>
+                      <dgm:alg type="tx"/>
+                      <dgm:shape xmlns:r="http://schemas.openxmlformats.org/officeDocument/2006/relationships" type="roundRect" r:blip="">
+                        <dgm:adjLst>
+                          <dgm:adj idx="1" val="0.1"/>
+                        </dgm:adjLst>
+                      </dgm:shape>
+                      <dgm:presOf axis="self"/>
+                      <dgm:constrLst>
+                        <dgm:constr type="tMarg" refType="primFontSz" fact="0.3"/>
+                        <dgm:constr type="bMarg" refType="primFontSz" fact="0.3"/>
+                        <dgm:constr type="lMarg" refType="primFontSz" fact="0.3"/>
+                        <dgm:constr type="rMarg" refType="primFontSz" fact="0.3"/>
+                      </dgm:constrLst>
+                      <dgm:ruleLst>
+                        <dgm:rule type="primFontSz" val="5" fact="NaN" max="NaN"/>
+                      </dgm:ruleLst>
+                    </dgm:layoutNode>
+                  </dgm:layoutNode>
+                  <dgm:layoutNode name="hierChild3">
+                    <dgm:choose name="Name12">
+                      <dgm:if name="Name13" func="var" arg="dir" op="equ" val="norm">
+                        <dgm:alg type="hierChild">
+                          <dgm:param type="linDir" val="fromL"/>
+                        </dgm:alg>
+                      </dgm:if>
+                      <dgm:else name="Name14">
+                        <dgm:alg type="hierChild">
+                          <dgm:param type="linDir" val="fromR"/>
+                        </dgm:alg>
+                      </dgm:else>
+                    </dgm:choose>
+                    <dgm:shape xmlns:r="http://schemas.openxmlformats.org/officeDocument/2006/relationships" r:blip="">
+                      <dgm:adjLst/>
+                    </dgm:shape>
+                    <dgm:presOf/>
+                    <dgm:constrLst/>
+                    <dgm:ruleLst/>
+                    <dgm:forEach name="Name15" axis="ch">
+                      <dgm:forEach name="Name16" axis="self" ptType="parTrans" cnt="1">
+                        <dgm:layoutNode name="Name17">
+                          <dgm:alg type="conn">
+                            <dgm:param type="dim" val="1D"/>
+                            <dgm:param type="endSty" val="noArr"/>
+                            <dgm:param type="connRout" val="bend"/>
+                            <dgm:param type="bendPt" val="end"/>
+                            <dgm:param type="begPts" val="bCtr"/>
+                            <dgm:param type="endPts" val="tCtr"/>
+                            <dgm:param type="srcNode" val="background2"/>
+                            <dgm:param type="dstNode" val="background3"/>
+                          </dgm:alg>
+                          <dgm:shape xmlns:r="http://schemas.openxmlformats.org/officeDocument/2006/relationships" type="conn" r:blip="" zOrderOff="-999">
+                            <dgm:adjLst/>
+                          </dgm:shape>
+                          <dgm:presOf axis="self"/>
+                          <dgm:constrLst>
+                            <dgm:constr type="begPad"/>
+                            <dgm:constr type="endPad"/>
+                          </dgm:constrLst>
+                          <dgm:ruleLst/>
+                        </dgm:layoutNode>
+                      </dgm:forEach>
+                      <dgm:forEach name="Name18" axis="self" ptType="node">
+                        <dgm:layoutNode name="hierRoot3">
+                          <dgm:alg type="hierRoot"/>
+                          <dgm:shape xmlns:r="http://schemas.openxmlformats.org/officeDocument/2006/relationships" r:blip="">
+                            <dgm:adjLst/>
+                          </dgm:shape>
+                          <dgm:presOf/>
+                          <dgm:constrLst>
+                            <dgm:constr type="bendDist" for="des" ptType="parTrans" refType="sp" fact="0.5"/>
+                          </dgm:constrLst>
+                          <dgm:ruleLst/>
+                          <dgm:layoutNode name="composite3">
+                            <dgm:alg type="composite"/>
+                            <dgm:shape xmlns:r="http://schemas.openxmlformats.org/officeDocument/2006/relationships" r:blip="">
+                              <dgm:adjLst/>
+                            </dgm:shape>
+                            <dgm:presOf/>
+                            <dgm:constrLst>
+                              <dgm:constr type="w" for="ch" forName="background3" refType="w" fact="0.9"/>
+                              <dgm:constr type="h" for="ch" forName="background3" refType="w" refFor="ch" refForName="background3" fact="0.635"/>
+                              <dgm:constr type="t" for="ch" forName="background3"/>
+                              <dgm:constr type="l" for="ch" forName="background3"/>
+                              <dgm:constr type="w" for="ch" forName="text3" refType="w" fact="0.9"/>
+                              <dgm:constr type="h" for="ch" forName="text3" refType="w" refFor="ch" refForName="text3" fact="0.635"/>
+                              <dgm:constr type="t" for="ch" forName="text3" refType="w" fact="0.095"/>
+                              <dgm:constr type="l" for="ch" forName="text3" refType="w" fact="0.1"/>
+                            </dgm:constrLst>
+                            <dgm:ruleLst/>
+                            <dgm:layoutNode name="background3" moveWith="text3">
+                              <dgm:alg type="sp"/>
+                              <dgm:shape xmlns:r="http://schemas.openxmlformats.org/officeDocument/2006/relationships" type="roundRect" r:blip="">
+                                <dgm:adjLst>
+                                  <dgm:adj idx="1" val="0.1"/>
+                                </dgm:adjLst>
+                              </dgm:shape>
+                              <dgm:presOf/>
+                              <dgm:constrLst/>
+                              <dgm:ruleLst/>
+                            </dgm:layoutNode>
+                            <dgm:layoutNode name="text3" styleLbl="fgAcc3">
+                              <dgm:varLst>
+                                <dgm:chPref val="3"/>
+                              </dgm:varLst>
+                              <dgm:alg type="tx"/>
+                              <dgm:shape xmlns:r="http://schemas.openxmlformats.org/officeDocument/2006/relationships" type="roundRect" r:blip="">
+                                <dgm:adjLst>
+                                  <dgm:adj idx="1" val="0.1"/>
+                                </dgm:adjLst>
+                              </dgm:shape>
+                              <dgm:presOf axis="self"/>
+                              <dgm:constrLst>
+                                <dgm:constr type="tMarg" refType="primFontSz" fact="0.3"/>
+                                <dgm:constr type="bMarg" refType="primFontSz" fact="0.3"/>
+                                <dgm:constr type="lMarg" refType="primFontSz" fact="0.3"/>
+                                <dgm:constr type="rMarg" refType="primFontSz" fact="0.3"/>
+                              </dgm:constrLst>
+                              <dgm:ruleLst>
+                                <dgm:rule type="primFontSz" val="5" fact="NaN" max="NaN"/>
+                              </dgm:ruleLst>
+                            </dgm:layoutNode>
+                          </dgm:layoutNode>
+                          <dgm:layoutNode name="hierChild4">
+                            <dgm:choose name="Name19">
+                              <dgm:if name="Name20" func="var" arg="dir" op="equ" val="norm">
+                                <dgm:alg type="hierChild">
+                                  <dgm:param type="linDir" val="fromL"/>
+                                </dgm:alg>
+                              </dgm:if>
+                              <dgm:else name="Name21">
+                                <dgm:alg type="hierChild">
+                                  <dgm:param type="linDir" val="fromR"/>
+                                </dgm:alg>
+                              </dgm:else>
+                            </dgm:choose>
+                            <dgm:shape xmlns:r="http://schemas.openxmlformats.org/officeDocument/2006/relationships" r:blip="">
+                              <dgm:adjLst/>
+                            </dgm:shape>
+                            <dgm:presOf/>
+                            <dgm:constrLst/>
+                            <dgm:ruleLst/>
+                            <dgm:forEach name="repeat" axis="ch">
+                              <dgm:forEach name="Name22" axis="self" ptType="parTrans" cnt="1">
+                                <dgm:layoutNode name="Name23">
+                                  <dgm:choose name="Name24">
+                                    <dgm:if name="Name25" axis="self" func="depth" op="lte" val="4">
+                                      <dgm:alg type="conn">
+                                        <dgm:param type="dim" val="1D"/>
+                                        <dgm:param type="endSty" val="noArr"/>
+                                        <dgm:param type="connRout" val="bend"/>
+                                        <dgm:param type="bendPt" val="end"/>
+                                        <dgm:param type="begPts" val="bCtr"/>
+                                        <dgm:param type="endPts" val="tCtr"/>
+                                        <dgm:param type="srcNode" val="background3"/>
+                                        <dgm:param type="dstNode" val="background4"/>
+                                      </dgm:alg>
+                                    </dgm:if>
+                                    <dgm:else name="Name26">
+                                      <dgm:alg type="conn">
+                                        <dgm:param type="dim" val="1D"/>
+                                        <dgm:param type="endSty" val="noArr"/>
+                                        <dgm:param type="connRout" val="bend"/>
+                                        <dgm:param type="bendPt" val="end"/>
+                                        <dgm:param type="begPts" val="bCtr"/>
+                                        <dgm:param type="endPts" val="tCtr"/>
+                                        <dgm:param type="srcNode" val="background4"/>
+                                        <dgm:param type="dstNode" val="background4"/>
+                                      </dgm:alg>
+                                    </dgm:else>
+                                  </dgm:choose>
+                                  <dgm:shape xmlns:r="http://schemas.openxmlformats.org/officeDocument/2006/relationships" type="conn" r:blip="" zOrderOff="-999">
+                                    <dgm:adjLst/>
+                                  </dgm:shape>
+                                  <dgm:presOf axis="self"/>
+                                  <dgm:constrLst>
+                                    <dgm:constr type="begPad"/>
+                                    <dgm:constr type="endPad"/>
+                                  </dgm:constrLst>
+                                  <dgm:ruleLst/>
+                                </dgm:layoutNode>
+                              </dgm:forEach>
+                              <dgm:forEach name="Name27" axis="self" ptType="node">
+                                <dgm:layoutNode name="hierRoot4">
+                                  <dgm:alg type="hierRoot"/>
+                                  <dgm:shape xmlns:r="http://schemas.openxmlformats.org/officeDocument/2006/relationships" r:blip="">
+                                    <dgm:adjLst/>
+                                  </dgm:shape>
+                                  <dgm:presOf/>
+                                  <dgm:constrLst>
+                                    <dgm:constr type="bendDist" for="des" ptType="parTrans" refType="sp" fact="0.5"/>
+                                  </dgm:constrLst>
+                                  <dgm:ruleLst/>
+                                  <dgm:layoutNode name="composite4">
+                                    <dgm:alg type="composite"/>
+                                    <dgm:shape xmlns:r="http://schemas.openxmlformats.org/officeDocument/2006/relationships" r:blip="">
+                                      <dgm:adjLst/>
+                                    </dgm:shape>
+                                    <dgm:presOf/>
+                                    <dgm:constrLst>
+                                      <dgm:constr type="w" for="ch" forName="background4" refType="w" fact="0.9"/>
+                                      <dgm:constr type="h" for="ch" forName="background4" refType="w" refFor="ch" refForName="background4" fact="0.635"/>
+                                      <dgm:constr type="t" for="ch" forName="background4"/>
+                                      <dgm:constr type="l" for="ch" forName="background4"/>
+                                      <dgm:constr type="w" for="ch" forName="text4" refType="w" fact="0.9"/>
+                                      <dgm:constr type="h" for="ch" forName="text4" refType="w" refFor="ch" refForName="text4" fact="0.635"/>
+                                      <dgm:constr type="t" for="ch" forName="text4" refType="w" fact="0.095"/>
+                                      <dgm:constr type="l" for="ch" forName="text4" refType="w" fact="0.1"/>
+                                    </dgm:constrLst>
+                                    <dgm:ruleLst/>
+                                    <dgm:layoutNode name="background4" moveWith="text4">
+                                      <dgm:alg type="sp"/>
+                                      <dgm:shape xmlns:r="http://schemas.openxmlformats.org/officeDocument/2006/relationships" type="roundRect" r:blip="">
+                                        <dgm:adjLst>
+                                          <dgm:adj idx="1" val="0.1"/>
+                                        </dgm:adjLst>
+                                      </dgm:shape>
+                                      <dgm:presOf/>
+                                      <dgm:constrLst/>
+                                      <dgm:ruleLst/>
+                                    </dgm:layoutNode>
+                                    <dgm:layoutNode name="text4" styleLbl="fgAcc4">
+                                      <dgm:varLst>
+                                        <dgm:chPref val="3"/>
+                                      </dgm:varLst>
+                                      <dgm:alg type="tx"/>
+                                      <dgm:shape xmlns:r="http://schemas.openxmlformats.org/officeDocument/2006/relationships" type="roundRect" r:blip="">
+                                        <dgm:adjLst>
+                                          <dgm:adj idx="1" val="0.1"/>
+                                        </dgm:adjLst>
+                                      </dgm:shape>
+                                      <dgm:presOf axis="self"/>
+                                      <dgm:constrLst>
+                                        <dgm:constr type="tMarg" refType="primFontSz" fact="0.3"/>
+                                        <dgm:constr type="bMarg" refType="primFontSz" fact="0.3"/>
+                                        <dgm:constr type="lMarg" refType="primFontSz" fact="0.3"/>
+                                        <dgm:constr type="rMarg" refType="primFontSz" fact="0.3"/>
+                                      </dgm:constrLst>
+                                      <dgm:ruleLst>
+                                        <dgm:rule type="primFontSz" val="5" fact="NaN" max="NaN"/>
+                                      </dgm:ruleLst>
+                                    </dgm:layoutNode>
+                                  </dgm:layoutNode>
+                                  <dgm:layoutNode name="hierChild5">
+                                    <dgm:choose name="Name28">
+                                      <dgm:if name="Name29" func="var" arg="dir" op="equ" val="norm">
+                                        <dgm:alg type="hierChild">
+                                          <dgm:param type="linDir" val="fromL"/>
+                                        </dgm:alg>
+                                      </dgm:if>
+                                      <dgm:else name="Name30">
+                                        <dgm:alg type="hierChild">
+                                          <dgm:param type="linDir" val="fromR"/>
+                                        </dgm:alg>
+                                      </dgm:else>
+                                    </dgm:choose>
+                                    <dgm:shape xmlns:r="http://schemas.openxmlformats.org/officeDocument/2006/relationships" r:blip="">
+                                      <dgm:adjLst/>
+                                    </dgm:shape>
+                                    <dgm:presOf/>
+                                    <dgm:constrLst/>
+                                    <dgm:ruleLst/>
+                                    <dgm:forEach name="Name31" ref="repeat"/>
+                                  </dgm:layoutNode>
+                                </dgm:layoutNode>
+                              </dgm:forEach>
+                            </dgm:forEach>
+                          </dgm:layoutNode>
+                        </dgm:layoutNode>
+                      </dgm:forEach>
+                    </dgm:forEach>
+                  </dgm:layoutNode>
+                </dgm:layoutNode>
+              </dgm:forEach>
+            </dgm:forEach>
+          </dgm:layoutNode>
+        </dgm:layoutNode>
+      </dgm:forEach>
+    </dgm:forEach>
+  </dgm:layoutNode>
+</dgm:layoutDef>
+</file>
+
+<file path=ppt/diagrams/quickStyle1.xml><?xml version="1.0" encoding="utf-8"?>
+<dgm:styleDef xmlns:dgm="http://schemas.openxmlformats.org/drawingml/2006/diagram" xmlns:a="http://schemas.openxmlformats.org/drawingml/2006/main" uniqueId="urn:microsoft.com/office/officeart/2005/8/quickstyle/simple1#1">
+  <dgm:title val=""/>
+  <dgm:desc val=""/>
+  <dgm:catLst>
+    <dgm:cat type="simple" pri="10100"/>
+  </dgm:catLst>
+  <dgm:scene3d>
+    <a:camera prst="orthographicFront"/>
+    <a:lightRig rig="threePt" dir="t"/>
+  </dgm:scene3d>
+  <dgm:styleLbl name="node0">
+    <dgm:scene3d>
+      <a:camera prst="orthographicFront"/>
+      <a:lightRig rig="threePt" dir="t"/>
+    </dgm:scene3d>
+    <dgm:sp3d/>
+    <dgm:txPr/>
+    <dgm:style>
+      <a:lnRef idx="2">
+        <a:scrgbClr r="0" g="0" b="0"/>
+      </a:lnRef>
+      <a:fillRef idx="1">
+        <a:scrgbClr r="0" g="0" b="0"/>
+      </a:fillRef>
+      <a:effectRef idx="0">
+        <a:scrgbClr r="0" g="0" b="0"/>
+      </a:effectRef>
+      <a:fontRef idx="minor">
+        <a:schemeClr val="lt1"/>
+      </a:fontRef>
+    </dgm:style>
+  </dgm:styleLbl>
+  <dgm:styleLbl name="lnNode1">
+    <dgm:scene3d>
+      <a:camera prst="orthographicFront"/>
+      <a:lightRig rig="threePt" dir="t"/>
+    </dgm:scene3d>
+    <dgm:sp3d/>
+    <dgm:txPr/>
+    <dgm:style>
+      <a:lnRef idx="2">
+        <a:scrgbClr r="0" g="0" b="0"/>
+      </a:lnRef>
+      <a:fillRef idx="1">
+        <a:scrgbClr r="0" g="0" b="0"/>
+      </a:fillRef>
+      <a:effectRef idx="0">
+        <a:scrgbClr r="0" g="0" b="0"/>
+      </a:effectRef>
+      <a:fontRef idx="minor">
+        <a:schemeClr val="lt1"/>
+      </a:fontRef>
+    </dgm:style>
+  </dgm:styleLbl>
+  <dgm:styleLbl name="vennNode1">
+    <dgm:scene3d>
+      <a:camera prst="orthographicFront"/>
+      <a:lightRig rig="threePt" dir="t"/>
+    </dgm:scene3d>
+    <dgm:sp3d/>
+    <dgm:txPr/>
+    <dgm:style>
+      <a:lnRef idx="2">
+        <a:scrgbClr r="0" g="0" b="0"/>
+      </a:lnRef>
+      <a:fillRef idx="1">
+        <a:scrgbClr r="0" g="0" b="0"/>
+      </a:fillRef>
+      <a:effectRef idx="0">
+        <a:scrgbClr r="0" g="0" b="0"/>
+      </a:effectRef>
+      <a:fontRef idx="minor">
+        <a:schemeClr val="tx1"/>
+      </a:fontRef>
+    </dgm:style>
+  </dgm:styleLbl>
+  <dgm:styleLbl name="alignNode1">
+    <dgm:scene3d>
+      <a:camera prst="orthographicFront"/>
+      <a:lightRig rig="threePt" dir="t"/>
+    </dgm:scene3d>
+    <dgm:sp3d/>
+    <dgm:txPr/>
+    <dgm:style>
+      <a:lnRef idx="2">
+        <a:scrgbClr r="0" g="0" b="0"/>
+      </a:lnRef>
+      <a:fillRef idx="1">
+        <a:scrgbClr r="0" g="0" b="0"/>
+      </a:fillRef>
+      <a:effectRef idx="0">
+        <a:scrgbClr r="0" g="0" b="0"/>
+      </a:effectRef>
+      <a:fontRef idx="minor">
+        <a:schemeClr val="lt1"/>
+      </a:fontRef>
+    </dgm:style>
+  </dgm:styleLbl>
+  <dgm:styleLbl name="node1">
+    <dgm:scene3d>
+      <a:camera prst="orthographicFront"/>
+      <a:lightRig rig="threePt" dir="t"/>
+    </dgm:scene3d>
+    <dgm:sp3d/>
+    <dgm:txPr/>
+    <dgm:style>
+      <a:lnRef idx="2">
+        <a:scrgbClr r="0" g="0" b="0"/>
+      </a:lnRef>
+      <a:fillRef idx="1">
+        <a:scrgbClr r="0" g="0" b="0"/>
+      </a:fillRef>
+      <a:effectRef idx="0">
+        <a:scrgbClr r="0" g="0" b="0"/>
+      </a:effectRef>
+      <a:fontRef idx="minor">
+        <a:schemeClr val="lt1"/>
+      </a:fontRef>
+    </dgm:style>
+  </dgm:styleLbl>
+  <dgm:styleLbl name="node2">
+    <dgm:scene3d>
+      <a:camera prst="orthographicFront"/>
+      <a:lightRig rig="threePt" dir="t"/>
+    </dgm:scene3d>
+    <dgm:sp3d/>
+    <dgm:txPr/>
+    <dgm:style>
+      <a:lnRef idx="2">
+        <a:scrgbClr r="0" g="0" b="0"/>
+      </a:lnRef>
+      <a:fillRef idx="1">
+        <a:scrgbClr r="0" g="0" b="0"/>
+      </a:fillRef>
+      <a:effectRef idx="0">
+        <a:scrgbClr r="0" g="0" b="0"/>
+      </a:effectRef>
+      <a:fontRef idx="minor">
+        <a:schemeClr val="lt1"/>
+      </a:fontRef>
+    </dgm:style>
+  </dgm:styleLbl>
+  <dgm:styleLbl name="node3">
+    <dgm:scene3d>
+      <a:camera prst="orthographicFront"/>
+      <a:lightRig rig="threePt" dir="t"/>
+    </dgm:scene3d>
+    <dgm:sp3d/>
+    <dgm:txPr/>
+    <dgm:style>
+      <a:lnRef idx="2">
+        <a:scrgbClr r="0" g="0" b="0"/>
+      </a:lnRef>
+      <a:fillRef idx="1">
+        <a:scrgbClr r="0" g="0" b="0"/>
+      </a:fillRef>
+      <a:effectRef idx="0">
+        <a:scrgbClr r="0" g="0" b="0"/>
+      </a:effectRef>
+      <a:fontRef idx="minor">
+        <a:schemeClr val="lt1"/>
+      </a:fontRef>
+    </dgm:style>
+  </dgm:styleLbl>
+  <dgm:styleLbl name="node4">
+    <dgm:scene3d>
+      <a:camera prst="orthographicFront"/>
+      <a:lightRig rig="threePt" dir="t"/>
+    </dgm:scene3d>
+    <dgm:sp3d/>
+    <dgm:txPr/>
+    <dgm:style>
+      <a:lnRef idx="2">
+        <a:scrgbClr r="0" g="0" b="0"/>
+      </a:lnRef>
+      <a:fillRef idx="1">
+        <a:scrgbClr r="0" g="0" b="0"/>
+      </a:fillRef>
+      <a:effectRef idx="0">
+        <a:scrgbClr r="0" g="0" b="0"/>
+      </a:effectRef>
+      <a:fontRef idx="minor">
+        <a:schemeClr val="lt1"/>
+      </a:fontRef>
+    </dgm:style>
+  </dgm:styleLbl>
+  <dgm:styleLbl name="fgImgPlace1">
+    <dgm:scene3d>
+      <a:camera prst="orthographicFront"/>
+      <a:lightRig rig="threePt" dir="t"/>
+    </dgm:scene3d>
+    <dgm:sp3d/>
+    <dgm:txPr/>
+    <dgm:style>
+      <a:lnRef idx="2">
+        <a:scrgbClr r="0" g="0" b="0"/>
+      </a:lnRef>
+      <a:fillRef idx="1">
+        <a:scrgbClr r="0" g="0" b="0"/>
+      </a:fillRef>
+      <a:effectRef idx="0">
+        <a:scrgbClr r="0" g="0" b="0"/>
+      </a:effectRef>
+      <a:fontRef idx="minor"/>
+    </dgm:style>
+  </dgm:styleLbl>
+  <dgm:styleLbl name="alignImgPlace1">
+    <dgm:scene3d>
+      <a:camera prst="orthographicFront"/>
+      <a:lightRig rig="threePt" dir="t"/>
+    </dgm:scene3d>
+    <dgm:sp3d/>
+    <dgm:txPr/>
+    <dgm:style>
+      <a:lnRef idx="2">
+        <a:scrgbClr r="0" g="0" b="0"/>
+      </a:lnRef>
+      <a:fillRef idx="1">
+        <a:scrgbClr r="0" g="0" b="0"/>
+      </a:fillRef>
+      <a:effectRef idx="0">
+        <a:scrgbClr r="0" g="0" b="0"/>
+      </a:effectRef>
+      <a:fontRef idx="minor"/>
+    </dgm:style>
+  </dgm:styleLbl>
+  <dgm:styleLbl name="bgImgPlace1">
+    <dgm:scene3d>
+      <a:camera prst="orthographicFront"/>
+      <a:lightRig rig="threePt" dir="t"/>
+    </dgm:scene3d>
+    <dgm:sp3d/>
+    <dgm:txPr/>
+    <dgm:style>
+      <a:lnRef idx="2">
+        <a:scrgbClr r="0" g="0" b="0"/>
+      </a:lnRef>
+      <a:fillRef idx="1">
+        <a:scrgbClr r="0" g="0" b="0"/>
+      </a:fillRef>
+      <a:effectRef idx="0">
+        <a:scrgbClr r="0" g="0" b="0"/>
+      </a:effectRef>
+      <a:fontRef idx="minor"/>
+    </dgm:style>
+  </dgm:styleLbl>
+  <dgm:styleLbl name="sibTrans2D1">
+    <dgm:scene3d>
+      <a:camera prst="orthographicFront"/>
+      <a:lightRig rig="threePt" dir="t"/>
+    </dgm:scene3d>
+    <dgm:sp3d/>
+    <dgm:txPr/>
+    <dgm:style>
+      <a:lnRef idx="0">
+        <a:scrgbClr r="0" g="0" b="0"/>
+      </a:lnRef>
+      <a:fillRef idx="1">
+        <a:scrgbClr r="0" g="0" b="0"/>
+      </a:fillRef>
+      <a:effectRef idx="0">
+        <a:scrgbClr r="0" g="0" b="0"/>
+      </a:effectRef>
+      <a:fontRef idx="minor">
+        <a:schemeClr val="lt1"/>
+      </a:fontRef>
+    </dgm:style>
+  </dgm:styleLbl>
+  <dgm:styleLbl name="fgSibTrans2D1">
+    <dgm:scene3d>
+      <a:camera prst="orthographicFront"/>
+      <a:lightRig rig="threePt" dir="t"/>
+    </dgm:scene3d>
+    <dgm:sp3d/>
+    <dgm:txPr/>
+    <dgm:style>
+      <a:lnRef idx="0">
+        <a:scrgbClr r="0" g="0" b="0"/>
+      </a:lnRef>
+      <a:fillRef idx="1">
+        <a:scrgbClr r="0" g="0" b="0"/>
+      </a:fillRef>
+      <a:effectRef idx="0">
+        <a:scrgbClr r="0" g="0" b="0"/>
+      </a:effectRef>
+      <a:fontRef idx="minor">
+        <a:schemeClr val="lt1"/>
+      </a:fontRef>
+    </dgm:style>
+  </dgm:styleLbl>
+  <dgm:styleLbl name="bgSibTrans2D1">
+    <dgm:scene3d>
+      <a:camera prst="orthographicFront"/>
+      <a:lightRig rig="threePt" dir="t"/>
+    </dgm:scene3d>
+    <dgm:sp3d/>
+    <dgm:txPr/>
+    <dgm:style>
+      <a:lnRef idx="0">
+        <a:scrgbClr r="0" g="0" b="0"/>
+      </a:lnRef>
+      <a:fillRef idx="1">
+        <a:scrgbClr r="0" g="0" b="0"/>
+      </a:fillRef>
+      <a:effectRef idx="0">
+        <a:scrgbClr r="0" g="0" b="0"/>
+      </a:effectRef>
+      <a:fontRef idx="minor">
+        <a:schemeClr val="lt1"/>
+      </a:fontRef>
+    </dgm:style>
+  </dgm:styleLbl>
+  <dgm:styleLbl name="sibTrans1D1">
+    <dgm:scene3d>
+      <a:camera prst="orthographicFront"/>
+      <a:lightRig rig="threePt" dir="t"/>
+    </dgm:scene3d>
+    <dgm:sp3d/>
+    <dgm:txPr/>
+    <dgm:style>
+      <a:lnRef idx="1">
+        <a:scrgbClr r="0" g="0" b="0"/>
+      </a:lnRef>
+      <a:fillRef idx="0">
+        <a:scrgbClr r="0" g="0" b="0"/>
+      </a:fillRef>
+      <a:effectRef idx="0">
+        <a:scrgbClr r="0" g="0" b="0"/>
+      </a:effectRef>
+      <a:fontRef idx="minor"/>
+    </dgm:style>
+  </dgm:styleLbl>
+  <dgm:styleLbl name="callout">
+    <dgm:scene3d>
+      <a:camera prst="orthographicFront"/>
+      <a:lightRig rig="threePt" dir="t"/>
+    </dgm:scene3d>
+    <dgm:sp3d/>
+    <dgm:txPr/>
+    <dgm:style>
+      <a:lnRef idx="2">
+        <a:scrgbClr r="0" g="0" b="0"/>
+      </a:lnRef>
+      <a:fillRef idx="1">
+        <a:scrgbClr r="0" g="0" b="0"/>
+      </a:fillRef>
+      <a:effectRef idx="0">
+        <a:scrgbClr r="0" g="0" b="0"/>
+      </a:effectRef>
+      <a:fontRef idx="minor"/>
+    </dgm:style>
+  </dgm:styleLbl>
+  <dgm:styleLbl name="asst0">
+    <dgm:scene3d>
+      <a:camera prst="orthographicFront"/>
+      <a:lightRig rig="threePt" dir="t"/>
+    </dgm:scene3d>
+    <dgm:sp3d/>
+    <dgm:txPr/>
+    <dgm:style>
+      <a:lnRef idx="2">
+        <a:scrgbClr r="0" g="0" b="0"/>
+      </a:lnRef>
+      <a:fillRef idx="1">
+        <a:scrgbClr r="0" g="0" b="0"/>
+      </a:fillRef>
+      <a:effectRef idx="0">
+        <a:scrgbClr r="0" g="0" b="0"/>
+      </a:effectRef>
+      <a:fontRef idx="minor">
+        <a:schemeClr val="lt1"/>
+      </a:fontRef>
+    </dgm:style>
+  </dgm:styleLbl>
+  <dgm:styleLbl name="asst1">
+    <dgm:scene3d>
+      <a:camera prst="orthographicFront"/>
+      <a:lightRig rig="threePt" dir="t"/>
+    </dgm:scene3d>
+    <dgm:sp3d/>
+    <dgm:txPr/>
+    <dgm:style>
+      <a:lnRef idx="2">
+        <a:scrgbClr r="0" g="0" b="0"/>
+      </a:lnRef>
+      <a:fillRef idx="1">
+        <a:scrgbClr r="0" g="0" b="0"/>
+      </a:fillRef>
+      <a:effectRef idx="0">
+        <a:scrgbClr r="0" g="0" b="0"/>
+      </a:effectRef>
+      <a:fontRef idx="minor">
+        <a:schemeClr val="lt1"/>
+      </a:fontRef>
+    </dgm:style>
+  </dgm:styleLbl>
+  <dgm:styleLbl name="asst2">
+    <dgm:scene3d>
+      <a:camera prst="orthographicFront"/>
+      <a:lightRig rig="threePt" dir="t"/>
+    </dgm:scene3d>
+    <dgm:sp3d/>
+    <dgm:txPr/>
+    <dgm:style>
+      <a:lnRef idx="2">
+        <a:scrgbClr r="0" g="0" b="0"/>
+      </a:lnRef>
+      <a:fillRef idx="1">
+        <a:scrgbClr r="0" g="0" b="0"/>
+      </a:fillRef>
+      <a:effectRef idx="0">
+        <a:scrgbClr r="0" g="0" b="0"/>
+      </a:effectRef>
+      <a:fontRef idx="minor">
+        <a:schemeClr val="lt1"/>
+      </a:fontRef>
+    </dgm:style>
+  </dgm:styleLbl>
+  <dgm:styleLbl name="asst3">
+    <dgm:scene3d>
+      <a:camera prst="orthographicFront"/>
+      <a:lightRig rig="threePt" dir="t"/>
+    </dgm:scene3d>
+    <dgm:sp3d/>
+    <dgm:txPr/>
+    <dgm:style>
+      <a:lnRef idx="2">
+        <a:scrgbClr r="0" g="0" b="0"/>
+      </a:lnRef>
+      <a:fillRef idx="1">
+        <a:scrgbClr r="0" g="0" b="0"/>
+      </a:fillRef>
+      <a:effectRef idx="0">
+        <a:scrgbClr r="0" g="0" b="0"/>
+      </a:effectRef>
+      <a:fontRef idx="minor">
+        <a:schemeClr val="lt1"/>
+      </a:fontRef>
+    </dgm:style>
+  </dgm:styleLbl>
+  <dgm:styleLbl name="asst4">
+    <dgm:scene3d>
+      <a:camera prst="orthographicFront"/>
+      <a:lightRig rig="threePt" dir="t"/>
+    </dgm:scene3d>
+    <dgm:sp3d/>
+    <dgm:txPr/>
+    <dgm:style>
+      <a:lnRef idx="2">
+        <a:scrgbClr r="0" g="0" b="0"/>
+      </a:lnRef>
+      <a:fillRef idx="1">
+        <a:scrgbClr r="0" g="0" b="0"/>
+      </a:fillRef>
+      <a:effectRef idx="0">
+        <a:scrgbClr r="0" g="0" b="0"/>
+      </a:effectRef>
+      <a:fontRef idx="minor">
+        <a:schemeClr val="lt1"/>
+      </a:fontRef>
+    </dgm:style>
+  </dgm:styleLbl>
+  <dgm:styleLbl name="parChTrans2D1">
+    <dgm:scene3d>
+      <a:camera prst="orthographicFront"/>
+      <a:lightRig rig="threePt" dir="t"/>
+    </dgm:scene3d>
+    <dgm:sp3d/>
+    <dgm:txPr/>
+    <dgm:style>
+      <a:lnRef idx="2">
+        <a:scrgbClr r="0" g="0" b="0"/>
+      </a:lnRef>
+      <a:fillRef idx="1">
+        <a:scrgbClr r="0" g="0" b="0"/>
+      </a:fillRef>
+      <a:effectRef idx="0">
+        <a:scrgbClr r="0" g="0" b="0"/>
+      </a:effectRef>
+      <a:fontRef idx="minor">
+        <a:schemeClr val="lt1"/>
+      </a:fontRef>
+    </dgm:style>
+  </dgm:styleLbl>
+  <dgm:styleLbl name="parChTrans2D2">
+    <dgm:scene3d>
+      <a:camera prst="orthographicFront"/>
+      <a:lightRig rig="threePt" dir="t"/>
+    </dgm:scene3d>
+    <dgm:sp3d/>
+    <dgm:txPr/>
+    <dgm:style>
+      <a:lnRef idx="2">
+        <a:scrgbClr r="0" g="0" b="0"/>
+      </a:lnRef>
+      <a:fillRef idx="1">
+        <a:scrgbClr r="0" g="0" b="0"/>
+      </a:fillRef>
+      <a:effectRef idx="0">
+        <a:scrgbClr r="0" g="0" b="0"/>
+      </a:effectRef>
+      <a:fontRef idx="minor">
+        <a:schemeClr val="lt1"/>
+      </a:fontRef>
+    </dgm:style>
+  </dgm:styleLbl>
+  <dgm:styleLbl name="parChTrans2D3">
+    <dgm:scene3d>
+      <a:camera prst="orthographicFront"/>
+      <a:lightRig rig="threePt" dir="t"/>
+    </dgm:scene3d>
+    <dgm:sp3d/>
+    <dgm:txPr/>
+    <dgm:style>
+      <a:lnRef idx="2">
+        <a:scrgbClr r="0" g="0" b="0"/>
+      </a:lnRef>
+      <a:fillRef idx="1">
+        <a:scrgbClr r="0" g="0" b="0"/>
+      </a:fillRef>
+      <a:effectRef idx="0">
+        <a:scrgbClr r="0" g="0" b="0"/>
+      </a:effectRef>
+      <a:fontRef idx="minor">
+        <a:schemeClr val="lt1"/>
+      </a:fontRef>
+    </dgm:style>
+  </dgm:styleLbl>
+  <dgm:styleLbl name="parChTrans2D4">
+    <dgm:scene3d>
+      <a:camera prst="orthographicFront"/>
+      <a:lightRig rig="threePt" dir="t"/>
+    </dgm:scene3d>
+    <dgm:sp3d/>
+    <dgm:txPr/>
+    <dgm:style>
+      <a:lnRef idx="2">
+        <a:scrgbClr r="0" g="0" b="0"/>
+      </a:lnRef>
+      <a:fillRef idx="1">
+        <a:scrgbClr r="0" g="0" b="0"/>
+      </a:fillRef>
+      <a:effectRef idx="0">
+        <a:scrgbClr r="0" g="0" b="0"/>
+      </a:effectRef>
+      <a:fontRef idx="minor">
+        <a:schemeClr val="lt1"/>
+      </a:fontRef>
+    </dgm:style>
+  </dgm:styleLbl>
+  <dgm:styleLbl name="parChTrans1D1">
+    <dgm:scene3d>
+      <a:camera prst="orthographicFront"/>
+      <a:lightRig rig="threePt" dir="t"/>
+    </dgm:scene3d>
+    <dgm:sp3d/>
+    <dgm:txPr/>
+    <dgm:style>
+      <a:lnRef idx="2">
+        <a:scrgbClr r="0" g="0" b="0"/>
+      </a:lnRef>
+      <a:fillRef idx="0">
+        <a:scrgbClr r="0" g="0" b="0"/>
+      </a:fillRef>
+      <a:effectRef idx="0">
+        <a:scrgbClr r="0" g="0" b="0"/>
+      </a:effectRef>
+      <a:fontRef idx="minor"/>
+    </dgm:style>
+  </dgm:styleLbl>
+  <dgm:styleLbl name="parChTrans1D2">
+    <dgm:scene3d>
+      <a:camera prst="orthographicFront"/>
+      <a:lightRig rig="threePt" dir="t"/>
+    </dgm:scene3d>
+    <dgm:sp3d/>
+    <dgm:txPr/>
+    <dgm:style>
+      <a:lnRef idx="2">
+        <a:scrgbClr r="0" g="0" b="0"/>
+      </a:lnRef>
+      <a:fillRef idx="0">
+        <a:scrgbClr r="0" g="0" b="0"/>
+      </a:fillRef>
+      <a:effectRef idx="0">
+        <a:scrgbClr r="0" g="0" b="0"/>
+      </a:effectRef>
+      <a:fontRef idx="minor"/>
+    </dgm:style>
+  </dgm:styleLbl>
+  <dgm:styleLbl name="parChTrans1D3">
+    <dgm:scene3d>
+      <a:camera prst="orthographicFront"/>
+      <a:lightRig rig="threePt" dir="t"/>
+    </dgm:scene3d>
+    <dgm:sp3d/>
+    <dgm:txPr/>
+    <dgm:style>
+      <a:lnRef idx="2">
+        <a:scrgbClr r="0" g="0" b="0"/>
+      </a:lnRef>
+      <a:fillRef idx="0">
+        <a:scrgbClr r="0" g="0" b="0"/>
+      </a:fillRef>
+      <a:effectRef idx="0">
+        <a:scrgbClr r="0" g="0" b="0"/>
+      </a:effectRef>
+      <a:fontRef idx="minor"/>
+    </dgm:style>
+  </dgm:styleLbl>
+  <dgm:styleLbl name="parChTrans1D4">
+    <dgm:scene3d>
+      <a:camera prst="orthographicFront"/>
+      <a:lightRig rig="threePt" dir="t"/>
+    </dgm:scene3d>
+    <dgm:sp3d/>
+    <dgm:txPr/>
+    <dgm:style>
+      <a:lnRef idx="2">
+        <a:scrgbClr r="0" g="0" b="0"/>
+      </a:lnRef>
+      <a:fillRef idx="0">
+        <a:scrgbClr r="0" g="0" b="0"/>
+      </a:fillRef>
+      <a:effectRef idx="0">
+        <a:scrgbClr r="0" g="0" b="0"/>
+      </a:effectRef>
+      <a:fontRef idx="minor"/>
+    </dgm:style>
+  </dgm:styleLbl>
+  <dgm:styleLbl name="fgAcc1">
+    <dgm:scene3d>
+      <a:camera prst="orthographicFront"/>
+      <a:lightRig rig="threePt" dir="t"/>
+    </dgm:scene3d>
+    <dgm:sp3d/>
+    <dgm:txPr/>
+    <dgm:style>
+      <a:lnRef idx="2">
+        <a:scrgbClr r="0" g="0" b="0"/>
+      </a:lnRef>
+      <a:fillRef idx="1">
+        <a:scrgbClr r="0" g="0" b="0"/>
+      </a:fillRef>
+      <a:effectRef idx="0">
+        <a:scrgbClr r="0" g="0" b="0"/>
+      </a:effectRef>
+      <a:fontRef idx="minor"/>
+    </dgm:style>
+  </dgm:styleLbl>
+  <dgm:styleLbl name="conFgAcc1">
+    <dgm:scene3d>
+      <a:camera prst="orthographicFront"/>
+      <a:lightRig rig="threePt" dir="t"/>
+    </dgm:scene3d>
+    <dgm:sp3d/>
+    <dgm:txPr/>
+    <dgm:style>
+      <a:lnRef idx="2">
+        <a:scrgbClr r="0" g="0" b="0"/>
+      </a:lnRef>
+      <a:fillRef idx="1">
+        <a:scrgbClr r="0" g="0" b="0"/>
+      </a:fillRef>
+      <a:effectRef idx="0">
+        <a:scrgbClr r="0" g="0" b="0"/>
+      </a:effectRef>
+      <a:fontRef idx="minor"/>
+    </dgm:style>
+  </dgm:styleLbl>
+  <dgm:styleLbl name="alignAcc1">
+    <dgm:scene3d>
+      <a:camera prst="orthographicFront"/>
+      <a:lightRig rig="threePt" dir="t"/>
+    </dgm:scene3d>
+    <dgm:sp3d/>
+    <dgm:txPr/>
+    <dgm:style>
+      <a:lnRef idx="2">
+        <a:scrgbClr r="0" g="0" b="0"/>
+      </a:lnRef>
+      <a:fillRef idx="1">
+        <a:scrgbClr r="0" g="0" b="0"/>
+      </a:fillRef>
+      <a:effectRef idx="0">
+        <a:scrgbClr r="0" g="0" b="0"/>
+      </a:effectRef>
+      <a:fontRef idx="minor"/>
+    </dgm:style>
+  </dgm:styleLbl>
+  <dgm:styleLbl name="trAlignAcc1">
+    <dgm:scene3d>
+      <a:camera prst="orthographicFront"/>
+      <a:lightRig rig="threePt" dir="t"/>
+    </dgm:scene3d>
+    <dgm:sp3d/>
+    <dgm:txPr/>
+    <dgm:style>
+      <a:lnRef idx="1">
+        <a:scrgbClr r="0" g="0" b="0"/>
+      </a:lnRef>
+      <a:fillRef idx="1">
+        <a:scrgbClr r="0" g="0" b="0"/>
+      </a:fillRef>
+      <a:effectRef idx="0">
+        <a:scrgbClr r="0" g="0" b="0"/>
+      </a:effectRef>
+      <a:fontRef idx="minor"/>
+    </dgm:style>
+  </dgm:styleLbl>
+  <dgm:styleLbl name="bgAcc1">
+    <dgm:scene3d>
+      <a:camera prst="orthographicFront"/>
+      <a:lightRig rig="threePt" dir="t"/>
+    </dgm:scene3d>
+    <dgm:sp3d/>
+    <dgm:txPr/>
+    <dgm:style>
+      <a:lnRef idx="2">
+        <a:scrgbClr r="0" g="0" b="0"/>
+      </a:lnRef>
+      <a:fillRef idx="1">
+        <a:scrgbClr r="0" g="0" b="0"/>
+      </a:fillRef>
+      <a:effectRef idx="0">
+        <a:scrgbClr r="0" g="0" b="0"/>
+      </a:effectRef>
+      <a:fontRef idx="minor"/>
+    </dgm:style>
+  </dgm:styleLbl>
+  <dgm:styleLbl name="solidFgAcc1">
+    <dgm:scene3d>
+      <a:camera prst="orthographicFront"/>
+      <a:lightRig rig="threePt" dir="t"/>
+    </dgm:scene3d>
+    <dgm:sp3d/>
+    <dgm:txPr/>
+    <dgm:style>
+      <a:lnRef idx="2">
+        <a:scrgbClr r="0" g="0" b="0"/>
+      </a:lnRef>
+      <a:fillRef idx="1">
+        <a:scrgbClr r="0" g="0" b="0"/>
+      </a:fillRef>
+      <a:effectRef idx="0">
+        <a:scrgbClr r="0" g="0" b="0"/>
+      </a:effectRef>
+      <a:fontRef idx="minor"/>
+    </dgm:style>
+  </dgm:styleLbl>
+  <dgm:styleLbl name="solidAlignAcc1">
+    <dgm:scene3d>
+      <a:camera prst="orthographicFront"/>
+      <a:lightRig rig="threePt" dir="t"/>
+    </dgm:scene3d>
+    <dgm:sp3d/>
+    <dgm:txPr/>
+    <dgm:style>
+      <a:lnRef idx="2">
+        <a:scrgbClr r="0" g="0" b="0"/>
+      </a:lnRef>
+      <a:fillRef idx="1">
+        <a:scrgbClr r="0" g="0" b="0"/>
+      </a:fillRef>
+      <a:effectRef idx="0">
+        <a:scrgbClr r="0" g="0" b="0"/>
+      </a:effectRef>
+      <a:fontRef idx="minor"/>
+    </dgm:style>
+  </dgm:styleLbl>
+  <dgm:styleLbl name="solidBgAcc1">
+    <dgm:scene3d>
+      <a:camera prst="orthographicFront"/>
+      <a:lightRig rig="threePt" dir="t"/>
+    </dgm:scene3d>
+    <dgm:sp3d/>
+    <dgm:txPr/>
+    <dgm:style>
+      <a:lnRef idx="2">
+        <a:scrgbClr r="0" g="0" b="0"/>
+      </a:lnRef>
+      <a:fillRef idx="1">
+        <a:scrgbClr r="0" g="0" b="0"/>
+      </a:fillRef>
+      <a:effectRef idx="0">
+        <a:scrgbClr r="0" g="0" b="0"/>
+      </a:effectRef>
+      <a:fontRef idx="minor"/>
+    </dgm:style>
+  </dgm:styleLbl>
+  <dgm:styleLbl name="fgAccFollowNode1">
+    <dgm:scene3d>
+      <a:camera prst="orthographicFront"/>
+      <a:lightRig rig="threePt" dir="t"/>
+    </dgm:scene3d>
+    <dgm:sp3d/>
+    <dgm:txPr/>
+    <dgm:style>
+      <a:lnRef idx="2">
+        <a:scrgbClr r="0" g="0" b="0"/>
+      </a:lnRef>
+      <a:fillRef idx="1">
+        <a:scrgbClr r="0" g="0" b="0"/>
+      </a:fillRef>
+      <a:effectRef idx="0">
+        <a:scrgbClr r="0" g="0" b="0"/>
+      </a:effectRef>
+      <a:fontRef idx="minor"/>
+    </dgm:style>
+  </dgm:styleLbl>
+  <dgm:styleLbl name="alignAccFollowNode1">
+    <dgm:scene3d>
+      <a:camera prst="orthographicFront"/>
+      <a:lightRig rig="threePt" dir="t"/>
+    </dgm:scene3d>
+    <dgm:sp3d/>
+    <dgm:txPr/>
+    <dgm:style>
+      <a:lnRef idx="2">
+        <a:scrgbClr r="0" g="0" b="0"/>
+      </a:lnRef>
+      <a:fillRef idx="1">
+        <a:scrgbClr r="0" g="0" b="0"/>
+      </a:fillRef>
+      <a:effectRef idx="0">
+        <a:scrgbClr r="0" g="0" b="0"/>
+      </a:effectRef>
+      <a:fontRef idx="minor"/>
+    </dgm:style>
+  </dgm:styleLbl>
+  <dgm:styleLbl name="bgAccFollowNode1">
+    <dgm:scene3d>
+      <a:camera prst="orthographicFront"/>
+      <a:lightRig rig="threePt" dir="t"/>
+    </dgm:scene3d>
+    <dgm:sp3d/>
+    <dgm:txPr/>
+    <dgm:style>
+      <a:lnRef idx="2">
+        <a:scrgbClr r="0" g="0" b="0"/>
+      </a:lnRef>
+      <a:fillRef idx="1">
+        <a:scrgbClr r="0" g="0" b="0"/>
+      </a:fillRef>
+      <a:effectRef idx="0">
+        <a:scrgbClr r="0" g="0" b="0"/>
+      </a:effectRef>
+      <a:fontRef idx="minor"/>
+    </dgm:style>
+  </dgm:styleLbl>
+  <dgm:styleLbl name="fgAcc0">
+    <dgm:scene3d>
+      <a:camera prst="orthographicFront"/>
+      <a:lightRig rig="threePt" dir="t"/>
+    </dgm:scene3d>
+    <dgm:sp3d/>
+    <dgm:txPr/>
+    <dgm:style>
+      <a:lnRef idx="2">
+        <a:scrgbClr r="0" g="0" b="0"/>
+      </a:lnRef>
+      <a:fillRef idx="1">
+        <a:scrgbClr r="0" g="0" b="0"/>
+      </a:fillRef>
+      <a:effectRef idx="0">
+        <a:scrgbClr r="0" g="0" b="0"/>
+      </a:effectRef>
+      <a:fontRef idx="minor"/>
+    </dgm:style>
+  </dgm:styleLbl>
+  <dgm:styleLbl name="fgAcc2">
+    <dgm:scene3d>
+      <a:camera prst="orthographicFront"/>
+      <a:lightRig rig="threePt" dir="t"/>
+    </dgm:scene3d>
+    <dgm:sp3d/>
+    <dgm:txPr/>
+    <dgm:style>
+      <a:lnRef idx="2">
+        <a:scrgbClr r="0" g="0" b="0"/>
+      </a:lnRef>
+      <a:fillRef idx="1">
+        <a:scrgbClr r="0" g="0" b="0"/>
+      </a:fillRef>
+      <a:effectRef idx="0">
+        <a:scrgbClr r="0" g="0" b="0"/>
+      </a:effectRef>
+      <a:fontRef idx="minor"/>
+    </dgm:style>
+  </dgm:styleLbl>
+  <dgm:styleLbl name="fgAcc3">
+    <dgm:scene3d>
+      <a:camera prst="orthographicFront"/>
+      <a:lightRig rig="threePt" dir="t"/>
+    </dgm:scene3d>
+    <dgm:sp3d/>
+    <dgm:txPr/>
+    <dgm:style>
+      <a:lnRef idx="2">
+        <a:scrgbClr r="0" g="0" b="0"/>
+      </a:lnRef>
+      <a:fillRef idx="1">
+        <a:scrgbClr r="0" g="0" b="0"/>
+      </a:fillRef>
+      <a:effectRef idx="0">
+        <a:scrgbClr r="0" g="0" b="0"/>
+      </a:effectRef>
+      <a:fontRef idx="minor"/>
+    </dgm:style>
+  </dgm:styleLbl>
+  <dgm:styleLbl name="fgAcc4">
+    <dgm:scene3d>
+      <a:camera prst="orthographicFront"/>
+      <a:lightRig rig="threePt" dir="t"/>
+    </dgm:scene3d>
+    <dgm:sp3d/>
+    <dgm:txPr/>
+    <dgm:style>
+      <a:lnRef idx="2">
+        <a:scrgbClr r="0" g="0" b="0"/>
+      </a:lnRef>
+      <a:fillRef idx="1">
+        <a:scrgbClr r="0" g="0" b="0"/>
+      </a:fillRef>
+      <a:effectRef idx="0">
+        <a:scrgbClr r="0" g="0" b="0"/>
+      </a:effectRef>
+      <a:fontRef idx="minor"/>
+    </dgm:style>
+  </dgm:styleLbl>
+  <dgm:styleLbl name="bgShp">
+    <dgm:scene3d>
+      <a:camera prst="orthographicFront"/>
+      <a:lightRig rig="threePt" dir="t"/>
+    </dgm:scene3d>
+    <dgm:sp3d/>
+    <dgm:txPr/>
+    <dgm:style>
+      <a:lnRef idx="0">
+        <a:scrgbClr r="0" g="0" b="0"/>
+      </a:lnRef>
+      <a:fillRef idx="1">
+        <a:scrgbClr r="0" g="0" b="0"/>
+      </a:fillRef>
+      <a:effectRef idx="0">
+        <a:scrgbClr r="0" g="0" b="0"/>
+      </a:effectRef>
+      <a:fontRef idx="minor"/>
+    </dgm:style>
+  </dgm:styleLbl>
+  <dgm:styleLbl name="dkBgShp">
+    <dgm:scene3d>
+      <a:camera prst="orthographicFront"/>
+      <a:lightRig rig="threePt" dir="t"/>
+    </dgm:scene3d>
+    <dgm:sp3d/>
+    <dgm:txPr/>
+    <dgm:style>
+      <a:lnRef idx="0">
+        <a:scrgbClr r="0" g="0" b="0"/>
+      </a:lnRef>
+      <a:fillRef idx="1">
+        <a:scrgbClr r="0" g="0" b="0"/>
+      </a:fillRef>
+      <a:effectRef idx="0">
+        <a:scrgbClr r="0" g="0" b="0"/>
+      </a:effectRef>
+      <a:fontRef idx="minor"/>
+    </dgm:style>
+  </dgm:styleLbl>
+  <dgm:styleLbl name="trBgShp">
+    <dgm:scene3d>
+      <a:camera prst="orthographicFront"/>
+      <a:lightRig rig="threePt" dir="t"/>
+    </dgm:scene3d>
+    <dgm:sp3d/>
+    <dgm:txPr/>
+    <dgm:style>
+      <a:lnRef idx="0">
+        <a:scrgbClr r="0" g="0" b="0"/>
+      </a:lnRef>
+      <a:fillRef idx="1">
+        <a:scrgbClr r="0" g="0" b="0"/>
+      </a:fillRef>
+      <a:effectRef idx="0">
+        <a:scrgbClr r="0" g="0" b="0"/>
+      </a:effectRef>
+      <a:fontRef idx="minor"/>
+    </dgm:style>
+  </dgm:styleLbl>
+  <dgm:styleLbl name="fgShp">
+    <dgm:scene3d>
+      <a:camera prst="orthographicFront"/>
+      <a:lightRig rig="threePt" dir="t"/>
+    </dgm:scene3d>
+    <dgm:sp3d/>
+    <dgm:txPr/>
+    <dgm:style>
+      <a:lnRef idx="2">
+        <a:scrgbClr r="0" g="0" b="0"/>
+      </a:lnRef>
+      <a:fillRef idx="1">
+        <a:scrgbClr r="0" g="0" b="0"/>
+      </a:fillRef>
+      <a:effectRef idx="0">
+        <a:scrgbClr r="0" g="0" b="0"/>
+      </a:effectRef>
+      <a:fontRef idx="minor"/>
+    </dgm:style>
+  </dgm:styleLbl>
+  <dgm:styleLbl name="revTx">
+    <dgm:scene3d>
+      <a:camera prst="orthographicFront"/>
+      <a:lightRig rig="threePt" dir="t"/>
+    </dgm:scene3d>
+    <dgm:sp3d/>
+    <dgm:txPr/>
+    <dgm:style>
+      <a:lnRef idx="0">
+        <a:scrgbClr r="0" g="0" b="0"/>
+      </a:lnRef>
+      <a:fillRef idx="0">
+        <a:scrgbClr r="0" g="0" b="0"/>
+      </a:fillRef>
+      <a:effectRef idx="0">
+        <a:scrgbClr r="0" g="0" b="0"/>
+      </a:effectRef>
+      <a:fontRef idx="minor"/>
+    </dgm:style>
+  </dgm:styleLbl>
+</dgm:styleDef>
 </file>
 
 <file path=ppt/ink/ink1.xml><?xml version="1.0" encoding="utf-8"?>
@@ -11104,6 +14356,115 @@
       </p:grpSpPr>
       <p:sp>
         <p:nvSpPr>
+          <p:cNvPr id="8" name="Title 1">
+            <a:extLst>
+              <a:ext uri="{FF2B5EF4-FFF2-40B4-BE49-F238E27FC236}">
+                <a16:creationId xmlns:a16="http://schemas.microsoft.com/office/drawing/2014/main" id="{CA62670D-1AAD-F98F-C148-BE9A831F40F1}"/>
+              </a:ext>
+            </a:extLst>
+          </p:cNvPr>
+          <p:cNvSpPr>
+            <a:spLocks noGrp="1"/>
+          </p:cNvSpPr>
+          <p:nvPr>
+            <p:ph type="title"/>
+          </p:nvPr>
+        </p:nvSpPr>
+        <p:spPr>
+          <a:xfrm>
+            <a:off x="438947" y="642635"/>
+            <a:ext cx="5378267" cy="985658"/>
+          </a:xfrm>
+        </p:spPr>
+        <p:txBody>
+          <a:bodyPr anchor="t">
+            <a:normAutofit/>
+          </a:bodyPr>
+          <a:lstStyle/>
+          <a:p>
+            <a:r>
+              <a:rPr lang="en-US" sz="5500" dirty="0" err="1"/>
+              <a:t>Uitbreiding</a:t>
+            </a:r>
+            <a:endParaRPr lang="en-US" sz="5500" dirty="0"/>
+          </a:p>
+        </p:txBody>
+      </p:sp>
+      <p:graphicFrame>
+        <p:nvGraphicFramePr>
+          <p:cNvPr id="12" name="Subtitle 2">
+            <a:extLst>
+              <a:ext uri="{FF2B5EF4-FFF2-40B4-BE49-F238E27FC236}">
+                <a16:creationId xmlns:a16="http://schemas.microsoft.com/office/drawing/2014/main" id="{0E2A3DB1-B1AD-54F2-0BF3-EA9B2484CC98}"/>
+              </a:ext>
+            </a:extLst>
+          </p:cNvPr>
+          <p:cNvGraphicFramePr>
+            <a:graphicFrameLocks noGrp="1"/>
+          </p:cNvGraphicFramePr>
+          <p:nvPr>
+            <p:ph idx="1"/>
+            <p:extLst>
+              <p:ext uri="{D42A27DB-BD31-4B8C-83A1-F6EECF244321}">
+                <p14:modId xmlns:p14="http://schemas.microsoft.com/office/powerpoint/2010/main" val="1464337690"/>
+              </p:ext>
+            </p:extLst>
+          </p:nvPr>
+        </p:nvGraphicFramePr>
+        <p:xfrm>
+          <a:off x="1790473" y="1135464"/>
+          <a:ext cx="8611054" cy="6224536"/>
+        </p:xfrm>
+        <a:graphic>
+          <a:graphicData uri="http://schemas.openxmlformats.org/drawingml/2006/diagram">
+            <dgm:relIds xmlns:dgm="http://schemas.openxmlformats.org/drawingml/2006/diagram" xmlns:r="http://schemas.openxmlformats.org/officeDocument/2006/relationships" r:dm="rId2" r:lo="rId3" r:qs="rId4" r:cs="rId5"/>
+          </a:graphicData>
+        </a:graphic>
+      </p:graphicFrame>
+    </p:spTree>
+    <p:extLst>
+      <p:ext uri="{BB962C8B-B14F-4D97-AF65-F5344CB8AC3E}">
+        <p14:creationId xmlns:p14="http://schemas.microsoft.com/office/powerpoint/2010/main" val="2760668692"/>
+      </p:ext>
+    </p:extLst>
+  </p:cSld>
+  <p:clrMapOvr>
+    <a:masterClrMapping/>
+  </p:clrMapOvr>
+  <mc:AlternateContent xmlns:mc="http://schemas.openxmlformats.org/markup-compatibility/2006">
+    <mc:Choice xmlns:p159="http://schemas.microsoft.com/office/powerpoint/2015/09/main" Requires="p159">
+      <p:transition xmlns:p14="http://schemas.microsoft.com/office/powerpoint/2010/main" spd="slow" p14:dur="2000">
+        <p159:morph option="byObject"/>
+      </p:transition>
+    </mc:Choice>
+    <mc:Fallback>
+      <p:transition spd="slow">
+        <p:fade/>
+      </p:transition>
+    </mc:Fallback>
+  </mc:AlternateContent>
+</p:sld>
+</file>
+
+<file path=ppt/slides/slide6.xml><?xml version="1.0" encoding="utf-8"?>
+<p:sld xmlns:a="http://schemas.openxmlformats.org/drawingml/2006/main" xmlns:r="http://schemas.openxmlformats.org/officeDocument/2006/relationships" xmlns:p="http://schemas.openxmlformats.org/presentationml/2006/main">
+  <p:cSld>
+    <p:spTree>
+      <p:nvGrpSpPr>
+        <p:cNvPr id="1" name=""/>
+        <p:cNvGrpSpPr/>
+        <p:nvPr/>
+      </p:nvGrpSpPr>
+      <p:grpSpPr>
+        <a:xfrm>
+          <a:off x="0" y="0"/>
+          <a:ext cx="0" cy="0"/>
+          <a:chOff x="0" y="0"/>
+          <a:chExt cx="0" cy="0"/>
+        </a:xfrm>
+      </p:grpSpPr>
+      <p:sp>
+        <p:nvSpPr>
           <p:cNvPr id="2" name="Title 1">
             <a:extLst>
               <a:ext uri="{FF2B5EF4-FFF2-40B4-BE49-F238E27FC236}">
@@ -11258,7 +14619,7 @@
 </p:sld>
 </file>
 
-<file path=ppt/slides/slide6.xml><?xml version="1.0" encoding="utf-8"?>
+<file path=ppt/slides/slide7.xml><?xml version="1.0" encoding="utf-8"?>
 <p:sld xmlns:a="http://schemas.openxmlformats.org/drawingml/2006/main" xmlns:r="http://schemas.openxmlformats.org/officeDocument/2006/relationships" xmlns:p="http://schemas.openxmlformats.org/presentationml/2006/main">
   <p:cSld>
     <p:spTree>
@@ -11434,7 +14795,7 @@
 </p:sld>
 </file>
 
-<file path=ppt/slides/slide7.xml><?xml version="1.0" encoding="utf-8"?>
+<file path=ppt/slides/slide8.xml><?xml version="1.0" encoding="utf-8"?>
 <p:sld xmlns:a="http://schemas.openxmlformats.org/drawingml/2006/main" xmlns:r="http://schemas.openxmlformats.org/officeDocument/2006/relationships" xmlns:p="http://schemas.openxmlformats.org/presentationml/2006/main">
   <p:cSld>
     <p:spTree>
